--- a/CHAPTER 3 RAG Part II_Chatting with Your Data.pptx
+++ b/CHAPTER 3 RAG Part II_Chatting with Your Data.pptx
@@ -5,10 +5,10 @@
     <p:sldMasterId id="2147483660" r:id="rId1"/>
   </p:sldMasterIdLst>
   <p:notesMasterIdLst>
-    <p:notesMasterId r:id="rId9"/>
+    <p:notesMasterId r:id="rId12"/>
   </p:notesMasterIdLst>
   <p:handoutMasterIdLst>
-    <p:handoutMasterId r:id="rId10"/>
+    <p:handoutMasterId r:id="rId13"/>
   </p:handoutMasterIdLst>
   <p:sldIdLst>
     <p:sldId id="256" r:id="rId2"/>
@@ -18,6 +18,9 @@
     <p:sldId id="1144" r:id="rId6"/>
     <p:sldId id="1142" r:id="rId7"/>
     <p:sldId id="1143" r:id="rId8"/>
+    <p:sldId id="1145" r:id="rId9"/>
+    <p:sldId id="1147" r:id="rId10"/>
+    <p:sldId id="1146" r:id="rId11"/>
   </p:sldIdLst>
   <p:sldSz cx="12192000" cy="6858000"/>
   <p:notesSz cx="6858000" cy="9144000"/>
@@ -132,6 +135,9 @@
             <p14:sldId id="1144"/>
             <p14:sldId id="1142"/>
             <p14:sldId id="1143"/>
+            <p14:sldId id="1145"/>
+            <p14:sldId id="1147"/>
+            <p14:sldId id="1146"/>
           </p14:sldIdLst>
         </p14:section>
         <p14:section name="자세한 정보" id="{2CC34DB2-6590-42C0-AD4B-A04C6060184E}">
@@ -3033,6 +3039,222 @@
 </p:sld>
 </file>
 
+<file path=ppt/slides/slide10.xml><?xml version="1.0" encoding="utf-8"?>
+<p:sld xmlns:a="http://schemas.openxmlformats.org/drawingml/2006/main" xmlns:r="http://schemas.openxmlformats.org/officeDocument/2006/relationships" xmlns:p="http://schemas.openxmlformats.org/presentationml/2006/main">
+  <p:cSld>
+    <p:spTree>
+      <p:nvGrpSpPr>
+        <p:cNvPr id="1" name="">
+          <a:extLst>
+            <a:ext uri="{FF2B5EF4-FFF2-40B4-BE49-F238E27FC236}">
+              <a16:creationId xmlns:a16="http://schemas.microsoft.com/office/drawing/2014/main" id="{6FDCDC85-5E1A-1016-76E9-AE940CBDF09B}"/>
+            </a:ext>
+          </a:extLst>
+        </p:cNvPr>
+        <p:cNvGrpSpPr/>
+        <p:nvPr/>
+      </p:nvGrpSpPr>
+      <p:grpSpPr>
+        <a:xfrm>
+          <a:off x="0" y="0"/>
+          <a:ext cx="0" cy="0"/>
+          <a:chOff x="0" y="0"/>
+          <a:chExt cx="0" cy="0"/>
+        </a:xfrm>
+      </p:grpSpPr>
+      <p:sp>
+        <p:nvSpPr>
+          <p:cNvPr id="4" name="슬라이드 번호 개체 틀 3">
+            <a:extLst>
+              <a:ext uri="{FF2B5EF4-FFF2-40B4-BE49-F238E27FC236}">
+                <a16:creationId xmlns:a16="http://schemas.microsoft.com/office/drawing/2014/main" id="{9AE73430-8836-961C-5301-71E1947D07D9}"/>
+              </a:ext>
+            </a:extLst>
+          </p:cNvPr>
+          <p:cNvSpPr>
+            <a:spLocks noGrp="1"/>
+          </p:cNvSpPr>
+          <p:nvPr>
+            <p:ph type="sldNum" sz="quarter" idx="12"/>
+          </p:nvPr>
+        </p:nvSpPr>
+        <p:spPr>
+          <a:xfrm>
+            <a:off x="10514011" y="6036261"/>
+            <a:ext cx="753545" cy="365125"/>
+          </a:xfrm>
+        </p:spPr>
+        <p:txBody>
+          <a:bodyPr/>
+          <a:lstStyle/>
+          <a:p>
+            <a:fld id="{D57F1E4F-1CFF-5643-939E-217C01CDF565}" type="slidenum">
+              <a:rPr lang="en-US" smtClean="0"/>
+              <a:pPr/>
+              <a:t>10</a:t>
+            </a:fld>
+            <a:endParaRPr lang="en-US" dirty="0"/>
+          </a:p>
+        </p:txBody>
+      </p:sp>
+      <p:sp>
+        <p:nvSpPr>
+          <p:cNvPr id="3" name="제목 1">
+            <a:extLst>
+              <a:ext uri="{FF2B5EF4-FFF2-40B4-BE49-F238E27FC236}">
+                <a16:creationId xmlns:a16="http://schemas.microsoft.com/office/drawing/2014/main" id="{E1C45773-93D9-590A-3670-583BFB0FBB0C}"/>
+              </a:ext>
+            </a:extLst>
+          </p:cNvPr>
+          <p:cNvSpPr txBox="1">
+            <a:spLocks/>
+          </p:cNvSpPr>
+          <p:nvPr/>
+        </p:nvSpPr>
+        <p:spPr>
+          <a:xfrm>
+            <a:off x="475645" y="481983"/>
+            <a:ext cx="10353762" cy="766439"/>
+          </a:xfrm>
+          <a:prstGeom prst="rect">
+            <a:avLst/>
+          </a:prstGeom>
+        </p:spPr>
+        <p:txBody>
+          <a:bodyPr vert="horz" lIns="91440" tIns="45720" rIns="91440" bIns="45720" rtlCol="0" anchor="ctr">
+            <a:normAutofit/>
+          </a:bodyPr>
+          <a:lstStyle>
+            <a:lvl1pPr algn="ctr" defTabSz="914400" rtl="0" eaLnBrk="1" latinLnBrk="1" hangingPunct="1">
+              <a:lnSpc>
+                <a:spcPct val="90000"/>
+              </a:lnSpc>
+              <a:spcBef>
+                <a:spcPct val="0"/>
+              </a:spcBef>
+              <a:buNone/>
+              <a:defRPr sz="3200" kern="1200" cap="all" baseline="0">
+                <a:solidFill>
+                  <a:schemeClr val="tx1"/>
+                </a:solidFill>
+                <a:effectLst/>
+                <a:latin typeface="Batang" panose="02030600000101010101" pitchFamily="18" charset="-127"/>
+                <a:ea typeface="Batang" panose="02030600000101010101" pitchFamily="18" charset="-127"/>
+                <a:cs typeface="+mj-cs"/>
+              </a:defRPr>
+            </a:lvl1pPr>
+          </a:lstStyle>
+          <a:p>
+            <a:pPr algn="l"/>
+            <a:r>
+              <a:rPr lang="en-US" altLang="ko-KR" sz="2800" cap="none" dirty="0">
+                <a:solidFill>
+                  <a:schemeClr val="bg2">
+                    <a:lumMod val="25000"/>
+                  </a:schemeClr>
+                </a:solidFill>
+                <a:latin typeface="D2Coding" panose="020B0609020101020101" pitchFamily="49" charset="-127"/>
+                <a:ea typeface="D2Coding" panose="020B0609020101020101" pitchFamily="49" charset="-127"/>
+                <a:cs typeface="Segoe UI Light" panose="020B0502040204020203" pitchFamily="34" charset="0"/>
+              </a:rPr>
+              <a:t>Query Transformation </a:t>
+            </a:r>
+            <a:endParaRPr lang="ko-KR" altLang="en-US" sz="2800" cap="none" dirty="0">
+              <a:solidFill>
+                <a:schemeClr val="bg2">
+                  <a:lumMod val="25000"/>
+                </a:schemeClr>
+              </a:solidFill>
+              <a:latin typeface="D2Coding" panose="020B0609020101020101" pitchFamily="49" charset="-127"/>
+              <a:ea typeface="D2Coding" panose="020B0609020101020101" pitchFamily="49" charset="-127"/>
+              <a:cs typeface="Segoe UI Light" panose="020B0502040204020203" pitchFamily="34" charset="0"/>
+            </a:endParaRPr>
+          </a:p>
+        </p:txBody>
+      </p:sp>
+      <p:sp>
+        <p:nvSpPr>
+          <p:cNvPr id="5" name="TextBox 4">
+            <a:extLst>
+              <a:ext uri="{FF2B5EF4-FFF2-40B4-BE49-F238E27FC236}">
+                <a16:creationId xmlns:a16="http://schemas.microsoft.com/office/drawing/2014/main" id="{C4D5CBB4-32B5-6778-4C36-D7987FBAD9AD}"/>
+              </a:ext>
+            </a:extLst>
+          </p:cNvPr>
+          <p:cNvSpPr txBox="1"/>
+          <p:nvPr/>
+        </p:nvSpPr>
+        <p:spPr>
+          <a:xfrm>
+            <a:off x="7944455" y="690061"/>
+            <a:ext cx="3600450" cy="369332"/>
+          </a:xfrm>
+          <a:prstGeom prst="rect">
+            <a:avLst/>
+          </a:prstGeom>
+          <a:noFill/>
+        </p:spPr>
+        <p:txBody>
+          <a:bodyPr wrap="square">
+            <a:spAutoFit/>
+          </a:bodyPr>
+          <a:lstStyle/>
+          <a:p>
+            <a:pPr algn="r"/>
+            <a:r>
+              <a:rPr lang="en-US" altLang="ko-KR" dirty="0">
+                <a:latin typeface="D2Coding" panose="020B0609020101020101" pitchFamily="49" charset="-127"/>
+                <a:ea typeface="D2Coding" panose="020B0609020101020101" pitchFamily="49" charset="-127"/>
+              </a:rPr>
+              <a:t>Rewrite-Retrieve-Read</a:t>
+            </a:r>
+            <a:endParaRPr lang="ko-KR" altLang="en-US" dirty="0"/>
+          </a:p>
+        </p:txBody>
+      </p:sp>
+      <p:pic>
+        <p:nvPicPr>
+          <p:cNvPr id="7" name="그림 6">
+            <a:extLst>
+              <a:ext uri="{FF2B5EF4-FFF2-40B4-BE49-F238E27FC236}">
+                <a16:creationId xmlns:a16="http://schemas.microsoft.com/office/drawing/2014/main" id="{D27233DF-4C16-66F3-20FB-FAF524AA1131}"/>
+              </a:ext>
+            </a:extLst>
+          </p:cNvPr>
+          <p:cNvPicPr>
+            <a:picLocks noChangeAspect="1"/>
+          </p:cNvPicPr>
+          <p:nvPr/>
+        </p:nvPicPr>
+        <p:blipFill>
+          <a:blip r:embed="rId2"/>
+          <a:stretch>
+            <a:fillRect/>
+          </a:stretch>
+        </p:blipFill>
+        <p:spPr>
+          <a:xfrm>
+            <a:off x="6974029" y="2267020"/>
+            <a:ext cx="4054191" cy="2949196"/>
+          </a:xfrm>
+          <a:prstGeom prst="rect">
+            <a:avLst/>
+          </a:prstGeom>
+        </p:spPr>
+      </p:pic>
+    </p:spTree>
+    <p:extLst>
+      <p:ext uri="{BB962C8B-B14F-4D97-AF65-F5344CB8AC3E}">
+        <p14:creationId xmlns:p14="http://schemas.microsoft.com/office/powerpoint/2010/main" val="4064725849"/>
+      </p:ext>
+    </p:extLst>
+  </p:cSld>
+  <p:clrMapOvr>
+    <a:masterClrMapping/>
+  </p:clrMapOvr>
+</p:sld>
+</file>
+
 <file path=ppt/slides/slide2.xml><?xml version="1.0" encoding="utf-8"?>
 <p:sld xmlns:a="http://schemas.openxmlformats.org/drawingml/2006/main" xmlns:r="http://schemas.openxmlformats.org/officeDocument/2006/relationships" xmlns:p="http://schemas.openxmlformats.org/presentationml/2006/main">
   <p:cSld>
@@ -7415,6 +7637,756 @@
     <p:extLst>
       <p:ext uri="{BB962C8B-B14F-4D97-AF65-F5344CB8AC3E}">
         <p14:creationId xmlns:p14="http://schemas.microsoft.com/office/powerpoint/2010/main" val="1065848431"/>
+      </p:ext>
+    </p:extLst>
+  </p:cSld>
+  <p:clrMapOvr>
+    <a:masterClrMapping/>
+  </p:clrMapOvr>
+</p:sld>
+</file>
+
+<file path=ppt/slides/slide8.xml><?xml version="1.0" encoding="utf-8"?>
+<p:sld xmlns:a="http://schemas.openxmlformats.org/drawingml/2006/main" xmlns:r="http://schemas.openxmlformats.org/officeDocument/2006/relationships" xmlns:p="http://schemas.openxmlformats.org/presentationml/2006/main">
+  <p:cSld>
+    <p:spTree>
+      <p:nvGrpSpPr>
+        <p:cNvPr id="1" name="">
+          <a:extLst>
+            <a:ext uri="{FF2B5EF4-FFF2-40B4-BE49-F238E27FC236}">
+              <a16:creationId xmlns:a16="http://schemas.microsoft.com/office/drawing/2014/main" id="{0DDE5245-9EDB-46A3-1F2A-4501E08E448E}"/>
+            </a:ext>
+          </a:extLst>
+        </p:cNvPr>
+        <p:cNvGrpSpPr/>
+        <p:nvPr/>
+      </p:nvGrpSpPr>
+      <p:grpSpPr>
+        <a:xfrm>
+          <a:off x="0" y="0"/>
+          <a:ext cx="0" cy="0"/>
+          <a:chOff x="0" y="0"/>
+          <a:chExt cx="0" cy="0"/>
+        </a:xfrm>
+      </p:grpSpPr>
+      <p:sp>
+        <p:nvSpPr>
+          <p:cNvPr id="4" name="슬라이드 번호 개체 틀 3">
+            <a:extLst>
+              <a:ext uri="{FF2B5EF4-FFF2-40B4-BE49-F238E27FC236}">
+                <a16:creationId xmlns:a16="http://schemas.microsoft.com/office/drawing/2014/main" id="{78188EE8-FE27-FA83-E7F6-84D649D4DECD}"/>
+              </a:ext>
+            </a:extLst>
+          </p:cNvPr>
+          <p:cNvSpPr>
+            <a:spLocks noGrp="1"/>
+          </p:cNvSpPr>
+          <p:nvPr>
+            <p:ph type="sldNum" sz="quarter" idx="12"/>
+          </p:nvPr>
+        </p:nvSpPr>
+        <p:spPr>
+          <a:xfrm>
+            <a:off x="10514011" y="6036261"/>
+            <a:ext cx="753545" cy="365125"/>
+          </a:xfrm>
+        </p:spPr>
+        <p:txBody>
+          <a:bodyPr/>
+          <a:lstStyle/>
+          <a:p>
+            <a:fld id="{D57F1E4F-1CFF-5643-939E-217C01CDF565}" type="slidenum">
+              <a:rPr lang="en-US" smtClean="0"/>
+              <a:pPr/>
+              <a:t>8</a:t>
+            </a:fld>
+            <a:endParaRPr lang="en-US" dirty="0"/>
+          </a:p>
+        </p:txBody>
+      </p:sp>
+      <p:sp>
+        <p:nvSpPr>
+          <p:cNvPr id="3" name="제목 1">
+            <a:extLst>
+              <a:ext uri="{FF2B5EF4-FFF2-40B4-BE49-F238E27FC236}">
+                <a16:creationId xmlns:a16="http://schemas.microsoft.com/office/drawing/2014/main" id="{08DB553A-0412-FD51-E0DB-FBD53447FA10}"/>
+              </a:ext>
+            </a:extLst>
+          </p:cNvPr>
+          <p:cNvSpPr txBox="1">
+            <a:spLocks/>
+          </p:cNvSpPr>
+          <p:nvPr/>
+        </p:nvSpPr>
+        <p:spPr>
+          <a:xfrm>
+            <a:off x="475645" y="481983"/>
+            <a:ext cx="10353762" cy="766439"/>
+          </a:xfrm>
+          <a:prstGeom prst="rect">
+            <a:avLst/>
+          </a:prstGeom>
+        </p:spPr>
+        <p:txBody>
+          <a:bodyPr vert="horz" lIns="91440" tIns="45720" rIns="91440" bIns="45720" rtlCol="0" anchor="ctr">
+            <a:normAutofit/>
+          </a:bodyPr>
+          <a:lstStyle>
+            <a:lvl1pPr algn="ctr" defTabSz="914400" rtl="0" eaLnBrk="1" latinLnBrk="1" hangingPunct="1">
+              <a:lnSpc>
+                <a:spcPct val="90000"/>
+              </a:lnSpc>
+              <a:spcBef>
+                <a:spcPct val="0"/>
+              </a:spcBef>
+              <a:buNone/>
+              <a:defRPr sz="3200" kern="1200" cap="all" baseline="0">
+                <a:solidFill>
+                  <a:schemeClr val="tx1"/>
+                </a:solidFill>
+                <a:effectLst/>
+                <a:latin typeface="Batang" panose="02030600000101010101" pitchFamily="18" charset="-127"/>
+                <a:ea typeface="Batang" panose="02030600000101010101" pitchFamily="18" charset="-127"/>
+                <a:cs typeface="+mj-cs"/>
+              </a:defRPr>
+            </a:lvl1pPr>
+          </a:lstStyle>
+          <a:p>
+            <a:pPr algn="l"/>
+            <a:r>
+              <a:rPr lang="en-US" altLang="ko-KR" sz="2800" cap="none" dirty="0">
+                <a:solidFill>
+                  <a:schemeClr val="bg2">
+                    <a:lumMod val="25000"/>
+                  </a:schemeClr>
+                </a:solidFill>
+                <a:latin typeface="D2Coding" panose="020B0609020101020101" pitchFamily="49" charset="-127"/>
+                <a:ea typeface="D2Coding" panose="020B0609020101020101" pitchFamily="49" charset="-127"/>
+                <a:cs typeface="Segoe UI Light" panose="020B0502040204020203" pitchFamily="34" charset="0"/>
+              </a:rPr>
+              <a:t>Query Transformation </a:t>
+            </a:r>
+            <a:endParaRPr lang="ko-KR" altLang="en-US" sz="2800" cap="none" dirty="0">
+              <a:solidFill>
+                <a:schemeClr val="bg2">
+                  <a:lumMod val="25000"/>
+                </a:schemeClr>
+              </a:solidFill>
+              <a:latin typeface="D2Coding" panose="020B0609020101020101" pitchFamily="49" charset="-127"/>
+              <a:ea typeface="D2Coding" panose="020B0609020101020101" pitchFamily="49" charset="-127"/>
+              <a:cs typeface="Segoe UI Light" panose="020B0502040204020203" pitchFamily="34" charset="0"/>
+            </a:endParaRPr>
+          </a:p>
+        </p:txBody>
+      </p:sp>
+      <p:sp>
+        <p:nvSpPr>
+          <p:cNvPr id="5" name="TextBox 4">
+            <a:extLst>
+              <a:ext uri="{FF2B5EF4-FFF2-40B4-BE49-F238E27FC236}">
+                <a16:creationId xmlns:a16="http://schemas.microsoft.com/office/drawing/2014/main" id="{A66CD26D-1BF6-C93E-CACA-6F5B48C79395}"/>
+              </a:ext>
+            </a:extLst>
+          </p:cNvPr>
+          <p:cNvSpPr txBox="1"/>
+          <p:nvPr/>
+        </p:nvSpPr>
+        <p:spPr>
+          <a:xfrm>
+            <a:off x="542320" y="1452061"/>
+            <a:ext cx="10925780" cy="4671151"/>
+          </a:xfrm>
+          <a:prstGeom prst="rect">
+            <a:avLst/>
+          </a:prstGeom>
+          <a:noFill/>
+        </p:spPr>
+        <p:txBody>
+          <a:bodyPr wrap="square">
+            <a:spAutoFit/>
+          </a:bodyPr>
+          <a:lstStyle/>
+          <a:p>
+            <a:pPr marL="285750" indent="-285750">
+              <a:lnSpc>
+                <a:spcPct val="150000"/>
+              </a:lnSpc>
+              <a:buFont typeface="Wingdings" panose="05000000000000000000" pitchFamily="2" charset="2"/>
+              <a:buChar char="v"/>
+            </a:pPr>
+            <a:r>
+              <a:rPr lang="en-US" altLang="ko-KR" dirty="0">
+                <a:latin typeface="D2Coding" panose="020B0609020101020101" pitchFamily="49" charset="-127"/>
+                <a:ea typeface="D2Coding" panose="020B0609020101020101" pitchFamily="49" charset="-127"/>
+              </a:rPr>
+              <a:t>Rewrite-Retrieve-Read</a:t>
+            </a:r>
+          </a:p>
+          <a:p>
+            <a:pPr marL="742950" lvl="1" indent="-285750">
+              <a:lnSpc>
+                <a:spcPct val="150000"/>
+              </a:lnSpc>
+              <a:buFont typeface="Wingdings" panose="05000000000000000000" pitchFamily="2" charset="2"/>
+              <a:buChar char="v"/>
+            </a:pPr>
+            <a:r>
+              <a:rPr lang="ko-KR" altLang="en-US" sz="1600" dirty="0">
+                <a:latin typeface="D2Coding" panose="020B0609020101020101" pitchFamily="49" charset="-127"/>
+                <a:ea typeface="D2Coding" panose="020B0609020101020101" pitchFamily="49" charset="-127"/>
+              </a:rPr>
+              <a:t>사용자의 </a:t>
+            </a:r>
+            <a:r>
+              <a:rPr lang="en-US" altLang="ko-KR" sz="1600" dirty="0">
+                <a:latin typeface="D2Coding" panose="020B0609020101020101" pitchFamily="49" charset="-127"/>
+                <a:ea typeface="D2Coding" panose="020B0609020101020101" pitchFamily="49" charset="-127"/>
+              </a:rPr>
+              <a:t>Query</a:t>
+            </a:r>
+            <a:r>
+              <a:rPr lang="ko-KR" altLang="en-US" sz="1600" dirty="0">
+                <a:latin typeface="D2Coding" panose="020B0609020101020101" pitchFamily="49" charset="-127"/>
+                <a:ea typeface="D2Coding" panose="020B0609020101020101" pitchFamily="49" charset="-127"/>
+              </a:rPr>
+              <a:t>를 </a:t>
+            </a:r>
+            <a:r>
+              <a:rPr lang="en-US" altLang="ko-KR" sz="1600" dirty="0">
+                <a:latin typeface="D2Coding" panose="020B0609020101020101" pitchFamily="49" charset="-127"/>
+                <a:ea typeface="D2Coding" panose="020B0609020101020101" pitchFamily="49" charset="-127"/>
+              </a:rPr>
+              <a:t>LLM</a:t>
+            </a:r>
+            <a:r>
+              <a:rPr lang="ko-KR" altLang="en-US" sz="1600" dirty="0">
+                <a:latin typeface="D2Coding" panose="020B0609020101020101" pitchFamily="49" charset="-127"/>
+                <a:ea typeface="D2Coding" panose="020B0609020101020101" pitchFamily="49" charset="-127"/>
+              </a:rPr>
+              <a:t>이 </a:t>
+            </a:r>
+            <a:r>
+              <a:rPr lang="en-US" altLang="ko-KR" sz="1600" dirty="0">
+                <a:latin typeface="D2Coding" panose="020B0609020101020101" pitchFamily="49" charset="-127"/>
+                <a:ea typeface="D2Coding" panose="020B0609020101020101" pitchFamily="49" charset="-127"/>
+              </a:rPr>
+              <a:t>1</a:t>
+            </a:r>
+            <a:r>
+              <a:rPr lang="ko-KR" altLang="en-US" sz="1600" dirty="0">
+                <a:latin typeface="D2Coding" panose="020B0609020101020101" pitchFamily="49" charset="-127"/>
+                <a:ea typeface="D2Coding" panose="020B0609020101020101" pitchFamily="49" charset="-127"/>
+              </a:rPr>
+              <a:t>차</a:t>
+            </a:r>
+            <a:r>
+              <a:rPr lang="en-US" altLang="ko-KR" sz="1600" dirty="0">
+                <a:latin typeface="D2Coding" panose="020B0609020101020101" pitchFamily="49" charset="-127"/>
+                <a:ea typeface="D2Coding" panose="020B0609020101020101" pitchFamily="49" charset="-127"/>
+              </a:rPr>
+              <a:t>, 2</a:t>
+            </a:r>
+            <a:r>
+              <a:rPr lang="ko-KR" altLang="en-US" sz="1600" dirty="0">
+                <a:latin typeface="D2Coding" panose="020B0609020101020101" pitchFamily="49" charset="-127"/>
+                <a:ea typeface="D2Coding" panose="020B0609020101020101" pitchFamily="49" charset="-127"/>
+              </a:rPr>
+              <a:t>차</a:t>
+            </a:r>
+            <a:r>
+              <a:rPr lang="en-US" altLang="ko-KR" sz="1600" dirty="0">
+                <a:latin typeface="D2Coding" panose="020B0609020101020101" pitchFamily="49" charset="-127"/>
+                <a:ea typeface="D2Coding" panose="020B0609020101020101" pitchFamily="49" charset="-127"/>
+              </a:rPr>
+              <a:t>,.. </a:t>
+            </a:r>
+            <a:r>
+              <a:rPr lang="ko-KR" altLang="en-US" sz="1600" dirty="0">
+                <a:latin typeface="D2Coding" panose="020B0609020101020101" pitchFamily="49" charset="-127"/>
+                <a:ea typeface="D2Coding" panose="020B0609020101020101" pitchFamily="49" charset="-127"/>
+              </a:rPr>
+              <a:t>로 변환한 후 벡터스토어에서 조각 문서를 찾아 내기</a:t>
+            </a:r>
+            <a:endParaRPr lang="en-US" altLang="ko-KR" sz="1600" dirty="0">
+              <a:latin typeface="D2Coding" panose="020B0609020101020101" pitchFamily="49" charset="-127"/>
+              <a:ea typeface="D2Coding" panose="020B0609020101020101" pitchFamily="49" charset="-127"/>
+            </a:endParaRPr>
+          </a:p>
+          <a:p>
+            <a:pPr marL="742950" lvl="1" indent="-285750">
+              <a:lnSpc>
+                <a:spcPct val="150000"/>
+              </a:lnSpc>
+              <a:buFont typeface="Wingdings" panose="05000000000000000000" pitchFamily="2" charset="2"/>
+              <a:buChar char="v"/>
+            </a:pPr>
+            <a:endParaRPr lang="en-US" altLang="ko-KR" sz="1600" dirty="0">
+              <a:latin typeface="D2Coding" panose="020B0609020101020101" pitchFamily="49" charset="-127"/>
+              <a:ea typeface="D2Coding" panose="020B0609020101020101" pitchFamily="49" charset="-127"/>
+            </a:endParaRPr>
+          </a:p>
+          <a:p>
+            <a:pPr marL="285750" indent="-285750">
+              <a:lnSpc>
+                <a:spcPct val="150000"/>
+              </a:lnSpc>
+              <a:buFont typeface="Wingdings" panose="05000000000000000000" pitchFamily="2" charset="2"/>
+              <a:buChar char="v"/>
+            </a:pPr>
+            <a:r>
+              <a:rPr lang="en-US" altLang="ko-KR" dirty="0">
+                <a:latin typeface="D2Coding" panose="020B0609020101020101" pitchFamily="49" charset="-127"/>
+                <a:ea typeface="D2Coding" panose="020B0609020101020101" pitchFamily="49" charset="-127"/>
+              </a:rPr>
+              <a:t>Multi-Query Retrieval</a:t>
+            </a:r>
+          </a:p>
+          <a:p>
+            <a:pPr marL="742950" lvl="1" indent="-285750">
+              <a:lnSpc>
+                <a:spcPct val="150000"/>
+              </a:lnSpc>
+              <a:buFont typeface="Wingdings" panose="05000000000000000000" pitchFamily="2" charset="2"/>
+              <a:buChar char="v"/>
+            </a:pPr>
+            <a:r>
+              <a:rPr lang="ko-KR" altLang="en-US" sz="1600" dirty="0">
+                <a:latin typeface="D2Coding" panose="020B0609020101020101" pitchFamily="49" charset="-127"/>
+                <a:ea typeface="D2Coding" panose="020B0609020101020101" pitchFamily="49" charset="-127"/>
+              </a:rPr>
+              <a:t>사용자의 </a:t>
+            </a:r>
+            <a:r>
+              <a:rPr lang="en-US" altLang="ko-KR" sz="1600" dirty="0">
+                <a:latin typeface="D2Coding" panose="020B0609020101020101" pitchFamily="49" charset="-127"/>
+                <a:ea typeface="D2Coding" panose="020B0609020101020101" pitchFamily="49" charset="-127"/>
+              </a:rPr>
+              <a:t>Query</a:t>
+            </a:r>
+            <a:r>
+              <a:rPr lang="ko-KR" altLang="en-US" sz="1600" dirty="0">
+                <a:latin typeface="D2Coding" panose="020B0609020101020101" pitchFamily="49" charset="-127"/>
+                <a:ea typeface="D2Coding" panose="020B0609020101020101" pitchFamily="49" charset="-127"/>
+              </a:rPr>
+              <a:t>를 </a:t>
+            </a:r>
+            <a:r>
+              <a:rPr lang="en-US" altLang="ko-KR" sz="1600" dirty="0">
+                <a:latin typeface="D2Coding" panose="020B0609020101020101" pitchFamily="49" charset="-127"/>
+                <a:ea typeface="D2Coding" panose="020B0609020101020101" pitchFamily="49" charset="-127"/>
+              </a:rPr>
+              <a:t>LLM</a:t>
+            </a:r>
+            <a:r>
+              <a:rPr lang="ko-KR" altLang="en-US" sz="1600" dirty="0">
+                <a:latin typeface="D2Coding" panose="020B0609020101020101" pitchFamily="49" charset="-127"/>
+                <a:ea typeface="D2Coding" panose="020B0609020101020101" pitchFamily="49" charset="-127"/>
+              </a:rPr>
+              <a:t>이 질문을 </a:t>
+            </a:r>
+            <a:r>
+              <a:rPr lang="en-US" altLang="ko-KR" sz="1600" dirty="0">
+                <a:latin typeface="D2Coding" panose="020B0609020101020101" pitchFamily="49" charset="-127"/>
+                <a:ea typeface="D2Coding" panose="020B0609020101020101" pitchFamily="49" charset="-127"/>
+              </a:rPr>
+              <a:t>3~4</a:t>
+            </a:r>
+            <a:r>
+              <a:rPr lang="ko-KR" altLang="en-US" sz="1600" dirty="0">
+                <a:latin typeface="D2Coding" panose="020B0609020101020101" pitchFamily="49" charset="-127"/>
+                <a:ea typeface="D2Coding" panose="020B0609020101020101" pitchFamily="49" charset="-127"/>
+              </a:rPr>
+              <a:t>개의 다른 표현으로 복제한 후 벡터스토어에서 조각 문서를 찾아 내기</a:t>
+            </a:r>
+            <a:endParaRPr lang="en-US" altLang="ko-KR" sz="1600" dirty="0">
+              <a:latin typeface="D2Coding" panose="020B0609020101020101" pitchFamily="49" charset="-127"/>
+              <a:ea typeface="D2Coding" panose="020B0609020101020101" pitchFamily="49" charset="-127"/>
+            </a:endParaRPr>
+          </a:p>
+          <a:p>
+            <a:pPr marL="742950" lvl="1" indent="-285750">
+              <a:lnSpc>
+                <a:spcPct val="150000"/>
+              </a:lnSpc>
+              <a:buFont typeface="Wingdings" panose="05000000000000000000" pitchFamily="2" charset="2"/>
+              <a:buChar char="v"/>
+            </a:pPr>
+            <a:endParaRPr lang="en-US" altLang="ko-KR" sz="1600" dirty="0">
+              <a:latin typeface="D2Coding" panose="020B0609020101020101" pitchFamily="49" charset="-127"/>
+              <a:ea typeface="D2Coding" panose="020B0609020101020101" pitchFamily="49" charset="-127"/>
+            </a:endParaRPr>
+          </a:p>
+          <a:p>
+            <a:pPr marL="285750" indent="-285750">
+              <a:lnSpc>
+                <a:spcPct val="150000"/>
+              </a:lnSpc>
+              <a:buFont typeface="Wingdings" panose="05000000000000000000" pitchFamily="2" charset="2"/>
+              <a:buChar char="v"/>
+            </a:pPr>
+            <a:r>
+              <a:rPr lang="en-US" altLang="ko-KR" dirty="0">
+                <a:latin typeface="D2Coding" panose="020B0609020101020101" pitchFamily="49" charset="-127"/>
+                <a:ea typeface="D2Coding" panose="020B0609020101020101" pitchFamily="49" charset="-127"/>
+              </a:rPr>
+              <a:t>RAG-Fusion</a:t>
+            </a:r>
+          </a:p>
+          <a:p>
+            <a:pPr marL="742950" lvl="1" indent="-285750">
+              <a:lnSpc>
+                <a:spcPct val="150000"/>
+              </a:lnSpc>
+              <a:buFont typeface="Wingdings" panose="05000000000000000000" pitchFamily="2" charset="2"/>
+              <a:buChar char="v"/>
+            </a:pPr>
+            <a:r>
+              <a:rPr lang="en-US" altLang="ko-KR" sz="1600" dirty="0">
+                <a:latin typeface="D2Coding" panose="020B0609020101020101" pitchFamily="49" charset="-127"/>
+                <a:ea typeface="D2Coding" panose="020B0609020101020101" pitchFamily="49" charset="-127"/>
+              </a:rPr>
+              <a:t>Multi-Query Retrieval</a:t>
+            </a:r>
+            <a:r>
+              <a:rPr lang="ko-KR" altLang="en-US" sz="1600" dirty="0">
+                <a:latin typeface="D2Coding" panose="020B0609020101020101" pitchFamily="49" charset="-127"/>
+                <a:ea typeface="D2Coding" panose="020B0609020101020101" pitchFamily="49" charset="-127"/>
+              </a:rPr>
+              <a:t>에서 여러 개의 질문에서 도출된</a:t>
+            </a:r>
+            <a:r>
+              <a:rPr lang="en-US" altLang="ko-KR" sz="1600" dirty="0">
+                <a:latin typeface="D2Coding" panose="020B0609020101020101" pitchFamily="49" charset="-127"/>
+                <a:ea typeface="D2Coding" panose="020B0609020101020101" pitchFamily="49" charset="-127"/>
+              </a:rPr>
+              <a:t> </a:t>
+            </a:r>
+            <a:r>
+              <a:rPr lang="ko-KR" altLang="en-US" sz="1600" dirty="0">
+                <a:latin typeface="D2Coding" panose="020B0609020101020101" pitchFamily="49" charset="-127"/>
+                <a:ea typeface="D2Coding" panose="020B0609020101020101" pitchFamily="49" charset="-127"/>
+              </a:rPr>
+              <a:t>조각 문서에 랭킹을</a:t>
+            </a:r>
+            <a:r>
+              <a:rPr lang="en-US" altLang="ko-KR" sz="1600" dirty="0">
+                <a:latin typeface="D2Coding" panose="020B0609020101020101" pitchFamily="49" charset="-127"/>
+                <a:ea typeface="D2Coding" panose="020B0609020101020101" pitchFamily="49" charset="-127"/>
+              </a:rPr>
+              <a:t> </a:t>
+            </a:r>
+            <a:r>
+              <a:rPr lang="ko-KR" altLang="en-US" sz="1600" dirty="0">
+                <a:latin typeface="D2Coding" panose="020B0609020101020101" pitchFamily="49" charset="-127"/>
+                <a:ea typeface="D2Coding" panose="020B0609020101020101" pitchFamily="49" charset="-127"/>
+              </a:rPr>
+              <a:t>부여하여 찾아내기</a:t>
+            </a:r>
+            <a:endParaRPr lang="en-US" altLang="ko-KR" sz="1600" dirty="0">
+              <a:latin typeface="D2Coding" panose="020B0609020101020101" pitchFamily="49" charset="-127"/>
+              <a:ea typeface="D2Coding" panose="020B0609020101020101" pitchFamily="49" charset="-127"/>
+            </a:endParaRPr>
+          </a:p>
+          <a:p>
+            <a:pPr marL="742950" lvl="1" indent="-285750">
+              <a:lnSpc>
+                <a:spcPct val="150000"/>
+              </a:lnSpc>
+              <a:buFont typeface="Wingdings" panose="05000000000000000000" pitchFamily="2" charset="2"/>
+              <a:buChar char="v"/>
+            </a:pPr>
+            <a:endParaRPr lang="en-US" altLang="ko-KR" sz="1600" dirty="0">
+              <a:latin typeface="D2Coding" panose="020B0609020101020101" pitchFamily="49" charset="-127"/>
+              <a:ea typeface="D2Coding" panose="020B0609020101020101" pitchFamily="49" charset="-127"/>
+            </a:endParaRPr>
+          </a:p>
+          <a:p>
+            <a:pPr marL="285750" indent="-285750">
+              <a:lnSpc>
+                <a:spcPct val="150000"/>
+              </a:lnSpc>
+              <a:buFont typeface="Wingdings" panose="05000000000000000000" pitchFamily="2" charset="2"/>
+              <a:buChar char="v"/>
+            </a:pPr>
+            <a:r>
+              <a:rPr lang="en-US" altLang="ko-KR" dirty="0">
+                <a:latin typeface="D2Coding" panose="020B0609020101020101" pitchFamily="49" charset="-127"/>
+                <a:ea typeface="D2Coding" panose="020B0609020101020101" pitchFamily="49" charset="-127"/>
+              </a:rPr>
+              <a:t>Hypothetical Document Embeddings</a:t>
+            </a:r>
+          </a:p>
+          <a:p>
+            <a:pPr marL="742950" lvl="1" indent="-285750">
+              <a:lnSpc>
+                <a:spcPct val="150000"/>
+              </a:lnSpc>
+              <a:buFont typeface="Wingdings" panose="05000000000000000000" pitchFamily="2" charset="2"/>
+              <a:buChar char="v"/>
+            </a:pPr>
+            <a:r>
+              <a:rPr lang="ko-KR" altLang="en-US" sz="1600" dirty="0">
+                <a:latin typeface="D2Coding" panose="020B0609020101020101" pitchFamily="49" charset="-127"/>
+                <a:ea typeface="D2Coding" panose="020B0609020101020101" pitchFamily="49" charset="-127"/>
+              </a:rPr>
+              <a:t>사용자의 질문을 기반으로 가상의 문서</a:t>
+            </a:r>
+            <a:r>
+              <a:rPr lang="en-US" altLang="ko-KR" sz="1600" dirty="0">
+                <a:latin typeface="D2Coding" panose="020B0609020101020101" pitchFamily="49" charset="-127"/>
+                <a:ea typeface="D2Coding" panose="020B0609020101020101" pitchFamily="49" charset="-127"/>
+              </a:rPr>
+              <a:t>(Hypothetical Document)</a:t>
+            </a:r>
+            <a:r>
+              <a:rPr lang="ko-KR" altLang="en-US" sz="1600" dirty="0">
+                <a:latin typeface="D2Coding" panose="020B0609020101020101" pitchFamily="49" charset="-127"/>
+                <a:ea typeface="D2Coding" panose="020B0609020101020101" pitchFamily="49" charset="-127"/>
+              </a:rPr>
+              <a:t>를 </a:t>
+            </a:r>
+            <a:r>
+              <a:rPr lang="en-US" altLang="ko-KR" sz="1600" dirty="0">
+                <a:latin typeface="D2Coding" panose="020B0609020101020101" pitchFamily="49" charset="-127"/>
+                <a:ea typeface="D2Coding" panose="020B0609020101020101" pitchFamily="49" charset="-127"/>
+              </a:rPr>
+              <a:t>LLM</a:t>
+            </a:r>
+            <a:r>
+              <a:rPr lang="ko-KR" altLang="en-US" sz="1600" dirty="0">
+                <a:latin typeface="D2Coding" panose="020B0609020101020101" pitchFamily="49" charset="-127"/>
+                <a:ea typeface="D2Coding" panose="020B0609020101020101" pitchFamily="49" charset="-127"/>
+              </a:rPr>
+              <a:t>이 생성하고</a:t>
+            </a:r>
+            <a:r>
+              <a:rPr lang="en-US" altLang="ko-KR" sz="1600" dirty="0">
+                <a:latin typeface="D2Coding" panose="020B0609020101020101" pitchFamily="49" charset="-127"/>
+                <a:ea typeface="D2Coding" panose="020B0609020101020101" pitchFamily="49" charset="-127"/>
+              </a:rPr>
+              <a:t>, </a:t>
+            </a:r>
+            <a:r>
+              <a:rPr lang="ko-KR" altLang="en-US" sz="1600" dirty="0">
+                <a:latin typeface="D2Coding" panose="020B0609020101020101" pitchFamily="49" charset="-127"/>
+                <a:ea typeface="D2Coding" panose="020B0609020101020101" pitchFamily="49" charset="-127"/>
+              </a:rPr>
+              <a:t>이 문서를 </a:t>
+            </a:r>
+            <a:r>
+              <a:rPr lang="ko-KR" altLang="en-US" sz="1600" dirty="0" err="1">
+                <a:latin typeface="D2Coding" panose="020B0609020101020101" pitchFamily="49" charset="-127"/>
+                <a:ea typeface="D2Coding" panose="020B0609020101020101" pitchFamily="49" charset="-127"/>
+              </a:rPr>
+              <a:t>임베딩하여</a:t>
+            </a:r>
+            <a:r>
+              <a:rPr lang="en-US" altLang="ko-KR" sz="1600" dirty="0">
+                <a:latin typeface="D2Coding" panose="020B0609020101020101" pitchFamily="49" charset="-127"/>
+                <a:ea typeface="D2Coding" panose="020B0609020101020101" pitchFamily="49" charset="-127"/>
+              </a:rPr>
+              <a:t>, </a:t>
+            </a:r>
+            <a:r>
+              <a:rPr lang="ko-KR" altLang="en-US" sz="1600" dirty="0">
+                <a:latin typeface="D2Coding" panose="020B0609020101020101" pitchFamily="49" charset="-127"/>
+                <a:ea typeface="D2Coding" panose="020B0609020101020101" pitchFamily="49" charset="-127"/>
+              </a:rPr>
+              <a:t>벡터 유사도를 바탕으로 관련 문서를 검색하는 방식</a:t>
+            </a:r>
+          </a:p>
+        </p:txBody>
+      </p:sp>
+    </p:spTree>
+    <p:extLst>
+      <p:ext uri="{BB962C8B-B14F-4D97-AF65-F5344CB8AC3E}">
+        <p14:creationId xmlns:p14="http://schemas.microsoft.com/office/powerpoint/2010/main" val="1432651993"/>
+      </p:ext>
+    </p:extLst>
+  </p:cSld>
+  <p:clrMapOvr>
+    <a:masterClrMapping/>
+  </p:clrMapOvr>
+</p:sld>
+</file>
+
+<file path=ppt/slides/slide9.xml><?xml version="1.0" encoding="utf-8"?>
+<p:sld xmlns:a="http://schemas.openxmlformats.org/drawingml/2006/main" xmlns:r="http://schemas.openxmlformats.org/officeDocument/2006/relationships" xmlns:p="http://schemas.openxmlformats.org/presentationml/2006/main">
+  <p:cSld>
+    <p:spTree>
+      <p:nvGrpSpPr>
+        <p:cNvPr id="1" name="">
+          <a:extLst>
+            <a:ext uri="{FF2B5EF4-FFF2-40B4-BE49-F238E27FC236}">
+              <a16:creationId xmlns:a16="http://schemas.microsoft.com/office/drawing/2014/main" id="{93F6F4E3-E67C-9BAF-371A-93DFEECB9E74}"/>
+            </a:ext>
+          </a:extLst>
+        </p:cNvPr>
+        <p:cNvGrpSpPr/>
+        <p:nvPr/>
+      </p:nvGrpSpPr>
+      <p:grpSpPr>
+        <a:xfrm>
+          <a:off x="0" y="0"/>
+          <a:ext cx="0" cy="0"/>
+          <a:chOff x="0" y="0"/>
+          <a:chExt cx="0" cy="0"/>
+        </a:xfrm>
+      </p:grpSpPr>
+      <p:sp>
+        <p:nvSpPr>
+          <p:cNvPr id="4" name="슬라이드 번호 개체 틀 3">
+            <a:extLst>
+              <a:ext uri="{FF2B5EF4-FFF2-40B4-BE49-F238E27FC236}">
+                <a16:creationId xmlns:a16="http://schemas.microsoft.com/office/drawing/2014/main" id="{BE06B752-0047-4A9A-D6ED-EE1C0D467FE9}"/>
+              </a:ext>
+            </a:extLst>
+          </p:cNvPr>
+          <p:cNvSpPr>
+            <a:spLocks noGrp="1"/>
+          </p:cNvSpPr>
+          <p:nvPr>
+            <p:ph type="sldNum" sz="quarter" idx="12"/>
+          </p:nvPr>
+        </p:nvSpPr>
+        <p:spPr>
+          <a:xfrm>
+            <a:off x="10514011" y="6036261"/>
+            <a:ext cx="753545" cy="365125"/>
+          </a:xfrm>
+        </p:spPr>
+        <p:txBody>
+          <a:bodyPr/>
+          <a:lstStyle/>
+          <a:p>
+            <a:fld id="{D57F1E4F-1CFF-5643-939E-217C01CDF565}" type="slidenum">
+              <a:rPr lang="en-US" smtClean="0"/>
+              <a:pPr/>
+              <a:t>9</a:t>
+            </a:fld>
+            <a:endParaRPr lang="en-US" dirty="0"/>
+          </a:p>
+        </p:txBody>
+      </p:sp>
+      <p:sp>
+        <p:nvSpPr>
+          <p:cNvPr id="3" name="제목 1">
+            <a:extLst>
+              <a:ext uri="{FF2B5EF4-FFF2-40B4-BE49-F238E27FC236}">
+                <a16:creationId xmlns:a16="http://schemas.microsoft.com/office/drawing/2014/main" id="{97AD7CBA-31A4-09CB-B7B4-C0EE49E65DE0}"/>
+              </a:ext>
+            </a:extLst>
+          </p:cNvPr>
+          <p:cNvSpPr txBox="1">
+            <a:spLocks/>
+          </p:cNvSpPr>
+          <p:nvPr/>
+        </p:nvSpPr>
+        <p:spPr>
+          <a:xfrm>
+            <a:off x="475645" y="481983"/>
+            <a:ext cx="10353762" cy="766439"/>
+          </a:xfrm>
+          <a:prstGeom prst="rect">
+            <a:avLst/>
+          </a:prstGeom>
+        </p:spPr>
+        <p:txBody>
+          <a:bodyPr vert="horz" lIns="91440" tIns="45720" rIns="91440" bIns="45720" rtlCol="0" anchor="ctr">
+            <a:normAutofit/>
+          </a:bodyPr>
+          <a:lstStyle>
+            <a:lvl1pPr algn="ctr" defTabSz="914400" rtl="0" eaLnBrk="1" latinLnBrk="1" hangingPunct="1">
+              <a:lnSpc>
+                <a:spcPct val="90000"/>
+              </a:lnSpc>
+              <a:spcBef>
+                <a:spcPct val="0"/>
+              </a:spcBef>
+              <a:buNone/>
+              <a:defRPr sz="3200" kern="1200" cap="all" baseline="0">
+                <a:solidFill>
+                  <a:schemeClr val="tx1"/>
+                </a:solidFill>
+                <a:effectLst/>
+                <a:latin typeface="Batang" panose="02030600000101010101" pitchFamily="18" charset="-127"/>
+                <a:ea typeface="Batang" panose="02030600000101010101" pitchFamily="18" charset="-127"/>
+                <a:cs typeface="+mj-cs"/>
+              </a:defRPr>
+            </a:lvl1pPr>
+          </a:lstStyle>
+          <a:p>
+            <a:pPr algn="l"/>
+            <a:r>
+              <a:rPr lang="en-US" altLang="ko-KR" sz="2800" cap="none" dirty="0">
+                <a:solidFill>
+                  <a:schemeClr val="bg2">
+                    <a:lumMod val="25000"/>
+                  </a:schemeClr>
+                </a:solidFill>
+                <a:latin typeface="D2Coding" panose="020B0609020101020101" pitchFamily="49" charset="-127"/>
+                <a:ea typeface="D2Coding" panose="020B0609020101020101" pitchFamily="49" charset="-127"/>
+                <a:cs typeface="Segoe UI Light" panose="020B0502040204020203" pitchFamily="34" charset="0"/>
+              </a:rPr>
+              <a:t>Query Transformation </a:t>
+            </a:r>
+            <a:endParaRPr lang="ko-KR" altLang="en-US" sz="2800" cap="none" dirty="0">
+              <a:solidFill>
+                <a:schemeClr val="bg2">
+                  <a:lumMod val="25000"/>
+                </a:schemeClr>
+              </a:solidFill>
+              <a:latin typeface="D2Coding" panose="020B0609020101020101" pitchFamily="49" charset="-127"/>
+              <a:ea typeface="D2Coding" panose="020B0609020101020101" pitchFamily="49" charset="-127"/>
+              <a:cs typeface="Segoe UI Light" panose="020B0502040204020203" pitchFamily="34" charset="0"/>
+            </a:endParaRPr>
+          </a:p>
+        </p:txBody>
+      </p:sp>
+      <p:sp>
+        <p:nvSpPr>
+          <p:cNvPr id="5" name="TextBox 4">
+            <a:extLst>
+              <a:ext uri="{FF2B5EF4-FFF2-40B4-BE49-F238E27FC236}">
+                <a16:creationId xmlns:a16="http://schemas.microsoft.com/office/drawing/2014/main" id="{5A06B856-0E9C-4457-343E-665F75B83343}"/>
+              </a:ext>
+            </a:extLst>
+          </p:cNvPr>
+          <p:cNvSpPr txBox="1"/>
+          <p:nvPr/>
+        </p:nvSpPr>
+        <p:spPr>
+          <a:xfrm>
+            <a:off x="8077805" y="709111"/>
+            <a:ext cx="3600450" cy="369332"/>
+          </a:xfrm>
+          <a:prstGeom prst="rect">
+            <a:avLst/>
+          </a:prstGeom>
+          <a:noFill/>
+        </p:spPr>
+        <p:txBody>
+          <a:bodyPr wrap="square">
+            <a:spAutoFit/>
+          </a:bodyPr>
+          <a:lstStyle/>
+          <a:p>
+            <a:pPr algn="r"/>
+            <a:r>
+              <a:rPr lang="en-US" altLang="ko-KR" dirty="0">
+                <a:latin typeface="D2Coding" panose="020B0609020101020101" pitchFamily="49" charset="-127"/>
+                <a:ea typeface="D2Coding" panose="020B0609020101020101" pitchFamily="49" charset="-127"/>
+              </a:rPr>
+              <a:t>Rewrite-Retrieve-Read</a:t>
+            </a:r>
+            <a:endParaRPr lang="ko-KR" altLang="en-US" dirty="0"/>
+          </a:p>
+        </p:txBody>
+      </p:sp>
+    </p:spTree>
+    <p:extLst>
+      <p:ext uri="{BB962C8B-B14F-4D97-AF65-F5344CB8AC3E}">
+        <p14:creationId xmlns:p14="http://schemas.microsoft.com/office/powerpoint/2010/main" val="3177427818"/>
       </p:ext>
     </p:extLst>
   </p:cSld>

--- a/CHAPTER 3 RAG Part II_Chatting with Your Data.pptx
+++ b/CHAPTER 3 RAG Part II_Chatting with Your Data.pptx
@@ -5,10 +5,10 @@
     <p:sldMasterId id="2147483660" r:id="rId1"/>
   </p:sldMasterIdLst>
   <p:notesMasterIdLst>
-    <p:notesMasterId r:id="rId12"/>
+    <p:notesMasterId r:id="rId20"/>
   </p:notesMasterIdLst>
   <p:handoutMasterIdLst>
-    <p:handoutMasterId r:id="rId13"/>
+    <p:handoutMasterId r:id="rId21"/>
   </p:handoutMasterIdLst>
   <p:sldIdLst>
     <p:sldId id="256" r:id="rId2"/>
@@ -18,9 +18,17 @@
     <p:sldId id="1144" r:id="rId6"/>
     <p:sldId id="1142" r:id="rId7"/>
     <p:sldId id="1143" r:id="rId8"/>
-    <p:sldId id="1145" r:id="rId9"/>
-    <p:sldId id="1147" r:id="rId10"/>
-    <p:sldId id="1146" r:id="rId11"/>
+    <p:sldId id="1150" r:id="rId9"/>
+    <p:sldId id="1153" r:id="rId10"/>
+    <p:sldId id="1145" r:id="rId11"/>
+    <p:sldId id="1147" r:id="rId12"/>
+    <p:sldId id="1149" r:id="rId13"/>
+    <p:sldId id="1148" r:id="rId14"/>
+    <p:sldId id="1146" r:id="rId15"/>
+    <p:sldId id="1154" r:id="rId16"/>
+    <p:sldId id="1151" r:id="rId17"/>
+    <p:sldId id="1152" r:id="rId18"/>
+    <p:sldId id="1155" r:id="rId19"/>
   </p:sldIdLst>
   <p:sldSz cx="12192000" cy="6858000"/>
   <p:notesSz cx="6858000" cy="9144000"/>
@@ -135,9 +143,17 @@
             <p14:sldId id="1144"/>
             <p14:sldId id="1142"/>
             <p14:sldId id="1143"/>
+            <p14:sldId id="1150"/>
+            <p14:sldId id="1153"/>
             <p14:sldId id="1145"/>
             <p14:sldId id="1147"/>
+            <p14:sldId id="1149"/>
+            <p14:sldId id="1148"/>
             <p14:sldId id="1146"/>
+            <p14:sldId id="1154"/>
+            <p14:sldId id="1151"/>
+            <p14:sldId id="1152"/>
+            <p14:sldId id="1155"/>
           </p14:sldIdLst>
         </p14:section>
         <p14:section name="자세한 정보" id="{2CC34DB2-6590-42C0-AD4B-A04C6060184E}">
@@ -262,7 +278,7 @@
                 <a:latin typeface="맑은 고딕" panose="020B0503020000020004" pitchFamily="50" charset="-127"/>
                 <a:ea typeface="맑은 고딕" panose="020B0503020000020004" pitchFamily="50" charset="-127"/>
               </a:rPr>
-              <a:t>2026-07-17</a:t>
+              <a:t>2026-07-20</a:t>
             </a:fld>
             <a:endParaRPr lang="ko-KR" altLang="en-US">
               <a:latin typeface="맑은 고딕" panose="020B0503020000020004" pitchFamily="50" charset="-127"/>
@@ -448,7 +464,7 @@
           <a:p>
             <a:fld id="{43E1C3DD-4A19-441D-907C-380838DB51C4}" type="datetime1">
               <a:rPr lang="ko-KR" altLang="en-US" noProof="0" smtClean="0"/>
-              <a:t>2026-07-17</a:t>
+              <a:t>2026-07-20</a:t>
             </a:fld>
             <a:endParaRPr lang="ko-KR" altLang="en-US" noProof="0"/>
           </a:p>
@@ -1296,7 +1312,7 @@
           <a:p>
             <a:fld id="{990475B5-67CA-4281-BDCA-DA943C3C8EB3}" type="datetime1">
               <a:rPr lang="ko-KR" altLang="en-US" noProof="0" smtClean="0"/>
-              <a:t>2026-07-17</a:t>
+              <a:t>2026-07-20</a:t>
             </a:fld>
             <a:endParaRPr lang="ko-KR" altLang="en-US" noProof="0"/>
           </a:p>
@@ -1950,7 +1966,7 @@
           <a:p>
             <a:fld id="{48A87A34-81AB-432B-8DAE-1953F412C126}" type="datetimeFigureOut">
               <a:rPr lang="en-US" smtClean="0"/>
-              <a:t>7/17/2026</a:t>
+              <a:t>7/20/2026</a:t>
             </a:fld>
             <a:endParaRPr lang="en-US" dirty="0"/>
           </a:p>
@@ -2246,7 +2262,7 @@
           <a:p>
             <a:fld id="{C655C81E-72E7-4D05-94B5-F45B321A525D}" type="datetime1">
               <a:rPr lang="ko-KR" altLang="en-US" noProof="0" smtClean="0"/>
-              <a:t>2026-07-17</a:t>
+              <a:t>2026-07-20</a:t>
             </a:fld>
             <a:endParaRPr lang="ko-KR" altLang="en-US" noProof="0" dirty="0">
               <a:latin typeface="맑은 고딕" panose="020B0503020000020004" pitchFamily="50" charset="-127"/>
@@ -3047,6 +3063,1710 @@
         <p:cNvPr id="1" name="">
           <a:extLst>
             <a:ext uri="{FF2B5EF4-FFF2-40B4-BE49-F238E27FC236}">
+              <a16:creationId xmlns:a16="http://schemas.microsoft.com/office/drawing/2014/main" id="{0DDE5245-9EDB-46A3-1F2A-4501E08E448E}"/>
+            </a:ext>
+          </a:extLst>
+        </p:cNvPr>
+        <p:cNvGrpSpPr/>
+        <p:nvPr/>
+      </p:nvGrpSpPr>
+      <p:grpSpPr>
+        <a:xfrm>
+          <a:off x="0" y="0"/>
+          <a:ext cx="0" cy="0"/>
+          <a:chOff x="0" y="0"/>
+          <a:chExt cx="0" cy="0"/>
+        </a:xfrm>
+      </p:grpSpPr>
+      <p:sp>
+        <p:nvSpPr>
+          <p:cNvPr id="4" name="슬라이드 번호 개체 틀 3">
+            <a:extLst>
+              <a:ext uri="{FF2B5EF4-FFF2-40B4-BE49-F238E27FC236}">
+                <a16:creationId xmlns:a16="http://schemas.microsoft.com/office/drawing/2014/main" id="{78188EE8-FE27-FA83-E7F6-84D649D4DECD}"/>
+              </a:ext>
+            </a:extLst>
+          </p:cNvPr>
+          <p:cNvSpPr>
+            <a:spLocks noGrp="1"/>
+          </p:cNvSpPr>
+          <p:nvPr>
+            <p:ph type="sldNum" sz="quarter" idx="12"/>
+          </p:nvPr>
+        </p:nvSpPr>
+        <p:spPr>
+          <a:xfrm>
+            <a:off x="10514011" y="6036261"/>
+            <a:ext cx="753545" cy="365125"/>
+          </a:xfrm>
+        </p:spPr>
+        <p:txBody>
+          <a:bodyPr/>
+          <a:lstStyle/>
+          <a:p>
+            <a:fld id="{D57F1E4F-1CFF-5643-939E-217C01CDF565}" type="slidenum">
+              <a:rPr lang="en-US" smtClean="0"/>
+              <a:pPr/>
+              <a:t>10</a:t>
+            </a:fld>
+            <a:endParaRPr lang="en-US" dirty="0"/>
+          </a:p>
+        </p:txBody>
+      </p:sp>
+      <p:sp>
+        <p:nvSpPr>
+          <p:cNvPr id="3" name="제목 1">
+            <a:extLst>
+              <a:ext uri="{FF2B5EF4-FFF2-40B4-BE49-F238E27FC236}">
+                <a16:creationId xmlns:a16="http://schemas.microsoft.com/office/drawing/2014/main" id="{08DB553A-0412-FD51-E0DB-FBD53447FA10}"/>
+              </a:ext>
+            </a:extLst>
+          </p:cNvPr>
+          <p:cNvSpPr txBox="1">
+            <a:spLocks/>
+          </p:cNvSpPr>
+          <p:nvPr/>
+        </p:nvSpPr>
+        <p:spPr>
+          <a:xfrm>
+            <a:off x="475645" y="481983"/>
+            <a:ext cx="10353762" cy="766439"/>
+          </a:xfrm>
+          <a:prstGeom prst="rect">
+            <a:avLst/>
+          </a:prstGeom>
+        </p:spPr>
+        <p:txBody>
+          <a:bodyPr vert="horz" lIns="91440" tIns="45720" rIns="91440" bIns="45720" rtlCol="0" anchor="ctr">
+            <a:normAutofit/>
+          </a:bodyPr>
+          <a:lstStyle>
+            <a:lvl1pPr algn="ctr" defTabSz="914400" rtl="0" eaLnBrk="1" latinLnBrk="1" hangingPunct="1">
+              <a:lnSpc>
+                <a:spcPct val="90000"/>
+              </a:lnSpc>
+              <a:spcBef>
+                <a:spcPct val="0"/>
+              </a:spcBef>
+              <a:buNone/>
+              <a:defRPr sz="3200" kern="1200" cap="all" baseline="0">
+                <a:solidFill>
+                  <a:schemeClr val="tx1"/>
+                </a:solidFill>
+                <a:effectLst/>
+                <a:latin typeface="Batang" panose="02030600000101010101" pitchFamily="18" charset="-127"/>
+                <a:ea typeface="Batang" panose="02030600000101010101" pitchFamily="18" charset="-127"/>
+                <a:cs typeface="+mj-cs"/>
+              </a:defRPr>
+            </a:lvl1pPr>
+          </a:lstStyle>
+          <a:p>
+            <a:pPr algn="l"/>
+            <a:r>
+              <a:rPr lang="en-US" altLang="ko-KR" sz="2800" cap="none" dirty="0">
+                <a:solidFill>
+                  <a:schemeClr val="bg2">
+                    <a:lumMod val="25000"/>
+                  </a:schemeClr>
+                </a:solidFill>
+                <a:latin typeface="D2Coding" panose="020B0609020101020101" pitchFamily="49" charset="-127"/>
+                <a:ea typeface="D2Coding" panose="020B0609020101020101" pitchFamily="49" charset="-127"/>
+                <a:cs typeface="Segoe UI Light" panose="020B0502040204020203" pitchFamily="34" charset="0"/>
+              </a:rPr>
+              <a:t>Query Transformation </a:t>
+            </a:r>
+            <a:endParaRPr lang="ko-KR" altLang="en-US" sz="2800" cap="none" dirty="0">
+              <a:solidFill>
+                <a:schemeClr val="bg2">
+                  <a:lumMod val="25000"/>
+                </a:schemeClr>
+              </a:solidFill>
+              <a:latin typeface="D2Coding" panose="020B0609020101020101" pitchFamily="49" charset="-127"/>
+              <a:ea typeface="D2Coding" panose="020B0609020101020101" pitchFamily="49" charset="-127"/>
+              <a:cs typeface="Segoe UI Light" panose="020B0502040204020203" pitchFamily="34" charset="0"/>
+            </a:endParaRPr>
+          </a:p>
+        </p:txBody>
+      </p:sp>
+      <p:sp>
+        <p:nvSpPr>
+          <p:cNvPr id="5" name="TextBox 4">
+            <a:extLst>
+              <a:ext uri="{FF2B5EF4-FFF2-40B4-BE49-F238E27FC236}">
+                <a16:creationId xmlns:a16="http://schemas.microsoft.com/office/drawing/2014/main" id="{A66CD26D-1BF6-C93E-CACA-6F5B48C79395}"/>
+              </a:ext>
+            </a:extLst>
+          </p:cNvPr>
+          <p:cNvSpPr txBox="1"/>
+          <p:nvPr/>
+        </p:nvSpPr>
+        <p:spPr>
+          <a:xfrm>
+            <a:off x="542320" y="1575886"/>
+            <a:ext cx="10925780" cy="4163319"/>
+          </a:xfrm>
+          <a:prstGeom prst="rect">
+            <a:avLst/>
+          </a:prstGeom>
+          <a:noFill/>
+        </p:spPr>
+        <p:txBody>
+          <a:bodyPr wrap="square">
+            <a:spAutoFit/>
+          </a:bodyPr>
+          <a:lstStyle/>
+          <a:p>
+            <a:pPr marL="285750" indent="-285750">
+              <a:lnSpc>
+                <a:spcPct val="150000"/>
+              </a:lnSpc>
+              <a:buFont typeface="Wingdings" panose="05000000000000000000" pitchFamily="2" charset="2"/>
+              <a:buChar char="v"/>
+            </a:pPr>
+            <a:r>
+              <a:rPr lang="en-US" altLang="ko-KR" b="1" dirty="0">
+                <a:latin typeface="D2Coding" panose="020B0609020101020101" pitchFamily="49" charset="-127"/>
+                <a:ea typeface="D2Coding" panose="020B0609020101020101" pitchFamily="49" charset="-127"/>
+              </a:rPr>
+              <a:t>Rewrite-Retrieve-Read</a:t>
+            </a:r>
+          </a:p>
+          <a:p>
+            <a:pPr marL="742950" lvl="1" indent="-285750">
+              <a:lnSpc>
+                <a:spcPct val="150000"/>
+              </a:lnSpc>
+              <a:buFont typeface="Wingdings" panose="05000000000000000000" pitchFamily="2" charset="2"/>
+              <a:buChar char="v"/>
+            </a:pPr>
+            <a:r>
+              <a:rPr lang="ko-KR" altLang="en-US" sz="1600" dirty="0">
+                <a:latin typeface="D2Coding" panose="020B0609020101020101" pitchFamily="49" charset="-127"/>
+                <a:ea typeface="D2Coding" panose="020B0609020101020101" pitchFamily="49" charset="-127"/>
+              </a:rPr>
+              <a:t>사용자의 </a:t>
+            </a:r>
+            <a:r>
+              <a:rPr lang="en-US" altLang="ko-KR" sz="1600" dirty="0">
+                <a:latin typeface="D2Coding" panose="020B0609020101020101" pitchFamily="49" charset="-127"/>
+                <a:ea typeface="D2Coding" panose="020B0609020101020101" pitchFamily="49" charset="-127"/>
+              </a:rPr>
+              <a:t>Query</a:t>
+            </a:r>
+            <a:r>
+              <a:rPr lang="ko-KR" altLang="en-US" sz="1600" dirty="0">
+                <a:latin typeface="D2Coding" panose="020B0609020101020101" pitchFamily="49" charset="-127"/>
+                <a:ea typeface="D2Coding" panose="020B0609020101020101" pitchFamily="49" charset="-127"/>
+              </a:rPr>
+              <a:t>를 </a:t>
+            </a:r>
+            <a:r>
+              <a:rPr lang="en-US" altLang="ko-KR" sz="1600" dirty="0">
+                <a:latin typeface="D2Coding" panose="020B0609020101020101" pitchFamily="49" charset="-127"/>
+                <a:ea typeface="D2Coding" panose="020B0609020101020101" pitchFamily="49" charset="-127"/>
+              </a:rPr>
+              <a:t>LLM</a:t>
+            </a:r>
+            <a:r>
+              <a:rPr lang="ko-KR" altLang="en-US" sz="1600" dirty="0">
+                <a:latin typeface="D2Coding" panose="020B0609020101020101" pitchFamily="49" charset="-127"/>
+                <a:ea typeface="D2Coding" panose="020B0609020101020101" pitchFamily="49" charset="-127"/>
+              </a:rPr>
+              <a:t>이 </a:t>
+            </a:r>
+            <a:r>
+              <a:rPr lang="en-US" altLang="ko-KR" sz="1600" dirty="0">
+                <a:latin typeface="D2Coding" panose="020B0609020101020101" pitchFamily="49" charset="-127"/>
+                <a:ea typeface="D2Coding" panose="020B0609020101020101" pitchFamily="49" charset="-127"/>
+              </a:rPr>
+              <a:t>1</a:t>
+            </a:r>
+            <a:r>
+              <a:rPr lang="ko-KR" altLang="en-US" sz="1600" dirty="0">
+                <a:latin typeface="D2Coding" panose="020B0609020101020101" pitchFamily="49" charset="-127"/>
+                <a:ea typeface="D2Coding" panose="020B0609020101020101" pitchFamily="49" charset="-127"/>
+              </a:rPr>
+              <a:t>차</a:t>
+            </a:r>
+            <a:r>
+              <a:rPr lang="en-US" altLang="ko-KR" sz="1600" dirty="0">
+                <a:latin typeface="D2Coding" panose="020B0609020101020101" pitchFamily="49" charset="-127"/>
+                <a:ea typeface="D2Coding" panose="020B0609020101020101" pitchFamily="49" charset="-127"/>
+              </a:rPr>
+              <a:t>, 2</a:t>
+            </a:r>
+            <a:r>
+              <a:rPr lang="ko-KR" altLang="en-US" sz="1600" dirty="0">
+                <a:latin typeface="D2Coding" panose="020B0609020101020101" pitchFamily="49" charset="-127"/>
+                <a:ea typeface="D2Coding" panose="020B0609020101020101" pitchFamily="49" charset="-127"/>
+              </a:rPr>
+              <a:t>차</a:t>
+            </a:r>
+            <a:r>
+              <a:rPr lang="en-US" altLang="ko-KR" sz="1600" dirty="0">
+                <a:latin typeface="D2Coding" panose="020B0609020101020101" pitchFamily="49" charset="-127"/>
+                <a:ea typeface="D2Coding" panose="020B0609020101020101" pitchFamily="49" charset="-127"/>
+              </a:rPr>
+              <a:t>,.. </a:t>
+            </a:r>
+            <a:r>
+              <a:rPr lang="ko-KR" altLang="en-US" sz="1600" dirty="0">
+                <a:latin typeface="D2Coding" panose="020B0609020101020101" pitchFamily="49" charset="-127"/>
+                <a:ea typeface="D2Coding" panose="020B0609020101020101" pitchFamily="49" charset="-127"/>
+              </a:rPr>
+              <a:t>로 변환한 후 벡터스토어에서 조각 문서를 찾아 내기</a:t>
+            </a:r>
+            <a:endParaRPr lang="en-US" altLang="ko-KR" sz="1600" dirty="0">
+              <a:latin typeface="D2Coding" panose="020B0609020101020101" pitchFamily="49" charset="-127"/>
+              <a:ea typeface="D2Coding" panose="020B0609020101020101" pitchFamily="49" charset="-127"/>
+            </a:endParaRPr>
+          </a:p>
+          <a:p>
+            <a:pPr marL="742950" lvl="1" indent="-285750">
+              <a:lnSpc>
+                <a:spcPct val="150000"/>
+              </a:lnSpc>
+              <a:buFont typeface="Wingdings" panose="05000000000000000000" pitchFamily="2" charset="2"/>
+              <a:buChar char="v"/>
+            </a:pPr>
+            <a:endParaRPr lang="en-US" altLang="ko-KR" sz="900" dirty="0">
+              <a:latin typeface="D2Coding" panose="020B0609020101020101" pitchFamily="49" charset="-127"/>
+              <a:ea typeface="D2Coding" panose="020B0609020101020101" pitchFamily="49" charset="-127"/>
+            </a:endParaRPr>
+          </a:p>
+          <a:p>
+            <a:pPr marL="285750" indent="-285750">
+              <a:lnSpc>
+                <a:spcPct val="150000"/>
+              </a:lnSpc>
+              <a:buFont typeface="Wingdings" panose="05000000000000000000" pitchFamily="2" charset="2"/>
+              <a:buChar char="v"/>
+            </a:pPr>
+            <a:r>
+              <a:rPr lang="en-US" altLang="ko-KR" b="1" dirty="0">
+                <a:latin typeface="D2Coding" panose="020B0609020101020101" pitchFamily="49" charset="-127"/>
+                <a:ea typeface="D2Coding" panose="020B0609020101020101" pitchFamily="49" charset="-127"/>
+              </a:rPr>
+              <a:t>Multi-Query Retrieval</a:t>
+            </a:r>
+          </a:p>
+          <a:p>
+            <a:pPr marL="742950" lvl="1" indent="-285750">
+              <a:lnSpc>
+                <a:spcPct val="150000"/>
+              </a:lnSpc>
+              <a:buFont typeface="Wingdings" panose="05000000000000000000" pitchFamily="2" charset="2"/>
+              <a:buChar char="v"/>
+            </a:pPr>
+            <a:r>
+              <a:rPr lang="ko-KR" altLang="en-US" sz="1600" dirty="0">
+                <a:latin typeface="D2Coding" panose="020B0609020101020101" pitchFamily="49" charset="-127"/>
+                <a:ea typeface="D2Coding" panose="020B0609020101020101" pitchFamily="49" charset="-127"/>
+              </a:rPr>
+              <a:t>사용자의 </a:t>
+            </a:r>
+            <a:r>
+              <a:rPr lang="en-US" altLang="ko-KR" sz="1600" dirty="0">
+                <a:latin typeface="D2Coding" panose="020B0609020101020101" pitchFamily="49" charset="-127"/>
+                <a:ea typeface="D2Coding" panose="020B0609020101020101" pitchFamily="49" charset="-127"/>
+              </a:rPr>
+              <a:t>Query</a:t>
+            </a:r>
+            <a:r>
+              <a:rPr lang="ko-KR" altLang="en-US" sz="1600" dirty="0">
+                <a:latin typeface="D2Coding" panose="020B0609020101020101" pitchFamily="49" charset="-127"/>
+                <a:ea typeface="D2Coding" panose="020B0609020101020101" pitchFamily="49" charset="-127"/>
+              </a:rPr>
+              <a:t>를 </a:t>
+            </a:r>
+            <a:r>
+              <a:rPr lang="en-US" altLang="ko-KR" sz="1600" dirty="0">
+                <a:latin typeface="D2Coding" panose="020B0609020101020101" pitchFamily="49" charset="-127"/>
+                <a:ea typeface="D2Coding" panose="020B0609020101020101" pitchFamily="49" charset="-127"/>
+              </a:rPr>
+              <a:t>LLM</a:t>
+            </a:r>
+            <a:r>
+              <a:rPr lang="ko-KR" altLang="en-US" sz="1600" dirty="0">
+                <a:latin typeface="D2Coding" panose="020B0609020101020101" pitchFamily="49" charset="-127"/>
+                <a:ea typeface="D2Coding" panose="020B0609020101020101" pitchFamily="49" charset="-127"/>
+              </a:rPr>
+              <a:t>이 질문을 </a:t>
+            </a:r>
+            <a:r>
+              <a:rPr lang="en-US" altLang="ko-KR" sz="1600" dirty="0">
+                <a:latin typeface="D2Coding" panose="020B0609020101020101" pitchFamily="49" charset="-127"/>
+                <a:ea typeface="D2Coding" panose="020B0609020101020101" pitchFamily="49" charset="-127"/>
+              </a:rPr>
+              <a:t>3~4</a:t>
+            </a:r>
+            <a:r>
+              <a:rPr lang="ko-KR" altLang="en-US" sz="1600" dirty="0">
+                <a:latin typeface="D2Coding" panose="020B0609020101020101" pitchFamily="49" charset="-127"/>
+                <a:ea typeface="D2Coding" panose="020B0609020101020101" pitchFamily="49" charset="-127"/>
+              </a:rPr>
+              <a:t>개의 다른 표현으로 복제한 후 벡터스토어에서 조각 문서를 찾아 내기</a:t>
+            </a:r>
+            <a:endParaRPr lang="en-US" altLang="ko-KR" sz="1600" dirty="0">
+              <a:latin typeface="D2Coding" panose="020B0609020101020101" pitchFamily="49" charset="-127"/>
+              <a:ea typeface="D2Coding" panose="020B0609020101020101" pitchFamily="49" charset="-127"/>
+            </a:endParaRPr>
+          </a:p>
+          <a:p>
+            <a:pPr marL="742950" lvl="1" indent="-285750">
+              <a:lnSpc>
+                <a:spcPct val="150000"/>
+              </a:lnSpc>
+              <a:buFont typeface="Wingdings" panose="05000000000000000000" pitchFamily="2" charset="2"/>
+              <a:buChar char="v"/>
+            </a:pPr>
+            <a:endParaRPr lang="en-US" altLang="ko-KR" sz="800" dirty="0">
+              <a:latin typeface="D2Coding" panose="020B0609020101020101" pitchFamily="49" charset="-127"/>
+              <a:ea typeface="D2Coding" panose="020B0609020101020101" pitchFamily="49" charset="-127"/>
+            </a:endParaRPr>
+          </a:p>
+          <a:p>
+            <a:pPr marL="285750" indent="-285750">
+              <a:lnSpc>
+                <a:spcPct val="150000"/>
+              </a:lnSpc>
+              <a:buFont typeface="Wingdings" panose="05000000000000000000" pitchFamily="2" charset="2"/>
+              <a:buChar char="v"/>
+            </a:pPr>
+            <a:r>
+              <a:rPr lang="en-US" altLang="ko-KR" b="1" dirty="0">
+                <a:latin typeface="D2Coding" panose="020B0609020101020101" pitchFamily="49" charset="-127"/>
+                <a:ea typeface="D2Coding" panose="020B0609020101020101" pitchFamily="49" charset="-127"/>
+              </a:rPr>
+              <a:t>RAG-Fusion</a:t>
+            </a:r>
+          </a:p>
+          <a:p>
+            <a:pPr marL="742950" lvl="1" indent="-285750">
+              <a:lnSpc>
+                <a:spcPct val="150000"/>
+              </a:lnSpc>
+              <a:buFont typeface="Wingdings" panose="05000000000000000000" pitchFamily="2" charset="2"/>
+              <a:buChar char="v"/>
+            </a:pPr>
+            <a:r>
+              <a:rPr lang="en-US" altLang="ko-KR" sz="1600" dirty="0">
+                <a:latin typeface="D2Coding" panose="020B0609020101020101" pitchFamily="49" charset="-127"/>
+                <a:ea typeface="D2Coding" panose="020B0609020101020101" pitchFamily="49" charset="-127"/>
+              </a:rPr>
+              <a:t>Multi-Query Retrieval</a:t>
+            </a:r>
+            <a:r>
+              <a:rPr lang="ko-KR" altLang="en-US" sz="1600" dirty="0">
+                <a:latin typeface="D2Coding" panose="020B0609020101020101" pitchFamily="49" charset="-127"/>
+                <a:ea typeface="D2Coding" panose="020B0609020101020101" pitchFamily="49" charset="-127"/>
+              </a:rPr>
+              <a:t>에서 여러 개의 질문에서 도출된</a:t>
+            </a:r>
+            <a:r>
+              <a:rPr lang="en-US" altLang="ko-KR" sz="1600" dirty="0">
+                <a:latin typeface="D2Coding" panose="020B0609020101020101" pitchFamily="49" charset="-127"/>
+                <a:ea typeface="D2Coding" panose="020B0609020101020101" pitchFamily="49" charset="-127"/>
+              </a:rPr>
+              <a:t> </a:t>
+            </a:r>
+            <a:r>
+              <a:rPr lang="ko-KR" altLang="en-US" sz="1600" dirty="0">
+                <a:latin typeface="D2Coding" panose="020B0609020101020101" pitchFamily="49" charset="-127"/>
+                <a:ea typeface="D2Coding" panose="020B0609020101020101" pitchFamily="49" charset="-127"/>
+              </a:rPr>
+              <a:t>조각 문서에 랭킹을</a:t>
+            </a:r>
+            <a:r>
+              <a:rPr lang="en-US" altLang="ko-KR" sz="1600" dirty="0">
+                <a:latin typeface="D2Coding" panose="020B0609020101020101" pitchFamily="49" charset="-127"/>
+                <a:ea typeface="D2Coding" panose="020B0609020101020101" pitchFamily="49" charset="-127"/>
+              </a:rPr>
+              <a:t> </a:t>
+            </a:r>
+            <a:r>
+              <a:rPr lang="ko-KR" altLang="en-US" sz="1600" dirty="0">
+                <a:latin typeface="D2Coding" panose="020B0609020101020101" pitchFamily="49" charset="-127"/>
+                <a:ea typeface="D2Coding" panose="020B0609020101020101" pitchFamily="49" charset="-127"/>
+              </a:rPr>
+              <a:t>부여하여 찾아내기</a:t>
+            </a:r>
+            <a:endParaRPr lang="en-US" altLang="ko-KR" sz="1600" dirty="0">
+              <a:latin typeface="D2Coding" panose="020B0609020101020101" pitchFamily="49" charset="-127"/>
+              <a:ea typeface="D2Coding" panose="020B0609020101020101" pitchFamily="49" charset="-127"/>
+            </a:endParaRPr>
+          </a:p>
+          <a:p>
+            <a:pPr lvl="1">
+              <a:lnSpc>
+                <a:spcPct val="150000"/>
+              </a:lnSpc>
+            </a:pPr>
+            <a:endParaRPr lang="en-US" altLang="ko-KR" sz="900" dirty="0">
+              <a:latin typeface="D2Coding" panose="020B0609020101020101" pitchFamily="49" charset="-127"/>
+              <a:ea typeface="D2Coding" panose="020B0609020101020101" pitchFamily="49" charset="-127"/>
+            </a:endParaRPr>
+          </a:p>
+          <a:p>
+            <a:pPr marL="285750" indent="-285750">
+              <a:lnSpc>
+                <a:spcPct val="150000"/>
+              </a:lnSpc>
+              <a:buFont typeface="Wingdings" panose="05000000000000000000" pitchFamily="2" charset="2"/>
+              <a:buChar char="v"/>
+            </a:pPr>
+            <a:r>
+              <a:rPr lang="en-US" altLang="ko-KR" b="1" dirty="0">
+                <a:latin typeface="D2Coding" panose="020B0609020101020101" pitchFamily="49" charset="-127"/>
+                <a:ea typeface="D2Coding" panose="020B0609020101020101" pitchFamily="49" charset="-127"/>
+              </a:rPr>
+              <a:t>Hypothetical Document Embeddings</a:t>
+            </a:r>
+          </a:p>
+          <a:p>
+            <a:pPr marL="742950" lvl="1" indent="-285750">
+              <a:lnSpc>
+                <a:spcPct val="150000"/>
+              </a:lnSpc>
+              <a:buFont typeface="Wingdings" panose="05000000000000000000" pitchFamily="2" charset="2"/>
+              <a:buChar char="v"/>
+            </a:pPr>
+            <a:r>
+              <a:rPr lang="ko-KR" altLang="en-US" sz="1600" dirty="0">
+                <a:latin typeface="D2Coding" panose="020B0609020101020101" pitchFamily="49" charset="-127"/>
+                <a:ea typeface="D2Coding" panose="020B0609020101020101" pitchFamily="49" charset="-127"/>
+              </a:rPr>
+              <a:t>사용자의 질문을 기반으로 가상의 문서</a:t>
+            </a:r>
+            <a:r>
+              <a:rPr lang="en-US" altLang="ko-KR" sz="1600" dirty="0">
+                <a:latin typeface="D2Coding" panose="020B0609020101020101" pitchFamily="49" charset="-127"/>
+                <a:ea typeface="D2Coding" panose="020B0609020101020101" pitchFamily="49" charset="-127"/>
+              </a:rPr>
+              <a:t>(Hypothetical Document)</a:t>
+            </a:r>
+            <a:r>
+              <a:rPr lang="ko-KR" altLang="en-US" sz="1600" dirty="0">
+                <a:latin typeface="D2Coding" panose="020B0609020101020101" pitchFamily="49" charset="-127"/>
+                <a:ea typeface="D2Coding" panose="020B0609020101020101" pitchFamily="49" charset="-127"/>
+              </a:rPr>
+              <a:t>를 </a:t>
+            </a:r>
+            <a:r>
+              <a:rPr lang="en-US" altLang="ko-KR" sz="1600" dirty="0">
+                <a:latin typeface="D2Coding" panose="020B0609020101020101" pitchFamily="49" charset="-127"/>
+                <a:ea typeface="D2Coding" panose="020B0609020101020101" pitchFamily="49" charset="-127"/>
+              </a:rPr>
+              <a:t>LLM</a:t>
+            </a:r>
+            <a:r>
+              <a:rPr lang="ko-KR" altLang="en-US" sz="1600" dirty="0">
+                <a:latin typeface="D2Coding" panose="020B0609020101020101" pitchFamily="49" charset="-127"/>
+                <a:ea typeface="D2Coding" panose="020B0609020101020101" pitchFamily="49" charset="-127"/>
+              </a:rPr>
+              <a:t>이 생성하고</a:t>
+            </a:r>
+            <a:r>
+              <a:rPr lang="en-US" altLang="ko-KR" sz="1600" dirty="0">
+                <a:latin typeface="D2Coding" panose="020B0609020101020101" pitchFamily="49" charset="-127"/>
+                <a:ea typeface="D2Coding" panose="020B0609020101020101" pitchFamily="49" charset="-127"/>
+              </a:rPr>
+              <a:t>, </a:t>
+            </a:r>
+            <a:r>
+              <a:rPr lang="ko-KR" altLang="en-US" sz="1600" dirty="0">
+                <a:latin typeface="D2Coding" panose="020B0609020101020101" pitchFamily="49" charset="-127"/>
+                <a:ea typeface="D2Coding" panose="020B0609020101020101" pitchFamily="49" charset="-127"/>
+              </a:rPr>
+              <a:t>이 문서를 </a:t>
+            </a:r>
+            <a:r>
+              <a:rPr lang="ko-KR" altLang="en-US" sz="1600" dirty="0" err="1">
+                <a:latin typeface="D2Coding" panose="020B0609020101020101" pitchFamily="49" charset="-127"/>
+                <a:ea typeface="D2Coding" panose="020B0609020101020101" pitchFamily="49" charset="-127"/>
+              </a:rPr>
+              <a:t>임베딩하여</a:t>
+            </a:r>
+            <a:r>
+              <a:rPr lang="en-US" altLang="ko-KR" sz="1600" dirty="0">
+                <a:latin typeface="D2Coding" panose="020B0609020101020101" pitchFamily="49" charset="-127"/>
+                <a:ea typeface="D2Coding" panose="020B0609020101020101" pitchFamily="49" charset="-127"/>
+              </a:rPr>
+              <a:t>, </a:t>
+            </a:r>
+            <a:r>
+              <a:rPr lang="ko-KR" altLang="en-US" sz="1600" dirty="0">
+                <a:latin typeface="D2Coding" panose="020B0609020101020101" pitchFamily="49" charset="-127"/>
+                <a:ea typeface="D2Coding" panose="020B0609020101020101" pitchFamily="49" charset="-127"/>
+              </a:rPr>
+              <a:t>벡터 유사도를 바탕으로 관련 문서를 검색하는 방식</a:t>
+            </a:r>
+            <a:endParaRPr lang="en-US" altLang="ko-KR" sz="1600" dirty="0">
+              <a:latin typeface="D2Coding" panose="020B0609020101020101" pitchFamily="49" charset="-127"/>
+              <a:ea typeface="D2Coding" panose="020B0609020101020101" pitchFamily="49" charset="-127"/>
+            </a:endParaRPr>
+          </a:p>
+        </p:txBody>
+      </p:sp>
+    </p:spTree>
+    <p:extLst>
+      <p:ext uri="{BB962C8B-B14F-4D97-AF65-F5344CB8AC3E}">
+        <p14:creationId xmlns:p14="http://schemas.microsoft.com/office/powerpoint/2010/main" val="1432651993"/>
+      </p:ext>
+    </p:extLst>
+  </p:cSld>
+  <p:clrMapOvr>
+    <a:masterClrMapping/>
+  </p:clrMapOvr>
+</p:sld>
+</file>
+
+<file path=ppt/slides/slide11.xml><?xml version="1.0" encoding="utf-8"?>
+<p:sld xmlns:a="http://schemas.openxmlformats.org/drawingml/2006/main" xmlns:r="http://schemas.openxmlformats.org/officeDocument/2006/relationships" xmlns:p="http://schemas.openxmlformats.org/presentationml/2006/main">
+  <p:cSld>
+    <p:spTree>
+      <p:nvGrpSpPr>
+        <p:cNvPr id="1" name="">
+          <a:extLst>
+            <a:ext uri="{FF2B5EF4-FFF2-40B4-BE49-F238E27FC236}">
+              <a16:creationId xmlns:a16="http://schemas.microsoft.com/office/drawing/2014/main" id="{93F6F4E3-E67C-9BAF-371A-93DFEECB9E74}"/>
+            </a:ext>
+          </a:extLst>
+        </p:cNvPr>
+        <p:cNvGrpSpPr/>
+        <p:nvPr/>
+      </p:nvGrpSpPr>
+      <p:grpSpPr>
+        <a:xfrm>
+          <a:off x="0" y="0"/>
+          <a:ext cx="0" cy="0"/>
+          <a:chOff x="0" y="0"/>
+          <a:chExt cx="0" cy="0"/>
+        </a:xfrm>
+      </p:grpSpPr>
+      <p:sp>
+        <p:nvSpPr>
+          <p:cNvPr id="4" name="슬라이드 번호 개체 틀 3">
+            <a:extLst>
+              <a:ext uri="{FF2B5EF4-FFF2-40B4-BE49-F238E27FC236}">
+                <a16:creationId xmlns:a16="http://schemas.microsoft.com/office/drawing/2014/main" id="{BE06B752-0047-4A9A-D6ED-EE1C0D467FE9}"/>
+              </a:ext>
+            </a:extLst>
+          </p:cNvPr>
+          <p:cNvSpPr>
+            <a:spLocks noGrp="1"/>
+          </p:cNvSpPr>
+          <p:nvPr>
+            <p:ph type="sldNum" sz="quarter" idx="12"/>
+          </p:nvPr>
+        </p:nvSpPr>
+        <p:spPr>
+          <a:xfrm>
+            <a:off x="10514011" y="6036261"/>
+            <a:ext cx="753545" cy="365125"/>
+          </a:xfrm>
+        </p:spPr>
+        <p:txBody>
+          <a:bodyPr/>
+          <a:lstStyle/>
+          <a:p>
+            <a:fld id="{D57F1E4F-1CFF-5643-939E-217C01CDF565}" type="slidenum">
+              <a:rPr lang="en-US" smtClean="0"/>
+              <a:pPr/>
+              <a:t>11</a:t>
+            </a:fld>
+            <a:endParaRPr lang="en-US" dirty="0"/>
+          </a:p>
+        </p:txBody>
+      </p:sp>
+      <p:sp>
+        <p:nvSpPr>
+          <p:cNvPr id="3" name="제목 1">
+            <a:extLst>
+              <a:ext uri="{FF2B5EF4-FFF2-40B4-BE49-F238E27FC236}">
+                <a16:creationId xmlns:a16="http://schemas.microsoft.com/office/drawing/2014/main" id="{97AD7CBA-31A4-09CB-B7B4-C0EE49E65DE0}"/>
+              </a:ext>
+            </a:extLst>
+          </p:cNvPr>
+          <p:cNvSpPr txBox="1">
+            <a:spLocks/>
+          </p:cNvSpPr>
+          <p:nvPr/>
+        </p:nvSpPr>
+        <p:spPr>
+          <a:xfrm>
+            <a:off x="475645" y="481983"/>
+            <a:ext cx="10353762" cy="766439"/>
+          </a:xfrm>
+          <a:prstGeom prst="rect">
+            <a:avLst/>
+          </a:prstGeom>
+        </p:spPr>
+        <p:txBody>
+          <a:bodyPr vert="horz" lIns="91440" tIns="45720" rIns="91440" bIns="45720" rtlCol="0" anchor="ctr">
+            <a:normAutofit/>
+          </a:bodyPr>
+          <a:lstStyle>
+            <a:lvl1pPr algn="ctr" defTabSz="914400" rtl="0" eaLnBrk="1" latinLnBrk="1" hangingPunct="1">
+              <a:lnSpc>
+                <a:spcPct val="90000"/>
+              </a:lnSpc>
+              <a:spcBef>
+                <a:spcPct val="0"/>
+              </a:spcBef>
+              <a:buNone/>
+              <a:defRPr sz="3200" kern="1200" cap="all" baseline="0">
+                <a:solidFill>
+                  <a:schemeClr val="tx1"/>
+                </a:solidFill>
+                <a:effectLst/>
+                <a:latin typeface="Batang" panose="02030600000101010101" pitchFamily="18" charset="-127"/>
+                <a:ea typeface="Batang" panose="02030600000101010101" pitchFamily="18" charset="-127"/>
+                <a:cs typeface="+mj-cs"/>
+              </a:defRPr>
+            </a:lvl1pPr>
+          </a:lstStyle>
+          <a:p>
+            <a:pPr algn="l"/>
+            <a:r>
+              <a:rPr lang="en-US" altLang="ko-KR" sz="2800" cap="none" dirty="0">
+                <a:solidFill>
+                  <a:schemeClr val="bg2">
+                    <a:lumMod val="25000"/>
+                  </a:schemeClr>
+                </a:solidFill>
+                <a:latin typeface="D2Coding" panose="020B0609020101020101" pitchFamily="49" charset="-127"/>
+                <a:ea typeface="D2Coding" panose="020B0609020101020101" pitchFamily="49" charset="-127"/>
+                <a:cs typeface="Segoe UI Light" panose="020B0502040204020203" pitchFamily="34" charset="0"/>
+              </a:rPr>
+              <a:t>Query Transformation </a:t>
+            </a:r>
+            <a:endParaRPr lang="ko-KR" altLang="en-US" sz="2800" cap="none" dirty="0">
+              <a:solidFill>
+                <a:schemeClr val="bg2">
+                  <a:lumMod val="25000"/>
+                </a:schemeClr>
+              </a:solidFill>
+              <a:latin typeface="D2Coding" panose="020B0609020101020101" pitchFamily="49" charset="-127"/>
+              <a:ea typeface="D2Coding" panose="020B0609020101020101" pitchFamily="49" charset="-127"/>
+              <a:cs typeface="Segoe UI Light" panose="020B0502040204020203" pitchFamily="34" charset="0"/>
+            </a:endParaRPr>
+          </a:p>
+        </p:txBody>
+      </p:sp>
+      <p:sp>
+        <p:nvSpPr>
+          <p:cNvPr id="5" name="TextBox 4">
+            <a:extLst>
+              <a:ext uri="{FF2B5EF4-FFF2-40B4-BE49-F238E27FC236}">
+                <a16:creationId xmlns:a16="http://schemas.microsoft.com/office/drawing/2014/main" id="{5A06B856-0E9C-4457-343E-665F75B83343}"/>
+              </a:ext>
+            </a:extLst>
+          </p:cNvPr>
+          <p:cNvSpPr txBox="1"/>
+          <p:nvPr/>
+        </p:nvSpPr>
+        <p:spPr>
+          <a:xfrm>
+            <a:off x="8077805" y="709111"/>
+            <a:ext cx="3600450" cy="369332"/>
+          </a:xfrm>
+          <a:prstGeom prst="rect">
+            <a:avLst/>
+          </a:prstGeom>
+          <a:noFill/>
+        </p:spPr>
+        <p:txBody>
+          <a:bodyPr wrap="square">
+            <a:spAutoFit/>
+          </a:bodyPr>
+          <a:lstStyle/>
+          <a:p>
+            <a:pPr algn="r"/>
+            <a:r>
+              <a:rPr lang="en-US" altLang="ko-KR" dirty="0">
+                <a:latin typeface="D2Coding" panose="020B0609020101020101" pitchFamily="49" charset="-127"/>
+                <a:ea typeface="D2Coding" panose="020B0609020101020101" pitchFamily="49" charset="-127"/>
+              </a:rPr>
+              <a:t>Multi-Query Retrieval</a:t>
+            </a:r>
+          </a:p>
+        </p:txBody>
+      </p:sp>
+      <p:pic>
+        <p:nvPicPr>
+          <p:cNvPr id="8" name="그림 7">
+            <a:extLst>
+              <a:ext uri="{FF2B5EF4-FFF2-40B4-BE49-F238E27FC236}">
+                <a16:creationId xmlns:a16="http://schemas.microsoft.com/office/drawing/2014/main" id="{7F518FF1-57CE-0E5F-CF06-80C8F9A48432}"/>
+              </a:ext>
+            </a:extLst>
+          </p:cNvPr>
+          <p:cNvPicPr>
+            <a:picLocks noChangeAspect="1"/>
+          </p:cNvPicPr>
+          <p:nvPr/>
+        </p:nvPicPr>
+        <p:blipFill>
+          <a:blip r:embed="rId2"/>
+          <a:stretch>
+            <a:fillRect/>
+          </a:stretch>
+        </p:blipFill>
+        <p:spPr>
+          <a:xfrm>
+            <a:off x="1959881" y="2469458"/>
+            <a:ext cx="7773074" cy="3749365"/>
+          </a:xfrm>
+          <a:prstGeom prst="rect">
+            <a:avLst/>
+          </a:prstGeom>
+        </p:spPr>
+      </p:pic>
+      <p:sp>
+        <p:nvSpPr>
+          <p:cNvPr id="10" name="TextBox 9">
+            <a:extLst>
+              <a:ext uri="{FF2B5EF4-FFF2-40B4-BE49-F238E27FC236}">
+                <a16:creationId xmlns:a16="http://schemas.microsoft.com/office/drawing/2014/main" id="{A7E57281-8E6A-D274-A120-7ACFD40C1A10}"/>
+              </a:ext>
+            </a:extLst>
+          </p:cNvPr>
+          <p:cNvSpPr txBox="1"/>
+          <p:nvPr/>
+        </p:nvSpPr>
+        <p:spPr>
+          <a:xfrm>
+            <a:off x="104775" y="1301686"/>
+            <a:ext cx="11483286" cy="793166"/>
+          </a:xfrm>
+          <a:prstGeom prst="rect">
+            <a:avLst/>
+          </a:prstGeom>
+          <a:noFill/>
+        </p:spPr>
+        <p:txBody>
+          <a:bodyPr wrap="square">
+            <a:spAutoFit/>
+          </a:bodyPr>
+          <a:lstStyle/>
+          <a:p>
+            <a:pPr marL="742950" lvl="1" indent="-285750">
+              <a:lnSpc>
+                <a:spcPct val="150000"/>
+              </a:lnSpc>
+              <a:buFont typeface="Wingdings" panose="05000000000000000000" pitchFamily="2" charset="2"/>
+              <a:buChar char="v"/>
+            </a:pPr>
+            <a:r>
+              <a:rPr lang="en-US" altLang="ko-KR" sz="1600" dirty="0">
+                <a:latin typeface="D2Coding" panose="020B0609020101020101" pitchFamily="49" charset="-127"/>
+                <a:ea typeface="D2Coding" panose="020B0609020101020101" pitchFamily="49" charset="-127"/>
+              </a:rPr>
+              <a:t>Multi-Query Retrieval</a:t>
+            </a:r>
+            <a:r>
+              <a:rPr lang="ko-KR" altLang="en-US" sz="1600" dirty="0">
+                <a:latin typeface="D2Coding" panose="020B0609020101020101" pitchFamily="49" charset="-127"/>
+                <a:ea typeface="D2Coding" panose="020B0609020101020101" pitchFamily="49" charset="-127"/>
+              </a:rPr>
+              <a:t>는</a:t>
+            </a:r>
+            <a:r>
+              <a:rPr lang="en-US" altLang="ko-KR" sz="1600" dirty="0">
+                <a:latin typeface="D2Coding" panose="020B0609020101020101" pitchFamily="49" charset="-127"/>
+                <a:ea typeface="D2Coding" panose="020B0609020101020101" pitchFamily="49" charset="-127"/>
+              </a:rPr>
+              <a:t> </a:t>
+            </a:r>
+            <a:r>
+              <a:rPr lang="ko-KR" altLang="en-US" sz="1600" dirty="0">
+                <a:latin typeface="D2Coding" panose="020B0609020101020101" pitchFamily="49" charset="-127"/>
+                <a:ea typeface="D2Coding" panose="020B0609020101020101" pitchFamily="49" charset="-127"/>
+              </a:rPr>
+              <a:t>사용자의 </a:t>
+            </a:r>
+            <a:r>
+              <a:rPr lang="en-US" altLang="ko-KR" sz="1600" dirty="0">
+                <a:latin typeface="D2Coding" panose="020B0609020101020101" pitchFamily="49" charset="-127"/>
+                <a:ea typeface="D2Coding" panose="020B0609020101020101" pitchFamily="49" charset="-127"/>
+              </a:rPr>
+              <a:t>Query</a:t>
+            </a:r>
+            <a:r>
+              <a:rPr lang="ko-KR" altLang="en-US" sz="1600" dirty="0">
+                <a:latin typeface="D2Coding" panose="020B0609020101020101" pitchFamily="49" charset="-127"/>
+                <a:ea typeface="D2Coding" panose="020B0609020101020101" pitchFamily="49" charset="-127"/>
+              </a:rPr>
+              <a:t>를 </a:t>
+            </a:r>
+            <a:r>
+              <a:rPr lang="en-US" altLang="ko-KR" sz="1600" dirty="0">
+                <a:latin typeface="D2Coding" panose="020B0609020101020101" pitchFamily="49" charset="-127"/>
+                <a:ea typeface="D2Coding" panose="020B0609020101020101" pitchFamily="49" charset="-127"/>
+              </a:rPr>
+              <a:t>LLM</a:t>
+            </a:r>
+            <a:r>
+              <a:rPr lang="ko-KR" altLang="en-US" sz="1600" dirty="0">
+                <a:latin typeface="D2Coding" panose="020B0609020101020101" pitchFamily="49" charset="-127"/>
+                <a:ea typeface="D2Coding" panose="020B0609020101020101" pitchFamily="49" charset="-127"/>
+              </a:rPr>
+              <a:t>이 질문을 </a:t>
+            </a:r>
+            <a:r>
+              <a:rPr lang="en-US" altLang="ko-KR" sz="1600" dirty="0">
+                <a:latin typeface="D2Coding" panose="020B0609020101020101" pitchFamily="49" charset="-127"/>
+                <a:ea typeface="D2Coding" panose="020B0609020101020101" pitchFamily="49" charset="-127"/>
+              </a:rPr>
+              <a:t>3~4</a:t>
+            </a:r>
+            <a:r>
+              <a:rPr lang="ko-KR" altLang="en-US" sz="1600" dirty="0">
+                <a:latin typeface="D2Coding" panose="020B0609020101020101" pitchFamily="49" charset="-127"/>
+                <a:ea typeface="D2Coding" panose="020B0609020101020101" pitchFamily="49" charset="-127"/>
+              </a:rPr>
+              <a:t>개의 다른 표현으로 복제한 후 벡터스토어에서 조각 문서를 찾아 내기</a:t>
+            </a:r>
+            <a:endParaRPr lang="en-US" altLang="ko-KR" sz="1600" dirty="0">
+              <a:latin typeface="D2Coding" panose="020B0609020101020101" pitchFamily="49" charset="-127"/>
+              <a:ea typeface="D2Coding" panose="020B0609020101020101" pitchFamily="49" charset="-127"/>
+            </a:endParaRPr>
+          </a:p>
+        </p:txBody>
+      </p:sp>
+    </p:spTree>
+    <p:extLst>
+      <p:ext uri="{BB962C8B-B14F-4D97-AF65-F5344CB8AC3E}">
+        <p14:creationId xmlns:p14="http://schemas.microsoft.com/office/powerpoint/2010/main" val="3177427818"/>
+      </p:ext>
+    </p:extLst>
+  </p:cSld>
+  <p:clrMapOvr>
+    <a:masterClrMapping/>
+  </p:clrMapOvr>
+</p:sld>
+</file>
+
+<file path=ppt/slides/slide12.xml><?xml version="1.0" encoding="utf-8"?>
+<p:sld xmlns:a="http://schemas.openxmlformats.org/drawingml/2006/main" xmlns:r="http://schemas.openxmlformats.org/officeDocument/2006/relationships" xmlns:p="http://schemas.openxmlformats.org/presentationml/2006/main">
+  <p:cSld>
+    <p:spTree>
+      <p:nvGrpSpPr>
+        <p:cNvPr id="1" name="">
+          <a:extLst>
+            <a:ext uri="{FF2B5EF4-FFF2-40B4-BE49-F238E27FC236}">
+              <a16:creationId xmlns:a16="http://schemas.microsoft.com/office/drawing/2014/main" id="{14E2C52D-50D8-DE43-C625-4ED19DE46D44}"/>
+            </a:ext>
+          </a:extLst>
+        </p:cNvPr>
+        <p:cNvGrpSpPr/>
+        <p:nvPr/>
+      </p:nvGrpSpPr>
+      <p:grpSpPr>
+        <a:xfrm>
+          <a:off x="0" y="0"/>
+          <a:ext cx="0" cy="0"/>
+          <a:chOff x="0" y="0"/>
+          <a:chExt cx="0" cy="0"/>
+        </a:xfrm>
+      </p:grpSpPr>
+      <p:sp>
+        <p:nvSpPr>
+          <p:cNvPr id="4" name="슬라이드 번호 개체 틀 3">
+            <a:extLst>
+              <a:ext uri="{FF2B5EF4-FFF2-40B4-BE49-F238E27FC236}">
+                <a16:creationId xmlns:a16="http://schemas.microsoft.com/office/drawing/2014/main" id="{1FEF8195-F95A-ED5B-2D6B-59CAE325F203}"/>
+              </a:ext>
+            </a:extLst>
+          </p:cNvPr>
+          <p:cNvSpPr>
+            <a:spLocks noGrp="1"/>
+          </p:cNvSpPr>
+          <p:nvPr>
+            <p:ph type="sldNum" sz="quarter" idx="12"/>
+          </p:nvPr>
+        </p:nvSpPr>
+        <p:spPr>
+          <a:xfrm>
+            <a:off x="10514011" y="6036261"/>
+            <a:ext cx="753545" cy="365125"/>
+          </a:xfrm>
+        </p:spPr>
+        <p:txBody>
+          <a:bodyPr/>
+          <a:lstStyle/>
+          <a:p>
+            <a:fld id="{D57F1E4F-1CFF-5643-939E-217C01CDF565}" type="slidenum">
+              <a:rPr lang="en-US" smtClean="0"/>
+              <a:pPr/>
+              <a:t>12</a:t>
+            </a:fld>
+            <a:endParaRPr lang="en-US" dirty="0"/>
+          </a:p>
+        </p:txBody>
+      </p:sp>
+      <p:sp>
+        <p:nvSpPr>
+          <p:cNvPr id="3" name="제목 1">
+            <a:extLst>
+              <a:ext uri="{FF2B5EF4-FFF2-40B4-BE49-F238E27FC236}">
+                <a16:creationId xmlns:a16="http://schemas.microsoft.com/office/drawing/2014/main" id="{B305C63E-AA27-C44C-1DAC-C4E541FCFCCC}"/>
+              </a:ext>
+            </a:extLst>
+          </p:cNvPr>
+          <p:cNvSpPr txBox="1">
+            <a:spLocks/>
+          </p:cNvSpPr>
+          <p:nvPr/>
+        </p:nvSpPr>
+        <p:spPr>
+          <a:xfrm>
+            <a:off x="475645" y="481983"/>
+            <a:ext cx="10353762" cy="766439"/>
+          </a:xfrm>
+          <a:prstGeom prst="rect">
+            <a:avLst/>
+          </a:prstGeom>
+        </p:spPr>
+        <p:txBody>
+          <a:bodyPr vert="horz" lIns="91440" tIns="45720" rIns="91440" bIns="45720" rtlCol="0" anchor="ctr">
+            <a:normAutofit/>
+          </a:bodyPr>
+          <a:lstStyle>
+            <a:lvl1pPr algn="ctr" defTabSz="914400" rtl="0" eaLnBrk="1" latinLnBrk="1" hangingPunct="1">
+              <a:lnSpc>
+                <a:spcPct val="90000"/>
+              </a:lnSpc>
+              <a:spcBef>
+                <a:spcPct val="0"/>
+              </a:spcBef>
+              <a:buNone/>
+              <a:defRPr sz="3200" kern="1200" cap="all" baseline="0">
+                <a:solidFill>
+                  <a:schemeClr val="tx1"/>
+                </a:solidFill>
+                <a:effectLst/>
+                <a:latin typeface="Batang" panose="02030600000101010101" pitchFamily="18" charset="-127"/>
+                <a:ea typeface="Batang" panose="02030600000101010101" pitchFamily="18" charset="-127"/>
+                <a:cs typeface="+mj-cs"/>
+              </a:defRPr>
+            </a:lvl1pPr>
+          </a:lstStyle>
+          <a:p>
+            <a:pPr algn="l"/>
+            <a:r>
+              <a:rPr lang="en-US" altLang="ko-KR" sz="2800" cap="none" dirty="0">
+                <a:solidFill>
+                  <a:schemeClr val="bg2">
+                    <a:lumMod val="25000"/>
+                  </a:schemeClr>
+                </a:solidFill>
+                <a:latin typeface="D2Coding" panose="020B0609020101020101" pitchFamily="49" charset="-127"/>
+                <a:ea typeface="D2Coding" panose="020B0609020101020101" pitchFamily="49" charset="-127"/>
+                <a:cs typeface="Segoe UI Light" panose="020B0502040204020203" pitchFamily="34" charset="0"/>
+              </a:rPr>
+              <a:t>Query Transformation </a:t>
+            </a:r>
+            <a:endParaRPr lang="ko-KR" altLang="en-US" sz="2800" cap="none" dirty="0">
+              <a:solidFill>
+                <a:schemeClr val="bg2">
+                  <a:lumMod val="25000"/>
+                </a:schemeClr>
+              </a:solidFill>
+              <a:latin typeface="D2Coding" panose="020B0609020101020101" pitchFamily="49" charset="-127"/>
+              <a:ea typeface="D2Coding" panose="020B0609020101020101" pitchFamily="49" charset="-127"/>
+              <a:cs typeface="Segoe UI Light" panose="020B0502040204020203" pitchFamily="34" charset="0"/>
+            </a:endParaRPr>
+          </a:p>
+        </p:txBody>
+      </p:sp>
+      <p:sp>
+        <p:nvSpPr>
+          <p:cNvPr id="5" name="TextBox 4">
+            <a:extLst>
+              <a:ext uri="{FF2B5EF4-FFF2-40B4-BE49-F238E27FC236}">
+                <a16:creationId xmlns:a16="http://schemas.microsoft.com/office/drawing/2014/main" id="{B4E05CA3-677A-03A6-7E7E-0C6E4CC16359}"/>
+              </a:ext>
+            </a:extLst>
+          </p:cNvPr>
+          <p:cNvSpPr txBox="1"/>
+          <p:nvPr/>
+        </p:nvSpPr>
+        <p:spPr>
+          <a:xfrm>
+            <a:off x="8077805" y="709111"/>
+            <a:ext cx="3600450" cy="369332"/>
+          </a:xfrm>
+          <a:prstGeom prst="rect">
+            <a:avLst/>
+          </a:prstGeom>
+          <a:noFill/>
+        </p:spPr>
+        <p:txBody>
+          <a:bodyPr wrap="square">
+            <a:spAutoFit/>
+          </a:bodyPr>
+          <a:lstStyle/>
+          <a:p>
+            <a:pPr algn="r"/>
+            <a:r>
+              <a:rPr lang="en-US" altLang="ko-KR" dirty="0">
+                <a:latin typeface="D2Coding" panose="020B0609020101020101" pitchFamily="49" charset="-127"/>
+                <a:ea typeface="D2Coding" panose="020B0609020101020101" pitchFamily="49" charset="-127"/>
+              </a:rPr>
+              <a:t>RAG-Fusion</a:t>
+            </a:r>
+          </a:p>
+        </p:txBody>
+      </p:sp>
+      <p:sp>
+        <p:nvSpPr>
+          <p:cNvPr id="10" name="TextBox 9">
+            <a:extLst>
+              <a:ext uri="{FF2B5EF4-FFF2-40B4-BE49-F238E27FC236}">
+                <a16:creationId xmlns:a16="http://schemas.microsoft.com/office/drawing/2014/main" id="{E519354A-E1BC-7136-D599-84F38A0036C6}"/>
+              </a:ext>
+            </a:extLst>
+          </p:cNvPr>
+          <p:cNvSpPr txBox="1"/>
+          <p:nvPr/>
+        </p:nvSpPr>
+        <p:spPr>
+          <a:xfrm>
+            <a:off x="104775" y="1235011"/>
+            <a:ext cx="11483286" cy="1203984"/>
+          </a:xfrm>
+          <a:prstGeom prst="rect">
+            <a:avLst/>
+          </a:prstGeom>
+          <a:noFill/>
+        </p:spPr>
+        <p:txBody>
+          <a:bodyPr wrap="square">
+            <a:spAutoFit/>
+          </a:bodyPr>
+          <a:lstStyle/>
+          <a:p>
+            <a:pPr marL="742950" lvl="1" indent="-285750">
+              <a:lnSpc>
+                <a:spcPct val="150000"/>
+              </a:lnSpc>
+              <a:buFont typeface="Wingdings" panose="05000000000000000000" pitchFamily="2" charset="2"/>
+              <a:buChar char="v"/>
+            </a:pPr>
+            <a:r>
+              <a:rPr lang="en-US" altLang="ko-KR" sz="1600" dirty="0">
+                <a:latin typeface="D2Coding" panose="020B0609020101020101" pitchFamily="49" charset="-127"/>
+                <a:ea typeface="D2Coding" panose="020B0609020101020101" pitchFamily="49" charset="-127"/>
+              </a:rPr>
+              <a:t>Multi-Query Retrieval</a:t>
+            </a:r>
+            <a:r>
+              <a:rPr lang="ko-KR" altLang="en-US" sz="1600" dirty="0">
+                <a:latin typeface="D2Coding" panose="020B0609020101020101" pitchFamily="49" charset="-127"/>
+                <a:ea typeface="D2Coding" panose="020B0609020101020101" pitchFamily="49" charset="-127"/>
+              </a:rPr>
+              <a:t>에서</a:t>
+            </a:r>
+            <a:r>
+              <a:rPr lang="en-US" altLang="ko-KR" sz="1600" dirty="0">
+                <a:latin typeface="D2Coding" panose="020B0609020101020101" pitchFamily="49" charset="-127"/>
+                <a:ea typeface="D2Coding" panose="020B0609020101020101" pitchFamily="49" charset="-127"/>
+              </a:rPr>
+              <a:t> </a:t>
+            </a:r>
+            <a:r>
+              <a:rPr lang="ko-KR" altLang="en-US" sz="1600" dirty="0">
+                <a:latin typeface="D2Coding" panose="020B0609020101020101" pitchFamily="49" charset="-127"/>
+                <a:ea typeface="D2Coding" panose="020B0609020101020101" pitchFamily="49" charset="-127"/>
+              </a:rPr>
+              <a:t>여러 개 </a:t>
+            </a:r>
+            <a:r>
+              <a:rPr lang="en-US" altLang="ko-KR" sz="1600" dirty="0">
+                <a:latin typeface="D2Coding" panose="020B0609020101020101" pitchFamily="49" charset="-127"/>
+                <a:ea typeface="D2Coding" panose="020B0609020101020101" pitchFamily="49" charset="-127"/>
+              </a:rPr>
+              <a:t>Query</a:t>
+            </a:r>
+            <a:r>
+              <a:rPr lang="ko-KR" altLang="en-US" sz="1600" dirty="0">
+                <a:latin typeface="D2Coding" panose="020B0609020101020101" pitchFamily="49" charset="-127"/>
+                <a:ea typeface="D2Coding" panose="020B0609020101020101" pitchFamily="49" charset="-127"/>
+              </a:rPr>
+              <a:t>에서 검색한 </a:t>
+            </a:r>
+            <a:r>
+              <a:rPr lang="en-US" altLang="ko-KR" sz="1600" dirty="0">
+                <a:latin typeface="D2Coding" panose="020B0609020101020101" pitchFamily="49" charset="-127"/>
+                <a:ea typeface="D2Coding" panose="020B0609020101020101" pitchFamily="49" charset="-127"/>
+              </a:rPr>
+              <a:t>Documents</a:t>
+            </a:r>
+            <a:r>
+              <a:rPr lang="ko-KR" altLang="en-US" sz="1600" dirty="0">
+                <a:latin typeface="D2Coding" panose="020B0609020101020101" pitchFamily="49" charset="-127"/>
+                <a:ea typeface="D2Coding" panose="020B0609020101020101" pitchFamily="49" charset="-127"/>
+              </a:rPr>
+              <a:t>를 모두 랭킹을 부여하여 각 </a:t>
+            </a:r>
+            <a:r>
+              <a:rPr lang="en-US" altLang="ko-KR" sz="1600" dirty="0">
+                <a:latin typeface="D2Coding" panose="020B0609020101020101" pitchFamily="49" charset="-127"/>
+                <a:ea typeface="D2Coding" panose="020B0609020101020101" pitchFamily="49" charset="-127"/>
+              </a:rPr>
+              <a:t> </a:t>
+            </a:r>
+            <a:r>
+              <a:rPr lang="ko-KR" altLang="en-US" sz="1600" dirty="0">
+                <a:latin typeface="D2Coding" panose="020B0609020101020101" pitchFamily="49" charset="-127"/>
+                <a:ea typeface="D2Coding" panose="020B0609020101020101" pitchFamily="49" charset="-127"/>
+              </a:rPr>
+              <a:t>사용자가 의도한 표현을 정확히 포착하고</a:t>
+            </a:r>
+            <a:r>
+              <a:rPr lang="en-US" altLang="ko-KR" sz="1600" dirty="0">
+                <a:latin typeface="D2Coding" panose="020B0609020101020101" pitchFamily="49" charset="-127"/>
+                <a:ea typeface="D2Coding" panose="020B0609020101020101" pitchFamily="49" charset="-127"/>
+              </a:rPr>
+              <a:t>, </a:t>
+            </a:r>
+            <a:r>
+              <a:rPr lang="ko-KR" altLang="en-US" sz="1600" dirty="0">
+                <a:latin typeface="D2Coding" panose="020B0609020101020101" pitchFamily="49" charset="-127"/>
+                <a:ea typeface="D2Coding" panose="020B0609020101020101" pitchFamily="49" charset="-127"/>
+              </a:rPr>
+              <a:t>복잡한 쿼리를 효과적으로 탐색하며</a:t>
+            </a:r>
+            <a:r>
+              <a:rPr lang="en-US" altLang="ko-KR" sz="1600" dirty="0">
+                <a:latin typeface="D2Coding" panose="020B0609020101020101" pitchFamily="49" charset="-127"/>
+                <a:ea typeface="D2Coding" panose="020B0609020101020101" pitchFamily="49" charset="-127"/>
+              </a:rPr>
+              <a:t>, </a:t>
+            </a:r>
+            <a:r>
+              <a:rPr lang="ko-KR" altLang="en-US" sz="1600" dirty="0">
+                <a:latin typeface="D2Coding" panose="020B0609020101020101" pitchFamily="49" charset="-127"/>
+                <a:ea typeface="D2Coding" panose="020B0609020101020101" pitchFamily="49" charset="-127"/>
+              </a:rPr>
+              <a:t>검색되는 문서의 범위를 넓혀 뜻밖의 유용한 발견을 가능하게 하는 알고리즘이 </a:t>
+            </a:r>
+            <a:r>
+              <a:rPr lang="en-US" altLang="ko-KR" sz="1600" dirty="0">
+                <a:latin typeface="D2Coding" panose="020B0609020101020101" pitchFamily="49" charset="-127"/>
+                <a:ea typeface="D2Coding" panose="020B0609020101020101" pitchFamily="49" charset="-127"/>
+              </a:rPr>
+              <a:t>RAG-Fusion</a:t>
+            </a:r>
+            <a:endParaRPr lang="ko-KR" altLang="en-US" sz="1600" dirty="0">
+              <a:latin typeface="D2Coding" panose="020B0609020101020101" pitchFamily="49" charset="-127"/>
+              <a:ea typeface="D2Coding" panose="020B0609020101020101" pitchFamily="49" charset="-127"/>
+            </a:endParaRPr>
+          </a:p>
+        </p:txBody>
+      </p:sp>
+      <p:pic>
+        <p:nvPicPr>
+          <p:cNvPr id="1026" name="Picture 2">
+            <a:extLst>
+              <a:ext uri="{FF2B5EF4-FFF2-40B4-BE49-F238E27FC236}">
+                <a16:creationId xmlns:a16="http://schemas.microsoft.com/office/drawing/2014/main" id="{678D0E03-CDFF-3C49-02F7-7E812922BBAE}"/>
+              </a:ext>
+            </a:extLst>
+          </p:cNvPr>
+          <p:cNvPicPr>
+            <a:picLocks noChangeAspect="1" noChangeArrowheads="1"/>
+          </p:cNvPicPr>
+          <p:nvPr/>
+        </p:nvPicPr>
+        <p:blipFill>
+          <a:blip r:embed="rId2">
+            <a:extLst>
+              <a:ext uri="{28A0092B-C50C-407E-A947-70E740481C1C}">
+                <a14:useLocalDpi xmlns:a14="http://schemas.microsoft.com/office/drawing/2010/main" val="0"/>
+              </a:ext>
+            </a:extLst>
+          </a:blip>
+          <a:srcRect/>
+          <a:stretch>
+            <a:fillRect/>
+          </a:stretch>
+        </p:blipFill>
+        <p:spPr bwMode="auto">
+          <a:xfrm>
+            <a:off x="991590" y="2728913"/>
+            <a:ext cx="9113606" cy="3419976"/>
+          </a:xfrm>
+          <a:prstGeom prst="rect">
+            <a:avLst/>
+          </a:prstGeom>
+          <a:noFill/>
+          <a:extLst>
+            <a:ext uri="{909E8E84-426E-40DD-AFC4-6F175D3DCCD1}">
+              <a14:hiddenFill xmlns:a14="http://schemas.microsoft.com/office/drawing/2010/main">
+                <a:solidFill>
+                  <a:srgbClr val="FFFFFF"/>
+                </a:solidFill>
+              </a14:hiddenFill>
+            </a:ext>
+          </a:extLst>
+        </p:spPr>
+      </p:pic>
+      <p:sp>
+        <p:nvSpPr>
+          <p:cNvPr id="2" name="TextBox 1">
+            <a:extLst>
+              <a:ext uri="{FF2B5EF4-FFF2-40B4-BE49-F238E27FC236}">
+                <a16:creationId xmlns:a16="http://schemas.microsoft.com/office/drawing/2014/main" id="{514B9924-C338-1A7A-E575-7C8DF3FA9D97}"/>
+              </a:ext>
+            </a:extLst>
+          </p:cNvPr>
+          <p:cNvSpPr txBox="1"/>
+          <p:nvPr/>
+        </p:nvSpPr>
+        <p:spPr>
+          <a:xfrm>
+            <a:off x="991590" y="6229350"/>
+            <a:ext cx="5301451" cy="307777"/>
+          </a:xfrm>
+          <a:prstGeom prst="rect">
+            <a:avLst/>
+          </a:prstGeom>
+          <a:noFill/>
+        </p:spPr>
+        <p:txBody>
+          <a:bodyPr wrap="none" rtlCol="0">
+            <a:spAutoFit/>
+          </a:bodyPr>
+          <a:lstStyle/>
+          <a:p>
+            <a:r>
+              <a:rPr lang="en-US" altLang="ko-KR" sz="1400" b="1" dirty="0">
+                <a:latin typeface="D2Coding" panose="020B0609020101020101" pitchFamily="49" charset="-127"/>
+                <a:ea typeface="D2Coding" panose="020B0609020101020101" pitchFamily="49" charset="-127"/>
+                <a:hlinkClick r:id="rId3"/>
+              </a:rPr>
+              <a:t>source : https://github.com/langchain-ai/rag-from-scratch</a:t>
+            </a:r>
+            <a:endParaRPr lang="ko-KR" altLang="en-US" sz="1400" b="1" dirty="0">
+              <a:latin typeface="D2Coding" panose="020B0609020101020101" pitchFamily="49" charset="-127"/>
+              <a:ea typeface="D2Coding" panose="020B0609020101020101" pitchFamily="49" charset="-127"/>
+            </a:endParaRPr>
+          </a:p>
+        </p:txBody>
+      </p:sp>
+    </p:spTree>
+    <p:extLst>
+      <p:ext uri="{BB962C8B-B14F-4D97-AF65-F5344CB8AC3E}">
+        <p14:creationId xmlns:p14="http://schemas.microsoft.com/office/powerpoint/2010/main" val="219946459"/>
+      </p:ext>
+    </p:extLst>
+  </p:cSld>
+  <p:clrMapOvr>
+    <a:masterClrMapping/>
+  </p:clrMapOvr>
+</p:sld>
+</file>
+
+<file path=ppt/slides/slide13.xml><?xml version="1.0" encoding="utf-8"?>
+<p:sld xmlns:a="http://schemas.openxmlformats.org/drawingml/2006/main" xmlns:r="http://schemas.openxmlformats.org/officeDocument/2006/relationships" xmlns:p="http://schemas.openxmlformats.org/presentationml/2006/main">
+  <p:cSld>
+    <p:spTree>
+      <p:nvGrpSpPr>
+        <p:cNvPr id="1" name="">
+          <a:extLst>
+            <a:ext uri="{FF2B5EF4-FFF2-40B4-BE49-F238E27FC236}">
+              <a16:creationId xmlns:a16="http://schemas.microsoft.com/office/drawing/2014/main" id="{59B66FF2-8F08-1AF5-2531-DA9A17286DD1}"/>
+            </a:ext>
+          </a:extLst>
+        </p:cNvPr>
+        <p:cNvGrpSpPr/>
+        <p:nvPr/>
+      </p:nvGrpSpPr>
+      <p:grpSpPr>
+        <a:xfrm>
+          <a:off x="0" y="0"/>
+          <a:ext cx="0" cy="0"/>
+          <a:chOff x="0" y="0"/>
+          <a:chExt cx="0" cy="0"/>
+        </a:xfrm>
+      </p:grpSpPr>
+      <p:sp>
+        <p:nvSpPr>
+          <p:cNvPr id="4" name="슬라이드 번호 개체 틀 3">
+            <a:extLst>
+              <a:ext uri="{FF2B5EF4-FFF2-40B4-BE49-F238E27FC236}">
+                <a16:creationId xmlns:a16="http://schemas.microsoft.com/office/drawing/2014/main" id="{69A78D84-4872-2E1E-7AC5-71F1A9E4658C}"/>
+              </a:ext>
+            </a:extLst>
+          </p:cNvPr>
+          <p:cNvSpPr>
+            <a:spLocks noGrp="1"/>
+          </p:cNvSpPr>
+          <p:nvPr>
+            <p:ph type="sldNum" sz="quarter" idx="12"/>
+          </p:nvPr>
+        </p:nvSpPr>
+        <p:spPr>
+          <a:xfrm>
+            <a:off x="10514011" y="6036261"/>
+            <a:ext cx="753545" cy="365125"/>
+          </a:xfrm>
+        </p:spPr>
+        <p:txBody>
+          <a:bodyPr/>
+          <a:lstStyle/>
+          <a:p>
+            <a:fld id="{D57F1E4F-1CFF-5643-939E-217C01CDF565}" type="slidenum">
+              <a:rPr lang="en-US" smtClean="0"/>
+              <a:pPr/>
+              <a:t>13</a:t>
+            </a:fld>
+            <a:endParaRPr lang="en-US" dirty="0"/>
+          </a:p>
+        </p:txBody>
+      </p:sp>
+      <p:sp>
+        <p:nvSpPr>
+          <p:cNvPr id="3" name="제목 1">
+            <a:extLst>
+              <a:ext uri="{FF2B5EF4-FFF2-40B4-BE49-F238E27FC236}">
+                <a16:creationId xmlns:a16="http://schemas.microsoft.com/office/drawing/2014/main" id="{CF8DB056-06F0-CB23-713E-F4804CF08B7E}"/>
+              </a:ext>
+            </a:extLst>
+          </p:cNvPr>
+          <p:cNvSpPr txBox="1">
+            <a:spLocks/>
+          </p:cNvSpPr>
+          <p:nvPr/>
+        </p:nvSpPr>
+        <p:spPr>
+          <a:xfrm>
+            <a:off x="475645" y="481983"/>
+            <a:ext cx="10353762" cy="766439"/>
+          </a:xfrm>
+          <a:prstGeom prst="rect">
+            <a:avLst/>
+          </a:prstGeom>
+        </p:spPr>
+        <p:txBody>
+          <a:bodyPr vert="horz" lIns="91440" tIns="45720" rIns="91440" bIns="45720" rtlCol="0" anchor="ctr">
+            <a:normAutofit/>
+          </a:bodyPr>
+          <a:lstStyle>
+            <a:lvl1pPr algn="ctr" defTabSz="914400" rtl="0" eaLnBrk="1" latinLnBrk="1" hangingPunct="1">
+              <a:lnSpc>
+                <a:spcPct val="90000"/>
+              </a:lnSpc>
+              <a:spcBef>
+                <a:spcPct val="0"/>
+              </a:spcBef>
+              <a:buNone/>
+              <a:defRPr sz="3200" kern="1200" cap="all" baseline="0">
+                <a:solidFill>
+                  <a:schemeClr val="tx1"/>
+                </a:solidFill>
+                <a:effectLst/>
+                <a:latin typeface="Batang" panose="02030600000101010101" pitchFamily="18" charset="-127"/>
+                <a:ea typeface="Batang" panose="02030600000101010101" pitchFamily="18" charset="-127"/>
+                <a:cs typeface="+mj-cs"/>
+              </a:defRPr>
+            </a:lvl1pPr>
+          </a:lstStyle>
+          <a:p>
+            <a:pPr algn="l"/>
+            <a:r>
+              <a:rPr lang="en-US" altLang="ko-KR" sz="2800" cap="none" dirty="0">
+                <a:solidFill>
+                  <a:schemeClr val="bg2">
+                    <a:lumMod val="25000"/>
+                  </a:schemeClr>
+                </a:solidFill>
+                <a:latin typeface="D2Coding" panose="020B0609020101020101" pitchFamily="49" charset="-127"/>
+                <a:ea typeface="D2Coding" panose="020B0609020101020101" pitchFamily="49" charset="-127"/>
+                <a:cs typeface="Segoe UI Light" panose="020B0502040204020203" pitchFamily="34" charset="0"/>
+              </a:rPr>
+              <a:t>Query Transformation </a:t>
+            </a:r>
+            <a:endParaRPr lang="ko-KR" altLang="en-US" sz="2800" cap="none" dirty="0">
+              <a:solidFill>
+                <a:schemeClr val="bg2">
+                  <a:lumMod val="25000"/>
+                </a:schemeClr>
+              </a:solidFill>
+              <a:latin typeface="D2Coding" panose="020B0609020101020101" pitchFamily="49" charset="-127"/>
+              <a:ea typeface="D2Coding" panose="020B0609020101020101" pitchFamily="49" charset="-127"/>
+              <a:cs typeface="Segoe UI Light" panose="020B0502040204020203" pitchFamily="34" charset="0"/>
+            </a:endParaRPr>
+          </a:p>
+        </p:txBody>
+      </p:sp>
+      <p:sp>
+        <p:nvSpPr>
+          <p:cNvPr id="5" name="TextBox 4">
+            <a:extLst>
+              <a:ext uri="{FF2B5EF4-FFF2-40B4-BE49-F238E27FC236}">
+                <a16:creationId xmlns:a16="http://schemas.microsoft.com/office/drawing/2014/main" id="{F7516B2D-A0E4-6EBA-3C78-4F56485C0946}"/>
+              </a:ext>
+            </a:extLst>
+          </p:cNvPr>
+          <p:cNvSpPr txBox="1"/>
+          <p:nvPr/>
+        </p:nvSpPr>
+        <p:spPr>
+          <a:xfrm>
+            <a:off x="7639050" y="709111"/>
+            <a:ext cx="4039205" cy="369332"/>
+          </a:xfrm>
+          <a:prstGeom prst="rect">
+            <a:avLst/>
+          </a:prstGeom>
+          <a:noFill/>
+        </p:spPr>
+        <p:txBody>
+          <a:bodyPr wrap="square">
+            <a:spAutoFit/>
+          </a:bodyPr>
+          <a:lstStyle/>
+          <a:p>
+            <a:pPr algn="r"/>
+            <a:r>
+              <a:rPr lang="en-US" altLang="ko-KR" dirty="0">
+                <a:latin typeface="D2Coding" panose="020B0609020101020101" pitchFamily="49" charset="-127"/>
+                <a:ea typeface="D2Coding" panose="020B0609020101020101" pitchFamily="49" charset="-127"/>
+              </a:rPr>
+              <a:t>Hypothetical Document Embeddings</a:t>
+            </a:r>
+          </a:p>
+        </p:txBody>
+      </p:sp>
+      <p:pic>
+        <p:nvPicPr>
+          <p:cNvPr id="6" name="그림 5">
+            <a:extLst>
+              <a:ext uri="{FF2B5EF4-FFF2-40B4-BE49-F238E27FC236}">
+                <a16:creationId xmlns:a16="http://schemas.microsoft.com/office/drawing/2014/main" id="{A593AB51-8EAB-5853-0D76-BB5F27AC42AE}"/>
+              </a:ext>
+            </a:extLst>
+          </p:cNvPr>
+          <p:cNvPicPr>
+            <a:picLocks noChangeAspect="1"/>
+          </p:cNvPicPr>
+          <p:nvPr/>
+        </p:nvPicPr>
+        <p:blipFill>
+          <a:blip r:embed="rId2"/>
+          <a:stretch>
+            <a:fillRect/>
+          </a:stretch>
+        </p:blipFill>
+        <p:spPr>
+          <a:xfrm>
+            <a:off x="763571" y="1830277"/>
+            <a:ext cx="7151704" cy="4388546"/>
+          </a:xfrm>
+          <a:prstGeom prst="rect">
+            <a:avLst/>
+          </a:prstGeom>
+        </p:spPr>
+      </p:pic>
+      <p:sp>
+        <p:nvSpPr>
+          <p:cNvPr id="7" name="TextBox 6">
+            <a:extLst>
+              <a:ext uri="{FF2B5EF4-FFF2-40B4-BE49-F238E27FC236}">
+                <a16:creationId xmlns:a16="http://schemas.microsoft.com/office/drawing/2014/main" id="{B9C4F66C-EE80-AC0E-D364-94B62758DDE9}"/>
+              </a:ext>
+            </a:extLst>
+          </p:cNvPr>
+          <p:cNvSpPr txBox="1"/>
+          <p:nvPr/>
+        </p:nvSpPr>
+        <p:spPr>
+          <a:xfrm>
+            <a:off x="8086553" y="1706452"/>
+            <a:ext cx="3562868" cy="2644635"/>
+          </a:xfrm>
+          <a:prstGeom prst="rect">
+            <a:avLst/>
+          </a:prstGeom>
+          <a:noFill/>
+        </p:spPr>
+        <p:txBody>
+          <a:bodyPr wrap="square">
+            <a:spAutoFit/>
+          </a:bodyPr>
+          <a:lstStyle/>
+          <a:p>
+            <a:pPr marL="285750" indent="-285750">
+              <a:lnSpc>
+                <a:spcPct val="150000"/>
+              </a:lnSpc>
+              <a:buFont typeface="Wingdings" panose="05000000000000000000" pitchFamily="2" charset="2"/>
+              <a:buChar char="§"/>
+            </a:pPr>
+            <a:r>
+              <a:rPr lang="ko-KR" altLang="en-US" sz="1400" dirty="0">
+                <a:latin typeface="D2Coding" panose="020B0609020101020101" pitchFamily="49" charset="-127"/>
+                <a:ea typeface="D2Coding" panose="020B0609020101020101" pitchFamily="49" charset="-127"/>
+              </a:rPr>
+              <a:t>검색할 때 원래 질문인 🟠 </a:t>
+            </a:r>
+            <a:r>
+              <a:rPr lang="ko-KR" altLang="en-US" sz="1400" dirty="0" err="1">
+                <a:latin typeface="D2Coding" panose="020B0609020101020101" pitchFamily="49" charset="-127"/>
+                <a:ea typeface="D2Coding" panose="020B0609020101020101" pitchFamily="49" charset="-127"/>
+              </a:rPr>
+              <a:t>연주황색</a:t>
+            </a:r>
+            <a:r>
+              <a:rPr lang="ko-KR" altLang="en-US" sz="1400" dirty="0">
+                <a:latin typeface="D2Coding" panose="020B0609020101020101" pitchFamily="49" charset="-127"/>
+                <a:ea typeface="D2Coding" panose="020B0609020101020101" pitchFamily="49" charset="-127"/>
+              </a:rPr>
+              <a:t> 원을 그대로 사용하는 것보다</a:t>
+            </a:r>
+            <a:r>
+              <a:rPr lang="en-US" altLang="ko-KR" sz="1400" dirty="0">
+                <a:latin typeface="D2Coding" panose="020B0609020101020101" pitchFamily="49" charset="-127"/>
+                <a:ea typeface="D2Coding" panose="020B0609020101020101" pitchFamily="49" charset="-127"/>
+              </a:rPr>
+              <a:t>, </a:t>
+            </a:r>
+          </a:p>
+          <a:p>
+            <a:pPr marL="285750" indent="-285750">
+              <a:lnSpc>
+                <a:spcPct val="150000"/>
+              </a:lnSpc>
+              <a:buFont typeface="Wingdings" panose="05000000000000000000" pitchFamily="2" charset="2"/>
+              <a:buChar char="§"/>
+            </a:pPr>
+            <a:r>
+              <a:rPr lang="en-US" altLang="ko-KR" sz="1400" dirty="0">
+                <a:latin typeface="D2Coding" panose="020B0609020101020101" pitchFamily="49" charset="-127"/>
+                <a:ea typeface="D2Coding" panose="020B0609020101020101" pitchFamily="49" charset="-127"/>
+              </a:rPr>
+              <a:t>LLM</a:t>
+            </a:r>
+            <a:r>
+              <a:rPr lang="ko-KR" altLang="en-US" sz="1400" dirty="0">
+                <a:latin typeface="D2Coding" panose="020B0609020101020101" pitchFamily="49" charset="-127"/>
+                <a:ea typeface="D2Coding" panose="020B0609020101020101" pitchFamily="49" charset="-127"/>
+              </a:rPr>
+              <a:t>을 거쳐 만들어진 가짜 답변인 🔴 </a:t>
+            </a:r>
+            <a:r>
+              <a:rPr lang="ko-KR" altLang="en-US" sz="1400" dirty="0" err="1">
+                <a:latin typeface="D2Coding" panose="020B0609020101020101" pitchFamily="49" charset="-127"/>
+                <a:ea typeface="D2Coding" panose="020B0609020101020101" pitchFamily="49" charset="-127"/>
+              </a:rPr>
+              <a:t>연빨간색</a:t>
+            </a:r>
+            <a:r>
+              <a:rPr lang="ko-KR" altLang="en-US" sz="1400" dirty="0">
+                <a:latin typeface="D2Coding" panose="020B0609020101020101" pitchFamily="49" charset="-127"/>
+                <a:ea typeface="D2Coding" panose="020B0609020101020101" pitchFamily="49" charset="-127"/>
+              </a:rPr>
+              <a:t> 원을 사용하면</a:t>
+            </a:r>
+            <a:r>
+              <a:rPr lang="en-US" altLang="ko-KR" sz="1400" dirty="0">
+                <a:latin typeface="D2Coding" panose="020B0609020101020101" pitchFamily="49" charset="-127"/>
+                <a:ea typeface="D2Coding" panose="020B0609020101020101" pitchFamily="49" charset="-127"/>
+              </a:rPr>
+              <a:t>, </a:t>
+            </a:r>
+          </a:p>
+          <a:p>
+            <a:pPr marL="285750" indent="-285750">
+              <a:lnSpc>
+                <a:spcPct val="150000"/>
+              </a:lnSpc>
+              <a:buFont typeface="Wingdings" panose="05000000000000000000" pitchFamily="2" charset="2"/>
+              <a:buChar char="§"/>
+            </a:pPr>
+            <a:r>
+              <a:rPr lang="ko-KR" altLang="en-US" sz="1400" dirty="0">
+                <a:latin typeface="D2Coding" panose="020B0609020101020101" pitchFamily="49" charset="-127"/>
+                <a:ea typeface="D2Coding" panose="020B0609020101020101" pitchFamily="49" charset="-127"/>
+              </a:rPr>
+              <a:t>진짜 정답 문서들</a:t>
+            </a:r>
+            <a:r>
+              <a:rPr lang="en-US" altLang="ko-KR" sz="1400" dirty="0">
+                <a:latin typeface="D2Coding" panose="020B0609020101020101" pitchFamily="49" charset="-127"/>
+                <a:ea typeface="D2Coding" panose="020B0609020101020101" pitchFamily="49" charset="-127"/>
+              </a:rPr>
+              <a:t>(</a:t>
+            </a:r>
+            <a:r>
+              <a:rPr lang="ko-KR" altLang="en-US" sz="1400" dirty="0">
+                <a:latin typeface="D2Coding" panose="020B0609020101020101" pitchFamily="49" charset="-127"/>
+                <a:ea typeface="D2Coding" panose="020B0609020101020101" pitchFamily="49" charset="-127"/>
+              </a:rPr>
+              <a:t>🟢🟢🟢</a:t>
+            </a:r>
+            <a:r>
+              <a:rPr lang="en-US" altLang="ko-KR" sz="1400" dirty="0">
+                <a:latin typeface="D2Coding" panose="020B0609020101020101" pitchFamily="49" charset="-127"/>
+                <a:ea typeface="D2Coding" panose="020B0609020101020101" pitchFamily="49" charset="-127"/>
+              </a:rPr>
+              <a:t>)</a:t>
+            </a:r>
+            <a:r>
+              <a:rPr lang="ko-KR" altLang="en-US" sz="1400" dirty="0">
+                <a:latin typeface="D2Coding" panose="020B0609020101020101" pitchFamily="49" charset="-127"/>
+                <a:ea typeface="D2Coding" panose="020B0609020101020101" pitchFamily="49" charset="-127"/>
+              </a:rPr>
+              <a:t>이 모여 있는 곳으로 훨씬 더 가깝게 접근할 수 있어 </a:t>
+            </a:r>
+            <a:endParaRPr lang="en-US" altLang="ko-KR" sz="1400" dirty="0">
+              <a:latin typeface="D2Coding" panose="020B0609020101020101" pitchFamily="49" charset="-127"/>
+              <a:ea typeface="D2Coding" panose="020B0609020101020101" pitchFamily="49" charset="-127"/>
+            </a:endParaRPr>
+          </a:p>
+          <a:p>
+            <a:pPr marL="285750" indent="-285750">
+              <a:lnSpc>
+                <a:spcPct val="150000"/>
+              </a:lnSpc>
+              <a:buFont typeface="Wingdings" panose="05000000000000000000" pitchFamily="2" charset="2"/>
+              <a:buChar char="§"/>
+            </a:pPr>
+            <a:r>
+              <a:rPr lang="ko-KR" altLang="en-US" sz="1400" dirty="0">
+                <a:latin typeface="D2Coding" panose="020B0609020101020101" pitchFamily="49" charset="-127"/>
+                <a:ea typeface="D2Coding" panose="020B0609020101020101" pitchFamily="49" charset="-127"/>
+              </a:rPr>
+              <a:t>검색 정확도가 높아지는 알고리즘</a:t>
+            </a:r>
+          </a:p>
+        </p:txBody>
+      </p:sp>
+    </p:spTree>
+    <p:extLst>
+      <p:ext uri="{BB962C8B-B14F-4D97-AF65-F5344CB8AC3E}">
+        <p14:creationId xmlns:p14="http://schemas.microsoft.com/office/powerpoint/2010/main" val="1777427447"/>
+      </p:ext>
+    </p:extLst>
+  </p:cSld>
+  <p:clrMapOvr>
+    <a:masterClrMapping/>
+  </p:clrMapOvr>
+</p:sld>
+</file>
+
+<file path=ppt/slides/slide14.xml><?xml version="1.0" encoding="utf-8"?>
+<p:sld xmlns:a="http://schemas.openxmlformats.org/drawingml/2006/main" xmlns:r="http://schemas.openxmlformats.org/officeDocument/2006/relationships" xmlns:p="http://schemas.openxmlformats.org/presentationml/2006/main">
+  <p:cSld>
+    <p:spTree>
+      <p:nvGrpSpPr>
+        <p:cNvPr id="1" name="">
+          <a:extLst>
+            <a:ext uri="{FF2B5EF4-FFF2-40B4-BE49-F238E27FC236}">
               <a16:creationId xmlns:a16="http://schemas.microsoft.com/office/drawing/2014/main" id="{6FDCDC85-5E1A-1016-76E9-AE940CBDF09B}"/>
             </a:ext>
           </a:extLst>
@@ -3091,7 +4811,7 @@
             <a:fld id="{D57F1E4F-1CFF-5643-939E-217C01CDF565}" type="slidenum">
               <a:rPr lang="en-US" smtClean="0"/>
               <a:pPr/>
-              <a:t>10</a:t>
+              <a:t>14</a:t>
             </a:fld>
             <a:endParaRPr lang="en-US" dirty="0"/>
           </a:p>
@@ -3157,7 +4877,7 @@
                 <a:ea typeface="D2Coding" panose="020B0609020101020101" pitchFamily="49" charset="-127"/>
                 <a:cs typeface="Segoe UI Light" panose="020B0502040204020203" pitchFamily="34" charset="0"/>
               </a:rPr>
-              <a:t>Query Transformation </a:t>
+              <a:t>Summary : Query Transformation </a:t>
             </a:r>
             <a:endParaRPr lang="ko-KR" altLang="en-US" sz="2800" cap="none" dirty="0">
               <a:solidFill>
@@ -3174,10 +4894,1216 @@
       </p:sp>
       <p:sp>
         <p:nvSpPr>
+          <p:cNvPr id="6" name="TextBox 5">
+            <a:extLst>
+              <a:ext uri="{FF2B5EF4-FFF2-40B4-BE49-F238E27FC236}">
+                <a16:creationId xmlns:a16="http://schemas.microsoft.com/office/drawing/2014/main" id="{B4D8536A-089E-D4BA-543D-9B7346C3698E}"/>
+              </a:ext>
+            </a:extLst>
+          </p:cNvPr>
+          <p:cNvSpPr txBox="1"/>
+          <p:nvPr/>
+        </p:nvSpPr>
+        <p:spPr>
+          <a:xfrm>
+            <a:off x="585787" y="1481168"/>
+            <a:ext cx="11020425" cy="4724370"/>
+          </a:xfrm>
+          <a:prstGeom prst="rect">
+            <a:avLst/>
+          </a:prstGeom>
+          <a:noFill/>
+        </p:spPr>
+        <p:txBody>
+          <a:bodyPr wrap="square">
+            <a:spAutoFit/>
+          </a:bodyPr>
+          <a:lstStyle/>
+          <a:p>
+            <a:pPr marL="342900" indent="-342900">
+              <a:buFont typeface="Wingdings" panose="05000000000000000000" pitchFamily="2" charset="2"/>
+              <a:buChar char="v"/>
+            </a:pPr>
+            <a:r>
+              <a:rPr lang="ko-KR" altLang="en-US" dirty="0">
+                <a:latin typeface="D2Coding" panose="020B0609020101020101" pitchFamily="49" charset="-127"/>
+                <a:ea typeface="D2Coding" panose="020B0609020101020101" pitchFamily="49" charset="-127"/>
+              </a:rPr>
+              <a:t>왜 쿼리를 변형할까</a:t>
+            </a:r>
+            <a:r>
+              <a:rPr lang="en-US" altLang="ko-KR" dirty="0">
+                <a:latin typeface="D2Coding" panose="020B0609020101020101" pitchFamily="49" charset="-127"/>
+                <a:ea typeface="D2Coding" panose="020B0609020101020101" pitchFamily="49" charset="-127"/>
+              </a:rPr>
+              <a:t>?</a:t>
+            </a:r>
+          </a:p>
+          <a:p>
+            <a:pPr marL="342900" indent="-342900">
+              <a:buFont typeface="Wingdings" panose="05000000000000000000" pitchFamily="2" charset="2"/>
+              <a:buChar char="v"/>
+            </a:pPr>
+            <a:endParaRPr lang="en-US" altLang="ko-KR" sz="1600" dirty="0">
+              <a:latin typeface="D2Coding" panose="020B0609020101020101" pitchFamily="49" charset="-127"/>
+              <a:ea typeface="D2Coding" panose="020B0609020101020101" pitchFamily="49" charset="-127"/>
+            </a:endParaRPr>
+          </a:p>
+          <a:p>
+            <a:pPr marL="800100" lvl="1" indent="-342900">
+              <a:buFont typeface="Wingdings" panose="05000000000000000000" pitchFamily="2" charset="2"/>
+              <a:buChar char="v"/>
+            </a:pPr>
+            <a:r>
+              <a:rPr lang="ko-KR" altLang="en-US" sz="1600" dirty="0">
+                <a:latin typeface="D2Coding" panose="020B0609020101020101" pitchFamily="49" charset="-127"/>
+                <a:ea typeface="D2Coding" panose="020B0609020101020101" pitchFamily="49" charset="-127"/>
+              </a:rPr>
+              <a:t>사용자가 던진 날것</a:t>
+            </a:r>
+            <a:r>
+              <a:rPr lang="en-US" altLang="ko-KR" sz="1600" dirty="0">
+                <a:latin typeface="D2Coding" panose="020B0609020101020101" pitchFamily="49" charset="-127"/>
+                <a:ea typeface="D2Coding" panose="020B0609020101020101" pitchFamily="49" charset="-127"/>
+              </a:rPr>
+              <a:t>(Raw) </a:t>
+            </a:r>
+            <a:r>
+              <a:rPr lang="ko-KR" altLang="en-US" sz="1600" dirty="0">
+                <a:latin typeface="D2Coding" panose="020B0609020101020101" pitchFamily="49" charset="-127"/>
+                <a:ea typeface="D2Coding" panose="020B0609020101020101" pitchFamily="49" charset="-127"/>
+              </a:rPr>
+              <a:t>그대로의 질문은 검색 엔진</a:t>
+            </a:r>
+            <a:r>
+              <a:rPr lang="en-US" altLang="ko-KR" sz="1600" dirty="0">
+                <a:latin typeface="D2Coding" panose="020B0609020101020101" pitchFamily="49" charset="-127"/>
+                <a:ea typeface="D2Coding" panose="020B0609020101020101" pitchFamily="49" charset="-127"/>
+              </a:rPr>
+              <a:t>(Vector Store)</a:t>
+            </a:r>
+            <a:r>
+              <a:rPr lang="ko-KR" altLang="en-US" sz="1600" dirty="0">
+                <a:latin typeface="D2Coding" panose="020B0609020101020101" pitchFamily="49" charset="-127"/>
+                <a:ea typeface="D2Coding" panose="020B0609020101020101" pitchFamily="49" charset="-127"/>
+              </a:rPr>
+              <a:t>이 이해하기에 너무 짧거나</a:t>
+            </a:r>
+            <a:r>
+              <a:rPr lang="en-US" altLang="ko-KR" sz="1600" dirty="0">
+                <a:latin typeface="D2Coding" panose="020B0609020101020101" pitchFamily="49" charset="-127"/>
+                <a:ea typeface="D2Coding" panose="020B0609020101020101" pitchFamily="49" charset="-127"/>
+              </a:rPr>
+              <a:t>, </a:t>
+            </a:r>
+            <a:r>
+              <a:rPr lang="ko-KR" altLang="en-US" sz="1600" dirty="0">
+                <a:latin typeface="D2Coding" panose="020B0609020101020101" pitchFamily="49" charset="-127"/>
+                <a:ea typeface="D2Coding" panose="020B0609020101020101" pitchFamily="49" charset="-127"/>
+              </a:rPr>
+              <a:t>군더더기가 많거나</a:t>
+            </a:r>
+            <a:r>
+              <a:rPr lang="en-US" altLang="ko-KR" sz="1600" dirty="0">
+                <a:latin typeface="D2Coding" panose="020B0609020101020101" pitchFamily="49" charset="-127"/>
+                <a:ea typeface="D2Coding" panose="020B0609020101020101" pitchFamily="49" charset="-127"/>
+              </a:rPr>
+              <a:t>, </a:t>
+            </a:r>
+            <a:r>
+              <a:rPr lang="ko-KR" altLang="en-US" sz="1600" dirty="0">
+                <a:latin typeface="D2Coding" panose="020B0609020101020101" pitchFamily="49" charset="-127"/>
+                <a:ea typeface="D2Coding" panose="020B0609020101020101" pitchFamily="49" charset="-127"/>
+              </a:rPr>
+              <a:t>문맥이 빠져 있을 수 있으니</a:t>
+            </a:r>
+            <a:r>
+              <a:rPr lang="en-US" altLang="ko-KR" sz="1600" dirty="0">
+                <a:latin typeface="D2Coding" panose="020B0609020101020101" pitchFamily="49" charset="-127"/>
+                <a:ea typeface="D2Coding" panose="020B0609020101020101" pitchFamily="49" charset="-127"/>
+              </a:rPr>
+              <a:t> LLM</a:t>
+            </a:r>
+            <a:r>
+              <a:rPr lang="ko-KR" altLang="en-US" sz="1600" dirty="0">
+                <a:latin typeface="D2Coding" panose="020B0609020101020101" pitchFamily="49" charset="-127"/>
+                <a:ea typeface="D2Coding" panose="020B0609020101020101" pitchFamily="49" charset="-127"/>
+              </a:rPr>
+              <a:t>을 필터이자 확장기로 사용하여 검색하기 가장 좋은 최적의 상태로 변형하는 것</a:t>
+            </a:r>
+            <a:endParaRPr lang="en-US" altLang="ko-KR" sz="1600" dirty="0">
+              <a:latin typeface="D2Coding" panose="020B0609020101020101" pitchFamily="49" charset="-127"/>
+              <a:ea typeface="D2Coding" panose="020B0609020101020101" pitchFamily="49" charset="-127"/>
+            </a:endParaRPr>
+          </a:p>
+          <a:p>
+            <a:pPr marL="800100" lvl="1" indent="-342900">
+              <a:buFont typeface="Wingdings" panose="05000000000000000000" pitchFamily="2" charset="2"/>
+              <a:buChar char="v"/>
+            </a:pPr>
+            <a:endParaRPr lang="en-US" altLang="ko-KR" sz="1600" dirty="0">
+              <a:latin typeface="D2Coding" panose="020B0609020101020101" pitchFamily="49" charset="-127"/>
+              <a:ea typeface="D2Coding" panose="020B0609020101020101" pitchFamily="49" charset="-127"/>
+            </a:endParaRPr>
+          </a:p>
+          <a:p>
+            <a:pPr marL="800100" lvl="1" indent="-342900">
+              <a:buFont typeface="Wingdings" panose="05000000000000000000" pitchFamily="2" charset="2"/>
+              <a:buChar char="v"/>
+            </a:pPr>
+            <a:endParaRPr lang="en-US" altLang="ko-KR" sz="900" dirty="0">
+              <a:latin typeface="D2Coding" panose="020B0609020101020101" pitchFamily="49" charset="-127"/>
+              <a:ea typeface="D2Coding" panose="020B0609020101020101" pitchFamily="49" charset="-127"/>
+            </a:endParaRPr>
+          </a:p>
+          <a:p>
+            <a:pPr marL="342900" indent="-342900">
+              <a:buFont typeface="Wingdings" panose="05000000000000000000" pitchFamily="2" charset="2"/>
+              <a:buChar char="v"/>
+            </a:pPr>
+            <a:r>
+              <a:rPr lang="ko-KR" altLang="en-US" dirty="0">
+                <a:latin typeface="D2Coding" panose="020B0609020101020101" pitchFamily="49" charset="-127"/>
+                <a:ea typeface="D2Coding" panose="020B0609020101020101" pitchFamily="49" charset="-127"/>
+              </a:rPr>
+              <a:t>실무 </a:t>
+            </a:r>
+            <a:r>
+              <a:rPr lang="en-US" altLang="ko-KR" dirty="0">
+                <a:latin typeface="D2Coding" panose="020B0609020101020101" pitchFamily="49" charset="-127"/>
+                <a:ea typeface="D2Coding" panose="020B0609020101020101" pitchFamily="49" charset="-127"/>
+              </a:rPr>
+              <a:t>RAG </a:t>
+            </a:r>
+            <a:r>
+              <a:rPr lang="ko-KR" altLang="en-US" dirty="0">
+                <a:latin typeface="D2Coding" panose="020B0609020101020101" pitchFamily="49" charset="-127"/>
+                <a:ea typeface="D2Coding" panose="020B0609020101020101" pitchFamily="49" charset="-127"/>
+              </a:rPr>
+              <a:t>시스템 구축 시 가장 자주 쓰이는 패턴 </a:t>
+            </a:r>
+            <a:r>
+              <a:rPr lang="en-US" altLang="ko-KR" dirty="0">
+                <a:latin typeface="D2Coding" panose="020B0609020101020101" pitchFamily="49" charset="-127"/>
+                <a:ea typeface="D2Coding" panose="020B0609020101020101" pitchFamily="49" charset="-127"/>
+              </a:rPr>
+              <a:t>(Prompt </a:t>
+            </a:r>
+            <a:r>
+              <a:rPr lang="ko-KR" altLang="en-US" dirty="0">
+                <a:latin typeface="D2Coding" panose="020B0609020101020101" pitchFamily="49" charset="-127"/>
+                <a:ea typeface="D2Coding" panose="020B0609020101020101" pitchFamily="49" charset="-127"/>
+              </a:rPr>
+              <a:t>가이드</a:t>
+            </a:r>
+            <a:r>
+              <a:rPr lang="en-US" altLang="ko-KR" dirty="0">
+                <a:latin typeface="D2Coding" panose="020B0609020101020101" pitchFamily="49" charset="-127"/>
+                <a:ea typeface="D2Coding" panose="020B0609020101020101" pitchFamily="49" charset="-127"/>
+              </a:rPr>
+              <a:t>)</a:t>
+            </a:r>
+          </a:p>
+          <a:p>
+            <a:pPr marL="342900" indent="-342900">
+              <a:buFont typeface="Wingdings" panose="05000000000000000000" pitchFamily="2" charset="2"/>
+              <a:buChar char="v"/>
+            </a:pPr>
+            <a:endParaRPr lang="en-US" altLang="ko-KR" sz="1600" dirty="0">
+              <a:latin typeface="D2Coding" panose="020B0609020101020101" pitchFamily="49" charset="-127"/>
+              <a:ea typeface="D2Coding" panose="020B0609020101020101" pitchFamily="49" charset="-127"/>
+            </a:endParaRPr>
+          </a:p>
+          <a:p>
+            <a:pPr marL="742950" lvl="1" indent="-285750">
+              <a:buFont typeface="Wingdings" panose="05000000000000000000" pitchFamily="2" charset="2"/>
+              <a:buChar char="v"/>
+            </a:pPr>
+            <a:r>
+              <a:rPr lang="ko-KR" altLang="en-US" sz="1600" dirty="0">
+                <a:latin typeface="D2Coding" panose="020B0609020101020101" pitchFamily="49" charset="-127"/>
+                <a:ea typeface="D2Coding" panose="020B0609020101020101" pitchFamily="49" charset="-127"/>
+              </a:rPr>
+              <a:t>노이즈 제거 </a:t>
+            </a:r>
+            <a:r>
+              <a:rPr lang="en-US" altLang="ko-KR" sz="1600" dirty="0">
+                <a:latin typeface="D2Coding" panose="020B0609020101020101" pitchFamily="49" charset="-127"/>
+                <a:ea typeface="D2Coding" panose="020B0609020101020101" pitchFamily="49" charset="-127"/>
+              </a:rPr>
+              <a:t>(Removing irrelevant text):</a:t>
+            </a:r>
+            <a:r>
+              <a:rPr lang="ko-KR" altLang="en-US" sz="1600" dirty="0">
+                <a:latin typeface="D2Coding" panose="020B0609020101020101" pitchFamily="49" charset="-127"/>
+                <a:ea typeface="D2Coding" panose="020B0609020101020101" pitchFamily="49" charset="-127"/>
+              </a:rPr>
+              <a:t> </a:t>
+            </a:r>
+            <a:r>
+              <a:rPr lang="en-US" altLang="ko-KR" sz="1600" dirty="0">
+                <a:latin typeface="D2Coding" panose="020B0609020101020101" pitchFamily="49" charset="-127"/>
+                <a:ea typeface="D2Coding" panose="020B0609020101020101" pitchFamily="49" charset="-127"/>
+              </a:rPr>
+              <a:t>"</a:t>
+            </a:r>
+            <a:r>
+              <a:rPr lang="ko-KR" altLang="en-US" sz="1600" dirty="0">
+                <a:latin typeface="D2Coding" panose="020B0609020101020101" pitchFamily="49" charset="-127"/>
+                <a:ea typeface="D2Coding" panose="020B0609020101020101" pitchFamily="49" charset="-127"/>
+              </a:rPr>
+              <a:t>안녕하세요</a:t>
+            </a:r>
+            <a:r>
+              <a:rPr lang="en-US" altLang="ko-KR" sz="1600" dirty="0">
+                <a:latin typeface="D2Coding" panose="020B0609020101020101" pitchFamily="49" charset="-127"/>
+                <a:ea typeface="D2Coding" panose="020B0609020101020101" pitchFamily="49" charset="-127"/>
+              </a:rPr>
+              <a:t>, </a:t>
+            </a:r>
+            <a:r>
+              <a:rPr lang="ko-KR" altLang="en-US" sz="1600" dirty="0">
+                <a:latin typeface="D2Coding" panose="020B0609020101020101" pitchFamily="49" charset="-127"/>
+                <a:ea typeface="D2Coding" panose="020B0609020101020101" pitchFamily="49" charset="-127"/>
+              </a:rPr>
+              <a:t>혹시 다름이 아니라 </a:t>
+            </a:r>
+            <a:r>
+              <a:rPr lang="en-US" altLang="ko-KR" sz="1600" dirty="0">
+                <a:latin typeface="D2Coding" panose="020B0609020101020101" pitchFamily="49" charset="-127"/>
+                <a:ea typeface="D2Coding" panose="020B0609020101020101" pitchFamily="49" charset="-127"/>
+              </a:rPr>
+              <a:t>2026</a:t>
+            </a:r>
+            <a:r>
+              <a:rPr lang="ko-KR" altLang="en-US" sz="1600" dirty="0">
+                <a:latin typeface="D2Coding" panose="020B0609020101020101" pitchFamily="49" charset="-127"/>
+                <a:ea typeface="D2Coding" panose="020B0609020101020101" pitchFamily="49" charset="-127"/>
+              </a:rPr>
+              <a:t>년 연말정산 프로세스에 대해 알고 싶어서 </a:t>
+            </a:r>
+            <a:r>
+              <a:rPr lang="ko-KR" altLang="en-US" sz="1600" dirty="0" err="1">
+                <a:latin typeface="D2Coding" panose="020B0609020101020101" pitchFamily="49" charset="-127"/>
+                <a:ea typeface="D2Coding" panose="020B0609020101020101" pitchFamily="49" charset="-127"/>
+              </a:rPr>
+              <a:t>문의드리는데</a:t>
+            </a:r>
+            <a:r>
+              <a:rPr lang="en-US" altLang="ko-KR" sz="1600" dirty="0">
+                <a:latin typeface="D2Coding" panose="020B0609020101020101" pitchFamily="49" charset="-127"/>
+                <a:ea typeface="D2Coding" panose="020B0609020101020101" pitchFamily="49" charset="-127"/>
+              </a:rPr>
+              <a:t>..."</a:t>
+            </a:r>
+            <a:r>
+              <a:rPr lang="ko-KR" altLang="en-US" sz="1600" dirty="0">
+                <a:latin typeface="D2Coding" panose="020B0609020101020101" pitchFamily="49" charset="-127"/>
+                <a:ea typeface="D2Coding" panose="020B0609020101020101" pitchFamily="49" charset="-127"/>
+              </a:rPr>
+              <a:t>에서 인사말이나 불필요한 수식어를 깎아내고 </a:t>
+            </a:r>
+            <a:r>
+              <a:rPr lang="en-US" altLang="ko-KR" sz="1600" dirty="0">
+                <a:latin typeface="D2Coding" panose="020B0609020101020101" pitchFamily="49" charset="-127"/>
+                <a:ea typeface="D2Coding" panose="020B0609020101020101" pitchFamily="49" charset="-127"/>
+              </a:rPr>
+              <a:t>2026 </a:t>
+            </a:r>
+            <a:r>
+              <a:rPr lang="ko-KR" altLang="en-US" sz="1600" dirty="0">
+                <a:latin typeface="D2Coding" panose="020B0609020101020101" pitchFamily="49" charset="-127"/>
+                <a:ea typeface="D2Coding" panose="020B0609020101020101" pitchFamily="49" charset="-127"/>
+              </a:rPr>
+              <a:t>연말정산 프로세스라는 핵심 키워드만 남겨라</a:t>
+            </a:r>
+            <a:r>
+              <a:rPr lang="en-US" altLang="ko-KR" sz="1600" dirty="0">
+                <a:latin typeface="D2Coding" panose="020B0609020101020101" pitchFamily="49" charset="-127"/>
+                <a:ea typeface="D2Coding" panose="020B0609020101020101" pitchFamily="49" charset="-127"/>
+              </a:rPr>
+              <a:t>!</a:t>
+            </a:r>
+          </a:p>
+          <a:p>
+            <a:pPr marL="742950" lvl="1" indent="-285750">
+              <a:buFont typeface="Wingdings" panose="05000000000000000000" pitchFamily="2" charset="2"/>
+              <a:buChar char="v"/>
+            </a:pPr>
+            <a:endParaRPr lang="en-US" altLang="ko-KR" sz="1600" dirty="0">
+              <a:latin typeface="D2Coding" panose="020B0609020101020101" pitchFamily="49" charset="-127"/>
+              <a:ea typeface="D2Coding" panose="020B0609020101020101" pitchFamily="49" charset="-127"/>
+            </a:endParaRPr>
+          </a:p>
+          <a:p>
+            <a:pPr marL="742950" lvl="1" indent="-285750">
+              <a:buFont typeface="Wingdings" panose="05000000000000000000" pitchFamily="2" charset="2"/>
+              <a:buChar char="v"/>
+            </a:pPr>
+            <a:r>
+              <a:rPr lang="ko-KR" altLang="en-US" sz="1600" dirty="0">
+                <a:latin typeface="D2Coding" panose="020B0609020101020101" pitchFamily="49" charset="-127"/>
+                <a:ea typeface="D2Coding" panose="020B0609020101020101" pitchFamily="49" charset="-127"/>
+              </a:rPr>
+              <a:t>대화 맥락 반영 </a:t>
+            </a:r>
+            <a:r>
+              <a:rPr lang="en-US" altLang="ko-KR" sz="1600" dirty="0">
+                <a:latin typeface="D2Coding" panose="020B0609020101020101" pitchFamily="49" charset="-127"/>
+                <a:ea typeface="D2Coding" panose="020B0609020101020101" pitchFamily="49" charset="-127"/>
+              </a:rPr>
+              <a:t>(Grounding with past history):</a:t>
+            </a:r>
+            <a:r>
+              <a:rPr lang="ko-KR" altLang="en-US" sz="1600" dirty="0">
+                <a:latin typeface="D2Coding" panose="020B0609020101020101" pitchFamily="49" charset="-127"/>
+                <a:ea typeface="D2Coding" panose="020B0609020101020101" pitchFamily="49" charset="-127"/>
+              </a:rPr>
+              <a:t> 사용자가 이전에 </a:t>
+            </a:r>
+            <a:r>
+              <a:rPr lang="en-US" altLang="ko-KR" sz="1600" dirty="0">
+                <a:latin typeface="D2Coding" panose="020B0609020101020101" pitchFamily="49" charset="-127"/>
+                <a:ea typeface="D2Coding" panose="020B0609020101020101" pitchFamily="49" charset="-127"/>
+              </a:rPr>
+              <a:t>"</a:t>
+            </a:r>
+            <a:r>
+              <a:rPr lang="ko-KR" altLang="en-US" sz="1600" dirty="0">
+                <a:latin typeface="D2Coding" panose="020B0609020101020101" pitchFamily="49" charset="-127"/>
+                <a:ea typeface="D2Coding" panose="020B0609020101020101" pitchFamily="49" charset="-127"/>
+              </a:rPr>
+              <a:t>샌프란시스코</a:t>
+            </a:r>
+            <a:r>
+              <a:rPr lang="en-US" altLang="ko-KR" sz="1600" dirty="0">
+                <a:latin typeface="D2Coding" panose="020B0609020101020101" pitchFamily="49" charset="-127"/>
+                <a:ea typeface="D2Coding" panose="020B0609020101020101" pitchFamily="49" charset="-127"/>
+              </a:rPr>
+              <a:t>(SF) </a:t>
+            </a:r>
+            <a:r>
+              <a:rPr lang="ko-KR" altLang="en-US" sz="1600" dirty="0">
+                <a:latin typeface="D2Coding" panose="020B0609020101020101" pitchFamily="49" charset="-127"/>
+                <a:ea typeface="D2Coding" panose="020B0609020101020101" pitchFamily="49" charset="-127"/>
+              </a:rPr>
+              <a:t>날씨 어때</a:t>
+            </a:r>
+            <a:r>
+              <a:rPr lang="en-US" altLang="ko-KR" sz="1600" dirty="0">
+                <a:latin typeface="D2Coding" panose="020B0609020101020101" pitchFamily="49" charset="-127"/>
+                <a:ea typeface="D2Coding" panose="020B0609020101020101" pitchFamily="49" charset="-127"/>
+              </a:rPr>
+              <a:t>?"</a:t>
+            </a:r>
+            <a:r>
+              <a:rPr lang="ko-KR" altLang="en-US" sz="1600" dirty="0">
+                <a:latin typeface="D2Coding" panose="020B0609020101020101" pitchFamily="49" charset="-127"/>
+                <a:ea typeface="D2Coding" panose="020B0609020101020101" pitchFamily="49" charset="-127"/>
+              </a:rPr>
+              <a:t>라고 묻고</a:t>
+            </a:r>
+            <a:r>
+              <a:rPr lang="en-US" altLang="ko-KR" sz="1600" dirty="0">
+                <a:latin typeface="D2Coding" panose="020B0609020101020101" pitchFamily="49" charset="-127"/>
+                <a:ea typeface="D2Coding" panose="020B0609020101020101" pitchFamily="49" charset="-127"/>
+              </a:rPr>
+              <a:t>, </a:t>
+            </a:r>
+            <a:r>
+              <a:rPr lang="ko-KR" altLang="en-US" sz="1600" dirty="0">
+                <a:latin typeface="D2Coding" panose="020B0609020101020101" pitchFamily="49" charset="-127"/>
+                <a:ea typeface="D2Coding" panose="020B0609020101020101" pitchFamily="49" charset="-127"/>
+              </a:rPr>
+              <a:t>이어서 </a:t>
+            </a:r>
+            <a:r>
+              <a:rPr lang="en-US" altLang="ko-KR" sz="1600" dirty="0">
+                <a:latin typeface="D2Coding" panose="020B0609020101020101" pitchFamily="49" charset="-127"/>
+                <a:ea typeface="D2Coding" panose="020B0609020101020101" pitchFamily="49" charset="-127"/>
+              </a:rPr>
+              <a:t>"</a:t>
+            </a:r>
+            <a:r>
+              <a:rPr lang="ko-KR" altLang="en-US" sz="1600" dirty="0">
+                <a:latin typeface="D2Coding" panose="020B0609020101020101" pitchFamily="49" charset="-127"/>
+                <a:ea typeface="D2Coding" panose="020B0609020101020101" pitchFamily="49" charset="-127"/>
+              </a:rPr>
+              <a:t>그럼 </a:t>
+            </a:r>
+            <a:r>
+              <a:rPr lang="en-US" altLang="ko-KR" sz="1600" dirty="0">
+                <a:latin typeface="D2Coding" panose="020B0609020101020101" pitchFamily="49" charset="-127"/>
+                <a:ea typeface="D2Coding" panose="020B0609020101020101" pitchFamily="49" charset="-127"/>
+              </a:rPr>
+              <a:t>LA</a:t>
+            </a:r>
+            <a:r>
+              <a:rPr lang="ko-KR" altLang="en-US" sz="1600" dirty="0">
+                <a:latin typeface="D2Coding" panose="020B0609020101020101" pitchFamily="49" charset="-127"/>
+                <a:ea typeface="D2Coding" panose="020B0609020101020101" pitchFamily="49" charset="-127"/>
+              </a:rPr>
+              <a:t>는</a:t>
+            </a:r>
+            <a:r>
+              <a:rPr lang="en-US" altLang="ko-KR" sz="1600" dirty="0">
+                <a:latin typeface="D2Coding" panose="020B0609020101020101" pitchFamily="49" charset="-127"/>
+                <a:ea typeface="D2Coding" panose="020B0609020101020101" pitchFamily="49" charset="-127"/>
+              </a:rPr>
+              <a:t>?"</a:t>
+            </a:r>
+            <a:r>
+              <a:rPr lang="ko-KR" altLang="en-US" sz="1600" dirty="0">
+                <a:latin typeface="D2Coding" panose="020B0609020101020101" pitchFamily="49" charset="-127"/>
+                <a:ea typeface="D2Coding" panose="020B0609020101020101" pitchFamily="49" charset="-127"/>
+              </a:rPr>
+              <a:t>이라고 했다면</a:t>
+            </a:r>
+            <a:r>
+              <a:rPr lang="en-US" altLang="ko-KR" sz="1600" dirty="0">
+                <a:latin typeface="D2Coding" panose="020B0609020101020101" pitchFamily="49" charset="-127"/>
+                <a:ea typeface="D2Coding" panose="020B0609020101020101" pitchFamily="49" charset="-127"/>
+              </a:rPr>
+              <a:t>, </a:t>
+            </a:r>
+            <a:r>
+              <a:rPr lang="ko-KR" altLang="en-US" sz="1600" dirty="0">
+                <a:latin typeface="D2Coding" panose="020B0609020101020101" pitchFamily="49" charset="-127"/>
+                <a:ea typeface="D2Coding" panose="020B0609020101020101" pitchFamily="49" charset="-127"/>
+              </a:rPr>
+              <a:t>컴퓨터는 </a:t>
+            </a:r>
+            <a:r>
+              <a:rPr lang="en-US" altLang="ko-KR" sz="1600" dirty="0">
+                <a:latin typeface="D2Coding" panose="020B0609020101020101" pitchFamily="49" charset="-127"/>
+                <a:ea typeface="D2Coding" panose="020B0609020101020101" pitchFamily="49" charset="-127"/>
+              </a:rPr>
+              <a:t>LA</a:t>
+            </a:r>
+            <a:r>
+              <a:rPr lang="ko-KR" altLang="en-US" sz="1600" dirty="0">
+                <a:latin typeface="D2Coding" panose="020B0609020101020101" pitchFamily="49" charset="-127"/>
+                <a:ea typeface="D2Coding" panose="020B0609020101020101" pitchFamily="49" charset="-127"/>
+              </a:rPr>
+              <a:t>의 무엇을 묻는지 알 수 없습니다</a:t>
+            </a:r>
+            <a:r>
+              <a:rPr lang="en-US" altLang="ko-KR" sz="1600" dirty="0">
+                <a:latin typeface="D2Coding" panose="020B0609020101020101" pitchFamily="49" charset="-127"/>
+                <a:ea typeface="D2Coding" panose="020B0609020101020101" pitchFamily="49" charset="-127"/>
+              </a:rPr>
+              <a:t>. </a:t>
+            </a:r>
+            <a:r>
+              <a:rPr lang="ko-KR" altLang="en-US" sz="1600" dirty="0">
+                <a:latin typeface="D2Coding" panose="020B0609020101020101" pitchFamily="49" charset="-127"/>
+                <a:ea typeface="D2Coding" panose="020B0609020101020101" pitchFamily="49" charset="-127"/>
+              </a:rPr>
+              <a:t>이전 대화 맥락을 합쳐 </a:t>
+            </a:r>
+            <a:r>
+              <a:rPr lang="en-US" altLang="ko-KR" sz="1600" dirty="0">
+                <a:latin typeface="D2Coding" panose="020B0609020101020101" pitchFamily="49" charset="-127"/>
+                <a:ea typeface="D2Coding" panose="020B0609020101020101" pitchFamily="49" charset="-127"/>
+              </a:rPr>
+              <a:t>LA </a:t>
+            </a:r>
+            <a:r>
+              <a:rPr lang="ko-KR" altLang="en-US" sz="1600" dirty="0">
+                <a:latin typeface="D2Coding" panose="020B0609020101020101" pitchFamily="49" charset="-127"/>
+                <a:ea typeface="D2Coding" panose="020B0609020101020101" pitchFamily="49" charset="-127"/>
+              </a:rPr>
+              <a:t>날씨라는 온전한 질문으로 복원하라</a:t>
+            </a:r>
+            <a:r>
+              <a:rPr lang="en-US" altLang="ko-KR" sz="1600" dirty="0">
+                <a:latin typeface="D2Coding" panose="020B0609020101020101" pitchFamily="49" charset="-127"/>
+                <a:ea typeface="D2Coding" panose="020B0609020101020101" pitchFamily="49" charset="-127"/>
+              </a:rPr>
+              <a:t>!(</a:t>
+            </a:r>
+            <a:r>
+              <a:rPr lang="en-US" altLang="ko-KR" sz="1600" dirty="0" err="1">
+                <a:latin typeface="D2Coding" panose="020B0609020101020101" pitchFamily="49" charset="-127"/>
+                <a:ea typeface="D2Coding" panose="020B0609020101020101" pitchFamily="49" charset="-127"/>
+              </a:rPr>
+              <a:t>ConversationalRetrievalChain</a:t>
+            </a:r>
+            <a:r>
+              <a:rPr lang="en-US" altLang="ko-KR" sz="1600" dirty="0">
+                <a:latin typeface="D2Coding" panose="020B0609020101020101" pitchFamily="49" charset="-127"/>
+                <a:ea typeface="D2Coding" panose="020B0609020101020101" pitchFamily="49" charset="-127"/>
+              </a:rPr>
+              <a:t>)</a:t>
+            </a:r>
+          </a:p>
+          <a:p>
+            <a:pPr marL="742950" lvl="1" indent="-285750">
+              <a:buFont typeface="Wingdings" panose="05000000000000000000" pitchFamily="2" charset="2"/>
+              <a:buChar char="v"/>
+            </a:pPr>
+            <a:endParaRPr lang="en-US" altLang="ko-KR" sz="1600" dirty="0">
+              <a:latin typeface="D2Coding" panose="020B0609020101020101" pitchFamily="49" charset="-127"/>
+              <a:ea typeface="D2Coding" panose="020B0609020101020101" pitchFamily="49" charset="-127"/>
+            </a:endParaRPr>
+          </a:p>
+          <a:p>
+            <a:pPr marL="742950" lvl="1" indent="-285750">
+              <a:buFont typeface="Wingdings" panose="05000000000000000000" pitchFamily="2" charset="2"/>
+              <a:buChar char="v"/>
+            </a:pPr>
+            <a:r>
+              <a:rPr lang="ko-KR" altLang="en-US" sz="1600" dirty="0" err="1">
+                <a:latin typeface="D2Coding" panose="020B0609020101020101" pitchFamily="49" charset="-127"/>
+                <a:ea typeface="D2Coding" panose="020B0609020101020101" pitchFamily="49" charset="-127"/>
+              </a:rPr>
+              <a:t>검색망</a:t>
+            </a:r>
+            <a:r>
+              <a:rPr lang="ko-KR" altLang="en-US" sz="1600" dirty="0">
+                <a:latin typeface="D2Coding" panose="020B0609020101020101" pitchFamily="49" charset="-127"/>
+                <a:ea typeface="D2Coding" panose="020B0609020101020101" pitchFamily="49" charset="-127"/>
+              </a:rPr>
+              <a:t> 넓히기 </a:t>
+            </a:r>
+            <a:r>
+              <a:rPr lang="en-US" altLang="ko-KR" sz="1600" dirty="0">
+                <a:latin typeface="D2Coding" panose="020B0609020101020101" pitchFamily="49" charset="-127"/>
+                <a:ea typeface="D2Coding" panose="020B0609020101020101" pitchFamily="49" charset="-127"/>
+              </a:rPr>
+              <a:t>(Casting a wider net):</a:t>
+            </a:r>
+            <a:r>
+              <a:rPr lang="ko-KR" altLang="en-US" sz="1600" dirty="0">
+                <a:latin typeface="D2Coding" panose="020B0609020101020101" pitchFamily="49" charset="-127"/>
+                <a:ea typeface="D2Coding" panose="020B0609020101020101" pitchFamily="49" charset="-127"/>
+              </a:rPr>
+              <a:t> </a:t>
+            </a:r>
+            <a:r>
+              <a:rPr lang="en-US" altLang="ko-KR" sz="1600" dirty="0">
+                <a:latin typeface="D2Coding" panose="020B0609020101020101" pitchFamily="49" charset="-127"/>
+                <a:ea typeface="D2Coding" panose="020B0609020101020101" pitchFamily="49" charset="-127"/>
+              </a:rPr>
+              <a:t>Multi-Query</a:t>
+            </a:r>
+            <a:r>
+              <a:rPr lang="ko-KR" altLang="en-US" sz="1600" dirty="0">
+                <a:latin typeface="D2Coding" panose="020B0609020101020101" pitchFamily="49" charset="-127"/>
+                <a:ea typeface="D2Coding" panose="020B0609020101020101" pitchFamily="49" charset="-127"/>
+              </a:rPr>
+              <a:t>와 </a:t>
+            </a:r>
+            <a:r>
+              <a:rPr lang="en-US" altLang="ko-KR" sz="1600" dirty="0">
+                <a:latin typeface="D2Coding" panose="020B0609020101020101" pitchFamily="49" charset="-127"/>
+                <a:ea typeface="D2Coding" panose="020B0609020101020101" pitchFamily="49" charset="-127"/>
+              </a:rPr>
+              <a:t>RAG-Fusion</a:t>
+            </a:r>
+            <a:r>
+              <a:rPr lang="ko-KR" altLang="en-US" sz="1600" dirty="0">
+                <a:latin typeface="D2Coding" panose="020B0609020101020101" pitchFamily="49" charset="-127"/>
+                <a:ea typeface="D2Coding" panose="020B0609020101020101" pitchFamily="49" charset="-127"/>
+              </a:rPr>
+              <a:t>의 원리로 유의어나 연관 질문들을 여러 개 생성해 냄으로써 단 한 번의 검색으로는 놓칠 수 있었던 정답 문서들을 촘촘하게 찾아내라</a:t>
+            </a:r>
+            <a:r>
+              <a:rPr lang="en-US" altLang="ko-KR" sz="1600" dirty="0">
+                <a:latin typeface="D2Coding" panose="020B0609020101020101" pitchFamily="49" charset="-127"/>
+                <a:ea typeface="D2Coding" panose="020B0609020101020101" pitchFamily="49" charset="-127"/>
+              </a:rPr>
+              <a:t>!</a:t>
+            </a:r>
+          </a:p>
+        </p:txBody>
+      </p:sp>
+    </p:spTree>
+    <p:extLst>
+      <p:ext uri="{BB962C8B-B14F-4D97-AF65-F5344CB8AC3E}">
+        <p14:creationId xmlns:p14="http://schemas.microsoft.com/office/powerpoint/2010/main" val="4064725849"/>
+      </p:ext>
+    </p:extLst>
+  </p:cSld>
+  <p:clrMapOvr>
+    <a:masterClrMapping/>
+  </p:clrMapOvr>
+</p:sld>
+</file>
+
+<file path=ppt/slides/slide15.xml><?xml version="1.0" encoding="utf-8"?>
+<p:sld xmlns:a="http://schemas.openxmlformats.org/drawingml/2006/main" xmlns:r="http://schemas.openxmlformats.org/officeDocument/2006/relationships" xmlns:p="http://schemas.openxmlformats.org/presentationml/2006/main">
+  <p:cSld>
+    <p:spTree>
+      <p:nvGrpSpPr>
+        <p:cNvPr id="1" name="">
+          <a:extLst>
+            <a:ext uri="{FF2B5EF4-FFF2-40B4-BE49-F238E27FC236}">
+              <a16:creationId xmlns:a16="http://schemas.microsoft.com/office/drawing/2014/main" id="{0D46E461-5CBD-3C82-01EF-70D3B1BB8A39}"/>
+            </a:ext>
+          </a:extLst>
+        </p:cNvPr>
+        <p:cNvGrpSpPr/>
+        <p:nvPr/>
+      </p:nvGrpSpPr>
+      <p:grpSpPr>
+        <a:xfrm>
+          <a:off x="0" y="0"/>
+          <a:ext cx="0" cy="0"/>
+          <a:chOff x="0" y="0"/>
+          <a:chExt cx="0" cy="0"/>
+        </a:xfrm>
+      </p:grpSpPr>
+      <p:sp>
+        <p:nvSpPr>
+          <p:cNvPr id="7" name="직사각형 6">
+            <a:extLst>
+              <a:ext uri="{FF2B5EF4-FFF2-40B4-BE49-F238E27FC236}">
+                <a16:creationId xmlns:a16="http://schemas.microsoft.com/office/drawing/2014/main" id="{3BC9C171-5FD1-C19E-6578-901B156E2161}"/>
+              </a:ext>
+            </a:extLst>
+          </p:cNvPr>
+          <p:cNvSpPr/>
+          <p:nvPr/>
+        </p:nvSpPr>
+        <p:spPr>
+          <a:xfrm>
+            <a:off x="2152650" y="3658176"/>
+            <a:ext cx="5676900" cy="466149"/>
+          </a:xfrm>
+          <a:prstGeom prst="rect">
+            <a:avLst/>
+          </a:prstGeom>
+          <a:solidFill>
+            <a:schemeClr val="bg1">
+              <a:lumMod val="85000"/>
+            </a:schemeClr>
+          </a:solidFill>
+          <a:ln>
+            <a:noFill/>
+          </a:ln>
+        </p:spPr>
+        <p:style>
+          <a:lnRef idx="2">
+            <a:schemeClr val="accent1">
+              <a:shade val="15000"/>
+            </a:schemeClr>
+          </a:lnRef>
+          <a:fillRef idx="1">
+            <a:schemeClr val="accent1"/>
+          </a:fillRef>
+          <a:effectRef idx="0">
+            <a:schemeClr val="accent1"/>
+          </a:effectRef>
+          <a:fontRef idx="minor">
+            <a:schemeClr val="lt1"/>
+          </a:fontRef>
+        </p:style>
+        <p:txBody>
+          <a:bodyPr rtlCol="0" anchor="ctr"/>
+          <a:lstStyle/>
+          <a:p>
+            <a:pPr algn="ctr"/>
+            <a:endParaRPr lang="ko-KR" altLang="en-US"/>
+          </a:p>
+        </p:txBody>
+      </p:sp>
+      <p:sp>
+        <p:nvSpPr>
+          <p:cNvPr id="4" name="슬라이드 번호 개체 틀 3">
+            <a:extLst>
+              <a:ext uri="{FF2B5EF4-FFF2-40B4-BE49-F238E27FC236}">
+                <a16:creationId xmlns:a16="http://schemas.microsoft.com/office/drawing/2014/main" id="{E596177E-948F-8948-C77F-0B2D47F01D19}"/>
+              </a:ext>
+            </a:extLst>
+          </p:cNvPr>
+          <p:cNvSpPr>
+            <a:spLocks noGrp="1"/>
+          </p:cNvSpPr>
+          <p:nvPr>
+            <p:ph type="sldNum" sz="quarter" idx="12"/>
+          </p:nvPr>
+        </p:nvSpPr>
+        <p:spPr>
+          <a:xfrm>
+            <a:off x="10514011" y="6036261"/>
+            <a:ext cx="753545" cy="365125"/>
+          </a:xfrm>
+        </p:spPr>
+        <p:txBody>
+          <a:bodyPr/>
+          <a:lstStyle/>
+          <a:p>
+            <a:fld id="{D57F1E4F-1CFF-5643-939E-217C01CDF565}" type="slidenum">
+              <a:rPr lang="en-US" smtClean="0"/>
+              <a:pPr/>
+              <a:t>15</a:t>
+            </a:fld>
+            <a:endParaRPr lang="en-US" dirty="0"/>
+          </a:p>
+        </p:txBody>
+      </p:sp>
+      <p:sp>
+        <p:nvSpPr>
+          <p:cNvPr id="3" name="제목 1">
+            <a:extLst>
+              <a:ext uri="{FF2B5EF4-FFF2-40B4-BE49-F238E27FC236}">
+                <a16:creationId xmlns:a16="http://schemas.microsoft.com/office/drawing/2014/main" id="{8F3BB8CC-BF29-6D14-D7CE-44DADEBEDC6B}"/>
+              </a:ext>
+            </a:extLst>
+          </p:cNvPr>
+          <p:cNvSpPr txBox="1">
+            <a:spLocks/>
+          </p:cNvSpPr>
+          <p:nvPr/>
+        </p:nvSpPr>
+        <p:spPr>
+          <a:xfrm>
+            <a:off x="475645" y="481983"/>
+            <a:ext cx="10353762" cy="766439"/>
+          </a:xfrm>
+          <a:prstGeom prst="rect">
+            <a:avLst/>
+          </a:prstGeom>
+        </p:spPr>
+        <p:txBody>
+          <a:bodyPr vert="horz" lIns="91440" tIns="45720" rIns="91440" bIns="45720" rtlCol="0" anchor="ctr">
+            <a:normAutofit/>
+          </a:bodyPr>
+          <a:lstStyle>
+            <a:lvl1pPr algn="ctr" defTabSz="914400" rtl="0" eaLnBrk="1" latinLnBrk="1" hangingPunct="1">
+              <a:lnSpc>
+                <a:spcPct val="90000"/>
+              </a:lnSpc>
+              <a:spcBef>
+                <a:spcPct val="0"/>
+              </a:spcBef>
+              <a:buNone/>
+              <a:defRPr sz="3200" kern="1200" cap="all" baseline="0">
+                <a:solidFill>
+                  <a:schemeClr val="tx1"/>
+                </a:solidFill>
+                <a:effectLst/>
+                <a:latin typeface="Batang" panose="02030600000101010101" pitchFamily="18" charset="-127"/>
+                <a:ea typeface="Batang" panose="02030600000101010101" pitchFamily="18" charset="-127"/>
+                <a:cs typeface="+mj-cs"/>
+              </a:defRPr>
+            </a:lvl1pPr>
+          </a:lstStyle>
+          <a:p>
+            <a:pPr algn="l"/>
+            <a:r>
+              <a:rPr lang="en-US" altLang="ko-KR" sz="2800" cap="none" dirty="0">
+                <a:solidFill>
+                  <a:schemeClr val="bg2">
+                    <a:lumMod val="25000"/>
+                  </a:schemeClr>
+                </a:solidFill>
+                <a:latin typeface="D2Coding" panose="020B0609020101020101" pitchFamily="49" charset="-127"/>
+                <a:ea typeface="D2Coding" panose="020B0609020101020101" pitchFamily="49" charset="-127"/>
+                <a:cs typeface="Segoe UI Light" panose="020B0502040204020203" pitchFamily="34" charset="0"/>
+              </a:rPr>
+              <a:t>Contents</a:t>
+            </a:r>
+            <a:endParaRPr lang="ko-KR" altLang="en-US" sz="2800" cap="none" dirty="0">
+              <a:solidFill>
+                <a:schemeClr val="bg2">
+                  <a:lumMod val="25000"/>
+                </a:schemeClr>
+              </a:solidFill>
+              <a:latin typeface="D2Coding" panose="020B0609020101020101" pitchFamily="49" charset="-127"/>
+              <a:ea typeface="D2Coding" panose="020B0609020101020101" pitchFamily="49" charset="-127"/>
+              <a:cs typeface="Segoe UI Light" panose="020B0502040204020203" pitchFamily="34" charset="0"/>
+            </a:endParaRPr>
+          </a:p>
+        </p:txBody>
+      </p:sp>
+      <p:sp>
+        <p:nvSpPr>
           <p:cNvPr id="5" name="TextBox 4">
             <a:extLst>
               <a:ext uri="{FF2B5EF4-FFF2-40B4-BE49-F238E27FC236}">
-                <a16:creationId xmlns:a16="http://schemas.microsoft.com/office/drawing/2014/main" id="{C4D5CBB4-32B5-6778-4C36-D7987FBAD9AD}"/>
+                <a16:creationId xmlns:a16="http://schemas.microsoft.com/office/drawing/2014/main" id="{DECB1B7E-1C6B-C25C-D18B-96DDDF736764}"/>
+              </a:ext>
+            </a:extLst>
+          </p:cNvPr>
+          <p:cNvSpPr txBox="1"/>
+          <p:nvPr/>
+        </p:nvSpPr>
+        <p:spPr>
+          <a:xfrm>
+            <a:off x="2733675" y="1381701"/>
+            <a:ext cx="4791075" cy="4994316"/>
+          </a:xfrm>
+          <a:prstGeom prst="rect">
+            <a:avLst/>
+          </a:prstGeom>
+          <a:noFill/>
+        </p:spPr>
+        <p:txBody>
+          <a:bodyPr wrap="square">
+            <a:spAutoFit/>
+          </a:bodyPr>
+          <a:lstStyle/>
+          <a:p>
+            <a:pPr marL="400050" indent="-400050">
+              <a:lnSpc>
+                <a:spcPct val="150000"/>
+              </a:lnSpc>
+              <a:buFont typeface="+mj-lt"/>
+              <a:buAutoNum type="romanUcPeriod"/>
+            </a:pPr>
+            <a:r>
+              <a:rPr lang="en-US" altLang="ko-KR" dirty="0">
+                <a:latin typeface="D2Coding" panose="020B0609020101020101" pitchFamily="49" charset="-127"/>
+                <a:ea typeface="D2Coding" panose="020B0609020101020101" pitchFamily="49" charset="-127"/>
+              </a:rPr>
+              <a:t>Query Transformation     </a:t>
+            </a:r>
+          </a:p>
+          <a:p>
+            <a:pPr marL="857250" lvl="1" indent="-400050">
+              <a:lnSpc>
+                <a:spcPct val="150000"/>
+              </a:lnSpc>
+              <a:buFont typeface="+mj-lt"/>
+              <a:buAutoNum type="romanUcPeriod"/>
+            </a:pPr>
+            <a:r>
+              <a:rPr lang="en-US" altLang="ko-KR" sz="1600" dirty="0">
+                <a:latin typeface="D2Coding" panose="020B0609020101020101" pitchFamily="49" charset="-127"/>
+                <a:ea typeface="D2Coding" panose="020B0609020101020101" pitchFamily="49" charset="-127"/>
+              </a:rPr>
+              <a:t>Rewrite-Retrieve-Read     </a:t>
+            </a:r>
+          </a:p>
+          <a:p>
+            <a:pPr marL="857250" lvl="1" indent="-400050">
+              <a:lnSpc>
+                <a:spcPct val="150000"/>
+              </a:lnSpc>
+              <a:buFont typeface="+mj-lt"/>
+              <a:buAutoNum type="romanUcPeriod"/>
+            </a:pPr>
+            <a:r>
+              <a:rPr lang="en-US" altLang="ko-KR" sz="1600" dirty="0">
+                <a:latin typeface="D2Coding" panose="020B0609020101020101" pitchFamily="49" charset="-127"/>
+                <a:ea typeface="D2Coding" panose="020B0609020101020101" pitchFamily="49" charset="-127"/>
+              </a:rPr>
+              <a:t>Multi-Query Retrieval     </a:t>
+            </a:r>
+          </a:p>
+          <a:p>
+            <a:pPr marL="857250" lvl="1" indent="-400050">
+              <a:lnSpc>
+                <a:spcPct val="150000"/>
+              </a:lnSpc>
+              <a:buFont typeface="+mj-lt"/>
+              <a:buAutoNum type="romanUcPeriod"/>
+            </a:pPr>
+            <a:r>
+              <a:rPr lang="en-US" altLang="ko-KR" sz="1600" dirty="0">
+                <a:latin typeface="D2Coding" panose="020B0609020101020101" pitchFamily="49" charset="-127"/>
+                <a:ea typeface="D2Coding" panose="020B0609020101020101" pitchFamily="49" charset="-127"/>
+              </a:rPr>
+              <a:t>RAG-Fusion     </a:t>
+            </a:r>
+          </a:p>
+          <a:p>
+            <a:pPr marL="857250" lvl="1" indent="-400050">
+              <a:lnSpc>
+                <a:spcPct val="150000"/>
+              </a:lnSpc>
+              <a:buFont typeface="+mj-lt"/>
+              <a:buAutoNum type="romanUcPeriod"/>
+            </a:pPr>
+            <a:r>
+              <a:rPr lang="en-US" altLang="ko-KR" sz="1600" dirty="0">
+                <a:latin typeface="D2Coding" panose="020B0609020101020101" pitchFamily="49" charset="-127"/>
+                <a:ea typeface="D2Coding" panose="020B0609020101020101" pitchFamily="49" charset="-127"/>
+              </a:rPr>
+              <a:t>Hypothetical Document Embeddings</a:t>
+            </a:r>
+          </a:p>
+          <a:p>
+            <a:pPr lvl="1">
+              <a:lnSpc>
+                <a:spcPct val="150000"/>
+              </a:lnSpc>
+            </a:pPr>
+            <a:r>
+              <a:rPr lang="en-US" altLang="ko-KR" sz="1600" dirty="0">
+                <a:latin typeface="D2Coding" panose="020B0609020101020101" pitchFamily="49" charset="-127"/>
+                <a:ea typeface="D2Coding" panose="020B0609020101020101" pitchFamily="49" charset="-127"/>
+              </a:rPr>
+              <a:t> </a:t>
+            </a:r>
+          </a:p>
+          <a:p>
+            <a:pPr marL="400050" indent="-400050">
+              <a:lnSpc>
+                <a:spcPct val="150000"/>
+              </a:lnSpc>
+              <a:buFont typeface="+mj-lt"/>
+              <a:buAutoNum type="romanUcPeriod"/>
+            </a:pPr>
+            <a:r>
+              <a:rPr lang="en-US" altLang="ko-KR" dirty="0">
+                <a:latin typeface="D2Coding" panose="020B0609020101020101" pitchFamily="49" charset="-127"/>
+                <a:ea typeface="D2Coding" panose="020B0609020101020101" pitchFamily="49" charset="-127"/>
+              </a:rPr>
+              <a:t>Query Routing     </a:t>
+            </a:r>
+          </a:p>
+          <a:p>
+            <a:pPr marL="857250" lvl="1" indent="-400050">
+              <a:lnSpc>
+                <a:spcPct val="150000"/>
+              </a:lnSpc>
+              <a:buFont typeface="+mj-lt"/>
+              <a:buAutoNum type="romanUcPeriod"/>
+            </a:pPr>
+            <a:r>
+              <a:rPr lang="en-US" altLang="ko-KR" sz="1600" dirty="0">
+                <a:latin typeface="D2Coding" panose="020B0609020101020101" pitchFamily="49" charset="-127"/>
+                <a:ea typeface="D2Coding" panose="020B0609020101020101" pitchFamily="49" charset="-127"/>
+              </a:rPr>
+              <a:t>Logical Routing     </a:t>
+            </a:r>
+          </a:p>
+          <a:p>
+            <a:pPr marL="857250" lvl="1" indent="-400050">
+              <a:lnSpc>
+                <a:spcPct val="150000"/>
+              </a:lnSpc>
+              <a:buFont typeface="+mj-lt"/>
+              <a:buAutoNum type="romanUcPeriod"/>
+            </a:pPr>
+            <a:r>
+              <a:rPr lang="en-US" altLang="ko-KR" sz="1600" dirty="0">
+                <a:latin typeface="D2Coding" panose="020B0609020101020101" pitchFamily="49" charset="-127"/>
+                <a:ea typeface="D2Coding" panose="020B0609020101020101" pitchFamily="49" charset="-127"/>
+              </a:rPr>
+              <a:t>Semantic Routing </a:t>
+            </a:r>
+          </a:p>
+          <a:p>
+            <a:pPr lvl="1">
+              <a:lnSpc>
+                <a:spcPct val="150000"/>
+              </a:lnSpc>
+            </a:pPr>
+            <a:endParaRPr lang="en-US" altLang="ko-KR" sz="1600" dirty="0">
+              <a:latin typeface="D2Coding" panose="020B0609020101020101" pitchFamily="49" charset="-127"/>
+              <a:ea typeface="D2Coding" panose="020B0609020101020101" pitchFamily="49" charset="-127"/>
+            </a:endParaRPr>
+          </a:p>
+          <a:p>
+            <a:pPr marL="400050" indent="-400050">
+              <a:lnSpc>
+                <a:spcPct val="150000"/>
+              </a:lnSpc>
+              <a:buFont typeface="+mj-lt"/>
+              <a:buAutoNum type="romanUcPeriod"/>
+            </a:pPr>
+            <a:r>
+              <a:rPr lang="en-US" altLang="ko-KR" dirty="0">
+                <a:latin typeface="D2Coding" panose="020B0609020101020101" pitchFamily="49" charset="-127"/>
+                <a:ea typeface="D2Coding" panose="020B0609020101020101" pitchFamily="49" charset="-127"/>
+              </a:rPr>
+              <a:t>Query Construction     </a:t>
+            </a:r>
+          </a:p>
+          <a:p>
+            <a:pPr marL="857250" lvl="1" indent="-400050">
+              <a:lnSpc>
+                <a:spcPct val="150000"/>
+              </a:lnSpc>
+              <a:buFont typeface="+mj-lt"/>
+              <a:buAutoNum type="romanUcPeriod"/>
+            </a:pPr>
+            <a:r>
+              <a:rPr lang="en-US" altLang="ko-KR" sz="1600" dirty="0">
+                <a:latin typeface="D2Coding" panose="020B0609020101020101" pitchFamily="49" charset="-127"/>
+                <a:ea typeface="D2Coding" panose="020B0609020101020101" pitchFamily="49" charset="-127"/>
+              </a:rPr>
+              <a:t>Text-to-Metadata Filter     </a:t>
+            </a:r>
+          </a:p>
+          <a:p>
+            <a:pPr marL="857250" lvl="1" indent="-400050">
+              <a:lnSpc>
+                <a:spcPct val="150000"/>
+              </a:lnSpc>
+              <a:buFont typeface="+mj-lt"/>
+              <a:buAutoNum type="romanUcPeriod"/>
+            </a:pPr>
+            <a:r>
+              <a:rPr lang="en-US" altLang="ko-KR" sz="1600" dirty="0">
+                <a:latin typeface="D2Coding" panose="020B0609020101020101" pitchFamily="49" charset="-127"/>
+                <a:ea typeface="D2Coding" panose="020B0609020101020101" pitchFamily="49" charset="-127"/>
+              </a:rPr>
+              <a:t>Text-to-SQL</a:t>
+            </a:r>
+            <a:endParaRPr lang="ko-KR" altLang="en-US" sz="1600" dirty="0">
+              <a:latin typeface="D2Coding" panose="020B0609020101020101" pitchFamily="49" charset="-127"/>
+              <a:ea typeface="D2Coding" panose="020B0609020101020101" pitchFamily="49" charset="-127"/>
+            </a:endParaRPr>
+          </a:p>
+        </p:txBody>
+      </p:sp>
+    </p:spTree>
+    <p:extLst>
+      <p:ext uri="{BB962C8B-B14F-4D97-AF65-F5344CB8AC3E}">
+        <p14:creationId xmlns:p14="http://schemas.microsoft.com/office/powerpoint/2010/main" val="3462557050"/>
+      </p:ext>
+    </p:extLst>
+  </p:cSld>
+  <p:clrMapOvr>
+    <a:masterClrMapping/>
+  </p:clrMapOvr>
+</p:sld>
+</file>
+
+<file path=ppt/slides/slide16.xml><?xml version="1.0" encoding="utf-8"?>
+<p:sld xmlns:a="http://schemas.openxmlformats.org/drawingml/2006/main" xmlns:r="http://schemas.openxmlformats.org/officeDocument/2006/relationships" xmlns:p="http://schemas.openxmlformats.org/presentationml/2006/main">
+  <p:cSld>
+    <p:spTree>
+      <p:nvGrpSpPr>
+        <p:cNvPr id="1" name="">
+          <a:extLst>
+            <a:ext uri="{FF2B5EF4-FFF2-40B4-BE49-F238E27FC236}">
+              <a16:creationId xmlns:a16="http://schemas.microsoft.com/office/drawing/2014/main" id="{E319B1D0-AA4E-FFDF-46BF-D75795FF1288}"/>
+            </a:ext>
+          </a:extLst>
+        </p:cNvPr>
+        <p:cNvGrpSpPr/>
+        <p:nvPr/>
+      </p:nvGrpSpPr>
+      <p:grpSpPr>
+        <a:xfrm>
+          <a:off x="0" y="0"/>
+          <a:ext cx="0" cy="0"/>
+          <a:chOff x="0" y="0"/>
+          <a:chExt cx="0" cy="0"/>
+        </a:xfrm>
+      </p:grpSpPr>
+      <p:sp>
+        <p:nvSpPr>
+          <p:cNvPr id="4" name="슬라이드 번호 개체 틀 3">
+            <a:extLst>
+              <a:ext uri="{FF2B5EF4-FFF2-40B4-BE49-F238E27FC236}">
+                <a16:creationId xmlns:a16="http://schemas.microsoft.com/office/drawing/2014/main" id="{EDDEFC5F-326D-26B9-2ACC-A68DB81FA422}"/>
+              </a:ext>
+            </a:extLst>
+          </p:cNvPr>
+          <p:cNvSpPr>
+            <a:spLocks noGrp="1"/>
+          </p:cNvSpPr>
+          <p:nvPr>
+            <p:ph type="sldNum" sz="quarter" idx="12"/>
+          </p:nvPr>
+        </p:nvSpPr>
+        <p:spPr>
+          <a:xfrm>
+            <a:off x="10514011" y="6036261"/>
+            <a:ext cx="753545" cy="365125"/>
+          </a:xfrm>
+        </p:spPr>
+        <p:txBody>
+          <a:bodyPr/>
+          <a:lstStyle/>
+          <a:p>
+            <a:fld id="{D57F1E4F-1CFF-5643-939E-217C01CDF565}" type="slidenum">
+              <a:rPr lang="en-US" smtClean="0"/>
+              <a:pPr/>
+              <a:t>16</a:t>
+            </a:fld>
+            <a:endParaRPr lang="en-US" dirty="0"/>
+          </a:p>
+        </p:txBody>
+      </p:sp>
+      <p:sp>
+        <p:nvSpPr>
+          <p:cNvPr id="3" name="제목 1">
+            <a:extLst>
+              <a:ext uri="{FF2B5EF4-FFF2-40B4-BE49-F238E27FC236}">
+                <a16:creationId xmlns:a16="http://schemas.microsoft.com/office/drawing/2014/main" id="{37930725-FCAF-2D11-6493-8D2225712698}"/>
+              </a:ext>
+            </a:extLst>
+          </p:cNvPr>
+          <p:cNvSpPr txBox="1">
+            <a:spLocks/>
+          </p:cNvSpPr>
+          <p:nvPr/>
+        </p:nvSpPr>
+        <p:spPr>
+          <a:xfrm>
+            <a:off x="475645" y="481983"/>
+            <a:ext cx="10353762" cy="766439"/>
+          </a:xfrm>
+          <a:prstGeom prst="rect">
+            <a:avLst/>
+          </a:prstGeom>
+        </p:spPr>
+        <p:txBody>
+          <a:bodyPr vert="horz" lIns="91440" tIns="45720" rIns="91440" bIns="45720" rtlCol="0" anchor="ctr">
+            <a:normAutofit/>
+          </a:bodyPr>
+          <a:lstStyle>
+            <a:lvl1pPr algn="ctr" defTabSz="914400" rtl="0" eaLnBrk="1" latinLnBrk="1" hangingPunct="1">
+              <a:lnSpc>
+                <a:spcPct val="90000"/>
+              </a:lnSpc>
+              <a:spcBef>
+                <a:spcPct val="0"/>
+              </a:spcBef>
+              <a:buNone/>
+              <a:defRPr sz="3200" kern="1200" cap="all" baseline="0">
+                <a:solidFill>
+                  <a:schemeClr val="tx1"/>
+                </a:solidFill>
+                <a:effectLst/>
+                <a:latin typeface="Batang" panose="02030600000101010101" pitchFamily="18" charset="-127"/>
+                <a:ea typeface="Batang" panose="02030600000101010101" pitchFamily="18" charset="-127"/>
+                <a:cs typeface="+mj-cs"/>
+              </a:defRPr>
+            </a:lvl1pPr>
+          </a:lstStyle>
+          <a:p>
+            <a:pPr algn="l"/>
+            <a:r>
+              <a:rPr lang="en-US" altLang="ko-KR" sz="2800" cap="none" dirty="0">
+                <a:solidFill>
+                  <a:schemeClr val="bg2">
+                    <a:lumMod val="25000"/>
+                  </a:schemeClr>
+                </a:solidFill>
+                <a:latin typeface="D2Coding" panose="020B0609020101020101" pitchFamily="49" charset="-127"/>
+                <a:ea typeface="D2Coding" panose="020B0609020101020101" pitchFamily="49" charset="-127"/>
+                <a:cs typeface="Segoe UI Light" panose="020B0502040204020203" pitchFamily="34" charset="0"/>
+              </a:rPr>
+              <a:t>Query Routing </a:t>
+            </a:r>
+            <a:endParaRPr lang="ko-KR" altLang="en-US" sz="2800" cap="none" dirty="0">
+              <a:solidFill>
+                <a:schemeClr val="bg2">
+                  <a:lumMod val="25000"/>
+                </a:schemeClr>
+              </a:solidFill>
+              <a:latin typeface="D2Coding" panose="020B0609020101020101" pitchFamily="49" charset="-127"/>
+              <a:ea typeface="D2Coding" panose="020B0609020101020101" pitchFamily="49" charset="-127"/>
+              <a:cs typeface="Segoe UI Light" panose="020B0502040204020203" pitchFamily="34" charset="0"/>
+            </a:endParaRPr>
+          </a:p>
+        </p:txBody>
+      </p:sp>
+      <p:sp>
+        <p:nvSpPr>
+          <p:cNvPr id="5" name="TextBox 4">
+            <a:extLst>
+              <a:ext uri="{FF2B5EF4-FFF2-40B4-BE49-F238E27FC236}">
+                <a16:creationId xmlns:a16="http://schemas.microsoft.com/office/drawing/2014/main" id="{4209F91F-AC31-CCC8-D12B-09B1EC48CCA1}"/>
               </a:ext>
             </a:extLst>
           </p:cNvPr>
@@ -3206,7 +6132,7 @@
                 <a:latin typeface="D2Coding" panose="020B0609020101020101" pitchFamily="49" charset="-127"/>
                 <a:ea typeface="D2Coding" panose="020B0609020101020101" pitchFamily="49" charset="-127"/>
               </a:rPr>
-              <a:t>Rewrite-Retrieve-Read</a:t>
+              <a:t>Logical Routing</a:t>
             </a:r>
             <a:endParaRPr lang="ko-KR" altLang="en-US" dirty="0"/>
           </a:p>
@@ -3214,10 +6140,10 @@
       </p:sp>
       <p:pic>
         <p:nvPicPr>
-          <p:cNvPr id="7" name="그림 6">
+          <p:cNvPr id="8" name="그림 7">
             <a:extLst>
               <a:ext uri="{FF2B5EF4-FFF2-40B4-BE49-F238E27FC236}">
-                <a16:creationId xmlns:a16="http://schemas.microsoft.com/office/drawing/2014/main" id="{D27233DF-4C16-66F3-20FB-FAF524AA1131}"/>
+                <a16:creationId xmlns:a16="http://schemas.microsoft.com/office/drawing/2014/main" id="{0027F0CC-4A4B-98EB-C735-B408F541692D}"/>
               </a:ext>
             </a:extLst>
           </p:cNvPr>
@@ -3234,18 +6160,1366 @@
         </p:blipFill>
         <p:spPr>
           <a:xfrm>
-            <a:off x="6974029" y="2267020"/>
-            <a:ext cx="4054191" cy="2949196"/>
+            <a:off x="647095" y="2753166"/>
+            <a:ext cx="6950042" cy="3177815"/>
           </a:xfrm>
           <a:prstGeom prst="rect">
             <a:avLst/>
           </a:prstGeom>
         </p:spPr>
       </p:pic>
+      <p:sp>
+        <p:nvSpPr>
+          <p:cNvPr id="10" name="TextBox 9">
+            <a:extLst>
+              <a:ext uri="{FF2B5EF4-FFF2-40B4-BE49-F238E27FC236}">
+                <a16:creationId xmlns:a16="http://schemas.microsoft.com/office/drawing/2014/main" id="{299D94A8-9F75-B509-5B85-70D06E5ED9C5}"/>
+              </a:ext>
+            </a:extLst>
+          </p:cNvPr>
+          <p:cNvSpPr txBox="1"/>
+          <p:nvPr/>
+        </p:nvSpPr>
+        <p:spPr>
+          <a:xfrm>
+            <a:off x="552449" y="1248422"/>
+            <a:ext cx="11096625" cy="1162498"/>
+          </a:xfrm>
+          <a:prstGeom prst="rect">
+            <a:avLst/>
+          </a:prstGeom>
+          <a:noFill/>
+        </p:spPr>
+        <p:txBody>
+          <a:bodyPr wrap="square">
+            <a:spAutoFit/>
+          </a:bodyPr>
+          <a:lstStyle/>
+          <a:p>
+            <a:pPr>
+              <a:lnSpc>
+                <a:spcPct val="150000"/>
+              </a:lnSpc>
+              <a:buNone/>
+            </a:pPr>
+            <a:r>
+              <a:rPr lang="en-US" altLang="ko-KR" sz="1600" dirty="0">
+                <a:latin typeface="D2Coding" panose="020B0609020101020101" pitchFamily="49" charset="-127"/>
+                <a:ea typeface="D2Coding" panose="020B0609020101020101" pitchFamily="49" charset="-127"/>
+              </a:rPr>
+              <a:t>LLM</a:t>
+            </a:r>
+            <a:r>
+              <a:rPr lang="ko-KR" altLang="en-US" sz="1600" dirty="0">
+                <a:latin typeface="D2Coding" panose="020B0609020101020101" pitchFamily="49" charset="-127"/>
+                <a:ea typeface="D2Coding" panose="020B0609020101020101" pitchFamily="49" charset="-127"/>
+              </a:rPr>
+              <a:t>의 </a:t>
+            </a:r>
+            <a:r>
+              <a:rPr lang="en-US" altLang="ko-KR" sz="1600" dirty="0">
+                <a:latin typeface="D2Coding" panose="020B0609020101020101" pitchFamily="49" charset="-127"/>
+                <a:ea typeface="D2Coding" panose="020B0609020101020101" pitchFamily="49" charset="-127"/>
+              </a:rPr>
+              <a:t>'</a:t>
+            </a:r>
+            <a:r>
+              <a:rPr lang="ko-KR" altLang="en-US" sz="1600" dirty="0">
+                <a:latin typeface="D2Coding" panose="020B0609020101020101" pitchFamily="49" charset="-127"/>
+                <a:ea typeface="D2Coding" panose="020B0609020101020101" pitchFamily="49" charset="-127"/>
+              </a:rPr>
+              <a:t>추론 능력</a:t>
+            </a:r>
+            <a:r>
+              <a:rPr lang="en-US" altLang="ko-KR" sz="1600" dirty="0">
+                <a:latin typeface="D2Coding" panose="020B0609020101020101" pitchFamily="49" charset="-127"/>
+                <a:ea typeface="D2Coding" panose="020B0609020101020101" pitchFamily="49" charset="-127"/>
+              </a:rPr>
+              <a:t>'</a:t>
+            </a:r>
+            <a:r>
+              <a:rPr lang="ko-KR" altLang="en-US" sz="1600" dirty="0">
+                <a:latin typeface="D2Coding" panose="020B0609020101020101" pitchFamily="49" charset="-127"/>
+                <a:ea typeface="D2Coding" panose="020B0609020101020101" pitchFamily="49" charset="-127"/>
+              </a:rPr>
+              <a:t>을 활용해 정해진 규칙대로 길을 찾는 방식으로</a:t>
+            </a:r>
+            <a:r>
+              <a:rPr lang="en-US" altLang="ko-KR" sz="1600" dirty="0">
+                <a:latin typeface="D2Coding" panose="020B0609020101020101" pitchFamily="49" charset="-127"/>
+                <a:ea typeface="D2Coding" panose="020B0609020101020101" pitchFamily="49" charset="-127"/>
+              </a:rPr>
+              <a:t> </a:t>
+            </a:r>
+            <a:r>
+              <a:rPr lang="en-US" altLang="ko-KR" sz="1600" dirty="0" err="1">
+                <a:latin typeface="D2Coding" panose="020B0609020101020101" pitchFamily="49" charset="-127"/>
+                <a:ea typeface="D2Coding" panose="020B0609020101020101" pitchFamily="49" charset="-127"/>
+              </a:rPr>
+              <a:t>Pydantic</a:t>
+            </a:r>
+            <a:r>
+              <a:rPr lang="ko-KR" altLang="en-US" sz="1600" dirty="0">
+                <a:latin typeface="D2Coding" panose="020B0609020101020101" pitchFamily="49" charset="-127"/>
+                <a:ea typeface="D2Coding" panose="020B0609020101020101" pitchFamily="49" charset="-127"/>
+              </a:rPr>
+              <a:t>이나 </a:t>
+            </a:r>
+            <a:r>
+              <a:rPr lang="en-US" altLang="ko-KR" sz="1600" dirty="0">
+                <a:latin typeface="D2Coding" panose="020B0609020101020101" pitchFamily="49" charset="-127"/>
+                <a:ea typeface="D2Coding" panose="020B0609020101020101" pitchFamily="49" charset="-127"/>
+              </a:rPr>
+              <a:t>Literal</a:t>
+            </a:r>
+            <a:r>
+              <a:rPr lang="ko-KR" altLang="en-US" sz="1600" dirty="0">
+                <a:latin typeface="D2Coding" panose="020B0609020101020101" pitchFamily="49" charset="-127"/>
+                <a:ea typeface="D2Coding" panose="020B0609020101020101" pitchFamily="49" charset="-127"/>
+              </a:rPr>
+              <a:t>을 활용해 결과물의 선택지</a:t>
+            </a:r>
+            <a:r>
+              <a:rPr lang="en-US" altLang="ko-KR" sz="1600" dirty="0">
+                <a:latin typeface="D2Coding" panose="020B0609020101020101" pitchFamily="49" charset="-127"/>
+                <a:ea typeface="D2Coding" panose="020B0609020101020101" pitchFamily="49" charset="-127"/>
+              </a:rPr>
+              <a:t>(</a:t>
+            </a:r>
+            <a:r>
+              <a:rPr lang="ko-KR" altLang="en-US" sz="1600" dirty="0">
+                <a:latin typeface="D2Coding" panose="020B0609020101020101" pitchFamily="49" charset="-127"/>
+                <a:ea typeface="D2Coding" panose="020B0609020101020101" pitchFamily="49" charset="-127"/>
+              </a:rPr>
+              <a:t>스키마</a:t>
+            </a:r>
+            <a:r>
+              <a:rPr lang="en-US" altLang="ko-KR" sz="1600" dirty="0">
+                <a:latin typeface="D2Coding" panose="020B0609020101020101" pitchFamily="49" charset="-127"/>
+                <a:ea typeface="D2Coding" panose="020B0609020101020101" pitchFamily="49" charset="-127"/>
+              </a:rPr>
+              <a:t>)</a:t>
+            </a:r>
+            <a:r>
+              <a:rPr lang="ko-KR" altLang="en-US" sz="1600" dirty="0">
+                <a:latin typeface="D2Coding" panose="020B0609020101020101" pitchFamily="49" charset="-127"/>
+                <a:ea typeface="D2Coding" panose="020B0609020101020101" pitchFamily="49" charset="-127"/>
+              </a:rPr>
+              <a:t>를 엄격히 제한한 뒤</a:t>
+            </a:r>
+            <a:r>
+              <a:rPr lang="en-US" altLang="ko-KR" sz="1600" dirty="0">
+                <a:latin typeface="D2Coding" panose="020B0609020101020101" pitchFamily="49" charset="-127"/>
+                <a:ea typeface="D2Coding" panose="020B0609020101020101" pitchFamily="49" charset="-127"/>
+              </a:rPr>
+              <a:t>, LLM</a:t>
+            </a:r>
+            <a:r>
+              <a:rPr lang="ko-KR" altLang="en-US" sz="1600" dirty="0">
+                <a:latin typeface="D2Coding" panose="020B0609020101020101" pitchFamily="49" charset="-127"/>
+                <a:ea typeface="D2Coding" panose="020B0609020101020101" pitchFamily="49" charset="-127"/>
+              </a:rPr>
+              <a:t>에게 </a:t>
+            </a:r>
+            <a:r>
+              <a:rPr lang="en-US" altLang="ko-KR" sz="1600" dirty="0">
+                <a:latin typeface="D2Coding" panose="020B0609020101020101" pitchFamily="49" charset="-127"/>
+                <a:ea typeface="D2Coding" panose="020B0609020101020101" pitchFamily="49" charset="-127"/>
+              </a:rPr>
+              <a:t>"</a:t>
+            </a:r>
+            <a:r>
+              <a:rPr lang="ko-KR" altLang="en-US" sz="1600" dirty="0">
+                <a:latin typeface="D2Coding" panose="020B0609020101020101" pitchFamily="49" charset="-127"/>
+                <a:ea typeface="D2Coding" panose="020B0609020101020101" pitchFamily="49" charset="-127"/>
+              </a:rPr>
+              <a:t>사용자 질문을 분석해서 이 형식에 맞춰 답해라</a:t>
+            </a:r>
+            <a:r>
+              <a:rPr lang="en-US" altLang="ko-KR" sz="1600" dirty="0">
+                <a:latin typeface="D2Coding" panose="020B0609020101020101" pitchFamily="49" charset="-127"/>
+                <a:ea typeface="D2Coding" panose="020B0609020101020101" pitchFamily="49" charset="-127"/>
+              </a:rPr>
+              <a:t>"</a:t>
+            </a:r>
+            <a:r>
+              <a:rPr lang="ko-KR" altLang="en-US" sz="1600" dirty="0">
+                <a:latin typeface="D2Coding" panose="020B0609020101020101" pitchFamily="49" charset="-127"/>
+                <a:ea typeface="D2Coding" panose="020B0609020101020101" pitchFamily="49" charset="-127"/>
+              </a:rPr>
+              <a:t>고 명령</a:t>
+            </a:r>
+            <a:r>
+              <a:rPr lang="en-US" altLang="ko-KR" sz="1600" dirty="0">
+                <a:latin typeface="D2Coding" panose="020B0609020101020101" pitchFamily="49" charset="-127"/>
+                <a:ea typeface="D2Coding" panose="020B0609020101020101" pitchFamily="49" charset="-127"/>
+              </a:rPr>
+              <a:t>(Function Calling)</a:t>
+            </a:r>
+          </a:p>
+        </p:txBody>
+      </p:sp>
+      <p:sp>
+        <p:nvSpPr>
+          <p:cNvPr id="12" name="TextBox 11">
+            <a:extLst>
+              <a:ext uri="{FF2B5EF4-FFF2-40B4-BE49-F238E27FC236}">
+                <a16:creationId xmlns:a16="http://schemas.microsoft.com/office/drawing/2014/main" id="{97B56ED5-C021-65AF-865F-9F69E5B5B0F2}"/>
+              </a:ext>
+            </a:extLst>
+          </p:cNvPr>
+          <p:cNvSpPr txBox="1"/>
+          <p:nvPr/>
+        </p:nvSpPr>
+        <p:spPr>
+          <a:xfrm>
+            <a:off x="7830155" y="2753166"/>
+            <a:ext cx="3829050" cy="2644635"/>
+          </a:xfrm>
+          <a:prstGeom prst="rect">
+            <a:avLst/>
+          </a:prstGeom>
+          <a:noFill/>
+        </p:spPr>
+        <p:txBody>
+          <a:bodyPr wrap="square">
+            <a:spAutoFit/>
+          </a:bodyPr>
+          <a:lstStyle/>
+          <a:p>
+            <a:pPr marL="285750" indent="-285750">
+              <a:lnSpc>
+                <a:spcPct val="150000"/>
+              </a:lnSpc>
+              <a:buFont typeface="Wingdings" panose="05000000000000000000" pitchFamily="2" charset="2"/>
+              <a:buChar char="v"/>
+            </a:pPr>
+            <a:r>
+              <a:rPr lang="ko-KR" altLang="en-US" sz="1400" dirty="0">
+                <a:latin typeface="D2Coding" panose="020B0609020101020101" pitchFamily="49" charset="-127"/>
+                <a:ea typeface="D2Coding" panose="020B0609020101020101" pitchFamily="49" charset="-127"/>
+              </a:rPr>
+              <a:t>장점</a:t>
+            </a:r>
+            <a:r>
+              <a:rPr lang="en-US" altLang="ko-KR" sz="1400" dirty="0">
+                <a:latin typeface="D2Coding" panose="020B0609020101020101" pitchFamily="49" charset="-127"/>
+                <a:ea typeface="D2Coding" panose="020B0609020101020101" pitchFamily="49" charset="-127"/>
+              </a:rPr>
+              <a:t>:</a:t>
+            </a:r>
+            <a:r>
+              <a:rPr lang="ko-KR" altLang="en-US" sz="1400" dirty="0">
+                <a:latin typeface="D2Coding" panose="020B0609020101020101" pitchFamily="49" charset="-127"/>
+                <a:ea typeface="D2Coding" panose="020B0609020101020101" pitchFamily="49" charset="-127"/>
+              </a:rPr>
+              <a:t> 복잡한 조건문</a:t>
+            </a:r>
+            <a:r>
+              <a:rPr lang="en-US" altLang="ko-KR" sz="1400" dirty="0">
+                <a:latin typeface="D2Coding" panose="020B0609020101020101" pitchFamily="49" charset="-127"/>
+                <a:ea typeface="D2Coding" panose="020B0609020101020101" pitchFamily="49" charset="-127"/>
+              </a:rPr>
+              <a:t>, </a:t>
+            </a:r>
+            <a:r>
+              <a:rPr lang="ko-KR" altLang="en-US" sz="1400" dirty="0">
+                <a:latin typeface="D2Coding" panose="020B0609020101020101" pitchFamily="49" charset="-127"/>
+                <a:ea typeface="D2Coding" panose="020B0609020101020101" pitchFamily="49" charset="-127"/>
+              </a:rPr>
+              <a:t>비즈니스 로직</a:t>
+            </a:r>
+            <a:r>
+              <a:rPr lang="en-US" altLang="ko-KR" sz="1400" dirty="0">
+                <a:latin typeface="D2Coding" panose="020B0609020101020101" pitchFamily="49" charset="-127"/>
+                <a:ea typeface="D2Coding" panose="020B0609020101020101" pitchFamily="49" charset="-127"/>
+              </a:rPr>
+              <a:t>, </a:t>
+            </a:r>
+            <a:r>
+              <a:rPr lang="ko-KR" altLang="en-US" sz="1400" dirty="0">
+                <a:latin typeface="D2Coding" panose="020B0609020101020101" pitchFamily="49" charset="-127"/>
+                <a:ea typeface="D2Coding" panose="020B0609020101020101" pitchFamily="49" charset="-127"/>
+              </a:rPr>
+              <a:t>혹은 데이터 구조에 맞춘 정교하고 정밀한 분기가 가능</a:t>
+            </a:r>
+            <a:endParaRPr lang="en-US" altLang="ko-KR" sz="1400" dirty="0">
+              <a:latin typeface="D2Coding" panose="020B0609020101020101" pitchFamily="49" charset="-127"/>
+              <a:ea typeface="D2Coding" panose="020B0609020101020101" pitchFamily="49" charset="-127"/>
+            </a:endParaRPr>
+          </a:p>
+          <a:p>
+            <a:pPr marL="285750" indent="-285750">
+              <a:lnSpc>
+                <a:spcPct val="150000"/>
+              </a:lnSpc>
+              <a:buFont typeface="Wingdings" panose="05000000000000000000" pitchFamily="2" charset="2"/>
+              <a:buChar char="v"/>
+            </a:pPr>
+            <a:r>
+              <a:rPr lang="ko-KR" altLang="en-US" sz="1400" dirty="0">
+                <a:latin typeface="D2Coding" panose="020B0609020101020101" pitchFamily="49" charset="-127"/>
+                <a:ea typeface="D2Coding" panose="020B0609020101020101" pitchFamily="49" charset="-127"/>
+              </a:rPr>
+              <a:t>단점</a:t>
+            </a:r>
+            <a:r>
+              <a:rPr lang="en-US" altLang="ko-KR" sz="1400" dirty="0">
+                <a:latin typeface="D2Coding" panose="020B0609020101020101" pitchFamily="49" charset="-127"/>
+                <a:ea typeface="D2Coding" panose="020B0609020101020101" pitchFamily="49" charset="-127"/>
+              </a:rPr>
+              <a:t>:</a:t>
+            </a:r>
+            <a:r>
+              <a:rPr lang="ko-KR" altLang="en-US" sz="1400" dirty="0">
+                <a:latin typeface="D2Coding" panose="020B0609020101020101" pitchFamily="49" charset="-127"/>
+                <a:ea typeface="D2Coding" panose="020B0609020101020101" pitchFamily="49" charset="-127"/>
+              </a:rPr>
+              <a:t> </a:t>
+            </a:r>
+            <a:r>
+              <a:rPr lang="en-US" altLang="ko-KR" sz="1400" dirty="0">
+                <a:latin typeface="D2Coding" panose="020B0609020101020101" pitchFamily="49" charset="-127"/>
+                <a:ea typeface="D2Coding" panose="020B0609020101020101" pitchFamily="49" charset="-127"/>
+              </a:rPr>
+              <a:t>LLM</a:t>
+            </a:r>
+            <a:r>
+              <a:rPr lang="ko-KR" altLang="en-US" sz="1400" dirty="0">
+                <a:latin typeface="D2Coding" panose="020B0609020101020101" pitchFamily="49" charset="-127"/>
+                <a:ea typeface="D2Coding" panose="020B0609020101020101" pitchFamily="49" charset="-127"/>
+              </a:rPr>
+              <a:t>을 거쳐야 하므로 답변 속도가 상대면으로 느리고</a:t>
+            </a:r>
+            <a:r>
+              <a:rPr lang="en-US" altLang="ko-KR" sz="1400" dirty="0">
+                <a:latin typeface="D2Coding" panose="020B0609020101020101" pitchFamily="49" charset="-127"/>
+                <a:ea typeface="D2Coding" panose="020B0609020101020101" pitchFamily="49" charset="-127"/>
+              </a:rPr>
+              <a:t>, API </a:t>
+            </a:r>
+            <a:r>
+              <a:rPr lang="ko-KR" altLang="en-US" sz="1400" dirty="0">
+                <a:latin typeface="D2Coding" panose="020B0609020101020101" pitchFamily="49" charset="-127"/>
+                <a:ea typeface="D2Coding" panose="020B0609020101020101" pitchFamily="49" charset="-127"/>
+              </a:rPr>
+              <a:t>비용이 발생</a:t>
+            </a:r>
+            <a:endParaRPr lang="en-US" altLang="ko-KR" sz="1400" dirty="0">
+              <a:latin typeface="D2Coding" panose="020B0609020101020101" pitchFamily="49" charset="-127"/>
+              <a:ea typeface="D2Coding" panose="020B0609020101020101" pitchFamily="49" charset="-127"/>
+            </a:endParaRPr>
+          </a:p>
+          <a:p>
+            <a:pPr marL="285750" indent="-285750">
+              <a:lnSpc>
+                <a:spcPct val="150000"/>
+              </a:lnSpc>
+              <a:buFont typeface="Wingdings" panose="05000000000000000000" pitchFamily="2" charset="2"/>
+              <a:buChar char="v"/>
+            </a:pPr>
+            <a:r>
+              <a:rPr lang="ko-KR" altLang="en-US" sz="1400" dirty="0">
+                <a:latin typeface="D2Coding" panose="020B0609020101020101" pitchFamily="49" charset="-127"/>
+                <a:ea typeface="D2Coding" panose="020B0609020101020101" pitchFamily="49" charset="-127"/>
+              </a:rPr>
+              <a:t>적합한 상황</a:t>
+            </a:r>
+            <a:r>
+              <a:rPr lang="en-US" altLang="ko-KR" sz="1400" dirty="0">
+                <a:latin typeface="D2Coding" panose="020B0609020101020101" pitchFamily="49" charset="-127"/>
+                <a:ea typeface="D2Coding" panose="020B0609020101020101" pitchFamily="49" charset="-127"/>
+              </a:rPr>
+              <a:t>:</a:t>
+            </a:r>
+            <a:r>
+              <a:rPr lang="ko-KR" altLang="en-US" sz="1400" dirty="0">
+                <a:latin typeface="D2Coding" panose="020B0609020101020101" pitchFamily="49" charset="-127"/>
+                <a:ea typeface="D2Coding" panose="020B0609020101020101" pitchFamily="49" charset="-127"/>
+              </a:rPr>
+              <a:t> 데이터 소스의 종류가 명확하게 정해져 있고</a:t>
+            </a:r>
+            <a:r>
+              <a:rPr lang="en-US" altLang="ko-KR" sz="1400" dirty="0">
+                <a:latin typeface="D2Coding" panose="020B0609020101020101" pitchFamily="49" charset="-127"/>
+                <a:ea typeface="D2Coding" panose="020B0609020101020101" pitchFamily="49" charset="-127"/>
+              </a:rPr>
+              <a:t>, </a:t>
+            </a:r>
+            <a:r>
+              <a:rPr lang="ko-KR" altLang="en-US" sz="1400" dirty="0">
+                <a:latin typeface="D2Coding" panose="020B0609020101020101" pitchFamily="49" charset="-127"/>
+                <a:ea typeface="D2Coding" panose="020B0609020101020101" pitchFamily="49" charset="-127"/>
+              </a:rPr>
+              <a:t>단순 단어 비교 이상의 깊은 문맥 판단이 필요한 경우</a:t>
+            </a:r>
+            <a:endParaRPr lang="en-US" altLang="ko-KR" sz="1400" dirty="0">
+              <a:latin typeface="D2Coding" panose="020B0609020101020101" pitchFamily="49" charset="-127"/>
+              <a:ea typeface="D2Coding" panose="020B0609020101020101" pitchFamily="49" charset="-127"/>
+            </a:endParaRPr>
+          </a:p>
+        </p:txBody>
+      </p:sp>
     </p:spTree>
     <p:extLst>
       <p:ext uri="{BB962C8B-B14F-4D97-AF65-F5344CB8AC3E}">
-        <p14:creationId xmlns:p14="http://schemas.microsoft.com/office/powerpoint/2010/main" val="4064725849"/>
+        <p14:creationId xmlns:p14="http://schemas.microsoft.com/office/powerpoint/2010/main" val="3369948639"/>
+      </p:ext>
+    </p:extLst>
+  </p:cSld>
+  <p:clrMapOvr>
+    <a:masterClrMapping/>
+  </p:clrMapOvr>
+</p:sld>
+</file>
+
+<file path=ppt/slides/slide17.xml><?xml version="1.0" encoding="utf-8"?>
+<p:sld xmlns:a="http://schemas.openxmlformats.org/drawingml/2006/main" xmlns:r="http://schemas.openxmlformats.org/officeDocument/2006/relationships" xmlns:p="http://schemas.openxmlformats.org/presentationml/2006/main">
+  <p:cSld>
+    <p:spTree>
+      <p:nvGrpSpPr>
+        <p:cNvPr id="1" name="">
+          <a:extLst>
+            <a:ext uri="{FF2B5EF4-FFF2-40B4-BE49-F238E27FC236}">
+              <a16:creationId xmlns:a16="http://schemas.microsoft.com/office/drawing/2014/main" id="{CFE12EEB-190A-86E9-C96A-9AF9C98A3FFA}"/>
+            </a:ext>
+          </a:extLst>
+        </p:cNvPr>
+        <p:cNvGrpSpPr/>
+        <p:nvPr/>
+      </p:nvGrpSpPr>
+      <p:grpSpPr>
+        <a:xfrm>
+          <a:off x="0" y="0"/>
+          <a:ext cx="0" cy="0"/>
+          <a:chOff x="0" y="0"/>
+          <a:chExt cx="0" cy="0"/>
+        </a:xfrm>
+      </p:grpSpPr>
+      <p:sp>
+        <p:nvSpPr>
+          <p:cNvPr id="4" name="슬라이드 번호 개체 틀 3">
+            <a:extLst>
+              <a:ext uri="{FF2B5EF4-FFF2-40B4-BE49-F238E27FC236}">
+                <a16:creationId xmlns:a16="http://schemas.microsoft.com/office/drawing/2014/main" id="{3EB3646E-1AC7-2F67-01E4-2C6E1243918C}"/>
+              </a:ext>
+            </a:extLst>
+          </p:cNvPr>
+          <p:cNvSpPr>
+            <a:spLocks noGrp="1"/>
+          </p:cNvSpPr>
+          <p:nvPr>
+            <p:ph type="sldNum" sz="quarter" idx="12"/>
+          </p:nvPr>
+        </p:nvSpPr>
+        <p:spPr>
+          <a:xfrm>
+            <a:off x="10514011" y="6036261"/>
+            <a:ext cx="753545" cy="365125"/>
+          </a:xfrm>
+        </p:spPr>
+        <p:txBody>
+          <a:bodyPr/>
+          <a:lstStyle/>
+          <a:p>
+            <a:fld id="{D57F1E4F-1CFF-5643-939E-217C01CDF565}" type="slidenum">
+              <a:rPr lang="en-US" smtClean="0"/>
+              <a:pPr/>
+              <a:t>17</a:t>
+            </a:fld>
+            <a:endParaRPr lang="en-US" dirty="0"/>
+          </a:p>
+        </p:txBody>
+      </p:sp>
+      <p:sp>
+        <p:nvSpPr>
+          <p:cNvPr id="3" name="제목 1">
+            <a:extLst>
+              <a:ext uri="{FF2B5EF4-FFF2-40B4-BE49-F238E27FC236}">
+                <a16:creationId xmlns:a16="http://schemas.microsoft.com/office/drawing/2014/main" id="{1937CC13-8946-2354-9B1C-DF61EA1DC048}"/>
+              </a:ext>
+            </a:extLst>
+          </p:cNvPr>
+          <p:cNvSpPr txBox="1">
+            <a:spLocks/>
+          </p:cNvSpPr>
+          <p:nvPr/>
+        </p:nvSpPr>
+        <p:spPr>
+          <a:xfrm>
+            <a:off x="475645" y="481983"/>
+            <a:ext cx="10353762" cy="766439"/>
+          </a:xfrm>
+          <a:prstGeom prst="rect">
+            <a:avLst/>
+          </a:prstGeom>
+        </p:spPr>
+        <p:txBody>
+          <a:bodyPr vert="horz" lIns="91440" tIns="45720" rIns="91440" bIns="45720" rtlCol="0" anchor="ctr">
+            <a:normAutofit/>
+          </a:bodyPr>
+          <a:lstStyle>
+            <a:lvl1pPr algn="ctr" defTabSz="914400" rtl="0" eaLnBrk="1" latinLnBrk="1" hangingPunct="1">
+              <a:lnSpc>
+                <a:spcPct val="90000"/>
+              </a:lnSpc>
+              <a:spcBef>
+                <a:spcPct val="0"/>
+              </a:spcBef>
+              <a:buNone/>
+              <a:defRPr sz="3200" kern="1200" cap="all" baseline="0">
+                <a:solidFill>
+                  <a:schemeClr val="tx1"/>
+                </a:solidFill>
+                <a:effectLst/>
+                <a:latin typeface="Batang" panose="02030600000101010101" pitchFamily="18" charset="-127"/>
+                <a:ea typeface="Batang" panose="02030600000101010101" pitchFamily="18" charset="-127"/>
+                <a:cs typeface="+mj-cs"/>
+              </a:defRPr>
+            </a:lvl1pPr>
+          </a:lstStyle>
+          <a:p>
+            <a:pPr algn="l"/>
+            <a:r>
+              <a:rPr lang="en-US" altLang="ko-KR" sz="2800" cap="none" dirty="0">
+                <a:solidFill>
+                  <a:schemeClr val="bg2">
+                    <a:lumMod val="25000"/>
+                  </a:schemeClr>
+                </a:solidFill>
+                <a:latin typeface="D2Coding" panose="020B0609020101020101" pitchFamily="49" charset="-127"/>
+                <a:ea typeface="D2Coding" panose="020B0609020101020101" pitchFamily="49" charset="-127"/>
+                <a:cs typeface="Segoe UI Light" panose="020B0502040204020203" pitchFamily="34" charset="0"/>
+              </a:rPr>
+              <a:t>Query Routing </a:t>
+            </a:r>
+            <a:endParaRPr lang="ko-KR" altLang="en-US" sz="2800" cap="none" dirty="0">
+              <a:solidFill>
+                <a:schemeClr val="bg2">
+                  <a:lumMod val="25000"/>
+                </a:schemeClr>
+              </a:solidFill>
+              <a:latin typeface="D2Coding" panose="020B0609020101020101" pitchFamily="49" charset="-127"/>
+              <a:ea typeface="D2Coding" panose="020B0609020101020101" pitchFamily="49" charset="-127"/>
+              <a:cs typeface="Segoe UI Light" panose="020B0502040204020203" pitchFamily="34" charset="0"/>
+            </a:endParaRPr>
+          </a:p>
+        </p:txBody>
+      </p:sp>
+      <p:sp>
+        <p:nvSpPr>
+          <p:cNvPr id="5" name="TextBox 4">
+            <a:extLst>
+              <a:ext uri="{FF2B5EF4-FFF2-40B4-BE49-F238E27FC236}">
+                <a16:creationId xmlns:a16="http://schemas.microsoft.com/office/drawing/2014/main" id="{3E0DA209-6860-FCD6-3ECD-C1F3D2B90633}"/>
+              </a:ext>
+            </a:extLst>
+          </p:cNvPr>
+          <p:cNvSpPr txBox="1"/>
+          <p:nvPr/>
+        </p:nvSpPr>
+        <p:spPr>
+          <a:xfrm>
+            <a:off x="7944455" y="690061"/>
+            <a:ext cx="3600450" cy="369332"/>
+          </a:xfrm>
+          <a:prstGeom prst="rect">
+            <a:avLst/>
+          </a:prstGeom>
+          <a:noFill/>
+        </p:spPr>
+        <p:txBody>
+          <a:bodyPr wrap="square">
+            <a:spAutoFit/>
+          </a:bodyPr>
+          <a:lstStyle/>
+          <a:p>
+            <a:pPr algn="r"/>
+            <a:r>
+              <a:rPr lang="en-US" altLang="ko-KR" dirty="0">
+                <a:latin typeface="D2Coding" panose="020B0609020101020101" pitchFamily="49" charset="-127"/>
+                <a:ea typeface="D2Coding" panose="020B0609020101020101" pitchFamily="49" charset="-127"/>
+              </a:rPr>
+              <a:t>Semantic Routing</a:t>
+            </a:r>
+            <a:endParaRPr lang="ko-KR" altLang="en-US" dirty="0"/>
+          </a:p>
+        </p:txBody>
+      </p:sp>
+      <p:pic>
+        <p:nvPicPr>
+          <p:cNvPr id="6" name="그림 5">
+            <a:extLst>
+              <a:ext uri="{FF2B5EF4-FFF2-40B4-BE49-F238E27FC236}">
+                <a16:creationId xmlns:a16="http://schemas.microsoft.com/office/drawing/2014/main" id="{4CE604AD-BA68-FF75-86AF-82B61E31DCE5}"/>
+              </a:ext>
+            </a:extLst>
+          </p:cNvPr>
+          <p:cNvPicPr>
+            <a:picLocks noChangeAspect="1"/>
+          </p:cNvPicPr>
+          <p:nvPr/>
+        </p:nvPicPr>
+        <p:blipFill>
+          <a:blip r:embed="rId2"/>
+          <a:stretch>
+            <a:fillRect/>
+          </a:stretch>
+        </p:blipFill>
+        <p:spPr>
+          <a:xfrm>
+            <a:off x="687402" y="2805191"/>
+            <a:ext cx="6988146" cy="2758679"/>
+          </a:xfrm>
+          <a:prstGeom prst="rect">
+            <a:avLst/>
+          </a:prstGeom>
+        </p:spPr>
+      </p:pic>
+      <p:sp>
+        <p:nvSpPr>
+          <p:cNvPr id="9" name="TextBox 8">
+            <a:extLst>
+              <a:ext uri="{FF2B5EF4-FFF2-40B4-BE49-F238E27FC236}">
+                <a16:creationId xmlns:a16="http://schemas.microsoft.com/office/drawing/2014/main" id="{D088D741-0036-4797-3EA9-C00EDA6FCAD0}"/>
+              </a:ext>
+            </a:extLst>
+          </p:cNvPr>
+          <p:cNvSpPr txBox="1"/>
+          <p:nvPr/>
+        </p:nvSpPr>
+        <p:spPr>
+          <a:xfrm>
+            <a:off x="609297" y="1248422"/>
+            <a:ext cx="10973405" cy="793166"/>
+          </a:xfrm>
+          <a:prstGeom prst="rect">
+            <a:avLst/>
+          </a:prstGeom>
+          <a:noFill/>
+        </p:spPr>
+        <p:txBody>
+          <a:bodyPr wrap="square">
+            <a:spAutoFit/>
+          </a:bodyPr>
+          <a:lstStyle/>
+          <a:p>
+            <a:pPr>
+              <a:lnSpc>
+                <a:spcPct val="150000"/>
+              </a:lnSpc>
+            </a:pPr>
+            <a:r>
+              <a:rPr lang="en-US" altLang="ko-KR" sz="1600" dirty="0">
+                <a:latin typeface="D2Coding" panose="020B0609020101020101" pitchFamily="49" charset="-127"/>
+                <a:ea typeface="D2Coding" panose="020B0609020101020101" pitchFamily="49" charset="-127"/>
+              </a:rPr>
+              <a:t>LLM </a:t>
+            </a:r>
+            <a:r>
+              <a:rPr lang="ko-KR" altLang="en-US" sz="1600" dirty="0">
+                <a:latin typeface="D2Coding" panose="020B0609020101020101" pitchFamily="49" charset="-127"/>
+                <a:ea typeface="D2Coding" panose="020B0609020101020101" pitchFamily="49" charset="-127"/>
+              </a:rPr>
+              <a:t>없이 각 목적지</a:t>
+            </a:r>
+            <a:r>
+              <a:rPr lang="en-US" altLang="ko-KR" sz="1600" dirty="0">
+                <a:latin typeface="D2Coding" panose="020B0609020101020101" pitchFamily="49" charset="-127"/>
+                <a:ea typeface="D2Coding" panose="020B0609020101020101" pitchFamily="49" charset="-127"/>
+              </a:rPr>
+              <a:t>(DB)</a:t>
+            </a:r>
+            <a:r>
+              <a:rPr lang="ko-KR" altLang="en-US" sz="1600" dirty="0">
+                <a:latin typeface="D2Coding" panose="020B0609020101020101" pitchFamily="49" charset="-127"/>
+                <a:ea typeface="D2Coding" panose="020B0609020101020101" pitchFamily="49" charset="-127"/>
+              </a:rPr>
+              <a:t>를 대표하는 여러 개의 샘플 질문</a:t>
+            </a:r>
+            <a:r>
+              <a:rPr lang="en-US" altLang="ko-KR" sz="1600" dirty="0">
+                <a:latin typeface="D2Coding" panose="020B0609020101020101" pitchFamily="49" charset="-127"/>
+                <a:ea typeface="D2Coding" panose="020B0609020101020101" pitchFamily="49" charset="-127"/>
+              </a:rPr>
+              <a:t>(Example Prompts)</a:t>
+            </a:r>
+            <a:r>
+              <a:rPr lang="ko-KR" altLang="en-US" sz="1600" dirty="0">
+                <a:latin typeface="D2Coding" panose="020B0609020101020101" pitchFamily="49" charset="-127"/>
+                <a:ea typeface="D2Coding" panose="020B0609020101020101" pitchFamily="49" charset="-127"/>
+              </a:rPr>
+              <a:t>들을 </a:t>
+            </a:r>
+            <a:r>
+              <a:rPr lang="ko-KR" altLang="en-US" sz="1600" dirty="0" err="1">
+                <a:latin typeface="D2Coding" panose="020B0609020101020101" pitchFamily="49" charset="-127"/>
+                <a:ea typeface="D2Coding" panose="020B0609020101020101" pitchFamily="49" charset="-127"/>
+              </a:rPr>
+              <a:t>벡터화하여</a:t>
+            </a:r>
+            <a:r>
+              <a:rPr lang="ko-KR" altLang="en-US" sz="1600" dirty="0">
+                <a:latin typeface="D2Coding" panose="020B0609020101020101" pitchFamily="49" charset="-127"/>
+                <a:ea typeface="D2Coding" panose="020B0609020101020101" pitchFamily="49" charset="-127"/>
+              </a:rPr>
+              <a:t> 벡터 </a:t>
+            </a:r>
+            <a:r>
+              <a:rPr lang="en-US" altLang="ko-KR" sz="1600" dirty="0">
+                <a:latin typeface="D2Coding" panose="020B0609020101020101" pitchFamily="49" charset="-127"/>
+                <a:ea typeface="D2Coding" panose="020B0609020101020101" pitchFamily="49" charset="-127"/>
+              </a:rPr>
+              <a:t>DB</a:t>
+            </a:r>
+            <a:r>
+              <a:rPr lang="ko-KR" altLang="en-US" sz="1600" dirty="0">
+                <a:latin typeface="D2Coding" panose="020B0609020101020101" pitchFamily="49" charset="-127"/>
+                <a:ea typeface="D2Coding" panose="020B0609020101020101" pitchFamily="49" charset="-127"/>
+              </a:rPr>
+              <a:t>에 미리 저장한 후</a:t>
+            </a:r>
+            <a:r>
+              <a:rPr lang="en-US" altLang="ko-KR" sz="1600" dirty="0">
+                <a:latin typeface="D2Coding" panose="020B0609020101020101" pitchFamily="49" charset="-127"/>
+                <a:ea typeface="D2Coding" panose="020B0609020101020101" pitchFamily="49" charset="-127"/>
+              </a:rPr>
+              <a:t> </a:t>
+            </a:r>
+            <a:r>
+              <a:rPr lang="ko-KR" altLang="en-US" sz="1600" dirty="0">
+                <a:latin typeface="D2Coding" panose="020B0609020101020101" pitchFamily="49" charset="-127"/>
+                <a:ea typeface="D2Coding" panose="020B0609020101020101" pitchFamily="49" charset="-127"/>
+              </a:rPr>
+              <a:t>사용자의 질문 벡터가 들어오면 이 샘플질문들과 코사인 유사도로  </a:t>
+            </a:r>
+            <a:r>
+              <a:rPr lang="en-US" altLang="ko-KR" sz="1600" dirty="0">
+                <a:latin typeface="D2Coding" panose="020B0609020101020101" pitchFamily="49" charset="-127"/>
+                <a:ea typeface="D2Coding" panose="020B0609020101020101" pitchFamily="49" charset="-127"/>
+              </a:rPr>
+              <a:t>1:N</a:t>
+            </a:r>
+            <a:r>
+              <a:rPr lang="ko-KR" altLang="en-US" sz="1600" dirty="0">
+                <a:latin typeface="D2Coding" panose="020B0609020101020101" pitchFamily="49" charset="-127"/>
+                <a:ea typeface="D2Coding" panose="020B0609020101020101" pitchFamily="49" charset="-127"/>
+              </a:rPr>
+              <a:t> 비교해 해당 </a:t>
+            </a:r>
+            <a:r>
+              <a:rPr lang="en-US" altLang="ko-KR" sz="1600" dirty="0">
+                <a:latin typeface="D2Coding" panose="020B0609020101020101" pitchFamily="49" charset="-127"/>
+                <a:ea typeface="D2Coding" panose="020B0609020101020101" pitchFamily="49" charset="-127"/>
+              </a:rPr>
+              <a:t>DB</a:t>
+            </a:r>
+            <a:r>
+              <a:rPr lang="ko-KR" altLang="en-US" sz="1600" dirty="0">
+                <a:latin typeface="D2Coding" panose="020B0609020101020101" pitchFamily="49" charset="-127"/>
+                <a:ea typeface="D2Coding" panose="020B0609020101020101" pitchFamily="49" charset="-127"/>
+              </a:rPr>
+              <a:t>를 찾기</a:t>
+            </a:r>
+          </a:p>
+        </p:txBody>
+      </p:sp>
+      <p:sp>
+        <p:nvSpPr>
+          <p:cNvPr id="12" name="TextBox 11">
+            <a:extLst>
+              <a:ext uri="{FF2B5EF4-FFF2-40B4-BE49-F238E27FC236}">
+                <a16:creationId xmlns:a16="http://schemas.microsoft.com/office/drawing/2014/main" id="{B9A31372-6152-D43F-69ED-BC1D406CF576}"/>
+              </a:ext>
+            </a:extLst>
+          </p:cNvPr>
+          <p:cNvSpPr txBox="1"/>
+          <p:nvPr/>
+        </p:nvSpPr>
+        <p:spPr>
+          <a:xfrm>
+            <a:off x="7781407" y="2884762"/>
+            <a:ext cx="4077218" cy="2462213"/>
+          </a:xfrm>
+          <a:prstGeom prst="rect">
+            <a:avLst/>
+          </a:prstGeom>
+          <a:noFill/>
+        </p:spPr>
+        <p:txBody>
+          <a:bodyPr wrap="square">
+            <a:spAutoFit/>
+          </a:bodyPr>
+          <a:lstStyle/>
+          <a:p>
+            <a:pPr marL="285750" indent="-285750">
+              <a:buFont typeface="Wingdings" panose="05000000000000000000" pitchFamily="2" charset="2"/>
+              <a:buChar char="v"/>
+            </a:pPr>
+            <a:r>
+              <a:rPr lang="ko-KR" altLang="en-US" sz="1400" dirty="0">
+                <a:latin typeface="D2Coding" panose="020B0609020101020101" pitchFamily="49" charset="-127"/>
+                <a:ea typeface="D2Coding" panose="020B0609020101020101" pitchFamily="49" charset="-127"/>
+              </a:rPr>
+              <a:t>장점: </a:t>
+            </a:r>
+            <a:r>
+              <a:rPr lang="ko-KR" altLang="en-US" sz="1400" dirty="0" err="1">
+                <a:latin typeface="D2Coding" panose="020B0609020101020101" pitchFamily="49" charset="-127"/>
+                <a:ea typeface="D2Coding" panose="020B0609020101020101" pitchFamily="49" charset="-127"/>
+              </a:rPr>
+              <a:t>LLM의</a:t>
+            </a:r>
+            <a:r>
+              <a:rPr lang="ko-KR" altLang="en-US" sz="1400" dirty="0">
+                <a:latin typeface="D2Coding" panose="020B0609020101020101" pitchFamily="49" charset="-127"/>
+                <a:ea typeface="D2Coding" panose="020B0609020101020101" pitchFamily="49" charset="-127"/>
+              </a:rPr>
+              <a:t> 추론 과정을 생략하므로 속도가 압도적으로 빠르고(</a:t>
+            </a:r>
+            <a:r>
+              <a:rPr lang="ko-KR" altLang="en-US" sz="1400" dirty="0" err="1">
+                <a:latin typeface="D2Coding" panose="020B0609020101020101" pitchFamily="49" charset="-127"/>
+                <a:ea typeface="D2Coding" panose="020B0609020101020101" pitchFamily="49" charset="-127"/>
+              </a:rPr>
+              <a:t>밀리초</a:t>
+            </a:r>
+            <a:r>
+              <a:rPr lang="ko-KR" altLang="en-US" sz="1400" dirty="0">
+                <a:latin typeface="D2Coding" panose="020B0609020101020101" pitchFamily="49" charset="-127"/>
+                <a:ea typeface="D2Coding" panose="020B0609020101020101" pitchFamily="49" charset="-127"/>
+              </a:rPr>
+              <a:t> 단위), 비용이 거의 들지 않음</a:t>
+            </a:r>
+          </a:p>
+          <a:p>
+            <a:pPr marL="285750" indent="-285750">
+              <a:buFont typeface="Wingdings" panose="05000000000000000000" pitchFamily="2" charset="2"/>
+              <a:buChar char="v"/>
+            </a:pPr>
+            <a:endParaRPr lang="ko-KR" altLang="en-US" sz="1400" dirty="0">
+              <a:latin typeface="D2Coding" panose="020B0609020101020101" pitchFamily="49" charset="-127"/>
+              <a:ea typeface="D2Coding" panose="020B0609020101020101" pitchFamily="49" charset="-127"/>
+            </a:endParaRPr>
+          </a:p>
+          <a:p>
+            <a:pPr marL="285750" indent="-285750">
+              <a:buFont typeface="Wingdings" panose="05000000000000000000" pitchFamily="2" charset="2"/>
+              <a:buChar char="v"/>
+            </a:pPr>
+            <a:r>
+              <a:rPr lang="ko-KR" altLang="en-US" sz="1400" dirty="0">
+                <a:latin typeface="D2Coding" panose="020B0609020101020101" pitchFamily="49" charset="-127"/>
+                <a:ea typeface="D2Coding" panose="020B0609020101020101" pitchFamily="49" charset="-127"/>
+              </a:rPr>
+              <a:t>단점: 정해진 샘플 </a:t>
+            </a:r>
+            <a:r>
+              <a:rPr lang="ko-KR" altLang="en-US" sz="1400" dirty="0" err="1">
+                <a:latin typeface="D2Coding" panose="020B0609020101020101" pitchFamily="49" charset="-127"/>
+                <a:ea typeface="D2Coding" panose="020B0609020101020101" pitchFamily="49" charset="-127"/>
+              </a:rPr>
+              <a:t>문장들과의</a:t>
+            </a:r>
+            <a:r>
+              <a:rPr lang="ko-KR" altLang="en-US" sz="1400" dirty="0">
+                <a:latin typeface="D2Coding" panose="020B0609020101020101" pitchFamily="49" charset="-127"/>
+                <a:ea typeface="D2Coding" panose="020B0609020101020101" pitchFamily="49" charset="-127"/>
+              </a:rPr>
+              <a:t> '</a:t>
+            </a:r>
+            <a:r>
+              <a:rPr lang="ko-KR" altLang="en-US" sz="1400" dirty="0" err="1">
+                <a:latin typeface="D2Coding" panose="020B0609020101020101" pitchFamily="49" charset="-127"/>
+                <a:ea typeface="D2Coding" panose="020B0609020101020101" pitchFamily="49" charset="-127"/>
+              </a:rPr>
+              <a:t>유사성'에만</a:t>
+            </a:r>
+            <a:r>
+              <a:rPr lang="ko-KR" altLang="en-US" sz="1400" dirty="0">
+                <a:latin typeface="D2Coding" panose="020B0609020101020101" pitchFamily="49" charset="-127"/>
+                <a:ea typeface="D2Coding" panose="020B0609020101020101" pitchFamily="49" charset="-127"/>
+              </a:rPr>
+              <a:t> 의존하므로, 복잡하고 정교한 조건부 분기는 어려움</a:t>
+            </a:r>
+          </a:p>
+          <a:p>
+            <a:pPr marL="285750" indent="-285750">
+              <a:buFont typeface="Wingdings" panose="05000000000000000000" pitchFamily="2" charset="2"/>
+              <a:buChar char="v"/>
+            </a:pPr>
+            <a:endParaRPr lang="ko-KR" altLang="en-US" sz="1400" dirty="0">
+              <a:latin typeface="D2Coding" panose="020B0609020101020101" pitchFamily="49" charset="-127"/>
+              <a:ea typeface="D2Coding" panose="020B0609020101020101" pitchFamily="49" charset="-127"/>
+            </a:endParaRPr>
+          </a:p>
+          <a:p>
+            <a:pPr marL="285750" indent="-285750">
+              <a:buFont typeface="Wingdings" panose="05000000000000000000" pitchFamily="2" charset="2"/>
+              <a:buChar char="v"/>
+            </a:pPr>
+            <a:r>
+              <a:rPr lang="ko-KR" altLang="en-US" sz="1400" dirty="0">
+                <a:latin typeface="D2Coding" panose="020B0609020101020101" pitchFamily="49" charset="-127"/>
+                <a:ea typeface="D2Coding" panose="020B0609020101020101" pitchFamily="49" charset="-127"/>
+              </a:rPr>
+              <a:t>적합한 상황: 자주 들어오는 질문 패턴이 명확히 </a:t>
+            </a:r>
+            <a:r>
+              <a:rPr lang="ko-KR" altLang="en-US" sz="1400" dirty="0" err="1">
+                <a:latin typeface="D2Coding" panose="020B0609020101020101" pitchFamily="49" charset="-127"/>
+                <a:ea typeface="D2Coding" panose="020B0609020101020101" pitchFamily="49" charset="-127"/>
+              </a:rPr>
+              <a:t>갈려있고</a:t>
+            </a:r>
+            <a:r>
+              <a:rPr lang="ko-KR" altLang="en-US" sz="1400" dirty="0">
+                <a:latin typeface="D2Coding" panose="020B0609020101020101" pitchFamily="49" charset="-127"/>
+                <a:ea typeface="D2Coding" panose="020B0609020101020101" pitchFamily="49" charset="-127"/>
+              </a:rPr>
+              <a:t>, 비용 절감과 빠른 응답 속도가 최우선인 경우</a:t>
+            </a:r>
+          </a:p>
+        </p:txBody>
+      </p:sp>
+    </p:spTree>
+    <p:extLst>
+      <p:ext uri="{BB962C8B-B14F-4D97-AF65-F5344CB8AC3E}">
+        <p14:creationId xmlns:p14="http://schemas.microsoft.com/office/powerpoint/2010/main" val="2267266916"/>
+      </p:ext>
+    </p:extLst>
+  </p:cSld>
+  <p:clrMapOvr>
+    <a:masterClrMapping/>
+  </p:clrMapOvr>
+</p:sld>
+</file>
+
+<file path=ppt/slides/slide18.xml><?xml version="1.0" encoding="utf-8"?>
+<p:sld xmlns:a="http://schemas.openxmlformats.org/drawingml/2006/main" xmlns:r="http://schemas.openxmlformats.org/officeDocument/2006/relationships" xmlns:p="http://schemas.openxmlformats.org/presentationml/2006/main">
+  <p:cSld>
+    <p:spTree>
+      <p:nvGrpSpPr>
+        <p:cNvPr id="1" name="">
+          <a:extLst>
+            <a:ext uri="{FF2B5EF4-FFF2-40B4-BE49-F238E27FC236}">
+              <a16:creationId xmlns:a16="http://schemas.microsoft.com/office/drawing/2014/main" id="{A852463D-366D-2B2B-52E1-FC802DB4BE4E}"/>
+            </a:ext>
+          </a:extLst>
+        </p:cNvPr>
+        <p:cNvGrpSpPr/>
+        <p:nvPr/>
+      </p:nvGrpSpPr>
+      <p:grpSpPr>
+        <a:xfrm>
+          <a:off x="0" y="0"/>
+          <a:ext cx="0" cy="0"/>
+          <a:chOff x="0" y="0"/>
+          <a:chExt cx="0" cy="0"/>
+        </a:xfrm>
+      </p:grpSpPr>
+      <p:sp>
+        <p:nvSpPr>
+          <p:cNvPr id="7" name="직사각형 6">
+            <a:extLst>
+              <a:ext uri="{FF2B5EF4-FFF2-40B4-BE49-F238E27FC236}">
+                <a16:creationId xmlns:a16="http://schemas.microsoft.com/office/drawing/2014/main" id="{331CABE4-A4EA-3C35-D08A-90CAA5B9E1A8}"/>
+              </a:ext>
+            </a:extLst>
+          </p:cNvPr>
+          <p:cNvSpPr/>
+          <p:nvPr/>
+        </p:nvSpPr>
+        <p:spPr>
+          <a:xfrm>
+            <a:off x="2152650" y="5163126"/>
+            <a:ext cx="5676900" cy="466149"/>
+          </a:xfrm>
+          <a:prstGeom prst="rect">
+            <a:avLst/>
+          </a:prstGeom>
+          <a:solidFill>
+            <a:schemeClr val="bg1">
+              <a:lumMod val="85000"/>
+            </a:schemeClr>
+          </a:solidFill>
+          <a:ln>
+            <a:noFill/>
+          </a:ln>
+        </p:spPr>
+        <p:style>
+          <a:lnRef idx="2">
+            <a:schemeClr val="accent1">
+              <a:shade val="15000"/>
+            </a:schemeClr>
+          </a:lnRef>
+          <a:fillRef idx="1">
+            <a:schemeClr val="accent1"/>
+          </a:fillRef>
+          <a:effectRef idx="0">
+            <a:schemeClr val="accent1"/>
+          </a:effectRef>
+          <a:fontRef idx="minor">
+            <a:schemeClr val="lt1"/>
+          </a:fontRef>
+        </p:style>
+        <p:txBody>
+          <a:bodyPr rtlCol="0" anchor="ctr"/>
+          <a:lstStyle/>
+          <a:p>
+            <a:pPr algn="ctr"/>
+            <a:endParaRPr lang="ko-KR" altLang="en-US"/>
+          </a:p>
+        </p:txBody>
+      </p:sp>
+      <p:sp>
+        <p:nvSpPr>
+          <p:cNvPr id="4" name="슬라이드 번호 개체 틀 3">
+            <a:extLst>
+              <a:ext uri="{FF2B5EF4-FFF2-40B4-BE49-F238E27FC236}">
+                <a16:creationId xmlns:a16="http://schemas.microsoft.com/office/drawing/2014/main" id="{D63494DE-760D-008E-0D20-721C21CB6B67}"/>
+              </a:ext>
+            </a:extLst>
+          </p:cNvPr>
+          <p:cNvSpPr>
+            <a:spLocks noGrp="1"/>
+          </p:cNvSpPr>
+          <p:nvPr>
+            <p:ph type="sldNum" sz="quarter" idx="12"/>
+          </p:nvPr>
+        </p:nvSpPr>
+        <p:spPr>
+          <a:xfrm>
+            <a:off x="10514011" y="6036261"/>
+            <a:ext cx="753545" cy="365125"/>
+          </a:xfrm>
+        </p:spPr>
+        <p:txBody>
+          <a:bodyPr/>
+          <a:lstStyle/>
+          <a:p>
+            <a:fld id="{D57F1E4F-1CFF-5643-939E-217C01CDF565}" type="slidenum">
+              <a:rPr lang="en-US" smtClean="0"/>
+              <a:pPr/>
+              <a:t>18</a:t>
+            </a:fld>
+            <a:endParaRPr lang="en-US" dirty="0"/>
+          </a:p>
+        </p:txBody>
+      </p:sp>
+      <p:sp>
+        <p:nvSpPr>
+          <p:cNvPr id="3" name="제목 1">
+            <a:extLst>
+              <a:ext uri="{FF2B5EF4-FFF2-40B4-BE49-F238E27FC236}">
+                <a16:creationId xmlns:a16="http://schemas.microsoft.com/office/drawing/2014/main" id="{8758F8EA-6724-9B2B-13EB-451014536D52}"/>
+              </a:ext>
+            </a:extLst>
+          </p:cNvPr>
+          <p:cNvSpPr txBox="1">
+            <a:spLocks/>
+          </p:cNvSpPr>
+          <p:nvPr/>
+        </p:nvSpPr>
+        <p:spPr>
+          <a:xfrm>
+            <a:off x="475645" y="481983"/>
+            <a:ext cx="10353762" cy="766439"/>
+          </a:xfrm>
+          <a:prstGeom prst="rect">
+            <a:avLst/>
+          </a:prstGeom>
+        </p:spPr>
+        <p:txBody>
+          <a:bodyPr vert="horz" lIns="91440" tIns="45720" rIns="91440" bIns="45720" rtlCol="0" anchor="ctr">
+            <a:normAutofit/>
+          </a:bodyPr>
+          <a:lstStyle>
+            <a:lvl1pPr algn="ctr" defTabSz="914400" rtl="0" eaLnBrk="1" latinLnBrk="1" hangingPunct="1">
+              <a:lnSpc>
+                <a:spcPct val="90000"/>
+              </a:lnSpc>
+              <a:spcBef>
+                <a:spcPct val="0"/>
+              </a:spcBef>
+              <a:buNone/>
+              <a:defRPr sz="3200" kern="1200" cap="all" baseline="0">
+                <a:solidFill>
+                  <a:schemeClr val="tx1"/>
+                </a:solidFill>
+                <a:effectLst/>
+                <a:latin typeface="Batang" panose="02030600000101010101" pitchFamily="18" charset="-127"/>
+                <a:ea typeface="Batang" panose="02030600000101010101" pitchFamily="18" charset="-127"/>
+                <a:cs typeface="+mj-cs"/>
+              </a:defRPr>
+            </a:lvl1pPr>
+          </a:lstStyle>
+          <a:p>
+            <a:pPr algn="l"/>
+            <a:r>
+              <a:rPr lang="en-US" altLang="ko-KR" sz="2800" cap="none" dirty="0">
+                <a:solidFill>
+                  <a:schemeClr val="bg2">
+                    <a:lumMod val="25000"/>
+                  </a:schemeClr>
+                </a:solidFill>
+                <a:latin typeface="D2Coding" panose="020B0609020101020101" pitchFamily="49" charset="-127"/>
+                <a:ea typeface="D2Coding" panose="020B0609020101020101" pitchFamily="49" charset="-127"/>
+                <a:cs typeface="Segoe UI Light" panose="020B0502040204020203" pitchFamily="34" charset="0"/>
+              </a:rPr>
+              <a:t>Contents</a:t>
+            </a:r>
+            <a:endParaRPr lang="ko-KR" altLang="en-US" sz="2800" cap="none" dirty="0">
+              <a:solidFill>
+                <a:schemeClr val="bg2">
+                  <a:lumMod val="25000"/>
+                </a:schemeClr>
+              </a:solidFill>
+              <a:latin typeface="D2Coding" panose="020B0609020101020101" pitchFamily="49" charset="-127"/>
+              <a:ea typeface="D2Coding" panose="020B0609020101020101" pitchFamily="49" charset="-127"/>
+              <a:cs typeface="Segoe UI Light" panose="020B0502040204020203" pitchFamily="34" charset="0"/>
+            </a:endParaRPr>
+          </a:p>
+        </p:txBody>
+      </p:sp>
+      <p:sp>
+        <p:nvSpPr>
+          <p:cNvPr id="5" name="TextBox 4">
+            <a:extLst>
+              <a:ext uri="{FF2B5EF4-FFF2-40B4-BE49-F238E27FC236}">
+                <a16:creationId xmlns:a16="http://schemas.microsoft.com/office/drawing/2014/main" id="{5E304547-CE37-5C70-211C-92CD5247E38A}"/>
+              </a:ext>
+            </a:extLst>
+          </p:cNvPr>
+          <p:cNvSpPr txBox="1"/>
+          <p:nvPr/>
+        </p:nvSpPr>
+        <p:spPr>
+          <a:xfrm>
+            <a:off x="2733675" y="1381701"/>
+            <a:ext cx="4791075" cy="4994316"/>
+          </a:xfrm>
+          <a:prstGeom prst="rect">
+            <a:avLst/>
+          </a:prstGeom>
+          <a:noFill/>
+        </p:spPr>
+        <p:txBody>
+          <a:bodyPr wrap="square">
+            <a:spAutoFit/>
+          </a:bodyPr>
+          <a:lstStyle/>
+          <a:p>
+            <a:pPr marL="400050" indent="-400050">
+              <a:lnSpc>
+                <a:spcPct val="150000"/>
+              </a:lnSpc>
+              <a:buFont typeface="+mj-lt"/>
+              <a:buAutoNum type="romanUcPeriod"/>
+            </a:pPr>
+            <a:r>
+              <a:rPr lang="en-US" altLang="ko-KR" dirty="0">
+                <a:latin typeface="D2Coding" panose="020B0609020101020101" pitchFamily="49" charset="-127"/>
+                <a:ea typeface="D2Coding" panose="020B0609020101020101" pitchFamily="49" charset="-127"/>
+              </a:rPr>
+              <a:t>Query Transformation     </a:t>
+            </a:r>
+          </a:p>
+          <a:p>
+            <a:pPr marL="857250" lvl="1" indent="-400050">
+              <a:lnSpc>
+                <a:spcPct val="150000"/>
+              </a:lnSpc>
+              <a:buFont typeface="+mj-lt"/>
+              <a:buAutoNum type="romanUcPeriod"/>
+            </a:pPr>
+            <a:r>
+              <a:rPr lang="en-US" altLang="ko-KR" sz="1600" dirty="0">
+                <a:latin typeface="D2Coding" panose="020B0609020101020101" pitchFamily="49" charset="-127"/>
+                <a:ea typeface="D2Coding" panose="020B0609020101020101" pitchFamily="49" charset="-127"/>
+              </a:rPr>
+              <a:t>Rewrite-Retrieve-Read     </a:t>
+            </a:r>
+          </a:p>
+          <a:p>
+            <a:pPr marL="857250" lvl="1" indent="-400050">
+              <a:lnSpc>
+                <a:spcPct val="150000"/>
+              </a:lnSpc>
+              <a:buFont typeface="+mj-lt"/>
+              <a:buAutoNum type="romanUcPeriod"/>
+            </a:pPr>
+            <a:r>
+              <a:rPr lang="en-US" altLang="ko-KR" sz="1600" dirty="0">
+                <a:latin typeface="D2Coding" panose="020B0609020101020101" pitchFamily="49" charset="-127"/>
+                <a:ea typeface="D2Coding" panose="020B0609020101020101" pitchFamily="49" charset="-127"/>
+              </a:rPr>
+              <a:t>Multi-Query Retrieval     </a:t>
+            </a:r>
+          </a:p>
+          <a:p>
+            <a:pPr marL="857250" lvl="1" indent="-400050">
+              <a:lnSpc>
+                <a:spcPct val="150000"/>
+              </a:lnSpc>
+              <a:buFont typeface="+mj-lt"/>
+              <a:buAutoNum type="romanUcPeriod"/>
+            </a:pPr>
+            <a:r>
+              <a:rPr lang="en-US" altLang="ko-KR" sz="1600" dirty="0">
+                <a:latin typeface="D2Coding" panose="020B0609020101020101" pitchFamily="49" charset="-127"/>
+                <a:ea typeface="D2Coding" panose="020B0609020101020101" pitchFamily="49" charset="-127"/>
+              </a:rPr>
+              <a:t>RAG-Fusion     </a:t>
+            </a:r>
+          </a:p>
+          <a:p>
+            <a:pPr marL="857250" lvl="1" indent="-400050">
+              <a:lnSpc>
+                <a:spcPct val="150000"/>
+              </a:lnSpc>
+              <a:buFont typeface="+mj-lt"/>
+              <a:buAutoNum type="romanUcPeriod"/>
+            </a:pPr>
+            <a:r>
+              <a:rPr lang="en-US" altLang="ko-KR" sz="1600" dirty="0">
+                <a:latin typeface="D2Coding" panose="020B0609020101020101" pitchFamily="49" charset="-127"/>
+                <a:ea typeface="D2Coding" panose="020B0609020101020101" pitchFamily="49" charset="-127"/>
+              </a:rPr>
+              <a:t>Hypothetical Document Embeddings</a:t>
+            </a:r>
+          </a:p>
+          <a:p>
+            <a:pPr lvl="1">
+              <a:lnSpc>
+                <a:spcPct val="150000"/>
+              </a:lnSpc>
+            </a:pPr>
+            <a:r>
+              <a:rPr lang="en-US" altLang="ko-KR" sz="1600" dirty="0">
+                <a:latin typeface="D2Coding" panose="020B0609020101020101" pitchFamily="49" charset="-127"/>
+                <a:ea typeface="D2Coding" panose="020B0609020101020101" pitchFamily="49" charset="-127"/>
+              </a:rPr>
+              <a:t> </a:t>
+            </a:r>
+          </a:p>
+          <a:p>
+            <a:pPr marL="400050" indent="-400050">
+              <a:lnSpc>
+                <a:spcPct val="150000"/>
+              </a:lnSpc>
+              <a:buFont typeface="+mj-lt"/>
+              <a:buAutoNum type="romanUcPeriod"/>
+            </a:pPr>
+            <a:r>
+              <a:rPr lang="en-US" altLang="ko-KR" dirty="0">
+                <a:latin typeface="D2Coding" panose="020B0609020101020101" pitchFamily="49" charset="-127"/>
+                <a:ea typeface="D2Coding" panose="020B0609020101020101" pitchFamily="49" charset="-127"/>
+              </a:rPr>
+              <a:t>Query Routing     </a:t>
+            </a:r>
+          </a:p>
+          <a:p>
+            <a:pPr marL="857250" lvl="1" indent="-400050">
+              <a:lnSpc>
+                <a:spcPct val="150000"/>
+              </a:lnSpc>
+              <a:buFont typeface="+mj-lt"/>
+              <a:buAutoNum type="romanUcPeriod"/>
+            </a:pPr>
+            <a:r>
+              <a:rPr lang="en-US" altLang="ko-KR" sz="1600" dirty="0">
+                <a:latin typeface="D2Coding" panose="020B0609020101020101" pitchFamily="49" charset="-127"/>
+                <a:ea typeface="D2Coding" panose="020B0609020101020101" pitchFamily="49" charset="-127"/>
+              </a:rPr>
+              <a:t>Logical Routing     </a:t>
+            </a:r>
+          </a:p>
+          <a:p>
+            <a:pPr marL="857250" lvl="1" indent="-400050">
+              <a:lnSpc>
+                <a:spcPct val="150000"/>
+              </a:lnSpc>
+              <a:buFont typeface="+mj-lt"/>
+              <a:buAutoNum type="romanUcPeriod"/>
+            </a:pPr>
+            <a:r>
+              <a:rPr lang="en-US" altLang="ko-KR" sz="1600" dirty="0">
+                <a:latin typeface="D2Coding" panose="020B0609020101020101" pitchFamily="49" charset="-127"/>
+                <a:ea typeface="D2Coding" panose="020B0609020101020101" pitchFamily="49" charset="-127"/>
+              </a:rPr>
+              <a:t>Semantic Routing </a:t>
+            </a:r>
+          </a:p>
+          <a:p>
+            <a:pPr lvl="1">
+              <a:lnSpc>
+                <a:spcPct val="150000"/>
+              </a:lnSpc>
+            </a:pPr>
+            <a:endParaRPr lang="en-US" altLang="ko-KR" sz="1600" dirty="0">
+              <a:latin typeface="D2Coding" panose="020B0609020101020101" pitchFamily="49" charset="-127"/>
+              <a:ea typeface="D2Coding" panose="020B0609020101020101" pitchFamily="49" charset="-127"/>
+            </a:endParaRPr>
+          </a:p>
+          <a:p>
+            <a:pPr marL="400050" indent="-400050">
+              <a:lnSpc>
+                <a:spcPct val="150000"/>
+              </a:lnSpc>
+              <a:buFont typeface="+mj-lt"/>
+              <a:buAutoNum type="romanUcPeriod"/>
+            </a:pPr>
+            <a:r>
+              <a:rPr lang="en-US" altLang="ko-KR" dirty="0">
+                <a:latin typeface="D2Coding" panose="020B0609020101020101" pitchFamily="49" charset="-127"/>
+                <a:ea typeface="D2Coding" panose="020B0609020101020101" pitchFamily="49" charset="-127"/>
+              </a:rPr>
+              <a:t>Query Construction     </a:t>
+            </a:r>
+          </a:p>
+          <a:p>
+            <a:pPr marL="857250" lvl="1" indent="-400050">
+              <a:lnSpc>
+                <a:spcPct val="150000"/>
+              </a:lnSpc>
+              <a:buFont typeface="+mj-lt"/>
+              <a:buAutoNum type="romanUcPeriod"/>
+            </a:pPr>
+            <a:r>
+              <a:rPr lang="en-US" altLang="ko-KR" sz="1600" dirty="0">
+                <a:latin typeface="D2Coding" panose="020B0609020101020101" pitchFamily="49" charset="-127"/>
+                <a:ea typeface="D2Coding" panose="020B0609020101020101" pitchFamily="49" charset="-127"/>
+              </a:rPr>
+              <a:t>Text-to-Metadata Filter     </a:t>
+            </a:r>
+          </a:p>
+          <a:p>
+            <a:pPr marL="857250" lvl="1" indent="-400050">
+              <a:lnSpc>
+                <a:spcPct val="150000"/>
+              </a:lnSpc>
+              <a:buFont typeface="+mj-lt"/>
+              <a:buAutoNum type="romanUcPeriod"/>
+            </a:pPr>
+            <a:r>
+              <a:rPr lang="en-US" altLang="ko-KR" sz="1600" dirty="0">
+                <a:latin typeface="D2Coding" panose="020B0609020101020101" pitchFamily="49" charset="-127"/>
+                <a:ea typeface="D2Coding" panose="020B0609020101020101" pitchFamily="49" charset="-127"/>
+              </a:rPr>
+              <a:t>Text-to-SQL</a:t>
+            </a:r>
+            <a:endParaRPr lang="ko-KR" altLang="en-US" sz="1600" dirty="0">
+              <a:latin typeface="D2Coding" panose="020B0609020101020101" pitchFamily="49" charset="-127"/>
+              <a:ea typeface="D2Coding" panose="020B0609020101020101" pitchFamily="49" charset="-127"/>
+            </a:endParaRPr>
+          </a:p>
+        </p:txBody>
+      </p:sp>
+    </p:spTree>
+    <p:extLst>
+      <p:ext uri="{BB962C8B-B14F-4D97-AF65-F5344CB8AC3E}">
+        <p14:creationId xmlns:p14="http://schemas.microsoft.com/office/powerpoint/2010/main" val="1936213023"/>
       </p:ext>
     </p:extLst>
   </p:cSld>
@@ -3385,67 +7659,6 @@
               <a:ea typeface="D2Coding" panose="020B0609020101020101" pitchFamily="49" charset="-127"/>
               <a:cs typeface="Segoe UI Light" panose="020B0502040204020203" pitchFamily="34" charset="0"/>
             </a:endParaRPr>
-          </a:p>
-        </p:txBody>
-      </p:sp>
-      <p:sp>
-        <p:nvSpPr>
-          <p:cNvPr id="5" name="TextBox 4">
-            <a:extLst>
-              <a:ext uri="{FF2B5EF4-FFF2-40B4-BE49-F238E27FC236}">
-                <a16:creationId xmlns:a16="http://schemas.microsoft.com/office/drawing/2014/main" id="{A0CB7729-09DC-4690-5139-CD2649D9221F}"/>
-              </a:ext>
-            </a:extLst>
-          </p:cNvPr>
-          <p:cNvSpPr txBox="1"/>
-          <p:nvPr/>
-        </p:nvSpPr>
-        <p:spPr>
-          <a:xfrm>
-            <a:off x="1166927" y="1724672"/>
-            <a:ext cx="10100629" cy="958339"/>
-          </a:xfrm>
-          <a:prstGeom prst="rect">
-            <a:avLst/>
-          </a:prstGeom>
-          <a:noFill/>
-        </p:spPr>
-        <p:txBody>
-          <a:bodyPr wrap="square">
-            <a:spAutoFit/>
-          </a:bodyPr>
-          <a:lstStyle/>
-          <a:p>
-            <a:pPr marL="342900" indent="-342900">
-              <a:lnSpc>
-                <a:spcPct val="150000"/>
-              </a:lnSpc>
-              <a:buFont typeface="Wingdings" panose="05000000000000000000" pitchFamily="2" charset="2"/>
-              <a:buChar char="v"/>
-            </a:pPr>
-            <a:r>
-              <a:rPr lang="ko-KR" altLang="en-US" sz="2000" dirty="0" err="1"/>
-              <a:t>머신러닝</a:t>
-            </a:r>
-            <a:r>
-              <a:rPr lang="ko-KR" altLang="en-US" sz="2000" dirty="0"/>
-              <a:t> 알고리즘</a:t>
-            </a:r>
-            <a:endParaRPr lang="en-US" altLang="ko-KR" sz="2000" dirty="0"/>
-          </a:p>
-          <a:p>
-            <a:pPr marL="342900" indent="-342900">
-              <a:lnSpc>
-                <a:spcPct val="150000"/>
-              </a:lnSpc>
-              <a:buFont typeface="Wingdings" panose="05000000000000000000" pitchFamily="2" charset="2"/>
-              <a:buChar char="v"/>
-            </a:pPr>
-            <a:r>
-              <a:rPr lang="ko-KR" altLang="en-US" sz="2000" dirty="0"/>
-              <a:t>분산과 편향</a:t>
-            </a:r>
-            <a:endParaRPr lang="en-US" altLang="ko-KR" sz="2000" dirty="0"/>
           </a:p>
         </p:txBody>
       </p:sp>
@@ -4250,8 +8463,8 @@
           </a:p>
         </p:txBody>
       </p:sp>
-      <mc:AlternateContent xmlns:mc="http://schemas.openxmlformats.org/markup-compatibility/2006">
-        <mc:Choice xmlns:a14="http://schemas.microsoft.com/office/drawing/2010/main" Requires="a14">
+      <mc:AlternateContent xmlns:mc="http://schemas.openxmlformats.org/markup-compatibility/2006" xmlns:a14="http://schemas.microsoft.com/office/drawing/2010/main">
+        <mc:Choice Requires="a14">
           <p:sp>
             <p:nvSpPr>
               <p:cNvPr id="10" name="TextBox 9">
@@ -4513,7 +8726,7 @@
             </p:txBody>
           </p:sp>
         </mc:Choice>
-        <mc:Fallback>
+        <mc:Fallback xmlns="">
           <p:sp>
             <p:nvSpPr>
               <p:cNvPr id="10" name="TextBox 9">
@@ -7654,7 +11867,7 @@
         <p:cNvPr id="1" name="">
           <a:extLst>
             <a:ext uri="{FF2B5EF4-FFF2-40B4-BE49-F238E27FC236}">
-              <a16:creationId xmlns:a16="http://schemas.microsoft.com/office/drawing/2014/main" id="{0DDE5245-9EDB-46A3-1F2A-4501E08E448E}"/>
+              <a16:creationId xmlns:a16="http://schemas.microsoft.com/office/drawing/2014/main" id="{76CD65FA-5A82-B436-A744-71C8BC1BFD01}"/>
             </a:ext>
           </a:extLst>
         </p:cNvPr>
@@ -7671,10 +11884,64 @@
       </p:grpSpPr>
       <p:sp>
         <p:nvSpPr>
+          <p:cNvPr id="7" name="직사각형 6">
+            <a:extLst>
+              <a:ext uri="{FF2B5EF4-FFF2-40B4-BE49-F238E27FC236}">
+                <a16:creationId xmlns:a16="http://schemas.microsoft.com/office/drawing/2014/main" id="{97A10316-F9AC-8EAD-793D-31A1E7253398}"/>
+              </a:ext>
+            </a:extLst>
+          </p:cNvPr>
+          <p:cNvSpPr/>
+          <p:nvPr/>
+        </p:nvSpPr>
+        <p:spPr>
+          <a:xfrm>
+            <a:off x="2152650" y="1400751"/>
+            <a:ext cx="5676900" cy="466149"/>
+          </a:xfrm>
+          <a:prstGeom prst="rect">
+            <a:avLst/>
+          </a:prstGeom>
+          <a:solidFill>
+            <a:schemeClr val="bg1">
+              <a:lumMod val="85000"/>
+            </a:schemeClr>
+          </a:solidFill>
+          <a:ln>
+            <a:noFill/>
+          </a:ln>
+        </p:spPr>
+        <p:style>
+          <a:lnRef idx="2">
+            <a:schemeClr val="accent1">
+              <a:shade val="15000"/>
+            </a:schemeClr>
+          </a:lnRef>
+          <a:fillRef idx="1">
+            <a:schemeClr val="accent1"/>
+          </a:fillRef>
+          <a:effectRef idx="0">
+            <a:schemeClr val="accent1"/>
+          </a:effectRef>
+          <a:fontRef idx="minor">
+            <a:schemeClr val="lt1"/>
+          </a:fontRef>
+        </p:style>
+        <p:txBody>
+          <a:bodyPr rtlCol="0" anchor="ctr"/>
+          <a:lstStyle/>
+          <a:p>
+            <a:pPr algn="ctr"/>
+            <a:endParaRPr lang="ko-KR" altLang="en-US"/>
+          </a:p>
+        </p:txBody>
+      </p:sp>
+      <p:sp>
+        <p:nvSpPr>
           <p:cNvPr id="4" name="슬라이드 번호 개체 틀 3">
             <a:extLst>
               <a:ext uri="{FF2B5EF4-FFF2-40B4-BE49-F238E27FC236}">
-                <a16:creationId xmlns:a16="http://schemas.microsoft.com/office/drawing/2014/main" id="{78188EE8-FE27-FA83-E7F6-84D649D4DECD}"/>
+                <a16:creationId xmlns:a16="http://schemas.microsoft.com/office/drawing/2014/main" id="{A66ACDC4-8095-55D2-F009-9C85960D8460}"/>
               </a:ext>
             </a:extLst>
           </p:cNvPr>
@@ -7709,7 +11976,7 @@
           <p:cNvPr id="3" name="제목 1">
             <a:extLst>
               <a:ext uri="{FF2B5EF4-FFF2-40B4-BE49-F238E27FC236}">
-                <a16:creationId xmlns:a16="http://schemas.microsoft.com/office/drawing/2014/main" id="{08DB553A-0412-FD51-E0DB-FBD53447FA10}"/>
+                <a16:creationId xmlns:a16="http://schemas.microsoft.com/office/drawing/2014/main" id="{53DD2CD5-595E-D34C-47F2-1533438A4277}"/>
               </a:ext>
             </a:extLst>
           </p:cNvPr>
@@ -7764,7 +12031,7 @@
                 <a:ea typeface="D2Coding" panose="020B0609020101020101" pitchFamily="49" charset="-127"/>
                 <a:cs typeface="Segoe UI Light" panose="020B0502040204020203" pitchFamily="34" charset="0"/>
               </a:rPr>
-              <a:t>Query Transformation </a:t>
+              <a:t>Contents</a:t>
             </a:r>
             <a:endParaRPr lang="ko-KR" altLang="en-US" sz="2800" cap="none" dirty="0">
               <a:solidFill>
@@ -7784,7 +12051,7 @@
           <p:cNvPr id="5" name="TextBox 4">
             <a:extLst>
               <a:ext uri="{FF2B5EF4-FFF2-40B4-BE49-F238E27FC236}">
-                <a16:creationId xmlns:a16="http://schemas.microsoft.com/office/drawing/2014/main" id="{A66CD26D-1BF6-C93E-CACA-6F5B48C79395}"/>
+                <a16:creationId xmlns:a16="http://schemas.microsoft.com/office/drawing/2014/main" id="{D248E036-F1F3-29F5-2DCD-2E433A8FFF4F}"/>
               </a:ext>
             </a:extLst>
           </p:cNvPr>
@@ -7793,8 +12060,8 @@
         </p:nvSpPr>
         <p:spPr>
           <a:xfrm>
-            <a:off x="542320" y="1452061"/>
-            <a:ext cx="10925780" cy="4671151"/>
+            <a:off x="2733675" y="1381701"/>
+            <a:ext cx="4791075" cy="4994316"/>
           </a:xfrm>
           <a:prstGeom prst="rect">
             <a:avLst/>
@@ -7807,400 +12074,216 @@
           </a:bodyPr>
           <a:lstStyle/>
           <a:p>
-            <a:pPr marL="285750" indent="-285750">
+            <a:pPr marL="400050" indent="-400050">
               <a:lnSpc>
                 <a:spcPct val="150000"/>
               </a:lnSpc>
-              <a:buFont typeface="Wingdings" panose="05000000000000000000" pitchFamily="2" charset="2"/>
-              <a:buChar char="v"/>
+              <a:buFont typeface="+mj-lt"/>
+              <a:buAutoNum type="romanUcPeriod"/>
             </a:pPr>
             <a:r>
               <a:rPr lang="en-US" altLang="ko-KR" dirty="0">
                 <a:latin typeface="D2Coding" panose="020B0609020101020101" pitchFamily="49" charset="-127"/>
                 <a:ea typeface="D2Coding" panose="020B0609020101020101" pitchFamily="49" charset="-127"/>
               </a:rPr>
-              <a:t>Rewrite-Retrieve-Read</a:t>
-            </a:r>
-          </a:p>
-          <a:p>
-            <a:pPr marL="742950" lvl="1" indent="-285750">
+              <a:t>Query Transformation     </a:t>
+            </a:r>
+          </a:p>
+          <a:p>
+            <a:pPr marL="857250" lvl="1" indent="-400050">
               <a:lnSpc>
                 <a:spcPct val="150000"/>
               </a:lnSpc>
-              <a:buFont typeface="Wingdings" panose="05000000000000000000" pitchFamily="2" charset="2"/>
-              <a:buChar char="v"/>
-            </a:pPr>
-            <a:r>
-              <a:rPr lang="ko-KR" altLang="en-US" sz="1600" dirty="0">
-                <a:latin typeface="D2Coding" panose="020B0609020101020101" pitchFamily="49" charset="-127"/>
-                <a:ea typeface="D2Coding" panose="020B0609020101020101" pitchFamily="49" charset="-127"/>
-              </a:rPr>
-              <a:t>사용자의 </a:t>
-            </a:r>
+              <a:buFont typeface="+mj-lt"/>
+              <a:buAutoNum type="romanUcPeriod"/>
+            </a:pPr>
             <a:r>
               <a:rPr lang="en-US" altLang="ko-KR" sz="1600" dirty="0">
                 <a:latin typeface="D2Coding" panose="020B0609020101020101" pitchFamily="49" charset="-127"/>
                 <a:ea typeface="D2Coding" panose="020B0609020101020101" pitchFamily="49" charset="-127"/>
               </a:rPr>
-              <a:t>Query</a:t>
-            </a:r>
-            <a:r>
-              <a:rPr lang="ko-KR" altLang="en-US" sz="1600" dirty="0">
-                <a:latin typeface="D2Coding" panose="020B0609020101020101" pitchFamily="49" charset="-127"/>
-                <a:ea typeface="D2Coding" panose="020B0609020101020101" pitchFamily="49" charset="-127"/>
-              </a:rPr>
-              <a:t>를 </a:t>
-            </a:r>
+              <a:t>Rewrite-Retrieve-Read     </a:t>
+            </a:r>
+          </a:p>
+          <a:p>
+            <a:pPr marL="857250" lvl="1" indent="-400050">
+              <a:lnSpc>
+                <a:spcPct val="150000"/>
+              </a:lnSpc>
+              <a:buFont typeface="+mj-lt"/>
+              <a:buAutoNum type="romanUcPeriod"/>
+            </a:pPr>
             <a:r>
               <a:rPr lang="en-US" altLang="ko-KR" sz="1600" dirty="0">
                 <a:latin typeface="D2Coding" panose="020B0609020101020101" pitchFamily="49" charset="-127"/>
                 <a:ea typeface="D2Coding" panose="020B0609020101020101" pitchFamily="49" charset="-127"/>
               </a:rPr>
-              <a:t>LLM</a:t>
-            </a:r>
-            <a:r>
-              <a:rPr lang="ko-KR" altLang="en-US" sz="1600" dirty="0">
-                <a:latin typeface="D2Coding" panose="020B0609020101020101" pitchFamily="49" charset="-127"/>
-                <a:ea typeface="D2Coding" panose="020B0609020101020101" pitchFamily="49" charset="-127"/>
-              </a:rPr>
-              <a:t>이 </a:t>
-            </a:r>
+              <a:t>Multi-Query Retrieval     </a:t>
+            </a:r>
+          </a:p>
+          <a:p>
+            <a:pPr marL="857250" lvl="1" indent="-400050">
+              <a:lnSpc>
+                <a:spcPct val="150000"/>
+              </a:lnSpc>
+              <a:buFont typeface="+mj-lt"/>
+              <a:buAutoNum type="romanUcPeriod"/>
+            </a:pPr>
             <a:r>
               <a:rPr lang="en-US" altLang="ko-KR" sz="1600" dirty="0">
                 <a:latin typeface="D2Coding" panose="020B0609020101020101" pitchFamily="49" charset="-127"/>
                 <a:ea typeface="D2Coding" panose="020B0609020101020101" pitchFamily="49" charset="-127"/>
               </a:rPr>
-              <a:t>1</a:t>
-            </a:r>
-            <a:r>
-              <a:rPr lang="ko-KR" altLang="en-US" sz="1600" dirty="0">
-                <a:latin typeface="D2Coding" panose="020B0609020101020101" pitchFamily="49" charset="-127"/>
-                <a:ea typeface="D2Coding" panose="020B0609020101020101" pitchFamily="49" charset="-127"/>
-              </a:rPr>
-              <a:t>차</a:t>
-            </a:r>
+              <a:t>RAG-Fusion     </a:t>
+            </a:r>
+          </a:p>
+          <a:p>
+            <a:pPr marL="857250" lvl="1" indent="-400050">
+              <a:lnSpc>
+                <a:spcPct val="150000"/>
+              </a:lnSpc>
+              <a:buFont typeface="+mj-lt"/>
+              <a:buAutoNum type="romanUcPeriod"/>
+            </a:pPr>
             <a:r>
               <a:rPr lang="en-US" altLang="ko-KR" sz="1600" dirty="0">
                 <a:latin typeface="D2Coding" panose="020B0609020101020101" pitchFamily="49" charset="-127"/>
                 <a:ea typeface="D2Coding" panose="020B0609020101020101" pitchFamily="49" charset="-127"/>
               </a:rPr>
-              <a:t>, 2</a:t>
-            </a:r>
-            <a:r>
-              <a:rPr lang="ko-KR" altLang="en-US" sz="1600" dirty="0">
-                <a:latin typeface="D2Coding" panose="020B0609020101020101" pitchFamily="49" charset="-127"/>
-                <a:ea typeface="D2Coding" panose="020B0609020101020101" pitchFamily="49" charset="-127"/>
-              </a:rPr>
-              <a:t>차</a:t>
-            </a:r>
+              <a:t>Hypothetical Document Embeddings</a:t>
+            </a:r>
+          </a:p>
+          <a:p>
+            <a:pPr lvl="1">
+              <a:lnSpc>
+                <a:spcPct val="150000"/>
+              </a:lnSpc>
+            </a:pPr>
             <a:r>
               <a:rPr lang="en-US" altLang="ko-KR" sz="1600" dirty="0">
                 <a:latin typeface="D2Coding" panose="020B0609020101020101" pitchFamily="49" charset="-127"/>
                 <a:ea typeface="D2Coding" panose="020B0609020101020101" pitchFamily="49" charset="-127"/>
               </a:rPr>
-              <a:t>,.. </a:t>
-            </a:r>
-            <a:r>
-              <a:rPr lang="ko-KR" altLang="en-US" sz="1600" dirty="0">
-                <a:latin typeface="D2Coding" panose="020B0609020101020101" pitchFamily="49" charset="-127"/>
-                <a:ea typeface="D2Coding" panose="020B0609020101020101" pitchFamily="49" charset="-127"/>
-              </a:rPr>
-              <a:t>로 변환한 후 벡터스토어에서 조각 문서를 찾아 내기</a:t>
-            </a:r>
+              <a:t> </a:t>
+            </a:r>
+          </a:p>
+          <a:p>
+            <a:pPr marL="400050" indent="-400050">
+              <a:lnSpc>
+                <a:spcPct val="150000"/>
+              </a:lnSpc>
+              <a:buFont typeface="+mj-lt"/>
+              <a:buAutoNum type="romanUcPeriod"/>
+            </a:pPr>
+            <a:r>
+              <a:rPr lang="en-US" altLang="ko-KR" dirty="0">
+                <a:latin typeface="D2Coding" panose="020B0609020101020101" pitchFamily="49" charset="-127"/>
+                <a:ea typeface="D2Coding" panose="020B0609020101020101" pitchFamily="49" charset="-127"/>
+              </a:rPr>
+              <a:t>Query Routing     </a:t>
+            </a:r>
+          </a:p>
+          <a:p>
+            <a:pPr marL="857250" lvl="1" indent="-400050">
+              <a:lnSpc>
+                <a:spcPct val="150000"/>
+              </a:lnSpc>
+              <a:buFont typeface="+mj-lt"/>
+              <a:buAutoNum type="romanUcPeriod"/>
+            </a:pPr>
+            <a:r>
+              <a:rPr lang="en-US" altLang="ko-KR" sz="1600" dirty="0">
+                <a:latin typeface="D2Coding" panose="020B0609020101020101" pitchFamily="49" charset="-127"/>
+                <a:ea typeface="D2Coding" panose="020B0609020101020101" pitchFamily="49" charset="-127"/>
+              </a:rPr>
+              <a:t>Logical Routing     </a:t>
+            </a:r>
+          </a:p>
+          <a:p>
+            <a:pPr marL="857250" lvl="1" indent="-400050">
+              <a:lnSpc>
+                <a:spcPct val="150000"/>
+              </a:lnSpc>
+              <a:buFont typeface="+mj-lt"/>
+              <a:buAutoNum type="romanUcPeriod"/>
+            </a:pPr>
+            <a:r>
+              <a:rPr lang="en-US" altLang="ko-KR" sz="1600" dirty="0">
+                <a:latin typeface="D2Coding" panose="020B0609020101020101" pitchFamily="49" charset="-127"/>
+                <a:ea typeface="D2Coding" panose="020B0609020101020101" pitchFamily="49" charset="-127"/>
+              </a:rPr>
+              <a:t>Semantic Routing </a:t>
+            </a:r>
+          </a:p>
+          <a:p>
+            <a:pPr lvl="1">
+              <a:lnSpc>
+                <a:spcPct val="150000"/>
+              </a:lnSpc>
+            </a:pPr>
             <a:endParaRPr lang="en-US" altLang="ko-KR" sz="1600" dirty="0">
               <a:latin typeface="D2Coding" panose="020B0609020101020101" pitchFamily="49" charset="-127"/>
               <a:ea typeface="D2Coding" panose="020B0609020101020101" pitchFamily="49" charset="-127"/>
             </a:endParaRPr>
           </a:p>
           <a:p>
-            <a:pPr marL="742950" lvl="1" indent="-285750">
+            <a:pPr marL="400050" indent="-400050">
               <a:lnSpc>
                 <a:spcPct val="150000"/>
               </a:lnSpc>
-              <a:buFont typeface="Wingdings" panose="05000000000000000000" pitchFamily="2" charset="2"/>
-              <a:buChar char="v"/>
-            </a:pPr>
-            <a:endParaRPr lang="en-US" altLang="ko-KR" sz="1600" dirty="0">
+              <a:buFont typeface="+mj-lt"/>
+              <a:buAutoNum type="romanUcPeriod"/>
+            </a:pPr>
+            <a:r>
+              <a:rPr lang="en-US" altLang="ko-KR" dirty="0">
+                <a:latin typeface="D2Coding" panose="020B0609020101020101" pitchFamily="49" charset="-127"/>
+                <a:ea typeface="D2Coding" panose="020B0609020101020101" pitchFamily="49" charset="-127"/>
+              </a:rPr>
+              <a:t>Query Construction     </a:t>
+            </a:r>
+          </a:p>
+          <a:p>
+            <a:pPr marL="857250" lvl="1" indent="-400050">
+              <a:lnSpc>
+                <a:spcPct val="150000"/>
+              </a:lnSpc>
+              <a:buFont typeface="+mj-lt"/>
+              <a:buAutoNum type="romanUcPeriod"/>
+            </a:pPr>
+            <a:r>
+              <a:rPr lang="en-US" altLang="ko-KR" sz="1600" dirty="0">
+                <a:latin typeface="D2Coding" panose="020B0609020101020101" pitchFamily="49" charset="-127"/>
+                <a:ea typeface="D2Coding" panose="020B0609020101020101" pitchFamily="49" charset="-127"/>
+              </a:rPr>
+              <a:t>Text-to-Metadata Filter     </a:t>
+            </a:r>
+          </a:p>
+          <a:p>
+            <a:pPr marL="857250" lvl="1" indent="-400050">
+              <a:lnSpc>
+                <a:spcPct val="150000"/>
+              </a:lnSpc>
+              <a:buFont typeface="+mj-lt"/>
+              <a:buAutoNum type="romanUcPeriod"/>
+            </a:pPr>
+            <a:r>
+              <a:rPr lang="en-US" altLang="ko-KR" sz="1600" dirty="0">
+                <a:latin typeface="D2Coding" panose="020B0609020101020101" pitchFamily="49" charset="-127"/>
+                <a:ea typeface="D2Coding" panose="020B0609020101020101" pitchFamily="49" charset="-127"/>
+              </a:rPr>
+              <a:t>Text-to-SQL</a:t>
+            </a:r>
+            <a:endParaRPr lang="ko-KR" altLang="en-US" sz="1600" dirty="0">
               <a:latin typeface="D2Coding" panose="020B0609020101020101" pitchFamily="49" charset="-127"/>
               <a:ea typeface="D2Coding" panose="020B0609020101020101" pitchFamily="49" charset="-127"/>
             </a:endParaRPr>
-          </a:p>
-          <a:p>
-            <a:pPr marL="285750" indent="-285750">
-              <a:lnSpc>
-                <a:spcPct val="150000"/>
-              </a:lnSpc>
-              <a:buFont typeface="Wingdings" panose="05000000000000000000" pitchFamily="2" charset="2"/>
-              <a:buChar char="v"/>
-            </a:pPr>
-            <a:r>
-              <a:rPr lang="en-US" altLang="ko-KR" dirty="0">
-                <a:latin typeface="D2Coding" panose="020B0609020101020101" pitchFamily="49" charset="-127"/>
-                <a:ea typeface="D2Coding" panose="020B0609020101020101" pitchFamily="49" charset="-127"/>
-              </a:rPr>
-              <a:t>Multi-Query Retrieval</a:t>
-            </a:r>
-          </a:p>
-          <a:p>
-            <a:pPr marL="742950" lvl="1" indent="-285750">
-              <a:lnSpc>
-                <a:spcPct val="150000"/>
-              </a:lnSpc>
-              <a:buFont typeface="Wingdings" panose="05000000000000000000" pitchFamily="2" charset="2"/>
-              <a:buChar char="v"/>
-            </a:pPr>
-            <a:r>
-              <a:rPr lang="ko-KR" altLang="en-US" sz="1600" dirty="0">
-                <a:latin typeface="D2Coding" panose="020B0609020101020101" pitchFamily="49" charset="-127"/>
-                <a:ea typeface="D2Coding" panose="020B0609020101020101" pitchFamily="49" charset="-127"/>
-              </a:rPr>
-              <a:t>사용자의 </a:t>
-            </a:r>
-            <a:r>
-              <a:rPr lang="en-US" altLang="ko-KR" sz="1600" dirty="0">
-                <a:latin typeface="D2Coding" panose="020B0609020101020101" pitchFamily="49" charset="-127"/>
-                <a:ea typeface="D2Coding" panose="020B0609020101020101" pitchFamily="49" charset="-127"/>
-              </a:rPr>
-              <a:t>Query</a:t>
-            </a:r>
-            <a:r>
-              <a:rPr lang="ko-KR" altLang="en-US" sz="1600" dirty="0">
-                <a:latin typeface="D2Coding" panose="020B0609020101020101" pitchFamily="49" charset="-127"/>
-                <a:ea typeface="D2Coding" panose="020B0609020101020101" pitchFamily="49" charset="-127"/>
-              </a:rPr>
-              <a:t>를 </a:t>
-            </a:r>
-            <a:r>
-              <a:rPr lang="en-US" altLang="ko-KR" sz="1600" dirty="0">
-                <a:latin typeface="D2Coding" panose="020B0609020101020101" pitchFamily="49" charset="-127"/>
-                <a:ea typeface="D2Coding" panose="020B0609020101020101" pitchFamily="49" charset="-127"/>
-              </a:rPr>
-              <a:t>LLM</a:t>
-            </a:r>
-            <a:r>
-              <a:rPr lang="ko-KR" altLang="en-US" sz="1600" dirty="0">
-                <a:latin typeface="D2Coding" panose="020B0609020101020101" pitchFamily="49" charset="-127"/>
-                <a:ea typeface="D2Coding" panose="020B0609020101020101" pitchFamily="49" charset="-127"/>
-              </a:rPr>
-              <a:t>이 질문을 </a:t>
-            </a:r>
-            <a:r>
-              <a:rPr lang="en-US" altLang="ko-KR" sz="1600" dirty="0">
-                <a:latin typeface="D2Coding" panose="020B0609020101020101" pitchFamily="49" charset="-127"/>
-                <a:ea typeface="D2Coding" panose="020B0609020101020101" pitchFamily="49" charset="-127"/>
-              </a:rPr>
-              <a:t>3~4</a:t>
-            </a:r>
-            <a:r>
-              <a:rPr lang="ko-KR" altLang="en-US" sz="1600" dirty="0">
-                <a:latin typeface="D2Coding" panose="020B0609020101020101" pitchFamily="49" charset="-127"/>
-                <a:ea typeface="D2Coding" panose="020B0609020101020101" pitchFamily="49" charset="-127"/>
-              </a:rPr>
-              <a:t>개의 다른 표현으로 복제한 후 벡터스토어에서 조각 문서를 찾아 내기</a:t>
-            </a:r>
-            <a:endParaRPr lang="en-US" altLang="ko-KR" sz="1600" dirty="0">
-              <a:latin typeface="D2Coding" panose="020B0609020101020101" pitchFamily="49" charset="-127"/>
-              <a:ea typeface="D2Coding" panose="020B0609020101020101" pitchFamily="49" charset="-127"/>
-            </a:endParaRPr>
-          </a:p>
-          <a:p>
-            <a:pPr marL="742950" lvl="1" indent="-285750">
-              <a:lnSpc>
-                <a:spcPct val="150000"/>
-              </a:lnSpc>
-              <a:buFont typeface="Wingdings" panose="05000000000000000000" pitchFamily="2" charset="2"/>
-              <a:buChar char="v"/>
-            </a:pPr>
-            <a:endParaRPr lang="en-US" altLang="ko-KR" sz="1600" dirty="0">
-              <a:latin typeface="D2Coding" panose="020B0609020101020101" pitchFamily="49" charset="-127"/>
-              <a:ea typeface="D2Coding" panose="020B0609020101020101" pitchFamily="49" charset="-127"/>
-            </a:endParaRPr>
-          </a:p>
-          <a:p>
-            <a:pPr marL="285750" indent="-285750">
-              <a:lnSpc>
-                <a:spcPct val="150000"/>
-              </a:lnSpc>
-              <a:buFont typeface="Wingdings" panose="05000000000000000000" pitchFamily="2" charset="2"/>
-              <a:buChar char="v"/>
-            </a:pPr>
-            <a:r>
-              <a:rPr lang="en-US" altLang="ko-KR" dirty="0">
-                <a:latin typeface="D2Coding" panose="020B0609020101020101" pitchFamily="49" charset="-127"/>
-                <a:ea typeface="D2Coding" panose="020B0609020101020101" pitchFamily="49" charset="-127"/>
-              </a:rPr>
-              <a:t>RAG-Fusion</a:t>
-            </a:r>
-          </a:p>
-          <a:p>
-            <a:pPr marL="742950" lvl="1" indent="-285750">
-              <a:lnSpc>
-                <a:spcPct val="150000"/>
-              </a:lnSpc>
-              <a:buFont typeface="Wingdings" panose="05000000000000000000" pitchFamily="2" charset="2"/>
-              <a:buChar char="v"/>
-            </a:pPr>
-            <a:r>
-              <a:rPr lang="en-US" altLang="ko-KR" sz="1600" dirty="0">
-                <a:latin typeface="D2Coding" panose="020B0609020101020101" pitchFamily="49" charset="-127"/>
-                <a:ea typeface="D2Coding" panose="020B0609020101020101" pitchFamily="49" charset="-127"/>
-              </a:rPr>
-              <a:t>Multi-Query Retrieval</a:t>
-            </a:r>
-            <a:r>
-              <a:rPr lang="ko-KR" altLang="en-US" sz="1600" dirty="0">
-                <a:latin typeface="D2Coding" panose="020B0609020101020101" pitchFamily="49" charset="-127"/>
-                <a:ea typeface="D2Coding" panose="020B0609020101020101" pitchFamily="49" charset="-127"/>
-              </a:rPr>
-              <a:t>에서 여러 개의 질문에서 도출된</a:t>
-            </a:r>
-            <a:r>
-              <a:rPr lang="en-US" altLang="ko-KR" sz="1600" dirty="0">
-                <a:latin typeface="D2Coding" panose="020B0609020101020101" pitchFamily="49" charset="-127"/>
-                <a:ea typeface="D2Coding" panose="020B0609020101020101" pitchFamily="49" charset="-127"/>
-              </a:rPr>
-              <a:t> </a:t>
-            </a:r>
-            <a:r>
-              <a:rPr lang="ko-KR" altLang="en-US" sz="1600" dirty="0">
-                <a:latin typeface="D2Coding" panose="020B0609020101020101" pitchFamily="49" charset="-127"/>
-                <a:ea typeface="D2Coding" panose="020B0609020101020101" pitchFamily="49" charset="-127"/>
-              </a:rPr>
-              <a:t>조각 문서에 랭킹을</a:t>
-            </a:r>
-            <a:r>
-              <a:rPr lang="en-US" altLang="ko-KR" sz="1600" dirty="0">
-                <a:latin typeface="D2Coding" panose="020B0609020101020101" pitchFamily="49" charset="-127"/>
-                <a:ea typeface="D2Coding" panose="020B0609020101020101" pitchFamily="49" charset="-127"/>
-              </a:rPr>
-              <a:t> </a:t>
-            </a:r>
-            <a:r>
-              <a:rPr lang="ko-KR" altLang="en-US" sz="1600" dirty="0">
-                <a:latin typeface="D2Coding" panose="020B0609020101020101" pitchFamily="49" charset="-127"/>
-                <a:ea typeface="D2Coding" panose="020B0609020101020101" pitchFamily="49" charset="-127"/>
-              </a:rPr>
-              <a:t>부여하여 찾아내기</a:t>
-            </a:r>
-            <a:endParaRPr lang="en-US" altLang="ko-KR" sz="1600" dirty="0">
-              <a:latin typeface="D2Coding" panose="020B0609020101020101" pitchFamily="49" charset="-127"/>
-              <a:ea typeface="D2Coding" panose="020B0609020101020101" pitchFamily="49" charset="-127"/>
-            </a:endParaRPr>
-          </a:p>
-          <a:p>
-            <a:pPr marL="742950" lvl="1" indent="-285750">
-              <a:lnSpc>
-                <a:spcPct val="150000"/>
-              </a:lnSpc>
-              <a:buFont typeface="Wingdings" panose="05000000000000000000" pitchFamily="2" charset="2"/>
-              <a:buChar char="v"/>
-            </a:pPr>
-            <a:endParaRPr lang="en-US" altLang="ko-KR" sz="1600" dirty="0">
-              <a:latin typeface="D2Coding" panose="020B0609020101020101" pitchFamily="49" charset="-127"/>
-              <a:ea typeface="D2Coding" panose="020B0609020101020101" pitchFamily="49" charset="-127"/>
-            </a:endParaRPr>
-          </a:p>
-          <a:p>
-            <a:pPr marL="285750" indent="-285750">
-              <a:lnSpc>
-                <a:spcPct val="150000"/>
-              </a:lnSpc>
-              <a:buFont typeface="Wingdings" panose="05000000000000000000" pitchFamily="2" charset="2"/>
-              <a:buChar char="v"/>
-            </a:pPr>
-            <a:r>
-              <a:rPr lang="en-US" altLang="ko-KR" dirty="0">
-                <a:latin typeface="D2Coding" panose="020B0609020101020101" pitchFamily="49" charset="-127"/>
-                <a:ea typeface="D2Coding" panose="020B0609020101020101" pitchFamily="49" charset="-127"/>
-              </a:rPr>
-              <a:t>Hypothetical Document Embeddings</a:t>
-            </a:r>
-          </a:p>
-          <a:p>
-            <a:pPr marL="742950" lvl="1" indent="-285750">
-              <a:lnSpc>
-                <a:spcPct val="150000"/>
-              </a:lnSpc>
-              <a:buFont typeface="Wingdings" panose="05000000000000000000" pitchFamily="2" charset="2"/>
-              <a:buChar char="v"/>
-            </a:pPr>
-            <a:r>
-              <a:rPr lang="ko-KR" altLang="en-US" sz="1600" dirty="0">
-                <a:latin typeface="D2Coding" panose="020B0609020101020101" pitchFamily="49" charset="-127"/>
-                <a:ea typeface="D2Coding" panose="020B0609020101020101" pitchFamily="49" charset="-127"/>
-              </a:rPr>
-              <a:t>사용자의 질문을 기반으로 가상의 문서</a:t>
-            </a:r>
-            <a:r>
-              <a:rPr lang="en-US" altLang="ko-KR" sz="1600" dirty="0">
-                <a:latin typeface="D2Coding" panose="020B0609020101020101" pitchFamily="49" charset="-127"/>
-                <a:ea typeface="D2Coding" panose="020B0609020101020101" pitchFamily="49" charset="-127"/>
-              </a:rPr>
-              <a:t>(Hypothetical Document)</a:t>
-            </a:r>
-            <a:r>
-              <a:rPr lang="ko-KR" altLang="en-US" sz="1600" dirty="0">
-                <a:latin typeface="D2Coding" panose="020B0609020101020101" pitchFamily="49" charset="-127"/>
-                <a:ea typeface="D2Coding" panose="020B0609020101020101" pitchFamily="49" charset="-127"/>
-              </a:rPr>
-              <a:t>를 </a:t>
-            </a:r>
-            <a:r>
-              <a:rPr lang="en-US" altLang="ko-KR" sz="1600" dirty="0">
-                <a:latin typeface="D2Coding" panose="020B0609020101020101" pitchFamily="49" charset="-127"/>
-                <a:ea typeface="D2Coding" panose="020B0609020101020101" pitchFamily="49" charset="-127"/>
-              </a:rPr>
-              <a:t>LLM</a:t>
-            </a:r>
-            <a:r>
-              <a:rPr lang="ko-KR" altLang="en-US" sz="1600" dirty="0">
-                <a:latin typeface="D2Coding" panose="020B0609020101020101" pitchFamily="49" charset="-127"/>
-                <a:ea typeface="D2Coding" panose="020B0609020101020101" pitchFamily="49" charset="-127"/>
-              </a:rPr>
-              <a:t>이 생성하고</a:t>
-            </a:r>
-            <a:r>
-              <a:rPr lang="en-US" altLang="ko-KR" sz="1600" dirty="0">
-                <a:latin typeface="D2Coding" panose="020B0609020101020101" pitchFamily="49" charset="-127"/>
-                <a:ea typeface="D2Coding" panose="020B0609020101020101" pitchFamily="49" charset="-127"/>
-              </a:rPr>
-              <a:t>, </a:t>
-            </a:r>
-            <a:r>
-              <a:rPr lang="ko-KR" altLang="en-US" sz="1600" dirty="0">
-                <a:latin typeface="D2Coding" panose="020B0609020101020101" pitchFamily="49" charset="-127"/>
-                <a:ea typeface="D2Coding" panose="020B0609020101020101" pitchFamily="49" charset="-127"/>
-              </a:rPr>
-              <a:t>이 문서를 </a:t>
-            </a:r>
-            <a:r>
-              <a:rPr lang="ko-KR" altLang="en-US" sz="1600" dirty="0" err="1">
-                <a:latin typeface="D2Coding" panose="020B0609020101020101" pitchFamily="49" charset="-127"/>
-                <a:ea typeface="D2Coding" panose="020B0609020101020101" pitchFamily="49" charset="-127"/>
-              </a:rPr>
-              <a:t>임베딩하여</a:t>
-            </a:r>
-            <a:r>
-              <a:rPr lang="en-US" altLang="ko-KR" sz="1600" dirty="0">
-                <a:latin typeface="D2Coding" panose="020B0609020101020101" pitchFamily="49" charset="-127"/>
-                <a:ea typeface="D2Coding" panose="020B0609020101020101" pitchFamily="49" charset="-127"/>
-              </a:rPr>
-              <a:t>, </a:t>
-            </a:r>
-            <a:r>
-              <a:rPr lang="ko-KR" altLang="en-US" sz="1600" dirty="0">
-                <a:latin typeface="D2Coding" panose="020B0609020101020101" pitchFamily="49" charset="-127"/>
-                <a:ea typeface="D2Coding" panose="020B0609020101020101" pitchFamily="49" charset="-127"/>
-              </a:rPr>
-              <a:t>벡터 유사도를 바탕으로 관련 문서를 검색하는 방식</a:t>
-            </a:r>
           </a:p>
         </p:txBody>
       </p:sp>
     </p:spTree>
     <p:extLst>
       <p:ext uri="{BB962C8B-B14F-4D97-AF65-F5344CB8AC3E}">
-        <p14:creationId xmlns:p14="http://schemas.microsoft.com/office/powerpoint/2010/main" val="1432651993"/>
+        <p14:creationId xmlns:p14="http://schemas.microsoft.com/office/powerpoint/2010/main" val="2333663661"/>
       </p:ext>
     </p:extLst>
   </p:cSld>
@@ -8218,7 +12301,7 @@
         <p:cNvPr id="1" name="">
           <a:extLst>
             <a:ext uri="{FF2B5EF4-FFF2-40B4-BE49-F238E27FC236}">
-              <a16:creationId xmlns:a16="http://schemas.microsoft.com/office/drawing/2014/main" id="{93F6F4E3-E67C-9BAF-371A-93DFEECB9E74}"/>
+              <a16:creationId xmlns:a16="http://schemas.microsoft.com/office/drawing/2014/main" id="{6042E7C5-3E23-B436-1692-8DC23B536508}"/>
             </a:ext>
           </a:extLst>
         </p:cNvPr>
@@ -8238,7 +12321,7 @@
           <p:cNvPr id="4" name="슬라이드 번호 개체 틀 3">
             <a:extLst>
               <a:ext uri="{FF2B5EF4-FFF2-40B4-BE49-F238E27FC236}">
-                <a16:creationId xmlns:a16="http://schemas.microsoft.com/office/drawing/2014/main" id="{BE06B752-0047-4A9A-D6ED-EE1C0D467FE9}"/>
+                <a16:creationId xmlns:a16="http://schemas.microsoft.com/office/drawing/2014/main" id="{D052AD99-116A-1D7B-57C9-C622DBDBF430}"/>
               </a:ext>
             </a:extLst>
           </p:cNvPr>
@@ -8273,7 +12356,7 @@
           <p:cNvPr id="3" name="제목 1">
             <a:extLst>
               <a:ext uri="{FF2B5EF4-FFF2-40B4-BE49-F238E27FC236}">
-                <a16:creationId xmlns:a16="http://schemas.microsoft.com/office/drawing/2014/main" id="{97AD7CBA-31A4-09CB-B7B4-C0EE49E65DE0}"/>
+                <a16:creationId xmlns:a16="http://schemas.microsoft.com/office/drawing/2014/main" id="{3B1DA200-D1BD-8957-2555-D8648F8A3640}"/>
               </a:ext>
             </a:extLst>
           </p:cNvPr>
@@ -8328,7 +12411,7 @@
                 <a:ea typeface="D2Coding" panose="020B0609020101020101" pitchFamily="49" charset="-127"/>
                 <a:cs typeface="Segoe UI Light" panose="020B0502040204020203" pitchFamily="34" charset="0"/>
               </a:rPr>
-              <a:t>Query Transformation </a:t>
+              <a:t>Goals</a:t>
             </a:r>
             <a:endParaRPr lang="ko-KR" altLang="en-US" sz="2800" cap="none" dirty="0">
               <a:solidFill>
@@ -8343,12 +12426,59 @@
           </a:p>
         </p:txBody>
       </p:sp>
+      <p:pic>
+        <p:nvPicPr>
+          <p:cNvPr id="2050" name="Picture 2" descr="도서관에서 램프 아래서 공부하는 사람들">
+            <a:extLst>
+              <a:ext uri="{FF2B5EF4-FFF2-40B4-BE49-F238E27FC236}">
+                <a16:creationId xmlns:a16="http://schemas.microsoft.com/office/drawing/2014/main" id="{EED2A11B-8C3A-E9C2-E4A2-7B0ABD97A43A}"/>
+              </a:ext>
+            </a:extLst>
+          </p:cNvPr>
+          <p:cNvPicPr>
+            <a:picLocks noChangeAspect="1" noChangeArrowheads="1"/>
+          </p:cNvPicPr>
+          <p:nvPr/>
+        </p:nvPicPr>
+        <p:blipFill>
+          <a:blip r:embed="rId2">
+            <a:extLst>
+              <a:ext uri="{28A0092B-C50C-407E-A947-70E740481C1C}">
+                <a14:useLocalDpi xmlns:a14="http://schemas.microsoft.com/office/drawing/2010/main" val="0"/>
+              </a:ext>
+            </a:extLst>
+          </a:blip>
+          <a:srcRect/>
+          <a:stretch>
+            <a:fillRect/>
+          </a:stretch>
+        </p:blipFill>
+        <p:spPr bwMode="auto">
+          <a:xfrm>
+            <a:off x="857250" y="2366012"/>
+            <a:ext cx="4371975" cy="2876913"/>
+          </a:xfrm>
+          <a:prstGeom prst="rect">
+            <a:avLst/>
+          </a:prstGeom>
+          <a:noFill/>
+          <a:extLst>
+            <a:ext uri="{909E8E84-426E-40DD-AFC4-6F175D3DCCD1}">
+              <a14:hiddenFill xmlns:a14="http://schemas.microsoft.com/office/drawing/2010/main">
+                <a:solidFill>
+                  <a:srgbClr val="FFFFFF"/>
+                </a:solidFill>
+              </a14:hiddenFill>
+            </a:ext>
+          </a:extLst>
+        </p:spPr>
+      </p:pic>
       <p:sp>
         <p:nvSpPr>
-          <p:cNvPr id="5" name="TextBox 4">
+          <p:cNvPr id="6" name="TextBox 5">
             <a:extLst>
               <a:ext uri="{FF2B5EF4-FFF2-40B4-BE49-F238E27FC236}">
-                <a16:creationId xmlns:a16="http://schemas.microsoft.com/office/drawing/2014/main" id="{5A06B856-0E9C-4457-343E-665F75B83343}"/>
+                <a16:creationId xmlns:a16="http://schemas.microsoft.com/office/drawing/2014/main" id="{F643317B-A396-DE0D-1096-E289F92E4AD5}"/>
               </a:ext>
             </a:extLst>
           </p:cNvPr>
@@ -8357,8 +12487,8 @@
         </p:nvSpPr>
         <p:spPr>
           <a:xfrm>
-            <a:off x="8077805" y="709111"/>
-            <a:ext cx="3600450" cy="369332"/>
+            <a:off x="5791200" y="2333489"/>
+            <a:ext cx="5543550" cy="2617704"/>
           </a:xfrm>
           <a:prstGeom prst="rect">
             <a:avLst/>
@@ -8371,13 +12501,151 @@
           </a:bodyPr>
           <a:lstStyle/>
           <a:p>
-            <a:pPr algn="r"/>
-            <a:r>
-              <a:rPr lang="en-US" altLang="ko-KR" dirty="0">
-                <a:latin typeface="D2Coding" panose="020B0609020101020101" pitchFamily="49" charset="-127"/>
-                <a:ea typeface="D2Coding" panose="020B0609020101020101" pitchFamily="49" charset="-127"/>
-              </a:rPr>
-              <a:t>Rewrite-Retrieve-Read</a:t>
+            <a:pPr>
+              <a:lnSpc>
+                <a:spcPct val="200000"/>
+              </a:lnSpc>
+            </a:pPr>
+            <a:r>
+              <a:rPr lang="ko-KR" altLang="en-US" sz="1400" dirty="0">
+                <a:latin typeface="D2Coding" panose="020B0609020101020101" pitchFamily="49" charset="-127"/>
+                <a:ea typeface="D2Coding" panose="020B0609020101020101" pitchFamily="49" charset="-127"/>
+              </a:rPr>
+              <a:t>질문을 바꾸면</a:t>
+            </a:r>
+            <a:r>
+              <a:rPr lang="en-US" altLang="ko-KR" sz="1400" dirty="0">
+                <a:latin typeface="D2Coding" panose="020B0609020101020101" pitchFamily="49" charset="-127"/>
+                <a:ea typeface="D2Coding" panose="020B0609020101020101" pitchFamily="49" charset="-127"/>
+              </a:rPr>
+              <a:t>, </a:t>
+            </a:r>
+            <a:r>
+              <a:rPr lang="ko-KR" altLang="en-US" sz="1400" dirty="0">
+                <a:latin typeface="D2Coding" panose="020B0609020101020101" pitchFamily="49" charset="-127"/>
+                <a:ea typeface="D2Coding" panose="020B0609020101020101" pitchFamily="49" charset="-127"/>
+              </a:rPr>
+              <a:t>보이지 않던 정답이 보인다</a:t>
+            </a:r>
+            <a:r>
+              <a:rPr lang="en-US" altLang="ko-KR" sz="1400" dirty="0">
+                <a:latin typeface="D2Coding" panose="020B0609020101020101" pitchFamily="49" charset="-127"/>
+                <a:ea typeface="D2Coding" panose="020B0609020101020101" pitchFamily="49" charset="-127"/>
+              </a:rPr>
+              <a:t> ! </a:t>
+            </a:r>
+          </a:p>
+          <a:p>
+            <a:pPr>
+              <a:lnSpc>
+                <a:spcPct val="200000"/>
+              </a:lnSpc>
+            </a:pPr>
+            <a:endParaRPr lang="en-US" altLang="ko-KR" sz="1400" dirty="0">
+              <a:latin typeface="D2Coding" panose="020B0609020101020101" pitchFamily="49" charset="-127"/>
+              <a:ea typeface="D2Coding" panose="020B0609020101020101" pitchFamily="49" charset="-127"/>
+            </a:endParaRPr>
+          </a:p>
+          <a:p>
+            <a:pPr>
+              <a:lnSpc>
+                <a:spcPct val="200000"/>
+              </a:lnSpc>
+            </a:pPr>
+            <a:r>
+              <a:rPr lang="ko-KR" altLang="en-US" sz="1400" dirty="0">
+                <a:latin typeface="D2Coding" panose="020B0609020101020101" pitchFamily="49" charset="-127"/>
+                <a:ea typeface="D2Coding" panose="020B0609020101020101" pitchFamily="49" charset="-127"/>
+              </a:rPr>
+              <a:t>도서관에 모인 여러 사람이 저마다의 시선으로 책을 읽듯</a:t>
+            </a:r>
+            <a:r>
+              <a:rPr lang="en-US" altLang="ko-KR" sz="1400" dirty="0">
+                <a:latin typeface="D2Coding" panose="020B0609020101020101" pitchFamily="49" charset="-127"/>
+                <a:ea typeface="D2Coding" panose="020B0609020101020101" pitchFamily="49" charset="-127"/>
+              </a:rPr>
+              <a:t>, </a:t>
+            </a:r>
+            <a:r>
+              <a:rPr lang="ko-KR" altLang="en-US" sz="1400" dirty="0">
+                <a:latin typeface="D2Coding" panose="020B0609020101020101" pitchFamily="49" charset="-127"/>
+                <a:ea typeface="D2Coding" panose="020B0609020101020101" pitchFamily="49" charset="-127"/>
+              </a:rPr>
+              <a:t>하나의 질문을 다양한 관점에서 질문하라</a:t>
+            </a:r>
+            <a:r>
+              <a:rPr lang="en-US" altLang="ko-KR" sz="1400" dirty="0">
+                <a:latin typeface="D2Coding" panose="020B0609020101020101" pitchFamily="49" charset="-127"/>
+                <a:ea typeface="D2Coding" panose="020B0609020101020101" pitchFamily="49" charset="-127"/>
+              </a:rPr>
+              <a:t>!</a:t>
+            </a:r>
+          </a:p>
+          <a:p>
+            <a:pPr>
+              <a:lnSpc>
+                <a:spcPct val="200000"/>
+              </a:lnSpc>
+            </a:pPr>
+            <a:endParaRPr lang="en-US" altLang="ko-KR" sz="1400" dirty="0">
+              <a:latin typeface="D2Coding" panose="020B0609020101020101" pitchFamily="49" charset="-127"/>
+              <a:ea typeface="D2Coding" panose="020B0609020101020101" pitchFamily="49" charset="-127"/>
+            </a:endParaRPr>
+          </a:p>
+          <a:p>
+            <a:pPr>
+              <a:lnSpc>
+                <a:spcPct val="200000"/>
+              </a:lnSpc>
+            </a:pPr>
+            <a:r>
+              <a:rPr lang="ko-KR" altLang="en-US" sz="1400" dirty="0">
+                <a:latin typeface="D2Coding" panose="020B0609020101020101" pitchFamily="49" charset="-127"/>
+                <a:ea typeface="D2Coding" panose="020B0609020101020101" pitchFamily="49" charset="-127"/>
+              </a:rPr>
+              <a:t>아는 만큼 질문하니 배우자 </a:t>
+            </a:r>
+            <a:r>
+              <a:rPr lang="en-US" altLang="ko-KR" sz="1400" dirty="0">
+                <a:latin typeface="D2Coding" panose="020B0609020101020101" pitchFamily="49" charset="-127"/>
+                <a:ea typeface="D2Coding" panose="020B0609020101020101" pitchFamily="49" charset="-127"/>
+              </a:rPr>
+              <a:t>!</a:t>
+            </a:r>
+          </a:p>
+        </p:txBody>
+      </p:sp>
+      <p:sp>
+        <p:nvSpPr>
+          <p:cNvPr id="5" name="TextBox 4">
+            <a:extLst>
+              <a:ext uri="{FF2B5EF4-FFF2-40B4-BE49-F238E27FC236}">
+                <a16:creationId xmlns:a16="http://schemas.microsoft.com/office/drawing/2014/main" id="{BB88772C-CAC1-F238-BF4A-3B26BA550C09}"/>
+              </a:ext>
+            </a:extLst>
+          </p:cNvPr>
+          <p:cNvSpPr txBox="1"/>
+          <p:nvPr/>
+        </p:nvSpPr>
+        <p:spPr>
+          <a:xfrm>
+            <a:off x="3048000" y="2690336"/>
+            <a:ext cx="6096000" cy="1477328"/>
+          </a:xfrm>
+          <a:prstGeom prst="rect">
+            <a:avLst/>
+          </a:prstGeom>
+          <a:noFill/>
+        </p:spPr>
+        <p:txBody>
+          <a:bodyPr wrap="square">
+            <a:spAutoFit/>
+          </a:bodyPr>
+          <a:lstStyle/>
+          <a:p>
+            <a:r>
+              <a:rPr lang="en-US" altLang="ko-KR" dirty="0"/>
+              <a:t>Query Transformation     Rewrite-Retrieve-Read     Multi-Query Retrieval     RAG-Fusion     Hypothetical Document Embeddings Query Routing     Logical Routing     Semantic Routing Query Construction     Text-to-Metadata Filter     Text-to-SQL</a:t>
             </a:r>
             <a:endParaRPr lang="ko-KR" altLang="en-US" dirty="0"/>
           </a:p>
@@ -8386,7 +12654,7 @@
     </p:spTree>
     <p:extLst>
       <p:ext uri="{BB962C8B-B14F-4D97-AF65-F5344CB8AC3E}">
-        <p14:creationId xmlns:p14="http://schemas.microsoft.com/office/powerpoint/2010/main" val="3177427818"/>
+        <p14:creationId xmlns:p14="http://schemas.microsoft.com/office/powerpoint/2010/main" val="4244662805"/>
       </p:ext>
     </p:extLst>
   </p:cSld>

--- a/CHAPTER 3 RAG Part II_Chatting with Your Data.pptx
+++ b/CHAPTER 3 RAG Part II_Chatting with Your Data.pptx
@@ -5,10 +5,10 @@
     <p:sldMasterId id="2147483660" r:id="rId1"/>
   </p:sldMasterIdLst>
   <p:notesMasterIdLst>
-    <p:notesMasterId r:id="rId20"/>
+    <p:notesMasterId r:id="rId23"/>
   </p:notesMasterIdLst>
   <p:handoutMasterIdLst>
-    <p:handoutMasterId r:id="rId21"/>
+    <p:handoutMasterId r:id="rId24"/>
   </p:handoutMasterIdLst>
   <p:sldIdLst>
     <p:sldId id="256" r:id="rId2"/>
@@ -29,6 +29,9 @@
     <p:sldId id="1151" r:id="rId17"/>
     <p:sldId id="1152" r:id="rId18"/>
     <p:sldId id="1155" r:id="rId19"/>
+    <p:sldId id="1156" r:id="rId20"/>
+    <p:sldId id="1157" r:id="rId21"/>
+    <p:sldId id="1158" r:id="rId22"/>
   </p:sldIdLst>
   <p:sldSz cx="12192000" cy="6858000"/>
   <p:notesSz cx="6858000" cy="9144000"/>
@@ -154,6 +157,9 @@
             <p14:sldId id="1151"/>
             <p14:sldId id="1152"/>
             <p14:sldId id="1155"/>
+            <p14:sldId id="1156"/>
+            <p14:sldId id="1157"/>
+            <p14:sldId id="1158"/>
           </p14:sldIdLst>
         </p14:section>
         <p14:section name="자세한 정보" id="{2CC34DB2-6590-42C0-AD4B-A04C6060184E}">
@@ -7529,6 +7535,376 @@
 </p:sld>
 </file>
 
+<file path=ppt/slides/slide19.xml><?xml version="1.0" encoding="utf-8"?>
+<p:sld xmlns:a="http://schemas.openxmlformats.org/drawingml/2006/main" xmlns:r="http://schemas.openxmlformats.org/officeDocument/2006/relationships" xmlns:p="http://schemas.openxmlformats.org/presentationml/2006/main">
+  <p:cSld>
+    <p:spTree>
+      <p:nvGrpSpPr>
+        <p:cNvPr id="1" name="">
+          <a:extLst>
+            <a:ext uri="{FF2B5EF4-FFF2-40B4-BE49-F238E27FC236}">
+              <a16:creationId xmlns:a16="http://schemas.microsoft.com/office/drawing/2014/main" id="{BD9A156F-E80F-CCB3-ED85-5B95EFE2DDEC}"/>
+            </a:ext>
+          </a:extLst>
+        </p:cNvPr>
+        <p:cNvGrpSpPr/>
+        <p:nvPr/>
+      </p:nvGrpSpPr>
+      <p:grpSpPr>
+        <a:xfrm>
+          <a:off x="0" y="0"/>
+          <a:ext cx="0" cy="0"/>
+          <a:chOff x="0" y="0"/>
+          <a:chExt cx="0" cy="0"/>
+        </a:xfrm>
+      </p:grpSpPr>
+      <p:sp>
+        <p:nvSpPr>
+          <p:cNvPr id="4" name="슬라이드 번호 개체 틀 3">
+            <a:extLst>
+              <a:ext uri="{FF2B5EF4-FFF2-40B4-BE49-F238E27FC236}">
+                <a16:creationId xmlns:a16="http://schemas.microsoft.com/office/drawing/2014/main" id="{D2871DAF-63F8-8502-F8DC-D5802D63E157}"/>
+              </a:ext>
+            </a:extLst>
+          </p:cNvPr>
+          <p:cNvSpPr>
+            <a:spLocks noGrp="1"/>
+          </p:cNvSpPr>
+          <p:nvPr>
+            <p:ph type="sldNum" sz="quarter" idx="12"/>
+          </p:nvPr>
+        </p:nvSpPr>
+        <p:spPr>
+          <a:xfrm>
+            <a:off x="10514011" y="6036261"/>
+            <a:ext cx="753545" cy="365125"/>
+          </a:xfrm>
+        </p:spPr>
+        <p:txBody>
+          <a:bodyPr/>
+          <a:lstStyle/>
+          <a:p>
+            <a:fld id="{D57F1E4F-1CFF-5643-939E-217C01CDF565}" type="slidenum">
+              <a:rPr lang="en-US" smtClean="0"/>
+              <a:pPr/>
+              <a:t>19</a:t>
+            </a:fld>
+            <a:endParaRPr lang="en-US" dirty="0"/>
+          </a:p>
+        </p:txBody>
+      </p:sp>
+      <p:sp>
+        <p:nvSpPr>
+          <p:cNvPr id="3" name="제목 1">
+            <a:extLst>
+              <a:ext uri="{FF2B5EF4-FFF2-40B4-BE49-F238E27FC236}">
+                <a16:creationId xmlns:a16="http://schemas.microsoft.com/office/drawing/2014/main" id="{784E45EB-21F8-4261-E403-625565A4889A}"/>
+              </a:ext>
+            </a:extLst>
+          </p:cNvPr>
+          <p:cNvSpPr txBox="1">
+            <a:spLocks/>
+          </p:cNvSpPr>
+          <p:nvPr/>
+        </p:nvSpPr>
+        <p:spPr>
+          <a:xfrm>
+            <a:off x="475645" y="481983"/>
+            <a:ext cx="10353762" cy="766439"/>
+          </a:xfrm>
+          <a:prstGeom prst="rect">
+            <a:avLst/>
+          </a:prstGeom>
+        </p:spPr>
+        <p:txBody>
+          <a:bodyPr vert="horz" lIns="91440" tIns="45720" rIns="91440" bIns="45720" rtlCol="0" anchor="ctr">
+            <a:normAutofit/>
+          </a:bodyPr>
+          <a:lstStyle>
+            <a:lvl1pPr algn="ctr" defTabSz="914400" rtl="0" eaLnBrk="1" latinLnBrk="1" hangingPunct="1">
+              <a:lnSpc>
+                <a:spcPct val="90000"/>
+              </a:lnSpc>
+              <a:spcBef>
+                <a:spcPct val="0"/>
+              </a:spcBef>
+              <a:buNone/>
+              <a:defRPr sz="3200" kern="1200" cap="all" baseline="0">
+                <a:solidFill>
+                  <a:schemeClr val="tx1"/>
+                </a:solidFill>
+                <a:effectLst/>
+                <a:latin typeface="Batang" panose="02030600000101010101" pitchFamily="18" charset="-127"/>
+                <a:ea typeface="Batang" panose="02030600000101010101" pitchFamily="18" charset="-127"/>
+                <a:cs typeface="+mj-cs"/>
+              </a:defRPr>
+            </a:lvl1pPr>
+          </a:lstStyle>
+          <a:p>
+            <a:pPr algn="l"/>
+            <a:r>
+              <a:rPr lang="en-US" altLang="ko-KR" sz="2800" cap="none" dirty="0">
+                <a:solidFill>
+                  <a:schemeClr val="bg2">
+                    <a:lumMod val="25000"/>
+                  </a:schemeClr>
+                </a:solidFill>
+                <a:latin typeface="D2Coding" panose="020B0609020101020101" pitchFamily="49" charset="-127"/>
+                <a:ea typeface="D2Coding" panose="020B0609020101020101" pitchFamily="49" charset="-127"/>
+                <a:cs typeface="Segoe UI Light" panose="020B0502040204020203" pitchFamily="34" charset="0"/>
+              </a:rPr>
+              <a:t>Query Construction </a:t>
+            </a:r>
+            <a:endParaRPr lang="ko-KR" altLang="en-US" sz="2800" cap="none" dirty="0">
+              <a:solidFill>
+                <a:schemeClr val="bg2">
+                  <a:lumMod val="25000"/>
+                </a:schemeClr>
+              </a:solidFill>
+              <a:latin typeface="D2Coding" panose="020B0609020101020101" pitchFamily="49" charset="-127"/>
+              <a:ea typeface="D2Coding" panose="020B0609020101020101" pitchFamily="49" charset="-127"/>
+              <a:cs typeface="Segoe UI Light" panose="020B0502040204020203" pitchFamily="34" charset="0"/>
+            </a:endParaRPr>
+          </a:p>
+        </p:txBody>
+      </p:sp>
+      <p:sp>
+        <p:nvSpPr>
+          <p:cNvPr id="5" name="TextBox 4">
+            <a:extLst>
+              <a:ext uri="{FF2B5EF4-FFF2-40B4-BE49-F238E27FC236}">
+                <a16:creationId xmlns:a16="http://schemas.microsoft.com/office/drawing/2014/main" id="{5F6F0206-695A-0E6A-F3BF-FC530C7AC2C1}"/>
+              </a:ext>
+            </a:extLst>
+          </p:cNvPr>
+          <p:cNvSpPr txBox="1"/>
+          <p:nvPr/>
+        </p:nvSpPr>
+        <p:spPr>
+          <a:xfrm>
+            <a:off x="7944455" y="690061"/>
+            <a:ext cx="3600450" cy="369332"/>
+          </a:xfrm>
+          <a:prstGeom prst="rect">
+            <a:avLst/>
+          </a:prstGeom>
+          <a:noFill/>
+        </p:spPr>
+        <p:txBody>
+          <a:bodyPr wrap="square">
+            <a:spAutoFit/>
+          </a:bodyPr>
+          <a:lstStyle/>
+          <a:p>
+            <a:pPr algn="r"/>
+            <a:r>
+              <a:rPr lang="en-US" altLang="ko-KR" dirty="0"/>
+              <a:t>Text-to-Metadata Filter</a:t>
+            </a:r>
+            <a:endParaRPr lang="ko-KR" altLang="en-US" dirty="0"/>
+          </a:p>
+        </p:txBody>
+      </p:sp>
+      <p:sp>
+        <p:nvSpPr>
+          <p:cNvPr id="9" name="TextBox 8">
+            <a:extLst>
+              <a:ext uri="{FF2B5EF4-FFF2-40B4-BE49-F238E27FC236}">
+                <a16:creationId xmlns:a16="http://schemas.microsoft.com/office/drawing/2014/main" id="{98FFCE8C-4944-E5F0-3B30-8022342A424D}"/>
+              </a:ext>
+            </a:extLst>
+          </p:cNvPr>
+          <p:cNvSpPr txBox="1"/>
+          <p:nvPr/>
+        </p:nvSpPr>
+        <p:spPr>
+          <a:xfrm>
+            <a:off x="609297" y="1248422"/>
+            <a:ext cx="10973405" cy="793166"/>
+          </a:xfrm>
+          <a:prstGeom prst="rect">
+            <a:avLst/>
+          </a:prstGeom>
+          <a:noFill/>
+        </p:spPr>
+        <p:txBody>
+          <a:bodyPr wrap="square">
+            <a:spAutoFit/>
+          </a:bodyPr>
+          <a:lstStyle/>
+          <a:p>
+            <a:pPr>
+              <a:lnSpc>
+                <a:spcPct val="150000"/>
+              </a:lnSpc>
+            </a:pPr>
+            <a:r>
+              <a:rPr lang="ko-KR" altLang="en-US" sz="1600" dirty="0">
+                <a:latin typeface="D2Coding" panose="020B0609020101020101" pitchFamily="49" charset="-127"/>
+                <a:ea typeface="D2Coding" panose="020B0609020101020101" pitchFamily="49" charset="-127"/>
+              </a:rPr>
+              <a:t>원본데이터를 </a:t>
+            </a:r>
+            <a:r>
+              <a:rPr lang="ko-KR" altLang="en-US" sz="1600" dirty="0" err="1">
+                <a:latin typeface="D2Coding" panose="020B0609020101020101" pitchFamily="49" charset="-127"/>
+                <a:ea typeface="D2Coding" panose="020B0609020101020101" pitchFamily="49" charset="-127"/>
+              </a:rPr>
+              <a:t>임베딩할때</a:t>
+            </a:r>
+            <a:r>
+              <a:rPr lang="ko-KR" altLang="en-US" sz="1600" dirty="0">
+                <a:latin typeface="D2Coding" panose="020B0609020101020101" pitchFamily="49" charset="-127"/>
+                <a:ea typeface="D2Coding" panose="020B0609020101020101" pitchFamily="49" charset="-127"/>
+              </a:rPr>
+              <a:t> 본문과 메타데이터가 저장되면 데이터에 미리 꼬리표</a:t>
+            </a:r>
+            <a:r>
+              <a:rPr lang="en-US" altLang="ko-KR" sz="1600" dirty="0">
+                <a:latin typeface="D2Coding" panose="020B0609020101020101" pitchFamily="49" charset="-127"/>
+                <a:ea typeface="D2Coding" panose="020B0609020101020101" pitchFamily="49" charset="-127"/>
+              </a:rPr>
+              <a:t>(</a:t>
+            </a:r>
+            <a:r>
+              <a:rPr lang="ko-KR" altLang="en-US" sz="1600" dirty="0">
+                <a:latin typeface="D2Coding" panose="020B0609020101020101" pitchFamily="49" charset="-127"/>
+                <a:ea typeface="D2Coding" panose="020B0609020101020101" pitchFamily="49" charset="-127"/>
+              </a:rPr>
+              <a:t>태그</a:t>
+            </a:r>
+            <a:r>
+              <a:rPr lang="en-US" altLang="ko-KR" sz="1600" dirty="0">
+                <a:latin typeface="D2Coding" panose="020B0609020101020101" pitchFamily="49" charset="-127"/>
+                <a:ea typeface="D2Coding" panose="020B0609020101020101" pitchFamily="49" charset="-127"/>
+              </a:rPr>
+              <a:t>)</a:t>
+            </a:r>
+            <a:r>
+              <a:rPr lang="ko-KR" altLang="en-US" sz="1600" dirty="0">
+                <a:latin typeface="D2Coding" panose="020B0609020101020101" pitchFamily="49" charset="-127"/>
+                <a:ea typeface="D2Coding" panose="020B0609020101020101" pitchFamily="49" charset="-127"/>
+              </a:rPr>
+              <a:t>가 붙게 되어</a:t>
+            </a:r>
+            <a:r>
+              <a:rPr lang="en-US" altLang="ko-KR" sz="1600" dirty="0">
+                <a:latin typeface="D2Coding" panose="020B0609020101020101" pitchFamily="49" charset="-127"/>
+                <a:ea typeface="D2Coding" panose="020B0609020101020101" pitchFamily="49" charset="-127"/>
+              </a:rPr>
+              <a:t>, </a:t>
+            </a:r>
+            <a:r>
+              <a:rPr lang="ko-KR" altLang="en-US" sz="1600" dirty="0">
+                <a:latin typeface="D2Coding" panose="020B0609020101020101" pitchFamily="49" charset="-127"/>
+                <a:ea typeface="D2Coding" panose="020B0609020101020101" pitchFamily="49" charset="-127"/>
+              </a:rPr>
+              <a:t>나중에 검색할 때 단순 텍스트 유사도 검색만 쓰지 말고 이 그 꼬리표를 기준으로 필터링하는 메타데이터 필터링 </a:t>
+            </a:r>
+            <a:r>
+              <a:rPr lang="en-US" altLang="ko-KR" sz="1600" dirty="0">
+                <a:latin typeface="D2Coding" panose="020B0609020101020101" pitchFamily="49" charset="-127"/>
+                <a:ea typeface="D2Coding" panose="020B0609020101020101" pitchFamily="49" charset="-127"/>
+              </a:rPr>
+              <a:t>!</a:t>
+            </a:r>
+            <a:r>
+              <a:rPr lang="ko-KR" altLang="en-US" sz="1600" dirty="0">
+                <a:latin typeface="D2Coding" panose="020B0609020101020101" pitchFamily="49" charset="-127"/>
+                <a:ea typeface="D2Coding" panose="020B0609020101020101" pitchFamily="49" charset="-127"/>
+              </a:rPr>
+              <a:t> </a:t>
+            </a:r>
+          </a:p>
+        </p:txBody>
+      </p:sp>
+      <p:pic>
+        <p:nvPicPr>
+          <p:cNvPr id="7" name="그림 6">
+            <a:extLst>
+              <a:ext uri="{FF2B5EF4-FFF2-40B4-BE49-F238E27FC236}">
+                <a16:creationId xmlns:a16="http://schemas.microsoft.com/office/drawing/2014/main" id="{120C00D7-C06B-18F1-0AFD-F2D3F6F2048C}"/>
+              </a:ext>
+            </a:extLst>
+          </p:cNvPr>
+          <p:cNvPicPr>
+            <a:picLocks noChangeAspect="1"/>
+          </p:cNvPicPr>
+          <p:nvPr/>
+        </p:nvPicPr>
+        <p:blipFill>
+          <a:blip r:embed="rId2"/>
+          <a:stretch>
+            <a:fillRect/>
+          </a:stretch>
+        </p:blipFill>
+        <p:spPr>
+          <a:xfrm>
+            <a:off x="3982205" y="2644711"/>
+            <a:ext cx="7285351" cy="3292125"/>
+          </a:xfrm>
+          <a:prstGeom prst="rect">
+            <a:avLst/>
+          </a:prstGeom>
+        </p:spPr>
+      </p:pic>
+      <p:sp>
+        <p:nvSpPr>
+          <p:cNvPr id="10" name="TextBox 9">
+            <a:extLst>
+              <a:ext uri="{FF2B5EF4-FFF2-40B4-BE49-F238E27FC236}">
+                <a16:creationId xmlns:a16="http://schemas.microsoft.com/office/drawing/2014/main" id="{79EC34A5-97A3-F689-24E2-4594613A719B}"/>
+              </a:ext>
+            </a:extLst>
+          </p:cNvPr>
+          <p:cNvSpPr txBox="1"/>
+          <p:nvPr/>
+        </p:nvSpPr>
+        <p:spPr>
+          <a:xfrm>
+            <a:off x="609297" y="2690335"/>
+            <a:ext cx="3048000" cy="2319930"/>
+          </a:xfrm>
+          <a:prstGeom prst="rect">
+            <a:avLst/>
+          </a:prstGeom>
+          <a:noFill/>
+        </p:spPr>
+        <p:txBody>
+          <a:bodyPr wrap="square">
+            <a:spAutoFit/>
+          </a:bodyPr>
+          <a:lstStyle/>
+          <a:p>
+            <a:pPr>
+              <a:lnSpc>
+                <a:spcPct val="150000"/>
+              </a:lnSpc>
+            </a:pPr>
+            <a:r>
+              <a:rPr lang="en-US" altLang="ko-KR" sz="1400" dirty="0">
+                <a:latin typeface="D2Coding" panose="020B0609020101020101" pitchFamily="49" charset="-127"/>
+                <a:ea typeface="D2Coding" panose="020B0609020101020101" pitchFamily="49" charset="-127"/>
+              </a:rPr>
+              <a:t>“What are movies about aliens in the year 1980?” This question contains an unstructured topic that can be retrieved via embeddings (aliens), but it also contains potential structured components (year == 1980).</a:t>
+            </a:r>
+            <a:endParaRPr lang="ko-KR" altLang="en-US" sz="1400" dirty="0"/>
+          </a:p>
+        </p:txBody>
+      </p:sp>
+    </p:spTree>
+    <p:extLst>
+      <p:ext uri="{BB962C8B-B14F-4D97-AF65-F5344CB8AC3E}">
+        <p14:creationId xmlns:p14="http://schemas.microsoft.com/office/powerpoint/2010/main" val="300108004"/>
+      </p:ext>
+    </p:extLst>
+  </p:cSld>
+  <p:clrMapOvr>
+    <a:masterClrMapping/>
+  </p:clrMapOvr>
+</p:sld>
+</file>
+
 <file path=ppt/slides/slide2.xml><?xml version="1.0" encoding="utf-8"?>
 <p:sld xmlns:a="http://schemas.openxmlformats.org/drawingml/2006/main" xmlns:r="http://schemas.openxmlformats.org/officeDocument/2006/relationships" xmlns:p="http://schemas.openxmlformats.org/presentationml/2006/main">
   <p:cSld>
@@ -7666,6 +8042,1282 @@
     <p:extLst>
       <p:ext uri="{BB962C8B-B14F-4D97-AF65-F5344CB8AC3E}">
         <p14:creationId xmlns:p14="http://schemas.microsoft.com/office/powerpoint/2010/main" val="2827070286"/>
+      </p:ext>
+    </p:extLst>
+  </p:cSld>
+  <p:clrMapOvr>
+    <a:masterClrMapping/>
+  </p:clrMapOvr>
+</p:sld>
+</file>
+
+<file path=ppt/slides/slide20.xml><?xml version="1.0" encoding="utf-8"?>
+<p:sld xmlns:a="http://schemas.openxmlformats.org/drawingml/2006/main" xmlns:r="http://schemas.openxmlformats.org/officeDocument/2006/relationships" xmlns:p="http://schemas.openxmlformats.org/presentationml/2006/main">
+  <p:cSld>
+    <p:spTree>
+      <p:nvGrpSpPr>
+        <p:cNvPr id="1" name="">
+          <a:extLst>
+            <a:ext uri="{FF2B5EF4-FFF2-40B4-BE49-F238E27FC236}">
+              <a16:creationId xmlns:a16="http://schemas.microsoft.com/office/drawing/2014/main" id="{B8873007-E9EC-8882-E07C-3F4E17ECFE8B}"/>
+            </a:ext>
+          </a:extLst>
+        </p:cNvPr>
+        <p:cNvGrpSpPr/>
+        <p:nvPr/>
+      </p:nvGrpSpPr>
+      <p:grpSpPr>
+        <a:xfrm>
+          <a:off x="0" y="0"/>
+          <a:ext cx="0" cy="0"/>
+          <a:chOff x="0" y="0"/>
+          <a:chExt cx="0" cy="0"/>
+        </a:xfrm>
+      </p:grpSpPr>
+      <p:sp>
+        <p:nvSpPr>
+          <p:cNvPr id="4" name="슬라이드 번호 개체 틀 3">
+            <a:extLst>
+              <a:ext uri="{FF2B5EF4-FFF2-40B4-BE49-F238E27FC236}">
+                <a16:creationId xmlns:a16="http://schemas.microsoft.com/office/drawing/2014/main" id="{48293AD0-01E0-E70E-A8AE-DC3D6ED005DA}"/>
+              </a:ext>
+            </a:extLst>
+          </p:cNvPr>
+          <p:cNvSpPr>
+            <a:spLocks noGrp="1"/>
+          </p:cNvSpPr>
+          <p:nvPr>
+            <p:ph type="sldNum" sz="quarter" idx="12"/>
+          </p:nvPr>
+        </p:nvSpPr>
+        <p:spPr>
+          <a:xfrm>
+            <a:off x="10514011" y="6036261"/>
+            <a:ext cx="753545" cy="365125"/>
+          </a:xfrm>
+        </p:spPr>
+        <p:txBody>
+          <a:bodyPr/>
+          <a:lstStyle/>
+          <a:p>
+            <a:fld id="{D57F1E4F-1CFF-5643-939E-217C01CDF565}" type="slidenum">
+              <a:rPr lang="en-US" smtClean="0"/>
+              <a:pPr/>
+              <a:t>20</a:t>
+            </a:fld>
+            <a:endParaRPr lang="en-US" dirty="0"/>
+          </a:p>
+        </p:txBody>
+      </p:sp>
+      <p:sp>
+        <p:nvSpPr>
+          <p:cNvPr id="3" name="제목 1">
+            <a:extLst>
+              <a:ext uri="{FF2B5EF4-FFF2-40B4-BE49-F238E27FC236}">
+                <a16:creationId xmlns:a16="http://schemas.microsoft.com/office/drawing/2014/main" id="{ABAA798D-E903-3D7A-2E0C-6D1580F1015E}"/>
+              </a:ext>
+            </a:extLst>
+          </p:cNvPr>
+          <p:cNvSpPr txBox="1">
+            <a:spLocks/>
+          </p:cNvSpPr>
+          <p:nvPr/>
+        </p:nvSpPr>
+        <p:spPr>
+          <a:xfrm>
+            <a:off x="475645" y="481983"/>
+            <a:ext cx="10353762" cy="766439"/>
+          </a:xfrm>
+          <a:prstGeom prst="rect">
+            <a:avLst/>
+          </a:prstGeom>
+        </p:spPr>
+        <p:txBody>
+          <a:bodyPr vert="horz" lIns="91440" tIns="45720" rIns="91440" bIns="45720" rtlCol="0" anchor="ctr">
+            <a:normAutofit/>
+          </a:bodyPr>
+          <a:lstStyle>
+            <a:lvl1pPr algn="ctr" defTabSz="914400" rtl="0" eaLnBrk="1" latinLnBrk="1" hangingPunct="1">
+              <a:lnSpc>
+                <a:spcPct val="90000"/>
+              </a:lnSpc>
+              <a:spcBef>
+                <a:spcPct val="0"/>
+              </a:spcBef>
+              <a:buNone/>
+              <a:defRPr sz="3200" kern="1200" cap="all" baseline="0">
+                <a:solidFill>
+                  <a:schemeClr val="tx1"/>
+                </a:solidFill>
+                <a:effectLst/>
+                <a:latin typeface="Batang" panose="02030600000101010101" pitchFamily="18" charset="-127"/>
+                <a:ea typeface="Batang" panose="02030600000101010101" pitchFamily="18" charset="-127"/>
+                <a:cs typeface="+mj-cs"/>
+              </a:defRPr>
+            </a:lvl1pPr>
+          </a:lstStyle>
+          <a:p>
+            <a:pPr algn="l"/>
+            <a:r>
+              <a:rPr lang="en-US" altLang="ko-KR" sz="2800" cap="none" dirty="0">
+                <a:solidFill>
+                  <a:schemeClr val="bg2">
+                    <a:lumMod val="25000"/>
+                  </a:schemeClr>
+                </a:solidFill>
+                <a:latin typeface="D2Coding" panose="020B0609020101020101" pitchFamily="49" charset="-127"/>
+                <a:ea typeface="D2Coding" panose="020B0609020101020101" pitchFamily="49" charset="-127"/>
+                <a:cs typeface="Segoe UI Light" panose="020B0502040204020203" pitchFamily="34" charset="0"/>
+              </a:rPr>
+              <a:t>Query Construction </a:t>
+            </a:r>
+            <a:endParaRPr lang="ko-KR" altLang="en-US" sz="2800" cap="none" dirty="0">
+              <a:solidFill>
+                <a:schemeClr val="bg2">
+                  <a:lumMod val="25000"/>
+                </a:schemeClr>
+              </a:solidFill>
+              <a:latin typeface="D2Coding" panose="020B0609020101020101" pitchFamily="49" charset="-127"/>
+              <a:ea typeface="D2Coding" panose="020B0609020101020101" pitchFamily="49" charset="-127"/>
+              <a:cs typeface="Segoe UI Light" panose="020B0502040204020203" pitchFamily="34" charset="0"/>
+            </a:endParaRPr>
+          </a:p>
+        </p:txBody>
+      </p:sp>
+      <p:sp>
+        <p:nvSpPr>
+          <p:cNvPr id="5" name="TextBox 4">
+            <a:extLst>
+              <a:ext uri="{FF2B5EF4-FFF2-40B4-BE49-F238E27FC236}">
+                <a16:creationId xmlns:a16="http://schemas.microsoft.com/office/drawing/2014/main" id="{301BC8B3-2997-C2C9-FB40-4D83AFE966C8}"/>
+              </a:ext>
+            </a:extLst>
+          </p:cNvPr>
+          <p:cNvSpPr txBox="1"/>
+          <p:nvPr/>
+        </p:nvSpPr>
+        <p:spPr>
+          <a:xfrm>
+            <a:off x="7944455" y="690061"/>
+            <a:ext cx="3600450" cy="369332"/>
+          </a:xfrm>
+          <a:prstGeom prst="rect">
+            <a:avLst/>
+          </a:prstGeom>
+          <a:noFill/>
+        </p:spPr>
+        <p:txBody>
+          <a:bodyPr wrap="square">
+            <a:spAutoFit/>
+          </a:bodyPr>
+          <a:lstStyle/>
+          <a:p>
+            <a:pPr algn="r"/>
+            <a:r>
+              <a:rPr lang="en-US" altLang="ko-KR" dirty="0"/>
+              <a:t>Text-to-SQL</a:t>
+            </a:r>
+            <a:endParaRPr lang="ko-KR" altLang="en-US" dirty="0"/>
+          </a:p>
+        </p:txBody>
+      </p:sp>
+      <p:pic>
+        <p:nvPicPr>
+          <p:cNvPr id="6" name="그림 5">
+            <a:extLst>
+              <a:ext uri="{FF2B5EF4-FFF2-40B4-BE49-F238E27FC236}">
+                <a16:creationId xmlns:a16="http://schemas.microsoft.com/office/drawing/2014/main" id="{CADDF4A7-2C71-3D20-E265-F55C50DE00D2}"/>
+              </a:ext>
+            </a:extLst>
+          </p:cNvPr>
+          <p:cNvPicPr>
+            <a:picLocks noChangeAspect="1"/>
+          </p:cNvPicPr>
+          <p:nvPr/>
+        </p:nvPicPr>
+        <p:blipFill>
+          <a:blip r:embed="rId2"/>
+          <a:stretch>
+            <a:fillRect/>
+          </a:stretch>
+        </p:blipFill>
+        <p:spPr>
+          <a:xfrm>
+            <a:off x="2287592" y="2948806"/>
+            <a:ext cx="7216765" cy="3093988"/>
+          </a:xfrm>
+          <a:prstGeom prst="rect">
+            <a:avLst/>
+          </a:prstGeom>
+        </p:spPr>
+      </p:pic>
+      <p:sp>
+        <p:nvSpPr>
+          <p:cNvPr id="8" name="TextBox 7">
+            <a:extLst>
+              <a:ext uri="{FF2B5EF4-FFF2-40B4-BE49-F238E27FC236}">
+                <a16:creationId xmlns:a16="http://schemas.microsoft.com/office/drawing/2014/main" id="{52B8D475-173F-B7C3-D2B5-3E8F3FD8026C}"/>
+              </a:ext>
+            </a:extLst>
+          </p:cNvPr>
+          <p:cNvSpPr txBox="1"/>
+          <p:nvPr/>
+        </p:nvSpPr>
+        <p:spPr>
+          <a:xfrm>
+            <a:off x="2287592" y="2651289"/>
+            <a:ext cx="6096000" cy="297517"/>
+          </a:xfrm>
+          <a:prstGeom prst="rect">
+            <a:avLst/>
+          </a:prstGeom>
+          <a:solidFill>
+            <a:srgbClr val="76E3FF"/>
+          </a:solidFill>
+        </p:spPr>
+        <p:txBody>
+          <a:bodyPr wrap="square">
+            <a:spAutoFit/>
+          </a:bodyPr>
+          <a:lstStyle/>
+          <a:p>
+            <a:pPr>
+              <a:lnSpc>
+                <a:spcPts val="1575"/>
+              </a:lnSpc>
+              <a:buNone/>
+            </a:pPr>
+            <a:r>
+              <a:rPr lang="en-US" altLang="ko-KR" sz="1400" b="0" dirty="0">
+                <a:effectLst/>
+                <a:latin typeface="D2Coding" panose="020B0609020101020101" pitchFamily="49" charset="-127"/>
+                <a:ea typeface="D2Coding" panose="020B0609020101020101" pitchFamily="49" charset="-127"/>
+              </a:rPr>
+              <a:t>from </a:t>
+            </a:r>
+            <a:r>
+              <a:rPr lang="en-US" altLang="ko-KR" sz="1400" b="0" dirty="0" err="1">
+                <a:effectLst/>
+                <a:latin typeface="D2Coding" panose="020B0609020101020101" pitchFamily="49" charset="-127"/>
+                <a:ea typeface="D2Coding" panose="020B0609020101020101" pitchFamily="49" charset="-127"/>
+              </a:rPr>
+              <a:t>langchain_classic.chains</a:t>
+            </a:r>
+            <a:r>
+              <a:rPr lang="en-US" altLang="ko-KR" sz="1400" b="0" dirty="0">
+                <a:effectLst/>
+                <a:latin typeface="D2Coding" panose="020B0609020101020101" pitchFamily="49" charset="-127"/>
+                <a:ea typeface="D2Coding" panose="020B0609020101020101" pitchFamily="49" charset="-127"/>
+              </a:rPr>
+              <a:t> import </a:t>
+            </a:r>
+            <a:r>
+              <a:rPr lang="en-US" altLang="ko-KR" sz="1400" b="0" dirty="0" err="1">
+                <a:effectLst/>
+                <a:latin typeface="D2Coding" panose="020B0609020101020101" pitchFamily="49" charset="-127"/>
+                <a:ea typeface="D2Coding" panose="020B0609020101020101" pitchFamily="49" charset="-127"/>
+              </a:rPr>
+              <a:t>create_sql_query_chain</a:t>
+            </a:r>
+            <a:endParaRPr lang="en-US" altLang="ko-KR" sz="1400" b="0" dirty="0">
+              <a:effectLst/>
+              <a:latin typeface="D2Coding" panose="020B0609020101020101" pitchFamily="49" charset="-127"/>
+              <a:ea typeface="D2Coding" panose="020B0609020101020101" pitchFamily="49" charset="-127"/>
+            </a:endParaRPr>
+          </a:p>
+        </p:txBody>
+      </p:sp>
+      <p:sp>
+        <p:nvSpPr>
+          <p:cNvPr id="11" name="TextBox 10">
+            <a:extLst>
+              <a:ext uri="{FF2B5EF4-FFF2-40B4-BE49-F238E27FC236}">
+                <a16:creationId xmlns:a16="http://schemas.microsoft.com/office/drawing/2014/main" id="{3A6D4AB0-1948-2092-5291-CDCD00B59FD0}"/>
+              </a:ext>
+            </a:extLst>
+          </p:cNvPr>
+          <p:cNvSpPr txBox="1"/>
+          <p:nvPr/>
+        </p:nvSpPr>
+        <p:spPr>
+          <a:xfrm>
+            <a:off x="571500" y="1244478"/>
+            <a:ext cx="11106150" cy="1162498"/>
+          </a:xfrm>
+          <a:prstGeom prst="rect">
+            <a:avLst/>
+          </a:prstGeom>
+          <a:noFill/>
+        </p:spPr>
+        <p:txBody>
+          <a:bodyPr wrap="square">
+            <a:spAutoFit/>
+          </a:bodyPr>
+          <a:lstStyle/>
+          <a:p>
+            <a:pPr>
+              <a:lnSpc>
+                <a:spcPct val="150000"/>
+              </a:lnSpc>
+            </a:pPr>
+            <a:r>
+              <a:rPr lang="ko-KR" altLang="en-US" sz="1600" dirty="0">
+                <a:latin typeface="D2Coding" panose="020B0609020101020101" pitchFamily="49" charset="-127"/>
+                <a:ea typeface="D2Coding" panose="020B0609020101020101" pitchFamily="49" charset="-127"/>
+              </a:rPr>
+              <a:t>사용자의 질문을 우리 데이터베이스의 언어</a:t>
+            </a:r>
+            <a:r>
+              <a:rPr lang="en-US" altLang="ko-KR" sz="1600" dirty="0">
+                <a:latin typeface="D2Coding" panose="020B0609020101020101" pitchFamily="49" charset="-127"/>
+                <a:ea typeface="D2Coding" panose="020B0609020101020101" pitchFamily="49" charset="-127"/>
+              </a:rPr>
+              <a:t>(Dialect)</a:t>
+            </a:r>
+            <a:r>
+              <a:rPr lang="ko-KR" altLang="en-US" sz="1600" dirty="0">
+                <a:latin typeface="D2Coding" panose="020B0609020101020101" pitchFamily="49" charset="-127"/>
+                <a:ea typeface="D2Coding" panose="020B0609020101020101" pitchFamily="49" charset="-127"/>
+              </a:rPr>
+              <a:t>에 맞는 </a:t>
+            </a:r>
+            <a:r>
+              <a:rPr lang="en-US" altLang="ko-KR" sz="1600" dirty="0">
+                <a:latin typeface="D2Coding" panose="020B0609020101020101" pitchFamily="49" charset="-127"/>
+                <a:ea typeface="D2Coding" panose="020B0609020101020101" pitchFamily="49" charset="-127"/>
+              </a:rPr>
+              <a:t>SQL </a:t>
+            </a:r>
+            <a:r>
+              <a:rPr lang="ko-KR" altLang="en-US" sz="1600" dirty="0">
+                <a:latin typeface="D2Coding" panose="020B0609020101020101" pitchFamily="49" charset="-127"/>
+                <a:ea typeface="D2Coding" panose="020B0609020101020101" pitchFamily="49" charset="-127"/>
+              </a:rPr>
+              <a:t>쿼리로 변환한</a:t>
+            </a:r>
+            <a:r>
+              <a:rPr lang="en-US" altLang="ko-KR" sz="1600" dirty="0">
+                <a:latin typeface="D2Coding" panose="020B0609020101020101" pitchFamily="49" charset="-127"/>
+                <a:ea typeface="D2Coding" panose="020B0609020101020101" pitchFamily="49" charset="-127"/>
+              </a:rPr>
+              <a:t> </a:t>
+            </a:r>
+            <a:r>
+              <a:rPr lang="ko-KR" altLang="en-US" sz="1600" dirty="0">
+                <a:latin typeface="D2Coding" panose="020B0609020101020101" pitchFamily="49" charset="-127"/>
+                <a:ea typeface="D2Coding" panose="020B0609020101020101" pitchFamily="49" charset="-127"/>
+              </a:rPr>
+              <a:t>후</a:t>
+            </a:r>
+            <a:r>
+              <a:rPr lang="en-US" altLang="ko-KR" sz="1600" dirty="0">
+                <a:latin typeface="D2Coding" panose="020B0609020101020101" pitchFamily="49" charset="-127"/>
+                <a:ea typeface="D2Coding" panose="020B0609020101020101" pitchFamily="49" charset="-127"/>
+              </a:rPr>
+              <a:t> </a:t>
+            </a:r>
+            <a:r>
+              <a:rPr lang="ko-KR" altLang="en-US" sz="1600" dirty="0">
+                <a:latin typeface="D2Coding" panose="020B0609020101020101" pitchFamily="49" charset="-127"/>
+                <a:ea typeface="D2Coding" panose="020B0609020101020101" pitchFamily="49" charset="-127"/>
+              </a:rPr>
+              <a:t>데이터베이스에서 해당 쿼리를 실행하지만</a:t>
+            </a:r>
+            <a:r>
+              <a:rPr lang="en-US" altLang="ko-KR" sz="1600" dirty="0">
+                <a:latin typeface="D2Coding" panose="020B0609020101020101" pitchFamily="49" charset="-127"/>
+                <a:ea typeface="D2Coding" panose="020B0609020101020101" pitchFamily="49" charset="-127"/>
+              </a:rPr>
+              <a:t> </a:t>
+            </a:r>
+            <a:r>
+              <a:rPr lang="ko-KR" altLang="en-US" sz="1600" dirty="0">
+                <a:latin typeface="D2Coding" panose="020B0609020101020101" pitchFamily="49" charset="-127"/>
+                <a:ea typeface="D2Coding" panose="020B0609020101020101" pitchFamily="49" charset="-127"/>
+              </a:rPr>
+              <a:t>의할 점은</a:t>
+            </a:r>
+            <a:r>
+              <a:rPr lang="en-US" altLang="ko-KR" sz="1600" dirty="0">
+                <a:latin typeface="D2Coding" panose="020B0609020101020101" pitchFamily="49" charset="-127"/>
+                <a:ea typeface="D2Coding" panose="020B0609020101020101" pitchFamily="49" charset="-127"/>
+              </a:rPr>
+              <a:t>, </a:t>
+            </a:r>
+            <a:r>
+              <a:rPr lang="ko-KR" altLang="en-US" sz="1600" dirty="0">
+                <a:latin typeface="D2Coding" panose="020B0609020101020101" pitchFamily="49" charset="-127"/>
+                <a:ea typeface="D2Coding" panose="020B0609020101020101" pitchFamily="49" charset="-127"/>
+              </a:rPr>
+              <a:t>사용자 입력으로부터 </a:t>
+            </a:r>
+            <a:r>
+              <a:rPr lang="en-US" altLang="ko-KR" sz="1600" dirty="0">
+                <a:latin typeface="D2Coding" panose="020B0609020101020101" pitchFamily="49" charset="-127"/>
+                <a:ea typeface="D2Coding" panose="020B0609020101020101" pitchFamily="49" charset="-127"/>
+              </a:rPr>
+              <a:t>LLM</a:t>
+            </a:r>
+            <a:r>
+              <a:rPr lang="ko-KR" altLang="en-US" sz="1600" dirty="0">
+                <a:latin typeface="D2Coding" panose="020B0609020101020101" pitchFamily="49" charset="-127"/>
+                <a:ea typeface="D2Coding" panose="020B0609020101020101" pitchFamily="49" charset="-127"/>
+              </a:rPr>
+              <a:t>이 생성한 임의의 </a:t>
+            </a:r>
+            <a:r>
+              <a:rPr lang="en-US" altLang="ko-KR" sz="1600" dirty="0">
+                <a:latin typeface="D2Coding" panose="020B0609020101020101" pitchFamily="49" charset="-127"/>
+                <a:ea typeface="D2Coding" panose="020B0609020101020101" pitchFamily="49" charset="-127"/>
+              </a:rPr>
+              <a:t>SQL </a:t>
+            </a:r>
+            <a:r>
+              <a:rPr lang="ko-KR" altLang="en-US" sz="1600" dirty="0">
+                <a:latin typeface="D2Coding" panose="020B0609020101020101" pitchFamily="49" charset="-127"/>
+                <a:ea typeface="D2Coding" panose="020B0609020101020101" pitchFamily="49" charset="-127"/>
+              </a:rPr>
+              <a:t>쿼리를 데이터베이스에서 그대로 실행하는 것은 실제 운영 애플리케이션</a:t>
+            </a:r>
+            <a:r>
+              <a:rPr lang="en-US" altLang="ko-KR" sz="1600" dirty="0">
+                <a:latin typeface="D2Coding" panose="020B0609020101020101" pitchFamily="49" charset="-127"/>
+                <a:ea typeface="D2Coding" panose="020B0609020101020101" pitchFamily="49" charset="-127"/>
+              </a:rPr>
+              <a:t>(Production)</a:t>
+            </a:r>
+            <a:r>
+              <a:rPr lang="ko-KR" altLang="en-US" sz="1600" dirty="0">
+                <a:latin typeface="D2Coding" panose="020B0609020101020101" pitchFamily="49" charset="-127"/>
+                <a:ea typeface="D2Coding" panose="020B0609020101020101" pitchFamily="49" charset="-127"/>
+              </a:rPr>
+              <a:t>에서 매우 위험</a:t>
+            </a:r>
+          </a:p>
+        </p:txBody>
+      </p:sp>
+    </p:spTree>
+    <p:extLst>
+      <p:ext uri="{BB962C8B-B14F-4D97-AF65-F5344CB8AC3E}">
+        <p14:creationId xmlns:p14="http://schemas.microsoft.com/office/powerpoint/2010/main" val="3337518302"/>
+      </p:ext>
+    </p:extLst>
+  </p:cSld>
+  <p:clrMapOvr>
+    <a:masterClrMapping/>
+  </p:clrMapOvr>
+</p:sld>
+</file>
+
+<file path=ppt/slides/slide21.xml><?xml version="1.0" encoding="utf-8"?>
+<p:sld xmlns:a="http://schemas.openxmlformats.org/drawingml/2006/main" xmlns:r="http://schemas.openxmlformats.org/officeDocument/2006/relationships" xmlns:p="http://schemas.openxmlformats.org/presentationml/2006/main">
+  <p:cSld>
+    <p:spTree>
+      <p:nvGrpSpPr>
+        <p:cNvPr id="1" name="">
+          <a:extLst>
+            <a:ext uri="{FF2B5EF4-FFF2-40B4-BE49-F238E27FC236}">
+              <a16:creationId xmlns:a16="http://schemas.microsoft.com/office/drawing/2014/main" id="{14475094-E673-444F-03F6-D964B6EAE19A}"/>
+            </a:ext>
+          </a:extLst>
+        </p:cNvPr>
+        <p:cNvGrpSpPr/>
+        <p:nvPr/>
+      </p:nvGrpSpPr>
+      <p:grpSpPr>
+        <a:xfrm>
+          <a:off x="0" y="0"/>
+          <a:ext cx="0" cy="0"/>
+          <a:chOff x="0" y="0"/>
+          <a:chExt cx="0" cy="0"/>
+        </a:xfrm>
+      </p:grpSpPr>
+      <p:sp>
+        <p:nvSpPr>
+          <p:cNvPr id="4" name="슬라이드 번호 개체 틀 3">
+            <a:extLst>
+              <a:ext uri="{FF2B5EF4-FFF2-40B4-BE49-F238E27FC236}">
+                <a16:creationId xmlns:a16="http://schemas.microsoft.com/office/drawing/2014/main" id="{47C86724-FDB2-6094-C7FE-85D331CA42F5}"/>
+              </a:ext>
+            </a:extLst>
+          </p:cNvPr>
+          <p:cNvSpPr>
+            <a:spLocks noGrp="1"/>
+          </p:cNvSpPr>
+          <p:nvPr>
+            <p:ph type="sldNum" sz="quarter" idx="12"/>
+          </p:nvPr>
+        </p:nvSpPr>
+        <p:spPr>
+          <a:xfrm>
+            <a:off x="10514011" y="6036261"/>
+            <a:ext cx="753545" cy="365125"/>
+          </a:xfrm>
+        </p:spPr>
+        <p:txBody>
+          <a:bodyPr/>
+          <a:lstStyle/>
+          <a:p>
+            <a:fld id="{D57F1E4F-1CFF-5643-939E-217C01CDF565}" type="slidenum">
+              <a:rPr lang="en-US" smtClean="0"/>
+              <a:pPr/>
+              <a:t>21</a:t>
+            </a:fld>
+            <a:endParaRPr lang="en-US" dirty="0"/>
+          </a:p>
+        </p:txBody>
+      </p:sp>
+      <p:sp>
+        <p:nvSpPr>
+          <p:cNvPr id="3" name="제목 1">
+            <a:extLst>
+              <a:ext uri="{FF2B5EF4-FFF2-40B4-BE49-F238E27FC236}">
+                <a16:creationId xmlns:a16="http://schemas.microsoft.com/office/drawing/2014/main" id="{48BA717A-B7CB-1D8D-898B-453AE929263D}"/>
+              </a:ext>
+            </a:extLst>
+          </p:cNvPr>
+          <p:cNvSpPr txBox="1">
+            <a:spLocks/>
+          </p:cNvSpPr>
+          <p:nvPr/>
+        </p:nvSpPr>
+        <p:spPr>
+          <a:xfrm>
+            <a:off x="475645" y="481983"/>
+            <a:ext cx="10353762" cy="766439"/>
+          </a:xfrm>
+          <a:prstGeom prst="rect">
+            <a:avLst/>
+          </a:prstGeom>
+        </p:spPr>
+        <p:txBody>
+          <a:bodyPr vert="horz" lIns="91440" tIns="45720" rIns="91440" bIns="45720" rtlCol="0" anchor="ctr">
+            <a:normAutofit/>
+          </a:bodyPr>
+          <a:lstStyle>
+            <a:lvl1pPr algn="ctr" defTabSz="914400" rtl="0" eaLnBrk="1" latinLnBrk="1" hangingPunct="1">
+              <a:lnSpc>
+                <a:spcPct val="90000"/>
+              </a:lnSpc>
+              <a:spcBef>
+                <a:spcPct val="0"/>
+              </a:spcBef>
+              <a:buNone/>
+              <a:defRPr sz="3200" kern="1200" cap="all" baseline="0">
+                <a:solidFill>
+                  <a:schemeClr val="tx1"/>
+                </a:solidFill>
+                <a:effectLst/>
+                <a:latin typeface="Batang" panose="02030600000101010101" pitchFamily="18" charset="-127"/>
+                <a:ea typeface="Batang" panose="02030600000101010101" pitchFamily="18" charset="-127"/>
+                <a:cs typeface="+mj-cs"/>
+              </a:defRPr>
+            </a:lvl1pPr>
+          </a:lstStyle>
+          <a:p>
+            <a:pPr algn="l"/>
+            <a:r>
+              <a:rPr lang="en-US" altLang="ko-KR" sz="2800" cap="none" dirty="0">
+                <a:solidFill>
+                  <a:schemeClr val="bg2">
+                    <a:lumMod val="25000"/>
+                  </a:schemeClr>
+                </a:solidFill>
+                <a:latin typeface="D2Coding" panose="020B0609020101020101" pitchFamily="49" charset="-127"/>
+                <a:ea typeface="D2Coding" panose="020B0609020101020101" pitchFamily="49" charset="-127"/>
+                <a:cs typeface="Segoe UI Light" panose="020B0502040204020203" pitchFamily="34" charset="0"/>
+              </a:rPr>
+              <a:t>Summary</a:t>
+            </a:r>
+            <a:endParaRPr lang="ko-KR" altLang="en-US" sz="2800" cap="none" dirty="0">
+              <a:solidFill>
+                <a:schemeClr val="bg2">
+                  <a:lumMod val="25000"/>
+                </a:schemeClr>
+              </a:solidFill>
+              <a:latin typeface="D2Coding" panose="020B0609020101020101" pitchFamily="49" charset="-127"/>
+              <a:ea typeface="D2Coding" panose="020B0609020101020101" pitchFamily="49" charset="-127"/>
+              <a:cs typeface="Segoe UI Light" panose="020B0502040204020203" pitchFamily="34" charset="0"/>
+            </a:endParaRPr>
+          </a:p>
+        </p:txBody>
+      </p:sp>
+      <p:sp>
+        <p:nvSpPr>
+          <p:cNvPr id="9" name="TextBox 8">
+            <a:extLst>
+              <a:ext uri="{FF2B5EF4-FFF2-40B4-BE49-F238E27FC236}">
+                <a16:creationId xmlns:a16="http://schemas.microsoft.com/office/drawing/2014/main" id="{976EF803-CB1A-3099-B8CF-CEF24D361A42}"/>
+              </a:ext>
+            </a:extLst>
+          </p:cNvPr>
+          <p:cNvSpPr txBox="1"/>
+          <p:nvPr/>
+        </p:nvSpPr>
+        <p:spPr>
+          <a:xfrm>
+            <a:off x="571219" y="1248422"/>
+            <a:ext cx="11049562" cy="4578818"/>
+          </a:xfrm>
+          <a:prstGeom prst="rect">
+            <a:avLst/>
+          </a:prstGeom>
+          <a:noFill/>
+        </p:spPr>
+        <p:txBody>
+          <a:bodyPr wrap="square">
+            <a:spAutoFit/>
+          </a:bodyPr>
+          <a:lstStyle/>
+          <a:p>
+            <a:pPr>
+              <a:lnSpc>
+                <a:spcPct val="150000"/>
+              </a:lnSpc>
+            </a:pPr>
+            <a:r>
+              <a:rPr lang="en-US" altLang="ko-KR" sz="1600" dirty="0">
+                <a:latin typeface="D2Coding" panose="020B0609020101020101" pitchFamily="49" charset="-127"/>
+                <a:ea typeface="D2Coding" panose="020B0609020101020101" pitchFamily="49" charset="-127"/>
+              </a:rPr>
+              <a:t>"</a:t>
+            </a:r>
+            <a:r>
+              <a:rPr lang="ko-KR" altLang="en-US" sz="1600" dirty="0">
+                <a:latin typeface="D2Coding" panose="020B0609020101020101" pitchFamily="49" charset="-127"/>
+                <a:ea typeface="D2Coding" panose="020B0609020101020101" pitchFamily="49" charset="-127"/>
+              </a:rPr>
+              <a:t>문서들을 벡터로 변환</a:t>
+            </a:r>
+            <a:r>
+              <a:rPr lang="en-US" altLang="ko-KR" sz="1600" dirty="0">
+                <a:latin typeface="D2Coding" panose="020B0609020101020101" pitchFamily="49" charset="-127"/>
+                <a:ea typeface="D2Coding" panose="020B0609020101020101" pitchFamily="49" charset="-127"/>
+              </a:rPr>
+              <a:t>/</a:t>
+            </a:r>
+            <a:r>
+              <a:rPr lang="ko-KR" altLang="en-US" sz="1600" dirty="0">
+                <a:latin typeface="D2Coding" panose="020B0609020101020101" pitchFamily="49" charset="-127"/>
+                <a:ea typeface="D2Coding" panose="020B0609020101020101" pitchFamily="49" charset="-127"/>
+              </a:rPr>
+              <a:t>저장하고</a:t>
+            </a:r>
+            <a:r>
+              <a:rPr lang="en-US" altLang="ko-KR" sz="1600" dirty="0">
+                <a:latin typeface="D2Coding" panose="020B0609020101020101" pitchFamily="49" charset="-127"/>
+                <a:ea typeface="D2Coding" panose="020B0609020101020101" pitchFamily="49" charset="-127"/>
+              </a:rPr>
+              <a:t>, </a:t>
+            </a:r>
+            <a:r>
+              <a:rPr lang="ko-KR" altLang="en-US" sz="1600" dirty="0">
+                <a:latin typeface="D2Coding" panose="020B0609020101020101" pitchFamily="49" charset="-127"/>
+                <a:ea typeface="D2Coding" panose="020B0609020101020101" pitchFamily="49" charset="-127"/>
+              </a:rPr>
+              <a:t>질문과 비슷한 걸 뽑아서 </a:t>
+            </a:r>
+            <a:r>
+              <a:rPr lang="en-US" altLang="ko-KR" sz="1600" dirty="0">
+                <a:latin typeface="D2Coding" panose="020B0609020101020101" pitchFamily="49" charset="-127"/>
+                <a:ea typeface="D2Coding" panose="020B0609020101020101" pitchFamily="49" charset="-127"/>
+              </a:rPr>
+              <a:t>LLM</a:t>
+            </a:r>
+            <a:r>
+              <a:rPr lang="ko-KR" altLang="en-US" sz="1600" dirty="0">
+                <a:latin typeface="D2Coding" panose="020B0609020101020101" pitchFamily="49" charset="-127"/>
+                <a:ea typeface="D2Coding" panose="020B0609020101020101" pitchFamily="49" charset="-127"/>
+              </a:rPr>
+              <a:t>에 넘겨준다</a:t>
+            </a:r>
+            <a:r>
+              <a:rPr lang="en-US" altLang="ko-KR" sz="1600" dirty="0">
+                <a:latin typeface="D2Coding" panose="020B0609020101020101" pitchFamily="49" charset="-127"/>
+                <a:ea typeface="D2Coding" panose="020B0609020101020101" pitchFamily="49" charset="-127"/>
+              </a:rPr>
+              <a:t>."</a:t>
+            </a:r>
+            <a:r>
+              <a:rPr lang="ko-KR" altLang="en-US" sz="1600" dirty="0">
+                <a:latin typeface="D2Coding" panose="020B0609020101020101" pitchFamily="49" charset="-127"/>
+                <a:ea typeface="D2Coding" panose="020B0609020101020101" pitchFamily="49" charset="-127"/>
+              </a:rPr>
+              <a:t>는 기본적 </a:t>
+            </a:r>
+            <a:r>
+              <a:rPr lang="en-US" altLang="ko-KR" sz="1600" dirty="0">
+                <a:latin typeface="D2Coding" panose="020B0609020101020101" pitchFamily="49" charset="-127"/>
+                <a:ea typeface="D2Coding" panose="020B0609020101020101" pitchFamily="49" charset="-127"/>
+              </a:rPr>
+              <a:t>RAG </a:t>
+            </a:r>
+            <a:r>
+              <a:rPr lang="ko-KR" altLang="en-US" sz="1600" dirty="0">
+                <a:latin typeface="D2Coding" panose="020B0609020101020101" pitchFamily="49" charset="-127"/>
+                <a:ea typeface="D2Coding" panose="020B0609020101020101" pitchFamily="49" charset="-127"/>
+              </a:rPr>
+              <a:t>구조는 실제 서비스</a:t>
+            </a:r>
+            <a:r>
+              <a:rPr lang="en-US" altLang="ko-KR" sz="1600" dirty="0">
+                <a:latin typeface="D2Coding" panose="020B0609020101020101" pitchFamily="49" charset="-127"/>
+                <a:ea typeface="D2Coding" panose="020B0609020101020101" pitchFamily="49" charset="-127"/>
+              </a:rPr>
+              <a:t>(Production)</a:t>
+            </a:r>
+            <a:r>
+              <a:rPr lang="ko-KR" altLang="en-US" sz="1600" dirty="0">
+                <a:latin typeface="D2Coding" panose="020B0609020101020101" pitchFamily="49" charset="-127"/>
+                <a:ea typeface="D2Coding" panose="020B0609020101020101" pitchFamily="49" charset="-127"/>
+              </a:rPr>
+              <a:t>환경에서 많은 한계에 부딪히는데</a:t>
+            </a:r>
+            <a:r>
+              <a:rPr lang="en-US" altLang="ko-KR" sz="1600" dirty="0">
+                <a:latin typeface="D2Coding" panose="020B0609020101020101" pitchFamily="49" charset="-127"/>
+                <a:ea typeface="D2Coding" panose="020B0609020101020101" pitchFamily="49" charset="-127"/>
+              </a:rPr>
+              <a:t> </a:t>
+            </a:r>
+            <a:r>
+              <a:rPr lang="ko-KR" altLang="en-US" sz="1600" dirty="0">
+                <a:latin typeface="D2Coding" panose="020B0609020101020101" pitchFamily="49" charset="-127"/>
+                <a:ea typeface="D2Coding" panose="020B0609020101020101" pitchFamily="49" charset="-127"/>
+              </a:rPr>
+              <a:t>실제 사용자가 만족할 만한 강력한 </a:t>
+            </a:r>
+            <a:r>
+              <a:rPr lang="en-US" altLang="ko-KR" sz="1600" dirty="0">
+                <a:latin typeface="D2Coding" panose="020B0609020101020101" pitchFamily="49" charset="-127"/>
+                <a:ea typeface="D2Coding" panose="020B0609020101020101" pitchFamily="49" charset="-127"/>
+              </a:rPr>
+              <a:t>RAG </a:t>
+            </a:r>
+            <a:r>
+              <a:rPr lang="ko-KR" altLang="en-US" sz="1600" dirty="0">
+                <a:latin typeface="D2Coding" panose="020B0609020101020101" pitchFamily="49" charset="-127"/>
+                <a:ea typeface="D2Coding" panose="020B0609020101020101" pitchFamily="49" charset="-127"/>
+              </a:rPr>
+              <a:t>시스템을 만들려면</a:t>
+            </a:r>
+            <a:r>
+              <a:rPr lang="en-US" altLang="ko-KR" sz="1600" dirty="0">
+                <a:latin typeface="D2Coding" panose="020B0609020101020101" pitchFamily="49" charset="-127"/>
+                <a:ea typeface="D2Coding" panose="020B0609020101020101" pitchFamily="49" charset="-127"/>
+              </a:rPr>
+              <a:t>;</a:t>
+            </a:r>
+          </a:p>
+          <a:p>
+            <a:pPr>
+              <a:lnSpc>
+                <a:spcPct val="150000"/>
+              </a:lnSpc>
+            </a:pPr>
+            <a:endParaRPr lang="en-US" altLang="ko-KR" sz="600" dirty="0">
+              <a:latin typeface="D2Coding" panose="020B0609020101020101" pitchFamily="49" charset="-127"/>
+              <a:ea typeface="D2Coding" panose="020B0609020101020101" pitchFamily="49" charset="-127"/>
+            </a:endParaRPr>
+          </a:p>
+          <a:p>
+            <a:pPr>
+              <a:lnSpc>
+                <a:spcPct val="150000"/>
+              </a:lnSpc>
+            </a:pPr>
+            <a:endParaRPr lang="en-US" altLang="ko-KR" sz="600" dirty="0">
+              <a:latin typeface="D2Coding" panose="020B0609020101020101" pitchFamily="49" charset="-127"/>
+              <a:ea typeface="D2Coding" panose="020B0609020101020101" pitchFamily="49" charset="-127"/>
+            </a:endParaRPr>
+          </a:p>
+          <a:p>
+            <a:pPr>
+              <a:lnSpc>
+                <a:spcPct val="150000"/>
+              </a:lnSpc>
+            </a:pPr>
+            <a:endParaRPr lang="en-US" altLang="ko-KR" sz="600" dirty="0">
+              <a:latin typeface="D2Coding" panose="020B0609020101020101" pitchFamily="49" charset="-127"/>
+              <a:ea typeface="D2Coding" panose="020B0609020101020101" pitchFamily="49" charset="-127"/>
+            </a:endParaRPr>
+          </a:p>
+          <a:p>
+            <a:pPr marL="285750" indent="-285750">
+              <a:lnSpc>
+                <a:spcPct val="150000"/>
+              </a:lnSpc>
+              <a:buFont typeface="Wingdings" panose="05000000000000000000" pitchFamily="2" charset="2"/>
+              <a:buChar char="v"/>
+            </a:pPr>
+            <a:r>
+              <a:rPr lang="en-US" altLang="ko-KR" sz="1600" b="1" dirty="0">
+                <a:latin typeface="D2Coding" panose="020B0609020101020101" pitchFamily="49" charset="-127"/>
+                <a:ea typeface="D2Coding" panose="020B0609020101020101" pitchFamily="49" charset="-127"/>
+              </a:rPr>
+              <a:t>Query Transformation (</a:t>
+            </a:r>
+            <a:r>
+              <a:rPr lang="ko-KR" altLang="en-US" sz="1600" b="1" dirty="0">
+                <a:latin typeface="D2Coding" panose="020B0609020101020101" pitchFamily="49" charset="-127"/>
+                <a:ea typeface="D2Coding" panose="020B0609020101020101" pitchFamily="49" charset="-127"/>
+              </a:rPr>
+              <a:t>쿼리 변환</a:t>
+            </a:r>
+            <a:r>
+              <a:rPr lang="en-US" altLang="ko-KR" sz="1600" b="1" dirty="0">
+                <a:latin typeface="D2Coding" panose="020B0609020101020101" pitchFamily="49" charset="-127"/>
+                <a:ea typeface="D2Coding" panose="020B0609020101020101" pitchFamily="49" charset="-127"/>
+              </a:rPr>
+              <a:t>):</a:t>
+            </a:r>
+            <a:r>
+              <a:rPr lang="ko-KR" altLang="en-US" sz="1600" dirty="0">
+                <a:latin typeface="D2Coding" panose="020B0609020101020101" pitchFamily="49" charset="-127"/>
+                <a:ea typeface="D2Coding" panose="020B0609020101020101" pitchFamily="49" charset="-127"/>
+              </a:rPr>
+              <a:t> 사용자가 애매하게 질문했을 때</a:t>
+            </a:r>
+            <a:r>
+              <a:rPr lang="en-US" altLang="ko-KR" sz="1600" dirty="0">
+                <a:latin typeface="D2Coding" panose="020B0609020101020101" pitchFamily="49" charset="-127"/>
+                <a:ea typeface="D2Coding" panose="020B0609020101020101" pitchFamily="49" charset="-127"/>
+              </a:rPr>
+              <a:t>, LLM</a:t>
+            </a:r>
+            <a:r>
+              <a:rPr lang="ko-KR" altLang="en-US" sz="1600" dirty="0">
+                <a:latin typeface="D2Coding" panose="020B0609020101020101" pitchFamily="49" charset="-127"/>
+                <a:ea typeface="D2Coding" panose="020B0609020101020101" pitchFamily="49" charset="-127"/>
+              </a:rPr>
+              <a:t>이 검색을 더 잘할 수 있도록 질문을 구체적인 여러 개로 쪼개거나 다른 표현으로 </a:t>
+            </a:r>
+            <a:r>
+              <a:rPr lang="ko-KR" altLang="en-US" sz="1600" dirty="0" err="1">
+                <a:latin typeface="D2Coding" panose="020B0609020101020101" pitchFamily="49" charset="-127"/>
+                <a:ea typeface="D2Coding" panose="020B0609020101020101" pitchFamily="49" charset="-127"/>
+              </a:rPr>
+              <a:t>재작성하는</a:t>
+            </a:r>
+            <a:r>
+              <a:rPr lang="ko-KR" altLang="en-US" sz="1600" dirty="0">
+                <a:latin typeface="D2Coding" panose="020B0609020101020101" pitchFamily="49" charset="-127"/>
+                <a:ea typeface="D2Coding" panose="020B0609020101020101" pitchFamily="49" charset="-127"/>
+              </a:rPr>
+              <a:t> 기술</a:t>
+            </a:r>
+            <a:endParaRPr lang="en-US" altLang="ko-KR" sz="1600" dirty="0">
+              <a:latin typeface="D2Coding" panose="020B0609020101020101" pitchFamily="49" charset="-127"/>
+              <a:ea typeface="D2Coding" panose="020B0609020101020101" pitchFamily="49" charset="-127"/>
+            </a:endParaRPr>
+          </a:p>
+          <a:p>
+            <a:pPr marL="285750" indent="-285750">
+              <a:lnSpc>
+                <a:spcPct val="150000"/>
+              </a:lnSpc>
+              <a:buFont typeface="Wingdings" panose="05000000000000000000" pitchFamily="2" charset="2"/>
+              <a:buChar char="v"/>
+            </a:pPr>
+            <a:endParaRPr lang="en-US" altLang="ko-KR" sz="600" dirty="0">
+              <a:latin typeface="D2Coding" panose="020B0609020101020101" pitchFamily="49" charset="-127"/>
+              <a:ea typeface="D2Coding" panose="020B0609020101020101" pitchFamily="49" charset="-127"/>
+            </a:endParaRPr>
+          </a:p>
+          <a:p>
+            <a:pPr marL="285750" indent="-285750">
+              <a:lnSpc>
+                <a:spcPct val="150000"/>
+              </a:lnSpc>
+              <a:buFont typeface="Wingdings" panose="05000000000000000000" pitchFamily="2" charset="2"/>
+              <a:buChar char="v"/>
+            </a:pPr>
+            <a:r>
+              <a:rPr lang="en-US" altLang="ko-KR" sz="1600" b="1" dirty="0">
+                <a:latin typeface="D2Coding" panose="020B0609020101020101" pitchFamily="49" charset="-127"/>
+                <a:ea typeface="D2Coding" panose="020B0609020101020101" pitchFamily="49" charset="-127"/>
+              </a:rPr>
+              <a:t>Query Construction (</a:t>
+            </a:r>
+            <a:r>
+              <a:rPr lang="ko-KR" altLang="en-US" sz="1600" b="1" dirty="0">
+                <a:latin typeface="D2Coding" panose="020B0609020101020101" pitchFamily="49" charset="-127"/>
+                <a:ea typeface="D2Coding" panose="020B0609020101020101" pitchFamily="49" charset="-127"/>
+              </a:rPr>
+              <a:t>쿼리 구성</a:t>
+            </a:r>
+            <a:r>
+              <a:rPr lang="en-US" altLang="ko-KR" sz="1600" b="1" dirty="0">
+                <a:latin typeface="D2Coding" panose="020B0609020101020101" pitchFamily="49" charset="-127"/>
+                <a:ea typeface="D2Coding" panose="020B0609020101020101" pitchFamily="49" charset="-127"/>
+              </a:rPr>
+              <a:t>):</a:t>
+            </a:r>
+            <a:r>
+              <a:rPr lang="ko-KR" altLang="en-US" sz="1600" dirty="0">
+                <a:latin typeface="D2Coding" panose="020B0609020101020101" pitchFamily="49" charset="-127"/>
+                <a:ea typeface="D2Coding" panose="020B0609020101020101" pitchFamily="49" charset="-127"/>
+              </a:rPr>
+              <a:t> 질문을 단순 텍스트 검색에만 쓰는 게 아니라</a:t>
+            </a:r>
+            <a:r>
+              <a:rPr lang="en-US" altLang="ko-KR" sz="1600" dirty="0">
+                <a:latin typeface="D2Coding" panose="020B0609020101020101" pitchFamily="49" charset="-127"/>
+                <a:ea typeface="D2Coding" panose="020B0609020101020101" pitchFamily="49" charset="-127"/>
+              </a:rPr>
+              <a:t>, </a:t>
+            </a:r>
+            <a:r>
+              <a:rPr lang="en-US" altLang="ko-KR" sz="1600" b="1" dirty="0">
+                <a:latin typeface="D2Coding" panose="020B0609020101020101" pitchFamily="49" charset="-127"/>
+                <a:ea typeface="D2Coding" panose="020B0609020101020101" pitchFamily="49" charset="-127"/>
+              </a:rPr>
+              <a:t>Text-to-Metadata Filter</a:t>
+            </a:r>
+            <a:r>
+              <a:rPr lang="ko-KR" altLang="en-US" sz="1600" dirty="0">
+                <a:latin typeface="D2Coding" panose="020B0609020101020101" pitchFamily="49" charset="-127"/>
+                <a:ea typeface="D2Coding" panose="020B0609020101020101" pitchFamily="49" charset="-127"/>
+              </a:rPr>
+              <a:t>나 </a:t>
+            </a:r>
+            <a:r>
+              <a:rPr lang="en-US" altLang="ko-KR" sz="1600" b="1" dirty="0">
+                <a:latin typeface="D2Coding" panose="020B0609020101020101" pitchFamily="49" charset="-127"/>
+                <a:ea typeface="D2Coding" panose="020B0609020101020101" pitchFamily="49" charset="-127"/>
+              </a:rPr>
+              <a:t>Text-to-SQL</a:t>
+            </a:r>
+            <a:r>
+              <a:rPr lang="ko-KR" altLang="en-US" sz="1600" dirty="0">
+                <a:latin typeface="D2Coding" panose="020B0609020101020101" pitchFamily="49" charset="-127"/>
+                <a:ea typeface="D2Coding" panose="020B0609020101020101" pitchFamily="49" charset="-127"/>
+              </a:rPr>
+              <a:t>처럼 데이터베이스가 완벽하게 이해할 수 있는 형태</a:t>
+            </a:r>
+            <a:r>
+              <a:rPr lang="en-US" altLang="ko-KR" sz="1600" dirty="0">
+                <a:latin typeface="D2Coding" panose="020B0609020101020101" pitchFamily="49" charset="-127"/>
+                <a:ea typeface="D2Coding" panose="020B0609020101020101" pitchFamily="49" charset="-127"/>
+              </a:rPr>
+              <a:t>(</a:t>
+            </a:r>
+            <a:r>
+              <a:rPr lang="ko-KR" altLang="en-US" sz="1600" dirty="0">
+                <a:latin typeface="D2Coding" panose="020B0609020101020101" pitchFamily="49" charset="-127"/>
+                <a:ea typeface="D2Coding" panose="020B0609020101020101" pitchFamily="49" charset="-127"/>
+              </a:rPr>
+              <a:t>구조화된 쿼리</a:t>
+            </a:r>
+            <a:r>
+              <a:rPr lang="en-US" altLang="ko-KR" sz="1600" dirty="0">
+                <a:latin typeface="D2Coding" panose="020B0609020101020101" pitchFamily="49" charset="-127"/>
+                <a:ea typeface="D2Coding" panose="020B0609020101020101" pitchFamily="49" charset="-127"/>
+              </a:rPr>
+              <a:t>)</a:t>
+            </a:r>
+            <a:r>
+              <a:rPr lang="ko-KR" altLang="en-US" sz="1600" dirty="0">
+                <a:latin typeface="D2Coding" panose="020B0609020101020101" pitchFamily="49" charset="-127"/>
+                <a:ea typeface="D2Coding" panose="020B0609020101020101" pitchFamily="49" charset="-127"/>
+              </a:rPr>
+              <a:t>로 빌드하는 기술</a:t>
+            </a:r>
+            <a:endParaRPr lang="en-US" altLang="ko-KR" sz="1600" dirty="0">
+              <a:latin typeface="D2Coding" panose="020B0609020101020101" pitchFamily="49" charset="-127"/>
+              <a:ea typeface="D2Coding" panose="020B0609020101020101" pitchFamily="49" charset="-127"/>
+            </a:endParaRPr>
+          </a:p>
+          <a:p>
+            <a:pPr marL="285750" indent="-285750">
+              <a:lnSpc>
+                <a:spcPct val="150000"/>
+              </a:lnSpc>
+              <a:buFont typeface="Wingdings" panose="05000000000000000000" pitchFamily="2" charset="2"/>
+              <a:buChar char="v"/>
+            </a:pPr>
+            <a:endParaRPr lang="en-US" altLang="ko-KR" sz="600" dirty="0">
+              <a:latin typeface="D2Coding" panose="020B0609020101020101" pitchFamily="49" charset="-127"/>
+              <a:ea typeface="D2Coding" panose="020B0609020101020101" pitchFamily="49" charset="-127"/>
+            </a:endParaRPr>
+          </a:p>
+          <a:p>
+            <a:pPr marL="285750" indent="-285750">
+              <a:lnSpc>
+                <a:spcPct val="150000"/>
+              </a:lnSpc>
+              <a:buFont typeface="Wingdings" panose="05000000000000000000" pitchFamily="2" charset="2"/>
+              <a:buChar char="v"/>
+            </a:pPr>
+            <a:r>
+              <a:rPr lang="en-US" altLang="ko-KR" sz="1600" b="1" dirty="0">
+                <a:latin typeface="D2Coding" panose="020B0609020101020101" pitchFamily="49" charset="-127"/>
+                <a:ea typeface="D2Coding" panose="020B0609020101020101" pitchFamily="49" charset="-127"/>
+              </a:rPr>
+              <a:t>Query Routing (</a:t>
+            </a:r>
+            <a:r>
+              <a:rPr lang="ko-KR" altLang="en-US" sz="1600" b="1" dirty="0">
+                <a:latin typeface="D2Coding" panose="020B0609020101020101" pitchFamily="49" charset="-127"/>
+                <a:ea typeface="D2Coding" panose="020B0609020101020101" pitchFamily="49" charset="-127"/>
+              </a:rPr>
+              <a:t>쿼리</a:t>
+            </a:r>
+            <a:r>
+              <a:rPr lang="en-US" altLang="ko-KR" sz="1600" b="1" dirty="0">
+                <a:latin typeface="D2Coding" panose="020B0609020101020101" pitchFamily="49" charset="-127"/>
+                <a:ea typeface="D2Coding" panose="020B0609020101020101" pitchFamily="49" charset="-127"/>
+              </a:rPr>
+              <a:t> </a:t>
+            </a:r>
+            <a:r>
+              <a:rPr lang="ko-KR" altLang="en-US" sz="1600" b="1" dirty="0">
+                <a:latin typeface="D2Coding" panose="020B0609020101020101" pitchFamily="49" charset="-127"/>
+                <a:ea typeface="D2Coding" panose="020B0609020101020101" pitchFamily="49" charset="-127"/>
+              </a:rPr>
+              <a:t>라우팅</a:t>
+            </a:r>
+            <a:r>
+              <a:rPr lang="en-US" altLang="ko-KR" sz="1600" b="1" dirty="0">
+                <a:latin typeface="D2Coding" panose="020B0609020101020101" pitchFamily="49" charset="-127"/>
+                <a:ea typeface="D2Coding" panose="020B0609020101020101" pitchFamily="49" charset="-127"/>
+              </a:rPr>
+              <a:t>):</a:t>
+            </a:r>
+            <a:r>
+              <a:rPr lang="ko-KR" altLang="en-US" sz="1600" dirty="0">
+                <a:latin typeface="D2Coding" panose="020B0609020101020101" pitchFamily="49" charset="-127"/>
+                <a:ea typeface="D2Coding" panose="020B0609020101020101" pitchFamily="49" charset="-127"/>
+              </a:rPr>
+              <a:t> 질문이 들어왔을 때 </a:t>
+            </a:r>
+            <a:r>
+              <a:rPr lang="en-US" altLang="ko-KR" sz="1600" dirty="0">
+                <a:latin typeface="D2Coding" panose="020B0609020101020101" pitchFamily="49" charset="-127"/>
+                <a:ea typeface="D2Coding" panose="020B0609020101020101" pitchFamily="49" charset="-127"/>
+              </a:rPr>
+              <a:t>"</a:t>
+            </a:r>
+            <a:r>
+              <a:rPr lang="ko-KR" altLang="en-US" sz="1600" dirty="0">
+                <a:latin typeface="D2Coding" panose="020B0609020101020101" pitchFamily="49" charset="-127"/>
+                <a:ea typeface="D2Coding" panose="020B0609020101020101" pitchFamily="49" charset="-127"/>
+              </a:rPr>
+              <a:t>이건 </a:t>
+            </a:r>
+            <a:r>
+              <a:rPr lang="en-US" altLang="ko-KR" sz="1600" dirty="0">
+                <a:latin typeface="D2Coding" panose="020B0609020101020101" pitchFamily="49" charset="-127"/>
+                <a:ea typeface="D2Coding" panose="020B0609020101020101" pitchFamily="49" charset="-127"/>
+              </a:rPr>
+              <a:t>SQL DB</a:t>
+            </a:r>
+            <a:r>
+              <a:rPr lang="ko-KR" altLang="en-US" sz="1600" dirty="0">
+                <a:latin typeface="D2Coding" panose="020B0609020101020101" pitchFamily="49" charset="-127"/>
+                <a:ea typeface="D2Coding" panose="020B0609020101020101" pitchFamily="49" charset="-127"/>
+              </a:rPr>
+              <a:t>로 보내야 할까</a:t>
+            </a:r>
+            <a:r>
+              <a:rPr lang="en-US" altLang="ko-KR" sz="1600" dirty="0">
+                <a:latin typeface="D2Coding" panose="020B0609020101020101" pitchFamily="49" charset="-127"/>
+                <a:ea typeface="D2Coding" panose="020B0609020101020101" pitchFamily="49" charset="-127"/>
+              </a:rPr>
+              <a:t>? </a:t>
+            </a:r>
+            <a:r>
+              <a:rPr lang="ko-KR" altLang="en-US" sz="1600" dirty="0">
+                <a:latin typeface="D2Coding" panose="020B0609020101020101" pitchFamily="49" charset="-127"/>
+                <a:ea typeface="D2Coding" panose="020B0609020101020101" pitchFamily="49" charset="-127"/>
+              </a:rPr>
+              <a:t>아니면 </a:t>
+            </a:r>
+            <a:r>
+              <a:rPr lang="en-US" altLang="ko-KR" sz="1600" dirty="0">
+                <a:latin typeface="D2Coding" panose="020B0609020101020101" pitchFamily="49" charset="-127"/>
+                <a:ea typeface="D2Coding" panose="020B0609020101020101" pitchFamily="49" charset="-127"/>
+              </a:rPr>
+              <a:t>Vector DB(</a:t>
+            </a:r>
+            <a:r>
+              <a:rPr lang="ko-KR" altLang="en-US" sz="1600" dirty="0">
+                <a:latin typeface="D2Coding" panose="020B0609020101020101" pitchFamily="49" charset="-127"/>
+                <a:ea typeface="D2Coding" panose="020B0609020101020101" pitchFamily="49" charset="-127"/>
+              </a:rPr>
+              <a:t>문서</a:t>
+            </a:r>
+            <a:r>
+              <a:rPr lang="en-US" altLang="ko-KR" sz="1600" dirty="0">
+                <a:latin typeface="D2Coding" panose="020B0609020101020101" pitchFamily="49" charset="-127"/>
+                <a:ea typeface="D2Coding" panose="020B0609020101020101" pitchFamily="49" charset="-127"/>
+              </a:rPr>
+              <a:t>)</a:t>
+            </a:r>
+            <a:r>
+              <a:rPr lang="ko-KR" altLang="en-US" sz="1600" dirty="0">
+                <a:latin typeface="D2Coding" panose="020B0609020101020101" pitchFamily="49" charset="-127"/>
+                <a:ea typeface="D2Coding" panose="020B0609020101020101" pitchFamily="49" charset="-127"/>
+              </a:rPr>
+              <a:t>로 보내야 할까</a:t>
+            </a:r>
+            <a:r>
+              <a:rPr lang="en-US" altLang="ko-KR" sz="1600" dirty="0">
+                <a:latin typeface="D2Coding" panose="020B0609020101020101" pitchFamily="49" charset="-127"/>
+                <a:ea typeface="D2Coding" panose="020B0609020101020101" pitchFamily="49" charset="-127"/>
+              </a:rPr>
+              <a:t>?"</a:t>
+            </a:r>
+            <a:r>
+              <a:rPr lang="ko-KR" altLang="en-US" sz="1600" dirty="0">
+                <a:latin typeface="D2Coding" panose="020B0609020101020101" pitchFamily="49" charset="-127"/>
+                <a:ea typeface="D2Coding" panose="020B0609020101020101" pitchFamily="49" charset="-127"/>
+              </a:rPr>
+              <a:t>를 </a:t>
+            </a:r>
+            <a:r>
+              <a:rPr lang="en-US" altLang="ko-KR" sz="1600" dirty="0">
+                <a:latin typeface="D2Coding" panose="020B0609020101020101" pitchFamily="49" charset="-127"/>
+                <a:ea typeface="D2Coding" panose="020B0609020101020101" pitchFamily="49" charset="-127"/>
+              </a:rPr>
+              <a:t>LLM</a:t>
+            </a:r>
+            <a:r>
+              <a:rPr lang="ko-KR" altLang="en-US" sz="1600" dirty="0">
+                <a:latin typeface="D2Coding" panose="020B0609020101020101" pitchFamily="49" charset="-127"/>
+                <a:ea typeface="D2Coding" panose="020B0609020101020101" pitchFamily="49" charset="-127"/>
+              </a:rPr>
+              <a:t>이 판단하여 적절한 데이터 소스로 길을 찾아주는 기술</a:t>
+            </a:r>
+            <a:endParaRPr lang="en-US" altLang="ko-KR" sz="1600" dirty="0">
+              <a:latin typeface="D2Coding" panose="020B0609020101020101" pitchFamily="49" charset="-127"/>
+              <a:ea typeface="D2Coding" panose="020B0609020101020101" pitchFamily="49" charset="-127"/>
+            </a:endParaRPr>
+          </a:p>
+          <a:p>
+            <a:pPr marL="285750" indent="-285750">
+              <a:lnSpc>
+                <a:spcPct val="150000"/>
+              </a:lnSpc>
+              <a:buFont typeface="Wingdings" panose="05000000000000000000" pitchFamily="2" charset="2"/>
+              <a:buChar char="v"/>
+            </a:pPr>
+            <a:endParaRPr lang="en-US" altLang="ko-KR" sz="600" dirty="0">
+              <a:latin typeface="D2Coding" panose="020B0609020101020101" pitchFamily="49" charset="-127"/>
+              <a:ea typeface="D2Coding" panose="020B0609020101020101" pitchFamily="49" charset="-127"/>
+            </a:endParaRPr>
+          </a:p>
+          <a:p>
+            <a:pPr marL="285750" indent="-285750">
+              <a:lnSpc>
+                <a:spcPct val="150000"/>
+              </a:lnSpc>
+              <a:buFont typeface="Wingdings" panose="05000000000000000000" pitchFamily="2" charset="2"/>
+              <a:buChar char="v"/>
+            </a:pPr>
+            <a:r>
+              <a:rPr lang="en-US" altLang="ko-KR" sz="1600" b="1" dirty="0">
+                <a:solidFill>
+                  <a:schemeClr val="bg1">
+                    <a:lumMod val="50000"/>
+                  </a:schemeClr>
+                </a:solidFill>
+                <a:latin typeface="D2Coding" panose="020B0609020101020101" pitchFamily="49" charset="-127"/>
+                <a:ea typeface="D2Coding" panose="020B0609020101020101" pitchFamily="49" charset="-127"/>
+              </a:rPr>
+              <a:t>Indexing Optimization (</a:t>
+            </a:r>
+            <a:r>
+              <a:rPr lang="ko-KR" altLang="en-US" sz="1600" b="1" dirty="0">
+                <a:solidFill>
+                  <a:schemeClr val="bg1">
+                    <a:lumMod val="50000"/>
+                  </a:schemeClr>
+                </a:solidFill>
+                <a:latin typeface="D2Coding" panose="020B0609020101020101" pitchFamily="49" charset="-127"/>
+                <a:ea typeface="D2Coding" panose="020B0609020101020101" pitchFamily="49" charset="-127"/>
+              </a:rPr>
+              <a:t>인덱싱 최적화</a:t>
+            </a:r>
+            <a:r>
+              <a:rPr lang="en-US" altLang="ko-KR" sz="1600" b="1" dirty="0">
+                <a:solidFill>
+                  <a:schemeClr val="bg1">
+                    <a:lumMod val="50000"/>
+                  </a:schemeClr>
+                </a:solidFill>
+                <a:latin typeface="D2Coding" panose="020B0609020101020101" pitchFamily="49" charset="-127"/>
+                <a:ea typeface="D2Coding" panose="020B0609020101020101" pitchFamily="49" charset="-127"/>
+              </a:rPr>
+              <a:t>):</a:t>
+            </a:r>
+            <a:r>
+              <a:rPr lang="ko-KR" altLang="en-US" sz="1600" dirty="0">
+                <a:solidFill>
+                  <a:schemeClr val="bg1">
+                    <a:lumMod val="50000"/>
+                  </a:schemeClr>
+                </a:solidFill>
+                <a:latin typeface="D2Coding" panose="020B0609020101020101" pitchFamily="49" charset="-127"/>
+                <a:ea typeface="D2Coding" panose="020B0609020101020101" pitchFamily="49" charset="-127"/>
+              </a:rPr>
+              <a:t> 데이터를 저장할 때부터 메타데이터를 잘 정제하고</a:t>
+            </a:r>
+            <a:r>
+              <a:rPr lang="en-US" altLang="ko-KR" sz="1600" dirty="0">
+                <a:solidFill>
+                  <a:schemeClr val="bg1">
+                    <a:lumMod val="50000"/>
+                  </a:schemeClr>
+                </a:solidFill>
+                <a:latin typeface="D2Coding" panose="020B0609020101020101" pitchFamily="49" charset="-127"/>
+                <a:ea typeface="D2Coding" panose="020B0609020101020101" pitchFamily="49" charset="-127"/>
+              </a:rPr>
+              <a:t>, </a:t>
+            </a:r>
+            <a:r>
+              <a:rPr lang="ko-KR" altLang="en-US" sz="1600" dirty="0">
+                <a:solidFill>
+                  <a:schemeClr val="bg1">
+                    <a:lumMod val="50000"/>
+                  </a:schemeClr>
+                </a:solidFill>
+                <a:latin typeface="D2Coding" panose="020B0609020101020101" pitchFamily="49" charset="-127"/>
+                <a:ea typeface="D2Coding" panose="020B0609020101020101" pitchFamily="49" charset="-127"/>
+              </a:rPr>
+              <a:t>중복을 제거하며</a:t>
+            </a:r>
+            <a:r>
+              <a:rPr lang="en-US" altLang="ko-KR" sz="1600" dirty="0">
+                <a:solidFill>
+                  <a:schemeClr val="bg1">
+                    <a:lumMod val="50000"/>
+                  </a:schemeClr>
+                </a:solidFill>
+                <a:latin typeface="D2Coding" panose="020B0609020101020101" pitchFamily="49" charset="-127"/>
+                <a:ea typeface="D2Coding" panose="020B0609020101020101" pitchFamily="49" charset="-127"/>
+              </a:rPr>
+              <a:t>, </a:t>
+            </a:r>
+            <a:r>
+              <a:rPr lang="ko-KR" altLang="en-US" sz="1600" dirty="0">
+                <a:solidFill>
+                  <a:schemeClr val="bg1">
+                    <a:lumMod val="50000"/>
+                  </a:schemeClr>
+                </a:solidFill>
+                <a:latin typeface="D2Coding" panose="020B0609020101020101" pitchFamily="49" charset="-127"/>
+                <a:ea typeface="D2Coding" panose="020B0609020101020101" pitchFamily="49" charset="-127"/>
+              </a:rPr>
+              <a:t>검색 속도와 정확도를 높일 수 있도록 데이터 구조를 최적화하는 기술</a:t>
+            </a:r>
+          </a:p>
+        </p:txBody>
+      </p:sp>
+    </p:spTree>
+    <p:extLst>
+      <p:ext uri="{BB962C8B-B14F-4D97-AF65-F5344CB8AC3E}">
+        <p14:creationId xmlns:p14="http://schemas.microsoft.com/office/powerpoint/2010/main" val="3058200003"/>
       </p:ext>
     </p:extLst>
   </p:cSld>
@@ -12612,42 +14264,6 @@
               </a:rPr>
               <a:t>!</a:t>
             </a:r>
-          </a:p>
-        </p:txBody>
-      </p:sp>
-      <p:sp>
-        <p:nvSpPr>
-          <p:cNvPr id="5" name="TextBox 4">
-            <a:extLst>
-              <a:ext uri="{FF2B5EF4-FFF2-40B4-BE49-F238E27FC236}">
-                <a16:creationId xmlns:a16="http://schemas.microsoft.com/office/drawing/2014/main" id="{BB88772C-CAC1-F238-BF4A-3B26BA550C09}"/>
-              </a:ext>
-            </a:extLst>
-          </p:cNvPr>
-          <p:cNvSpPr txBox="1"/>
-          <p:nvPr/>
-        </p:nvSpPr>
-        <p:spPr>
-          <a:xfrm>
-            <a:off x="3048000" y="2690336"/>
-            <a:ext cx="6096000" cy="1477328"/>
-          </a:xfrm>
-          <a:prstGeom prst="rect">
-            <a:avLst/>
-          </a:prstGeom>
-          <a:noFill/>
-        </p:spPr>
-        <p:txBody>
-          <a:bodyPr wrap="square">
-            <a:spAutoFit/>
-          </a:bodyPr>
-          <a:lstStyle/>
-          <a:p>
-            <a:r>
-              <a:rPr lang="en-US" altLang="ko-KR" dirty="0"/>
-              <a:t>Query Transformation     Rewrite-Retrieve-Read     Multi-Query Retrieval     RAG-Fusion     Hypothetical Document Embeddings Query Routing     Logical Routing     Semantic Routing Query Construction     Text-to-Metadata Filter     Text-to-SQL</a:t>
-            </a:r>
-            <a:endParaRPr lang="ko-KR" altLang="en-US" dirty="0"/>
           </a:p>
         </p:txBody>
       </p:sp>

--- a/CHAPTER 3 RAG Part II_Chatting with Your Data.pptx
+++ b/CHAPTER 3 RAG Part II_Chatting with Your Data.pptx
@@ -284,7 +284,7 @@
                 <a:latin typeface="맑은 고딕" panose="020B0503020000020004" pitchFamily="50" charset="-127"/>
                 <a:ea typeface="맑은 고딕" panose="020B0503020000020004" pitchFamily="50" charset="-127"/>
               </a:rPr>
-              <a:t>2026-07-20</a:t>
+              <a:t>2026-07-22</a:t>
             </a:fld>
             <a:endParaRPr lang="ko-KR" altLang="en-US">
               <a:latin typeface="맑은 고딕" panose="020B0503020000020004" pitchFamily="50" charset="-127"/>
@@ -470,7 +470,7 @@
           <a:p>
             <a:fld id="{43E1C3DD-4A19-441D-907C-380838DB51C4}" type="datetime1">
               <a:rPr lang="ko-KR" altLang="en-US" noProof="0" smtClean="0"/>
-              <a:t>2026-07-20</a:t>
+              <a:t>2026-07-22</a:t>
             </a:fld>
             <a:endParaRPr lang="ko-KR" altLang="en-US" noProof="0"/>
           </a:p>
@@ -1318,7 +1318,7 @@
           <a:p>
             <a:fld id="{990475B5-67CA-4281-BDCA-DA943C3C8EB3}" type="datetime1">
               <a:rPr lang="ko-KR" altLang="en-US" noProof="0" smtClean="0"/>
-              <a:t>2026-07-20</a:t>
+              <a:t>2026-07-22</a:t>
             </a:fld>
             <a:endParaRPr lang="ko-KR" altLang="en-US" noProof="0"/>
           </a:p>
@@ -1972,7 +1972,7 @@
           <a:p>
             <a:fld id="{48A87A34-81AB-432B-8DAE-1953F412C126}" type="datetimeFigureOut">
               <a:rPr lang="en-US" smtClean="0"/>
-              <a:t>7/20/2026</a:t>
+              <a:t>7/22/2026</a:t>
             </a:fld>
             <a:endParaRPr lang="en-US" dirty="0"/>
           </a:p>
@@ -2268,7 +2268,7 @@
           <a:p>
             <a:fld id="{C655C81E-72E7-4D05-94B5-F45B321A525D}" type="datetime1">
               <a:rPr lang="ko-KR" altLang="en-US" noProof="0" smtClean="0"/>
-              <a:t>2026-07-20</a:t>
+              <a:t>2026-07-22</a:t>
             </a:fld>
             <a:endParaRPr lang="ko-KR" altLang="en-US" noProof="0" dirty="0">
               <a:latin typeface="맑은 고딕" panose="020B0503020000020004" pitchFamily="50" charset="-127"/>
@@ -4355,6 +4355,57 @@
                 <a:hlinkClick r:id="rId3"/>
               </a:rPr>
               <a:t>source : https://github.com/langchain-ai/rag-from-scratch</a:t>
+            </a:r>
+            <a:endParaRPr lang="ko-KR" altLang="en-US" sz="1400" b="1" dirty="0">
+              <a:latin typeface="D2Coding" panose="020B0609020101020101" pitchFamily="49" charset="-127"/>
+              <a:ea typeface="D2Coding" panose="020B0609020101020101" pitchFamily="49" charset="-127"/>
+            </a:endParaRPr>
+          </a:p>
+        </p:txBody>
+      </p:sp>
+      <p:sp>
+        <p:nvSpPr>
+          <p:cNvPr id="6" name="TextBox 5">
+            <a:extLst>
+              <a:ext uri="{FF2B5EF4-FFF2-40B4-BE49-F238E27FC236}">
+                <a16:creationId xmlns:a16="http://schemas.microsoft.com/office/drawing/2014/main" id="{D0EE2F95-384F-75CC-DDB6-DC0F58A88ABC}"/>
+              </a:ext>
+            </a:extLst>
+          </p:cNvPr>
+          <p:cNvSpPr txBox="1"/>
+          <p:nvPr/>
+        </p:nvSpPr>
+        <p:spPr>
+          <a:xfrm>
+            <a:off x="8933080" y="6218823"/>
+            <a:ext cx="1172116" cy="307777"/>
+          </a:xfrm>
+          <a:prstGeom prst="rect">
+            <a:avLst/>
+          </a:prstGeom>
+          <a:noFill/>
+        </p:spPr>
+        <p:txBody>
+          <a:bodyPr wrap="none" rtlCol="0">
+            <a:spAutoFit/>
+          </a:bodyPr>
+          <a:lstStyle/>
+          <a:p>
+            <a:r>
+              <a:rPr lang="en-US" altLang="ko-KR" sz="1400" b="1" dirty="0">
+                <a:latin typeface="D2Coding" panose="020B0609020101020101" pitchFamily="49" charset="-127"/>
+                <a:ea typeface="D2Coding" panose="020B0609020101020101" pitchFamily="49" charset="-127"/>
+                <a:hlinkClick r:id="rId4"/>
+              </a:rPr>
+              <a:t>Cohere </a:t>
+            </a:r>
+            <a:r>
+              <a:rPr lang="ko-KR" altLang="en-US" sz="1400" b="1" dirty="0">
+                <a:latin typeface="D2Coding" panose="020B0609020101020101" pitchFamily="49" charset="-127"/>
+                <a:ea typeface="D2Coding" panose="020B0609020101020101" pitchFamily="49" charset="-127"/>
+                <a:hlinkClick r:id="rId4"/>
+              </a:rPr>
+              <a:t>참고</a:t>
             </a:r>
             <a:endParaRPr lang="ko-KR" altLang="en-US" sz="1400" b="1" dirty="0">
               <a:latin typeface="D2Coding" panose="020B0609020101020101" pitchFamily="49" charset="-127"/>
